--- a/docs/srDesign_ClientPresentation2.pptx
+++ b/docs/srDesign_ClientPresentation2.pptx
@@ -12,11 +12,14 @@
     <p:sldId id="262" r:id="rId6"/>
     <p:sldId id="263" r:id="rId7"/>
     <p:sldId id="264" r:id="rId8"/>
-    <p:sldId id="265" r:id="rId9"/>
-    <p:sldId id="266" r:id="rId10"/>
-    <p:sldId id="267" r:id="rId11"/>
-    <p:sldId id="269" r:id="rId12"/>
-    <p:sldId id="268" r:id="rId13"/>
+    <p:sldId id="271" r:id="rId9"/>
+    <p:sldId id="270" r:id="rId10"/>
+    <p:sldId id="272" r:id="rId11"/>
+    <p:sldId id="265" r:id="rId12"/>
+    <p:sldId id="266" r:id="rId13"/>
+    <p:sldId id="267" r:id="rId14"/>
+    <p:sldId id="269" r:id="rId15"/>
+    <p:sldId id="268" r:id="rId16"/>
   </p:sldIdLst>
   <p:sldSz cx="9144000" cy="6858000" type="screen4x3"/>
   <p:notesSz cx="6858000" cy="9144000"/>
@@ -299,7 +302,7 @@
           <a:p>
             <a:fld id="{8096CBEF-B388-4E9F-94F0-5BE1A698433D}" type="datetimeFigureOut">
               <a:rPr lang="en-US" smtClean="0"/>
-              <a:t>12/4/2012</a:t>
+              <a:t>12/5/2012</a:t>
             </a:fld>
             <a:endParaRPr lang="en-US"/>
           </a:p>
@@ -469,7 +472,7 @@
           <a:p>
             <a:fld id="{8096CBEF-B388-4E9F-94F0-5BE1A698433D}" type="datetimeFigureOut">
               <a:rPr lang="en-US" smtClean="0"/>
-              <a:t>12/4/2012</a:t>
+              <a:t>12/5/2012</a:t>
             </a:fld>
             <a:endParaRPr lang="en-US"/>
           </a:p>
@@ -649,7 +652,7 @@
           <a:p>
             <a:fld id="{8096CBEF-B388-4E9F-94F0-5BE1A698433D}" type="datetimeFigureOut">
               <a:rPr lang="en-US" smtClean="0"/>
-              <a:t>12/4/2012</a:t>
+              <a:t>12/5/2012</a:t>
             </a:fld>
             <a:endParaRPr lang="en-US"/>
           </a:p>
@@ -819,7 +822,7 @@
           <a:p>
             <a:fld id="{8096CBEF-B388-4E9F-94F0-5BE1A698433D}" type="datetimeFigureOut">
               <a:rPr lang="en-US" smtClean="0"/>
-              <a:t>12/4/2012</a:t>
+              <a:t>12/5/2012</a:t>
             </a:fld>
             <a:endParaRPr lang="en-US"/>
           </a:p>
@@ -1065,7 +1068,7 @@
           <a:p>
             <a:fld id="{8096CBEF-B388-4E9F-94F0-5BE1A698433D}" type="datetimeFigureOut">
               <a:rPr lang="en-US" smtClean="0"/>
-              <a:t>12/4/2012</a:t>
+              <a:t>12/5/2012</a:t>
             </a:fld>
             <a:endParaRPr lang="en-US"/>
           </a:p>
@@ -1353,7 +1356,7 @@
           <a:p>
             <a:fld id="{8096CBEF-B388-4E9F-94F0-5BE1A698433D}" type="datetimeFigureOut">
               <a:rPr lang="en-US" smtClean="0"/>
-              <a:t>12/4/2012</a:t>
+              <a:t>12/5/2012</a:t>
             </a:fld>
             <a:endParaRPr lang="en-US"/>
           </a:p>
@@ -1775,7 +1778,7 @@
           <a:p>
             <a:fld id="{8096CBEF-B388-4E9F-94F0-5BE1A698433D}" type="datetimeFigureOut">
               <a:rPr lang="en-US" smtClean="0"/>
-              <a:t>12/4/2012</a:t>
+              <a:t>12/5/2012</a:t>
             </a:fld>
             <a:endParaRPr lang="en-US"/>
           </a:p>
@@ -1893,7 +1896,7 @@
           <a:p>
             <a:fld id="{8096CBEF-B388-4E9F-94F0-5BE1A698433D}" type="datetimeFigureOut">
               <a:rPr lang="en-US" smtClean="0"/>
-              <a:t>12/4/2012</a:t>
+              <a:t>12/5/2012</a:t>
             </a:fld>
             <a:endParaRPr lang="en-US"/>
           </a:p>
@@ -1988,7 +1991,7 @@
           <a:p>
             <a:fld id="{8096CBEF-B388-4E9F-94F0-5BE1A698433D}" type="datetimeFigureOut">
               <a:rPr lang="en-US" smtClean="0"/>
-              <a:t>12/4/2012</a:t>
+              <a:t>12/5/2012</a:t>
             </a:fld>
             <a:endParaRPr lang="en-US"/>
           </a:p>
@@ -2265,7 +2268,7 @@
           <a:p>
             <a:fld id="{8096CBEF-B388-4E9F-94F0-5BE1A698433D}" type="datetimeFigureOut">
               <a:rPr lang="en-US" smtClean="0"/>
-              <a:t>12/4/2012</a:t>
+              <a:t>12/5/2012</a:t>
             </a:fld>
             <a:endParaRPr lang="en-US"/>
           </a:p>
@@ -2518,7 +2521,7 @@
           <a:p>
             <a:fld id="{8096CBEF-B388-4E9F-94F0-5BE1A698433D}" type="datetimeFigureOut">
               <a:rPr lang="en-US" smtClean="0"/>
-              <a:t>12/4/2012</a:t>
+              <a:t>12/5/2012</a:t>
             </a:fld>
             <a:endParaRPr lang="en-US"/>
           </a:p>
@@ -2731,7 +2734,7 @@
           <a:p>
             <a:fld id="{8096CBEF-B388-4E9F-94F0-5BE1A698433D}" type="datetimeFigureOut">
               <a:rPr lang="en-US" smtClean="0"/>
-              <a:t>12/4/2012</a:t>
+              <a:t>12/5/2012</a:t>
             </a:fld>
             <a:endParaRPr lang="en-US"/>
           </a:p>
@@ -3213,8 +3216,12 @@
           <a:lstStyle/>
           <a:p>
             <a:r>
+              <a:rPr lang="en-US" dirty="0" err="1" smtClean="0"/>
+              <a:t>vSTB</a:t>
+            </a:r>
+            <a:r>
               <a:rPr lang="en-US" dirty="0" smtClean="0"/>
-              <a:t>Demo</a:t>
+              <a:t> Direction</a:t>
             </a:r>
             <a:endParaRPr lang="en-US" dirty="0"/>
           </a:p>
@@ -3237,7 +3244,27 @@
           <a:p>
             <a:r>
               <a:rPr lang="en-US" dirty="0" smtClean="0"/>
-              <a:t>HERE WE GGOOOOOOO</a:t>
+              <a:t>Stabilize communication layer</a:t>
+            </a:r>
+          </a:p>
+          <a:p>
+            <a:r>
+              <a:rPr lang="en-US" dirty="0" smtClean="0"/>
+              <a:t>Redesign game architecture to exist </a:t>
+            </a:r>
+            <a:r>
+              <a:rPr lang="en-US" smtClean="0"/>
+              <a:t>with new live </a:t>
+            </a:r>
+            <a:r>
+              <a:rPr lang="en-US" dirty="0" smtClean="0"/>
+              <a:t>multiplayer environment</a:t>
+            </a:r>
+          </a:p>
+          <a:p>
+            <a:r>
+              <a:rPr lang="en-US" dirty="0" smtClean="0"/>
+              <a:t>Increased development time of live environment</a:t>
             </a:r>
             <a:endParaRPr lang="en-US" dirty="0"/>
           </a:p>
@@ -3246,13 +3273,20 @@
     </p:spTree>
     <p:extLst>
       <p:ext uri="{BB962C8B-B14F-4D97-AF65-F5344CB8AC3E}">
-        <p14:creationId xmlns:p14="http://schemas.microsoft.com/office/powerpoint/2010/main" val="625723072"/>
+        <p14:creationId xmlns:p14="http://schemas.microsoft.com/office/powerpoint/2010/main" val="1732998213"/>
       </p:ext>
     </p:extLst>
   </p:cSld>
   <p:clrMapOvr>
     <a:masterClrMapping/>
   </p:clrMapOvr>
+  <p:timing>
+    <p:tnLst>
+      <p:par>
+        <p:cTn id="1" dur="indefinite" restart="never" nodeType="tmRoot"/>
+      </p:par>
+    </p:tnLst>
+  </p:timing>
 </p:sld>
 </file>
 
@@ -3289,1282 +3323,6 @@
           <a:lstStyle/>
           <a:p>
             <a:r>
-              <a:rPr lang="en-US" dirty="0" smtClean="0"/>
-              <a:t>Product Backlog</a:t>
-            </a:r>
-            <a:endParaRPr lang="en-US" dirty="0"/>
-          </a:p>
-        </p:txBody>
-      </p:sp>
-      <p:sp>
-        <p:nvSpPr>
-          <p:cNvPr id="3" name="Content Placeholder 2"/>
-          <p:cNvSpPr>
-            <a:spLocks noGrp="1"/>
-          </p:cNvSpPr>
-          <p:nvPr>
-            <p:ph idx="1"/>
-          </p:nvPr>
-        </p:nvSpPr>
-        <p:spPr>
-          <a:xfrm>
-            <a:off x="457200" y="1219200"/>
-            <a:ext cx="8229600" cy="5486400"/>
-          </a:xfrm>
-        </p:spPr>
-        <p:txBody>
-          <a:bodyPr>
-            <a:noAutofit/>
-          </a:bodyPr>
-          <a:lstStyle/>
-          <a:p>
-            <a:r>
-              <a:rPr lang="en-US" sz="1200" b="1" dirty="0" err="1" smtClean="0"/>
-              <a:t>vSTB</a:t>
-            </a:r>
-            <a:endParaRPr lang="en-US" sz="1200" b="1" dirty="0"/>
-          </a:p>
-          <a:p>
-            <a:pPr lvl="1"/>
-            <a:r>
-              <a:rPr lang="en-US" sz="1200" dirty="0"/>
-              <a:t>Research </a:t>
-            </a:r>
-            <a:r>
-              <a:rPr lang="en-US" sz="1200" dirty="0" err="1"/>
-              <a:t>Qt</a:t>
-            </a:r>
-            <a:r>
-              <a:rPr lang="en-US" sz="1200" dirty="0"/>
-              <a:t> Unit Testing</a:t>
-            </a:r>
-          </a:p>
-          <a:p>
-            <a:pPr lvl="1"/>
-            <a:r>
-              <a:rPr lang="en-US" sz="1200" dirty="0" smtClean="0"/>
-              <a:t>Create </a:t>
-            </a:r>
-            <a:r>
-              <a:rPr lang="en-US" sz="1200" dirty="0"/>
-              <a:t>Checkers game as a proof </a:t>
-            </a:r>
-            <a:r>
-              <a:rPr lang="en-US" sz="1200" dirty="0" smtClean="0"/>
-              <a:t>of concept</a:t>
-            </a:r>
-          </a:p>
-          <a:p>
-            <a:pPr lvl="1"/>
-            <a:r>
-              <a:rPr lang="en-US" sz="1200" dirty="0" smtClean="0"/>
-              <a:t>Prove </a:t>
-            </a:r>
-            <a:r>
-              <a:rPr lang="en-US" sz="1200" dirty="0"/>
-              <a:t>out and implement </a:t>
-            </a:r>
-            <a:r>
-              <a:rPr lang="en-US" sz="1200" dirty="0" err="1" smtClean="0"/>
-              <a:t>QUiLoader</a:t>
-            </a:r>
-            <a:endParaRPr lang="en-US" sz="1200" dirty="0"/>
-          </a:p>
-          <a:p>
-            <a:pPr lvl="1"/>
-            <a:r>
-              <a:rPr lang="en-US" sz="1200" dirty="0" smtClean="0"/>
-              <a:t>Research </a:t>
-            </a:r>
-            <a:r>
-              <a:rPr lang="en-US" sz="1200" dirty="0"/>
-              <a:t>Dynamic </a:t>
-            </a:r>
-            <a:r>
-              <a:rPr lang="en-US" sz="1200" dirty="0" smtClean="0"/>
-              <a:t>UI</a:t>
-            </a:r>
-          </a:p>
-          <a:p>
-            <a:pPr lvl="1"/>
-            <a:r>
-              <a:rPr lang="en-US" sz="1200" dirty="0" smtClean="0"/>
-              <a:t>Refactor </a:t>
-            </a:r>
-            <a:r>
-              <a:rPr lang="en-US" sz="1200" dirty="0"/>
-              <a:t>existing STB game </a:t>
-            </a:r>
-            <a:r>
-              <a:rPr lang="en-US" sz="1200" dirty="0" smtClean="0"/>
-              <a:t>view/model </a:t>
-            </a:r>
-            <a:r>
-              <a:rPr lang="en-US" sz="1200" dirty="0"/>
-              <a:t>architecture to meet STBMF </a:t>
-            </a:r>
-            <a:r>
-              <a:rPr lang="en-US" sz="1200" dirty="0" smtClean="0"/>
-              <a:t>requirements</a:t>
-            </a:r>
-          </a:p>
-          <a:p>
-            <a:pPr lvl="1"/>
-            <a:r>
-              <a:rPr lang="en-US" sz="1200" dirty="0" smtClean="0"/>
-              <a:t>Create </a:t>
-            </a:r>
-            <a:r>
-              <a:rPr lang="en-US" sz="1200" dirty="0"/>
-              <a:t>Memory game as a proof of </a:t>
-            </a:r>
-            <a:r>
-              <a:rPr lang="en-US" sz="1200" dirty="0" smtClean="0"/>
-              <a:t>concept</a:t>
-            </a:r>
-          </a:p>
-          <a:p>
-            <a:r>
-              <a:rPr lang="en-US" sz="1200" b="1" dirty="0" err="1" smtClean="0"/>
-              <a:t>vAPMAX</a:t>
-            </a:r>
-            <a:endParaRPr lang="en-US" sz="1200" b="1" dirty="0"/>
-          </a:p>
-          <a:p>
-            <a:pPr lvl="1"/>
-            <a:r>
-              <a:rPr lang="en-US" sz="1200" dirty="0" smtClean="0"/>
-              <a:t>Integrate </a:t>
-            </a:r>
-            <a:r>
-              <a:rPr lang="en-US" sz="1200" dirty="0"/>
-              <a:t>Logger into project and </a:t>
-            </a:r>
-            <a:r>
-              <a:rPr lang="en-US" sz="1200" dirty="0" smtClean="0"/>
-              <a:t>provide basic </a:t>
-            </a:r>
-            <a:r>
-              <a:rPr lang="en-US" sz="1200" dirty="0"/>
-              <a:t>command line usage to view</a:t>
-            </a:r>
-            <a:r>
-              <a:rPr lang="en-US" sz="1200" dirty="0" smtClean="0"/>
-              <a:t>.</a:t>
-            </a:r>
-          </a:p>
-          <a:p>
-            <a:pPr lvl="1"/>
-            <a:r>
-              <a:rPr lang="en-US" sz="1200" dirty="0" smtClean="0"/>
-              <a:t>Unit Testing</a:t>
-            </a:r>
-          </a:p>
-          <a:p>
-            <a:pPr lvl="1"/>
-            <a:r>
-              <a:rPr lang="en-US" sz="1200" dirty="0" smtClean="0"/>
-              <a:t>update </a:t>
-            </a:r>
-            <a:r>
-              <a:rPr lang="en-US" sz="1200" dirty="0"/>
-              <a:t>Reactive Extension package to </a:t>
-            </a:r>
-            <a:r>
-              <a:rPr lang="en-US" sz="1200" dirty="0" smtClean="0"/>
-              <a:t>latest</a:t>
-            </a:r>
-            <a:endParaRPr lang="en-US" sz="1200" dirty="0"/>
-          </a:p>
-          <a:p>
-            <a:r>
-              <a:rPr lang="en-US" sz="1200" b="1" dirty="0" smtClean="0"/>
-              <a:t>Game Server</a:t>
-            </a:r>
-          </a:p>
-          <a:p>
-            <a:pPr lvl="1"/>
-            <a:r>
-              <a:rPr lang="en-US" sz="1200" dirty="0" smtClean="0"/>
-              <a:t> </a:t>
-            </a:r>
-            <a:r>
-              <a:rPr lang="en-US" sz="1200" dirty="0"/>
-              <a:t>TCP: connections to </a:t>
-            </a:r>
-            <a:r>
-              <a:rPr lang="en-US" sz="1200" dirty="0" err="1"/>
-              <a:t>APMax</a:t>
-            </a:r>
-            <a:r>
-              <a:rPr lang="en-US" sz="1200" dirty="0"/>
-              <a:t>, - </a:t>
-            </a:r>
-            <a:r>
-              <a:rPr lang="en-US" sz="1200" dirty="0" smtClean="0"/>
-              <a:t>receiving and sending</a:t>
-            </a:r>
-          </a:p>
-          <a:p>
-            <a:pPr lvl="1"/>
-            <a:r>
-              <a:rPr lang="en-US" sz="1200" dirty="0" smtClean="0"/>
-              <a:t>Server</a:t>
-            </a:r>
-            <a:r>
-              <a:rPr lang="en-US" sz="1200" dirty="0"/>
-              <a:t>: Plugin </a:t>
-            </a:r>
-            <a:r>
-              <a:rPr lang="en-US" sz="1200" dirty="0" smtClean="0"/>
-              <a:t>Interface</a:t>
-            </a:r>
-          </a:p>
-          <a:p>
-            <a:pPr lvl="1"/>
-            <a:r>
-              <a:rPr lang="en-US" sz="1200" dirty="0" smtClean="0"/>
-              <a:t>Server</a:t>
-            </a:r>
-            <a:r>
-              <a:rPr lang="en-US" sz="1200" dirty="0"/>
-              <a:t>: </a:t>
-            </a:r>
-            <a:r>
-              <a:rPr lang="en-US" sz="1200" dirty="0" smtClean="0"/>
-              <a:t>Database</a:t>
-            </a:r>
-          </a:p>
-          <a:p>
-            <a:pPr lvl="1"/>
-            <a:r>
-              <a:rPr lang="en-US" sz="1200" dirty="0" smtClean="0"/>
-              <a:t>Server</a:t>
-            </a:r>
-            <a:r>
-              <a:rPr lang="en-US" sz="1200" dirty="0"/>
-              <a:t>: UI - Stats, </a:t>
-            </a:r>
-            <a:r>
-              <a:rPr lang="en-US" sz="1200" dirty="0" smtClean="0"/>
-              <a:t>Import</a:t>
-            </a:r>
-          </a:p>
-          <a:p>
-            <a:pPr lvl="1"/>
-            <a:r>
-              <a:rPr lang="en-US" sz="1200" dirty="0" smtClean="0"/>
-              <a:t>Server</a:t>
-            </a:r>
-            <a:r>
-              <a:rPr lang="en-US" sz="1200" dirty="0"/>
-              <a:t>: Future - server components, </a:t>
-            </a:r>
-            <a:r>
-              <a:rPr lang="en-US" sz="1200" dirty="0" smtClean="0"/>
-              <a:t>database</a:t>
-            </a:r>
-          </a:p>
-          <a:p>
-            <a:pPr lvl="1"/>
-            <a:r>
-              <a:rPr lang="en-US" sz="1200" dirty="0" smtClean="0"/>
-              <a:t>Server</a:t>
-            </a:r>
-            <a:r>
-              <a:rPr lang="en-US" sz="1200" dirty="0"/>
-              <a:t>: Design: game interface - loading </a:t>
-            </a:r>
-            <a:r>
-              <a:rPr lang="en-US" sz="1200" dirty="0" smtClean="0"/>
-              <a:t>game, playing game</a:t>
-            </a:r>
-          </a:p>
-          <a:p>
-            <a:pPr lvl="1"/>
-            <a:r>
-              <a:rPr lang="en-US" sz="1200" dirty="0" smtClean="0"/>
-              <a:t>Server</a:t>
-            </a:r>
-            <a:r>
-              <a:rPr lang="en-US" sz="1200" dirty="0"/>
-              <a:t>: </a:t>
-            </a:r>
-            <a:r>
-              <a:rPr lang="en-US" sz="1200" dirty="0" smtClean="0"/>
-              <a:t>logger</a:t>
-            </a:r>
-          </a:p>
-          <a:p>
-            <a:pPr lvl="1"/>
-            <a:r>
-              <a:rPr lang="en-US" sz="1200" dirty="0" smtClean="0"/>
-              <a:t>Server</a:t>
-            </a:r>
-            <a:r>
-              <a:rPr lang="en-US" sz="1200" dirty="0"/>
-              <a:t>: Unit </a:t>
-            </a:r>
-            <a:r>
-              <a:rPr lang="en-US" sz="1200" dirty="0" smtClean="0"/>
-              <a:t>Test</a:t>
-            </a:r>
-          </a:p>
-          <a:p>
-            <a:pPr lvl="1"/>
-            <a:r>
-              <a:rPr lang="en-US" sz="1200" dirty="0" smtClean="0"/>
-              <a:t>Server</a:t>
-            </a:r>
-            <a:r>
-              <a:rPr lang="en-US" sz="1200" dirty="0"/>
-              <a:t>: Build template </a:t>
-            </a:r>
-            <a:r>
-              <a:rPr lang="en-US" sz="1200" dirty="0" smtClean="0"/>
-              <a:t>GUI</a:t>
-            </a:r>
-          </a:p>
-          <a:p>
-            <a:pPr lvl="1"/>
-            <a:r>
-              <a:rPr lang="en-US" sz="1200" dirty="0" smtClean="0"/>
-              <a:t>Server</a:t>
-            </a:r>
-            <a:r>
-              <a:rPr lang="en-US" sz="1200" dirty="0"/>
-              <a:t>: Research Server operating </a:t>
-            </a:r>
-            <a:r>
-              <a:rPr lang="en-US" sz="1200" dirty="0" smtClean="0"/>
-              <a:t>systems</a:t>
-            </a:r>
-          </a:p>
-          <a:p>
-            <a:pPr lvl="1"/>
-            <a:r>
-              <a:rPr lang="en-US" sz="1200" dirty="0" smtClean="0"/>
-              <a:t>Server</a:t>
-            </a:r>
-            <a:r>
-              <a:rPr lang="en-US" sz="1200" dirty="0"/>
-              <a:t>: Research </a:t>
-            </a:r>
-            <a:r>
-              <a:rPr lang="en-US" sz="1200" dirty="0" smtClean="0"/>
-              <a:t>Security</a:t>
-            </a:r>
-          </a:p>
-          <a:p>
-            <a:pPr lvl="1"/>
-            <a:r>
-              <a:rPr lang="en-US" sz="1200" dirty="0" smtClean="0"/>
-              <a:t>Server</a:t>
-            </a:r>
-            <a:r>
-              <a:rPr lang="en-US" sz="1200" dirty="0"/>
-              <a:t>: Convert to a </a:t>
-            </a:r>
-            <a:r>
-              <a:rPr lang="en-US" sz="1200" dirty="0" smtClean="0"/>
-              <a:t>service</a:t>
-            </a:r>
-          </a:p>
-          <a:p>
-            <a:pPr lvl="1"/>
-            <a:r>
-              <a:rPr lang="en-US" sz="1200" dirty="0" smtClean="0"/>
-              <a:t>Server</a:t>
-            </a:r>
-            <a:r>
-              <a:rPr lang="en-US" sz="1200" dirty="0"/>
-              <a:t>: Research attaching a GUI to a </a:t>
-            </a:r>
-            <a:r>
-              <a:rPr lang="en-US" sz="1200" dirty="0" smtClean="0"/>
-              <a:t>service using </a:t>
-            </a:r>
-            <a:r>
-              <a:rPr lang="en-US" sz="1200" dirty="0"/>
-              <a:t>C</a:t>
-            </a:r>
-            <a:r>
-              <a:rPr lang="en-US" sz="1200" dirty="0" smtClean="0"/>
-              <a:t>#</a:t>
-            </a:r>
-            <a:endParaRPr lang="en-US" sz="1200" dirty="0"/>
-          </a:p>
-        </p:txBody>
-      </p:sp>
-    </p:spTree>
-    <p:extLst>
-      <p:ext uri="{BB962C8B-B14F-4D97-AF65-F5344CB8AC3E}">
-        <p14:creationId xmlns:p14="http://schemas.microsoft.com/office/powerpoint/2010/main" val="3805795148"/>
-      </p:ext>
-    </p:extLst>
-  </p:cSld>
-  <p:clrMapOvr>
-    <a:masterClrMapping/>
-  </p:clrMapOvr>
-</p:sld>
-</file>
-
-<file path=ppt/slides/slide12.xml><?xml version="1.0" encoding="utf-8"?>
-<p:sld xmlns:a="http://schemas.openxmlformats.org/drawingml/2006/main" xmlns:r="http://schemas.openxmlformats.org/officeDocument/2006/relationships" xmlns:p="http://schemas.openxmlformats.org/presentationml/2006/main">
-  <p:cSld>
-    <p:spTree>
-      <p:nvGrpSpPr>
-        <p:cNvPr id="1" name=""/>
-        <p:cNvGrpSpPr/>
-        <p:nvPr/>
-      </p:nvGrpSpPr>
-      <p:grpSpPr>
-        <a:xfrm>
-          <a:off x="0" y="0"/>
-          <a:ext cx="0" cy="0"/>
-          <a:chOff x="0" y="0"/>
-          <a:chExt cx="0" cy="0"/>
-        </a:xfrm>
-      </p:grpSpPr>
-      <p:sp>
-        <p:nvSpPr>
-          <p:cNvPr id="2" name="Title 1"/>
-          <p:cNvSpPr>
-            <a:spLocks noGrp="1"/>
-          </p:cNvSpPr>
-          <p:nvPr>
-            <p:ph type="title"/>
-          </p:nvPr>
-        </p:nvSpPr>
-        <p:spPr/>
-        <p:txBody>
-          <a:bodyPr/>
-          <a:lstStyle/>
-          <a:p>
-            <a:r>
-              <a:rPr lang="en-US" dirty="0" smtClean="0"/>
-              <a:t>Questions</a:t>
-            </a:r>
-            <a:endParaRPr lang="en-US" dirty="0"/>
-          </a:p>
-        </p:txBody>
-      </p:sp>
-      <p:sp>
-        <p:nvSpPr>
-          <p:cNvPr id="3" name="Content Placeholder 2"/>
-          <p:cNvSpPr>
-            <a:spLocks noGrp="1"/>
-          </p:cNvSpPr>
-          <p:nvPr>
-            <p:ph idx="1"/>
-          </p:nvPr>
-        </p:nvSpPr>
-        <p:spPr/>
-        <p:txBody>
-          <a:bodyPr/>
-          <a:lstStyle/>
-          <a:p>
-            <a:endParaRPr lang="en-US" dirty="0"/>
-          </a:p>
-        </p:txBody>
-      </p:sp>
-    </p:spTree>
-    <p:extLst>
-      <p:ext uri="{BB962C8B-B14F-4D97-AF65-F5344CB8AC3E}">
-        <p14:creationId xmlns:p14="http://schemas.microsoft.com/office/powerpoint/2010/main" val="2940516112"/>
-      </p:ext>
-    </p:extLst>
-  </p:cSld>
-  <p:clrMapOvr>
-    <a:masterClrMapping/>
-  </p:clrMapOvr>
-</p:sld>
-</file>
-
-<file path=ppt/slides/slide2.xml><?xml version="1.0" encoding="utf-8"?>
-<p:sld xmlns:a="http://schemas.openxmlformats.org/drawingml/2006/main" xmlns:r="http://schemas.openxmlformats.org/officeDocument/2006/relationships" xmlns:p="http://schemas.openxmlformats.org/presentationml/2006/main">
-  <p:cSld>
-    <p:spTree>
-      <p:nvGrpSpPr>
-        <p:cNvPr id="1" name=""/>
-        <p:cNvGrpSpPr/>
-        <p:nvPr/>
-      </p:nvGrpSpPr>
-      <p:grpSpPr>
-        <a:xfrm>
-          <a:off x="0" y="0"/>
-          <a:ext cx="0" cy="0"/>
-          <a:chOff x="0" y="0"/>
-          <a:chExt cx="0" cy="0"/>
-        </a:xfrm>
-      </p:grpSpPr>
-      <p:sp>
-        <p:nvSpPr>
-          <p:cNvPr id="2" name="Title 1"/>
-          <p:cNvSpPr>
-            <a:spLocks noGrp="1"/>
-          </p:cNvSpPr>
-          <p:nvPr>
-            <p:ph type="title"/>
-          </p:nvPr>
-        </p:nvSpPr>
-        <p:spPr/>
-        <p:txBody>
-          <a:bodyPr/>
-          <a:lstStyle/>
-          <a:p>
-            <a:r>
-              <a:rPr lang="en-US" dirty="0" smtClean="0"/>
-              <a:t>Client</a:t>
-            </a:r>
-            <a:endParaRPr lang="en-US" dirty="0"/>
-          </a:p>
-        </p:txBody>
-      </p:sp>
-      <p:sp>
-        <p:nvSpPr>
-          <p:cNvPr id="3" name="Content Placeholder 2"/>
-          <p:cNvSpPr>
-            <a:spLocks noGrp="1"/>
-          </p:cNvSpPr>
-          <p:nvPr>
-            <p:ph idx="1"/>
-          </p:nvPr>
-        </p:nvSpPr>
-        <p:spPr/>
-        <p:txBody>
-          <a:bodyPr>
-            <a:normAutofit fontScale="92500" lnSpcReduction="10000"/>
-          </a:bodyPr>
-          <a:lstStyle/>
-          <a:p>
-            <a:r>
-              <a:rPr lang="en-US" sz="2800" dirty="0" smtClean="0"/>
-              <a:t>Innovative </a:t>
-            </a:r>
-            <a:r>
-              <a:rPr lang="en-US" sz="2800" dirty="0" smtClean="0"/>
-              <a:t>Systems</a:t>
-            </a:r>
-          </a:p>
-          <a:p>
-            <a:pPr lvl="1"/>
-            <a:r>
-              <a:rPr lang="en-US" sz="2400" dirty="0"/>
-              <a:t>P</a:t>
-            </a:r>
-            <a:r>
-              <a:rPr lang="en-US" sz="2400" dirty="0" smtClean="0"/>
-              <a:t>rovides </a:t>
-            </a:r>
-            <a:r>
-              <a:rPr lang="en-US" sz="2400" dirty="0" smtClean="0"/>
-              <a:t>integrated solutions for the independent telecommunications industry.</a:t>
-            </a:r>
-          </a:p>
-          <a:p>
-            <a:r>
-              <a:rPr lang="en-US" sz="2800" dirty="0" smtClean="0"/>
-              <a:t>APMAX</a:t>
-            </a:r>
-          </a:p>
-          <a:p>
-            <a:pPr lvl="1"/>
-            <a:r>
-              <a:rPr lang="en-US" sz="2400" dirty="0"/>
-              <a:t>Application </a:t>
-            </a:r>
-            <a:r>
-              <a:rPr lang="en-US" sz="2400" dirty="0" smtClean="0"/>
-              <a:t>Server providing services such as:</a:t>
-            </a:r>
-          </a:p>
-          <a:p>
-            <a:pPr lvl="2"/>
-            <a:r>
-              <a:rPr lang="en-US" sz="2000" dirty="0" smtClean="0"/>
-              <a:t>IPTV Video Solutions</a:t>
-            </a:r>
-          </a:p>
-          <a:p>
-            <a:pPr lvl="2"/>
-            <a:r>
-              <a:rPr lang="en-US" sz="2000" dirty="0" smtClean="0"/>
-              <a:t>Unified Messaging</a:t>
-            </a:r>
-          </a:p>
-          <a:p>
-            <a:pPr lvl="2"/>
-            <a:r>
-              <a:rPr lang="en-US" sz="2000" dirty="0" smtClean="0"/>
-              <a:t>Single Number Service</a:t>
-            </a:r>
-          </a:p>
-          <a:p>
-            <a:r>
-              <a:rPr lang="en-US" dirty="0" smtClean="0"/>
-              <a:t>STB</a:t>
-            </a:r>
-          </a:p>
-          <a:p>
-            <a:pPr lvl="1"/>
-            <a:r>
-              <a:rPr lang="en-US" dirty="0" smtClean="0"/>
-              <a:t>Set-top-box providing television and integrated telephony applications</a:t>
-            </a:r>
-            <a:endParaRPr lang="en-US" dirty="0"/>
-          </a:p>
-        </p:txBody>
-      </p:sp>
-    </p:spTree>
-    <p:extLst>
-      <p:ext uri="{BB962C8B-B14F-4D97-AF65-F5344CB8AC3E}">
-        <p14:creationId xmlns:p14="http://schemas.microsoft.com/office/powerpoint/2010/main" val="2493944366"/>
-      </p:ext>
-    </p:extLst>
-  </p:cSld>
-  <p:clrMapOvr>
-    <a:masterClrMapping/>
-  </p:clrMapOvr>
-</p:sld>
-</file>
-
-<file path=ppt/slides/slide3.xml><?xml version="1.0" encoding="utf-8"?>
-<p:sld xmlns:a="http://schemas.openxmlformats.org/drawingml/2006/main" xmlns:r="http://schemas.openxmlformats.org/officeDocument/2006/relationships" xmlns:p="http://schemas.openxmlformats.org/presentationml/2006/main">
-  <p:cSld>
-    <p:spTree>
-      <p:nvGrpSpPr>
-        <p:cNvPr id="1" name=""/>
-        <p:cNvGrpSpPr/>
-        <p:nvPr/>
-      </p:nvGrpSpPr>
-      <p:grpSpPr>
-        <a:xfrm>
-          <a:off x="0" y="0"/>
-          <a:ext cx="0" cy="0"/>
-          <a:chOff x="0" y="0"/>
-          <a:chExt cx="0" cy="0"/>
-        </a:xfrm>
-      </p:grpSpPr>
-      <p:sp>
-        <p:nvSpPr>
-          <p:cNvPr id="2" name="Title 1"/>
-          <p:cNvSpPr>
-            <a:spLocks noGrp="1"/>
-          </p:cNvSpPr>
-          <p:nvPr>
-            <p:ph type="title"/>
-          </p:nvPr>
-        </p:nvSpPr>
-        <p:spPr/>
-        <p:txBody>
-          <a:bodyPr/>
-          <a:lstStyle/>
-          <a:p>
-            <a:r>
-              <a:rPr lang="en-US" dirty="0" smtClean="0"/>
-              <a:t>Project</a:t>
-            </a:r>
-            <a:endParaRPr lang="en-US" dirty="0"/>
-          </a:p>
-        </p:txBody>
-      </p:sp>
-      <p:sp>
-        <p:nvSpPr>
-          <p:cNvPr id="3" name="Content Placeholder 2"/>
-          <p:cNvSpPr>
-            <a:spLocks noGrp="1"/>
-          </p:cNvSpPr>
-          <p:nvPr>
-            <p:ph idx="1"/>
-          </p:nvPr>
-        </p:nvSpPr>
-        <p:spPr/>
-        <p:txBody>
-          <a:bodyPr/>
-          <a:lstStyle/>
-          <a:p>
-            <a:r>
-              <a:rPr lang="en-US" dirty="0" smtClean="0"/>
-              <a:t>Create a server to host </a:t>
-            </a:r>
-            <a:r>
-              <a:rPr lang="en-US" dirty="0" smtClean="0"/>
-              <a:t>STB multiplayer </a:t>
-            </a:r>
-            <a:r>
-              <a:rPr lang="en-US" dirty="0" smtClean="0"/>
-              <a:t>game plugins</a:t>
-            </a:r>
-          </a:p>
-          <a:p>
-            <a:r>
-              <a:rPr lang="en-US" dirty="0" smtClean="0"/>
-              <a:t>Design a template game UI for STBs in an APMAX environment</a:t>
-            </a:r>
-          </a:p>
-          <a:p>
-            <a:r>
-              <a:rPr lang="en-US" dirty="0" smtClean="0"/>
-              <a:t>Build a virtual APMAX to simulate future communication protocols.</a:t>
-            </a:r>
-          </a:p>
-          <a:p>
-            <a:r>
-              <a:rPr lang="en-US" dirty="0" smtClean="0"/>
-              <a:t>Convert games to proof-of-concept multiplayer games.</a:t>
-            </a:r>
-          </a:p>
-          <a:p>
-            <a:pPr marL="0" indent="0">
-              <a:buNone/>
-            </a:pPr>
-            <a:endParaRPr lang="en-US" dirty="0"/>
-          </a:p>
-        </p:txBody>
-      </p:sp>
-    </p:spTree>
-    <p:extLst>
-      <p:ext uri="{BB962C8B-B14F-4D97-AF65-F5344CB8AC3E}">
-        <p14:creationId xmlns:p14="http://schemas.microsoft.com/office/powerpoint/2010/main" val="1517087465"/>
-      </p:ext>
-    </p:extLst>
-  </p:cSld>
-  <p:clrMapOvr>
-    <a:masterClrMapping/>
-  </p:clrMapOvr>
-</p:sld>
-</file>
-
-<file path=ppt/slides/slide4.xml><?xml version="1.0" encoding="utf-8"?>
-<p:sld xmlns:a="http://schemas.openxmlformats.org/drawingml/2006/main" xmlns:r="http://schemas.openxmlformats.org/officeDocument/2006/relationships" xmlns:p="http://schemas.openxmlformats.org/presentationml/2006/main">
-  <p:cSld>
-    <p:spTree>
-      <p:nvGrpSpPr>
-        <p:cNvPr id="1" name=""/>
-        <p:cNvGrpSpPr/>
-        <p:nvPr/>
-      </p:nvGrpSpPr>
-      <p:grpSpPr>
-        <a:xfrm>
-          <a:off x="0" y="0"/>
-          <a:ext cx="0" cy="0"/>
-          <a:chOff x="0" y="0"/>
-          <a:chExt cx="0" cy="0"/>
-        </a:xfrm>
-      </p:grpSpPr>
-      <p:sp>
-        <p:nvSpPr>
-          <p:cNvPr id="2" name="Title 1"/>
-          <p:cNvSpPr>
-            <a:spLocks noGrp="1"/>
-          </p:cNvSpPr>
-          <p:nvPr>
-            <p:ph type="title"/>
-          </p:nvPr>
-        </p:nvSpPr>
-        <p:spPr/>
-        <p:txBody>
-          <a:bodyPr/>
-          <a:lstStyle/>
-          <a:p>
-            <a:r>
-              <a:rPr lang="en-US" dirty="0" smtClean="0"/>
-              <a:t>Sprint Review</a:t>
-            </a:r>
-            <a:endParaRPr lang="en-US" dirty="0"/>
-          </a:p>
-        </p:txBody>
-      </p:sp>
-      <p:sp>
-        <p:nvSpPr>
-          <p:cNvPr id="3" name="Content Placeholder 2"/>
-          <p:cNvSpPr>
-            <a:spLocks noGrp="1"/>
-          </p:cNvSpPr>
-          <p:nvPr>
-            <p:ph idx="1"/>
-          </p:nvPr>
-        </p:nvSpPr>
-        <p:spPr/>
-        <p:txBody>
-          <a:bodyPr>
-            <a:normAutofit lnSpcReduction="10000"/>
-          </a:bodyPr>
-          <a:lstStyle/>
-          <a:p>
-            <a:r>
-              <a:rPr lang="en-US" dirty="0" smtClean="0"/>
-              <a:t>Sprint #1</a:t>
-            </a:r>
-          </a:p>
-          <a:p>
-            <a:pPr lvl="1"/>
-            <a:r>
-              <a:rPr lang="en-US" sz="2400" dirty="0" smtClean="0"/>
-              <a:t>Initial design of STBMF system</a:t>
-            </a:r>
-          </a:p>
-          <a:p>
-            <a:pPr lvl="1"/>
-            <a:r>
-              <a:rPr lang="en-US" sz="2400" dirty="0" smtClean="0"/>
-              <a:t>Learn current Innovative System network communications</a:t>
-            </a:r>
-            <a:endParaRPr lang="en-US" sz="2400" dirty="0" smtClean="0"/>
-          </a:p>
-          <a:p>
-            <a:r>
-              <a:rPr lang="en-US" dirty="0" smtClean="0"/>
-              <a:t>Sprint #2</a:t>
-            </a:r>
-          </a:p>
-          <a:p>
-            <a:pPr lvl="1"/>
-            <a:r>
-              <a:rPr lang="en-US" sz="2400" dirty="0" smtClean="0"/>
-              <a:t>Refined prototypes of STBMF System (</a:t>
-            </a:r>
-            <a:r>
-              <a:rPr lang="en-US" sz="2400" dirty="0" err="1" smtClean="0"/>
-              <a:t>vSTB</a:t>
-            </a:r>
-            <a:r>
-              <a:rPr lang="en-US" sz="2400" dirty="0" smtClean="0"/>
-              <a:t>, </a:t>
-            </a:r>
-            <a:r>
-              <a:rPr lang="en-US" sz="2400" dirty="0" err="1" smtClean="0"/>
-              <a:t>vAPMAX</a:t>
-            </a:r>
-            <a:r>
-              <a:rPr lang="en-US" sz="2400" dirty="0" smtClean="0"/>
-              <a:t>, Game Server) </a:t>
-            </a:r>
-          </a:p>
-          <a:p>
-            <a:pPr lvl="1"/>
-            <a:r>
-              <a:rPr lang="en-US" sz="2400" dirty="0" smtClean="0"/>
-              <a:t>Designed communication definitions for STBMF</a:t>
-            </a:r>
-            <a:endParaRPr lang="en-US" sz="2400" dirty="0"/>
-          </a:p>
-          <a:p>
-            <a:r>
-              <a:rPr lang="en-US" dirty="0" smtClean="0"/>
-              <a:t>Sprint #3</a:t>
-            </a:r>
-          </a:p>
-          <a:p>
-            <a:pPr lvl="1"/>
-            <a:r>
-              <a:rPr lang="en-US" sz="2400" dirty="0" smtClean="0"/>
-              <a:t>Implemented prototypes to test designed communication definitions</a:t>
-            </a:r>
-            <a:endParaRPr lang="en-US" sz="2400" dirty="0" smtClean="0"/>
-          </a:p>
-          <a:p>
-            <a:pPr lvl="1"/>
-            <a:endParaRPr lang="en-US" dirty="0" smtClean="0"/>
-          </a:p>
-        </p:txBody>
-      </p:sp>
-    </p:spTree>
-    <p:extLst>
-      <p:ext uri="{BB962C8B-B14F-4D97-AF65-F5344CB8AC3E}">
-        <p14:creationId xmlns:p14="http://schemas.microsoft.com/office/powerpoint/2010/main" val="3876032928"/>
-      </p:ext>
-    </p:extLst>
-  </p:cSld>
-  <p:clrMapOvr>
-    <a:masterClrMapping/>
-  </p:clrMapOvr>
-</p:sld>
-</file>
-
-<file path=ppt/slides/slide5.xml><?xml version="1.0" encoding="utf-8"?>
-<p:sld xmlns:a="http://schemas.openxmlformats.org/drawingml/2006/main" xmlns:r="http://schemas.openxmlformats.org/officeDocument/2006/relationships" xmlns:p="http://schemas.openxmlformats.org/presentationml/2006/main">
-  <p:cSld>
-    <p:spTree>
-      <p:nvGrpSpPr>
-        <p:cNvPr id="1" name=""/>
-        <p:cNvGrpSpPr/>
-        <p:nvPr/>
-      </p:nvGrpSpPr>
-      <p:grpSpPr>
-        <a:xfrm>
-          <a:off x="0" y="0"/>
-          <a:ext cx="0" cy="0"/>
-          <a:chOff x="0" y="0"/>
-          <a:chExt cx="0" cy="0"/>
-        </a:xfrm>
-      </p:grpSpPr>
-      <p:sp>
-        <p:nvSpPr>
-          <p:cNvPr id="2" name="Title 1"/>
-          <p:cNvSpPr>
-            <a:spLocks noGrp="1"/>
-          </p:cNvSpPr>
-          <p:nvPr>
-            <p:ph type="title"/>
-          </p:nvPr>
-        </p:nvSpPr>
-        <p:spPr/>
-        <p:txBody>
-          <a:bodyPr/>
-          <a:lstStyle/>
-          <a:p>
-            <a:r>
-              <a:rPr lang="en-US" dirty="0" smtClean="0"/>
-              <a:t>System Design</a:t>
-            </a:r>
-            <a:endParaRPr lang="en-US" dirty="0"/>
-          </a:p>
-        </p:txBody>
-      </p:sp>
-      <p:sp>
-        <p:nvSpPr>
-          <p:cNvPr id="3" name="Content Placeholder 2"/>
-          <p:cNvSpPr>
-            <a:spLocks noGrp="1"/>
-          </p:cNvSpPr>
-          <p:nvPr>
-            <p:ph idx="1"/>
-          </p:nvPr>
-        </p:nvSpPr>
-        <p:spPr/>
-        <p:txBody>
-          <a:bodyPr/>
-          <a:lstStyle/>
-          <a:p>
-            <a:r>
-              <a:rPr lang="en-US" dirty="0" smtClean="0"/>
-              <a:t>3 Major Components:</a:t>
-            </a:r>
-          </a:p>
-          <a:p>
-            <a:pPr lvl="1"/>
-            <a:r>
-              <a:rPr lang="en-US" dirty="0" err="1" smtClean="0"/>
-              <a:t>vSTB</a:t>
-            </a:r>
-            <a:endParaRPr lang="en-US" dirty="0" smtClean="0"/>
-          </a:p>
-          <a:p>
-            <a:pPr lvl="1"/>
-            <a:r>
-              <a:rPr lang="en-US" dirty="0" err="1" smtClean="0"/>
-              <a:t>vAPMAX</a:t>
-            </a:r>
-            <a:endParaRPr lang="en-US" dirty="0" smtClean="0"/>
-          </a:p>
-          <a:p>
-            <a:pPr lvl="1"/>
-            <a:r>
-              <a:rPr lang="en-US" dirty="0" smtClean="0"/>
-              <a:t>Game Server</a:t>
-            </a:r>
-          </a:p>
-          <a:p>
-            <a:r>
-              <a:rPr lang="en-US" dirty="0" smtClean="0"/>
-              <a:t>Communication:</a:t>
-            </a:r>
-          </a:p>
-          <a:p>
-            <a:pPr lvl="1"/>
-            <a:r>
-              <a:rPr lang="en-US" dirty="0" smtClean="0"/>
-              <a:t>UDP</a:t>
-            </a:r>
-          </a:p>
-          <a:p>
-            <a:pPr lvl="1"/>
-            <a:r>
-              <a:rPr lang="en-US" dirty="0" smtClean="0"/>
-              <a:t>TCP</a:t>
-            </a:r>
-          </a:p>
-        </p:txBody>
-      </p:sp>
-    </p:spTree>
-    <p:extLst>
-      <p:ext uri="{BB962C8B-B14F-4D97-AF65-F5344CB8AC3E}">
-        <p14:creationId xmlns:p14="http://schemas.microsoft.com/office/powerpoint/2010/main" val="3216653805"/>
-      </p:ext>
-    </p:extLst>
-  </p:cSld>
-  <p:clrMapOvr>
-    <a:masterClrMapping/>
-  </p:clrMapOvr>
-</p:sld>
-</file>
-
-<file path=ppt/slides/slide6.xml><?xml version="1.0" encoding="utf-8"?>
-<p:sld xmlns:a="http://schemas.openxmlformats.org/drawingml/2006/main" xmlns:r="http://schemas.openxmlformats.org/officeDocument/2006/relationships" xmlns:p="http://schemas.openxmlformats.org/presentationml/2006/main">
-  <p:cSld>
-    <p:spTree>
-      <p:nvGrpSpPr>
-        <p:cNvPr id="1" name=""/>
-        <p:cNvGrpSpPr/>
-        <p:nvPr/>
-      </p:nvGrpSpPr>
-      <p:grpSpPr>
-        <a:xfrm>
-          <a:off x="0" y="0"/>
-          <a:ext cx="0" cy="0"/>
-          <a:chOff x="0" y="0"/>
-          <a:chExt cx="0" cy="0"/>
-        </a:xfrm>
-      </p:grpSpPr>
-      <p:sp>
-        <p:nvSpPr>
-          <p:cNvPr id="2" name="Title 1"/>
-          <p:cNvSpPr>
-            <a:spLocks noGrp="1"/>
-          </p:cNvSpPr>
-          <p:nvPr>
-            <p:ph type="title"/>
-          </p:nvPr>
-        </p:nvSpPr>
-        <p:spPr/>
-        <p:txBody>
-          <a:bodyPr/>
-          <a:lstStyle/>
-          <a:p>
-            <a:r>
-              <a:rPr lang="en-US" dirty="0" smtClean="0"/>
-              <a:t>Prototypes</a:t>
-            </a:r>
-            <a:endParaRPr lang="en-US" dirty="0"/>
-          </a:p>
-        </p:txBody>
-      </p:sp>
-      <p:sp>
-        <p:nvSpPr>
-          <p:cNvPr id="3" name="Content Placeholder 2"/>
-          <p:cNvSpPr>
-            <a:spLocks noGrp="1"/>
-          </p:cNvSpPr>
-          <p:nvPr>
-            <p:ph idx="1"/>
-          </p:nvPr>
-        </p:nvSpPr>
-        <p:spPr>
-          <a:xfrm>
-            <a:off x="457200" y="1600200"/>
-            <a:ext cx="8229600" cy="4525963"/>
-          </a:xfrm>
-        </p:spPr>
-        <p:txBody>
-          <a:bodyPr/>
-          <a:lstStyle/>
-          <a:p>
-            <a:pPr lvl="1"/>
-            <a:r>
-              <a:rPr lang="en-US" dirty="0" err="1" smtClean="0"/>
-              <a:t>vSTB</a:t>
-            </a:r>
-            <a:endParaRPr lang="en-US" dirty="0" smtClean="0"/>
-          </a:p>
-          <a:p>
-            <a:pPr lvl="2"/>
-            <a:r>
-              <a:rPr lang="en-US" dirty="0" smtClean="0"/>
-              <a:t>Scalable module to handle game environment request/response from user</a:t>
-            </a:r>
-          </a:p>
-          <a:p>
-            <a:pPr lvl="1"/>
-            <a:r>
-              <a:rPr lang="en-US" dirty="0" err="1" smtClean="0"/>
-              <a:t>vAPMAX</a:t>
-            </a:r>
-            <a:endParaRPr lang="en-US" dirty="0" smtClean="0"/>
-          </a:p>
-          <a:p>
-            <a:pPr lvl="2"/>
-            <a:r>
-              <a:rPr lang="en-US" dirty="0" smtClean="0"/>
-              <a:t>Message handler between </a:t>
-            </a:r>
-            <a:r>
-              <a:rPr lang="en-US" dirty="0" err="1" smtClean="0"/>
-              <a:t>vSTB</a:t>
-            </a:r>
-            <a:r>
-              <a:rPr lang="en-US" dirty="0" smtClean="0"/>
-              <a:t> and Game Server</a:t>
-            </a:r>
-          </a:p>
-          <a:p>
-            <a:pPr lvl="1"/>
-            <a:r>
-              <a:rPr lang="en-US" dirty="0" smtClean="0"/>
-              <a:t>Game Server</a:t>
-            </a:r>
-          </a:p>
-          <a:p>
-            <a:pPr lvl="2"/>
-            <a:r>
-              <a:rPr lang="en-US" dirty="0" smtClean="0"/>
-              <a:t>Process requests from/responses to users on vSTB</a:t>
-            </a:r>
-          </a:p>
-          <a:p>
-            <a:endParaRPr lang="en-US" dirty="0"/>
-          </a:p>
-        </p:txBody>
-      </p:sp>
-    </p:spTree>
-    <p:extLst>
-      <p:ext uri="{BB962C8B-B14F-4D97-AF65-F5344CB8AC3E}">
-        <p14:creationId xmlns:p14="http://schemas.microsoft.com/office/powerpoint/2010/main" val="1491991968"/>
-      </p:ext>
-    </p:extLst>
-  </p:cSld>
-  <p:clrMapOvr>
-    <a:masterClrMapping/>
-  </p:clrMapOvr>
-</p:sld>
-</file>
-
-<file path=ppt/slides/slide7.xml><?xml version="1.0" encoding="utf-8"?>
-<p:sld xmlns:a="http://schemas.openxmlformats.org/drawingml/2006/main" xmlns:r="http://schemas.openxmlformats.org/officeDocument/2006/relationships" xmlns:p="http://schemas.openxmlformats.org/presentationml/2006/main">
-  <p:cSld>
-    <p:spTree>
-      <p:nvGrpSpPr>
-        <p:cNvPr id="1" name=""/>
-        <p:cNvGrpSpPr/>
-        <p:nvPr/>
-      </p:nvGrpSpPr>
-      <p:grpSpPr>
-        <a:xfrm>
-          <a:off x="0" y="0"/>
-          <a:ext cx="0" cy="0"/>
-          <a:chOff x="0" y="0"/>
-          <a:chExt cx="0" cy="0"/>
-        </a:xfrm>
-      </p:grpSpPr>
-      <p:sp>
-        <p:nvSpPr>
-          <p:cNvPr id="2" name="Title 1"/>
-          <p:cNvSpPr>
-            <a:spLocks noGrp="1"/>
-          </p:cNvSpPr>
-          <p:nvPr>
-            <p:ph type="title"/>
-          </p:nvPr>
-        </p:nvSpPr>
-        <p:spPr/>
-        <p:txBody>
-          <a:bodyPr/>
-          <a:lstStyle/>
-          <a:p>
-            <a:r>
-              <a:rPr lang="en-US" dirty="0" err="1" smtClean="0"/>
-              <a:t>vSTB</a:t>
-            </a:r>
-            <a:endParaRPr lang="en-US" dirty="0"/>
-          </a:p>
-        </p:txBody>
-      </p:sp>
-      <p:sp>
-        <p:nvSpPr>
-          <p:cNvPr id="3" name="Content Placeholder 2"/>
-          <p:cNvSpPr>
-            <a:spLocks noGrp="1"/>
-          </p:cNvSpPr>
-          <p:nvPr>
-            <p:ph idx="1"/>
-          </p:nvPr>
-        </p:nvSpPr>
-        <p:spPr/>
-        <p:txBody>
-          <a:bodyPr/>
-          <a:lstStyle/>
-          <a:p>
-            <a:r>
-              <a:rPr lang="en-US" dirty="0" smtClean="0"/>
-              <a:t>Request response</a:t>
-            </a:r>
-          </a:p>
-          <a:p>
-            <a:r>
-              <a:rPr lang="en-US" dirty="0" smtClean="0"/>
-              <a:t>Scalable</a:t>
-            </a:r>
-          </a:p>
-          <a:p>
-            <a:r>
-              <a:rPr lang="en-US" dirty="0" smtClean="0"/>
-              <a:t>Modular</a:t>
-            </a:r>
-          </a:p>
-          <a:p>
-            <a:r>
-              <a:rPr lang="en-US" dirty="0" smtClean="0"/>
-              <a:t>Platform independent</a:t>
-            </a:r>
-          </a:p>
-          <a:p>
-            <a:r>
-              <a:rPr lang="en-US" dirty="0" smtClean="0"/>
-              <a:t>Increased availability</a:t>
-            </a:r>
-          </a:p>
-          <a:p>
-            <a:endParaRPr lang="en-US" dirty="0"/>
-          </a:p>
-        </p:txBody>
-      </p:sp>
-    </p:spTree>
-    <p:extLst>
-      <p:ext uri="{BB962C8B-B14F-4D97-AF65-F5344CB8AC3E}">
-        <p14:creationId xmlns:p14="http://schemas.microsoft.com/office/powerpoint/2010/main" val="2177279113"/>
-      </p:ext>
-    </p:extLst>
-  </p:cSld>
-  <p:clrMapOvr>
-    <a:masterClrMapping/>
-  </p:clrMapOvr>
-</p:sld>
-</file>
-
-<file path=ppt/slides/slide8.xml><?xml version="1.0" encoding="utf-8"?>
-<p:sld xmlns:a="http://schemas.openxmlformats.org/drawingml/2006/main" xmlns:r="http://schemas.openxmlformats.org/officeDocument/2006/relationships" xmlns:p="http://schemas.openxmlformats.org/presentationml/2006/main">
-  <p:cSld>
-    <p:spTree>
-      <p:nvGrpSpPr>
-        <p:cNvPr id="1" name=""/>
-        <p:cNvGrpSpPr/>
-        <p:nvPr/>
-      </p:nvGrpSpPr>
-      <p:grpSpPr>
-        <a:xfrm>
-          <a:off x="0" y="0"/>
-          <a:ext cx="0" cy="0"/>
-          <a:chOff x="0" y="0"/>
-          <a:chExt cx="0" cy="0"/>
-        </a:xfrm>
-      </p:grpSpPr>
-      <p:sp>
-        <p:nvSpPr>
-          <p:cNvPr id="2" name="Title 1"/>
-          <p:cNvSpPr>
-            <a:spLocks noGrp="1"/>
-          </p:cNvSpPr>
-          <p:nvPr>
-            <p:ph type="title"/>
-          </p:nvPr>
-        </p:nvSpPr>
-        <p:spPr/>
-        <p:txBody>
-          <a:bodyPr/>
-          <a:lstStyle/>
-          <a:p>
-            <a:r>
               <a:rPr lang="en-US" dirty="0" err="1" smtClean="0"/>
               <a:t>vAPMAX</a:t>
             </a:r>
@@ -4618,10 +3376,17 @@
   <p:clrMapOvr>
     <a:masterClrMapping/>
   </p:clrMapOvr>
+  <p:timing>
+    <p:tnLst>
+      <p:par>
+        <p:cTn id="1" dur="indefinite" restart="never" nodeType="tmRoot"/>
+      </p:par>
+    </p:tnLst>
+  </p:timing>
 </p:sld>
 </file>
 
-<file path=ppt/slides/slide9.xml><?xml version="1.0" encoding="utf-8"?>
+<file path=ppt/slides/slide12.xml><?xml version="1.0" encoding="utf-8"?>
 <p:sld xmlns:a="http://schemas.openxmlformats.org/drawingml/2006/main" xmlns:r="http://schemas.openxmlformats.org/officeDocument/2006/relationships" xmlns:p="http://schemas.openxmlformats.org/presentationml/2006/main">
   <p:cSld>
     <p:spTree>
@@ -5488,6 +4253,1908 @@
   <p:clrMapOvr>
     <a:masterClrMapping/>
   </p:clrMapOvr>
+  <p:timing>
+    <p:tnLst>
+      <p:par>
+        <p:cTn id="1" dur="indefinite" restart="never" nodeType="tmRoot"/>
+      </p:par>
+    </p:tnLst>
+  </p:timing>
+</p:sld>
+</file>
+
+<file path=ppt/slides/slide13.xml><?xml version="1.0" encoding="utf-8"?>
+<p:sld xmlns:a="http://schemas.openxmlformats.org/drawingml/2006/main" xmlns:r="http://schemas.openxmlformats.org/officeDocument/2006/relationships" xmlns:p="http://schemas.openxmlformats.org/presentationml/2006/main">
+  <p:cSld>
+    <p:spTree>
+      <p:nvGrpSpPr>
+        <p:cNvPr id="1" name=""/>
+        <p:cNvGrpSpPr/>
+        <p:nvPr/>
+      </p:nvGrpSpPr>
+      <p:grpSpPr>
+        <a:xfrm>
+          <a:off x="0" y="0"/>
+          <a:ext cx="0" cy="0"/>
+          <a:chOff x="0" y="0"/>
+          <a:chExt cx="0" cy="0"/>
+        </a:xfrm>
+      </p:grpSpPr>
+      <p:sp>
+        <p:nvSpPr>
+          <p:cNvPr id="2" name="Title 1"/>
+          <p:cNvSpPr>
+            <a:spLocks noGrp="1"/>
+          </p:cNvSpPr>
+          <p:nvPr>
+            <p:ph type="title"/>
+          </p:nvPr>
+        </p:nvSpPr>
+        <p:spPr/>
+        <p:txBody>
+          <a:bodyPr/>
+          <a:lstStyle/>
+          <a:p>
+            <a:r>
+              <a:rPr lang="en-US" dirty="0" smtClean="0"/>
+              <a:t>Demo</a:t>
+            </a:r>
+            <a:endParaRPr lang="en-US" dirty="0"/>
+          </a:p>
+        </p:txBody>
+      </p:sp>
+      <p:sp>
+        <p:nvSpPr>
+          <p:cNvPr id="3" name="Content Placeholder 2"/>
+          <p:cNvSpPr>
+            <a:spLocks noGrp="1"/>
+          </p:cNvSpPr>
+          <p:nvPr>
+            <p:ph idx="1"/>
+          </p:nvPr>
+        </p:nvSpPr>
+        <p:spPr/>
+        <p:txBody>
+          <a:bodyPr/>
+          <a:lstStyle/>
+          <a:p>
+            <a:r>
+              <a:rPr lang="en-US" dirty="0" smtClean="0"/>
+              <a:t>HERE WE GGOOOOOOO</a:t>
+            </a:r>
+            <a:endParaRPr lang="en-US" dirty="0"/>
+          </a:p>
+        </p:txBody>
+      </p:sp>
+    </p:spTree>
+    <p:extLst>
+      <p:ext uri="{BB962C8B-B14F-4D97-AF65-F5344CB8AC3E}">
+        <p14:creationId xmlns:p14="http://schemas.microsoft.com/office/powerpoint/2010/main" val="625723072"/>
+      </p:ext>
+    </p:extLst>
+  </p:cSld>
+  <p:clrMapOvr>
+    <a:masterClrMapping/>
+  </p:clrMapOvr>
+  <p:timing>
+    <p:tnLst>
+      <p:par>
+        <p:cTn id="1" dur="indefinite" restart="never" nodeType="tmRoot"/>
+      </p:par>
+    </p:tnLst>
+  </p:timing>
+</p:sld>
+</file>
+
+<file path=ppt/slides/slide14.xml><?xml version="1.0" encoding="utf-8"?>
+<p:sld xmlns:a="http://schemas.openxmlformats.org/drawingml/2006/main" xmlns:r="http://schemas.openxmlformats.org/officeDocument/2006/relationships" xmlns:p="http://schemas.openxmlformats.org/presentationml/2006/main">
+  <p:cSld>
+    <p:spTree>
+      <p:nvGrpSpPr>
+        <p:cNvPr id="1" name=""/>
+        <p:cNvGrpSpPr/>
+        <p:nvPr/>
+      </p:nvGrpSpPr>
+      <p:grpSpPr>
+        <a:xfrm>
+          <a:off x="0" y="0"/>
+          <a:ext cx="0" cy="0"/>
+          <a:chOff x="0" y="0"/>
+          <a:chExt cx="0" cy="0"/>
+        </a:xfrm>
+      </p:grpSpPr>
+      <p:sp>
+        <p:nvSpPr>
+          <p:cNvPr id="2" name="Title 1"/>
+          <p:cNvSpPr>
+            <a:spLocks noGrp="1"/>
+          </p:cNvSpPr>
+          <p:nvPr>
+            <p:ph type="title"/>
+          </p:nvPr>
+        </p:nvSpPr>
+        <p:spPr/>
+        <p:txBody>
+          <a:bodyPr/>
+          <a:lstStyle/>
+          <a:p>
+            <a:r>
+              <a:rPr lang="en-US" dirty="0" smtClean="0"/>
+              <a:t>Product Backlog</a:t>
+            </a:r>
+            <a:endParaRPr lang="en-US" dirty="0"/>
+          </a:p>
+        </p:txBody>
+      </p:sp>
+      <p:sp>
+        <p:nvSpPr>
+          <p:cNvPr id="3" name="Content Placeholder 2"/>
+          <p:cNvSpPr>
+            <a:spLocks noGrp="1"/>
+          </p:cNvSpPr>
+          <p:nvPr>
+            <p:ph idx="1"/>
+          </p:nvPr>
+        </p:nvSpPr>
+        <p:spPr>
+          <a:xfrm>
+            <a:off x="457200" y="1219200"/>
+            <a:ext cx="8229600" cy="5486400"/>
+          </a:xfrm>
+        </p:spPr>
+        <p:txBody>
+          <a:bodyPr>
+            <a:noAutofit/>
+          </a:bodyPr>
+          <a:lstStyle/>
+          <a:p>
+            <a:r>
+              <a:rPr lang="en-US" sz="1200" b="1" dirty="0" err="1" smtClean="0"/>
+              <a:t>vSTB</a:t>
+            </a:r>
+            <a:endParaRPr lang="en-US" sz="1200" b="1" dirty="0"/>
+          </a:p>
+          <a:p>
+            <a:pPr lvl="1"/>
+            <a:r>
+              <a:rPr lang="en-US" sz="1200" dirty="0"/>
+              <a:t>Research </a:t>
+            </a:r>
+            <a:r>
+              <a:rPr lang="en-US" sz="1200" dirty="0" err="1"/>
+              <a:t>Qt</a:t>
+            </a:r>
+            <a:r>
+              <a:rPr lang="en-US" sz="1200" dirty="0"/>
+              <a:t> Unit Testing</a:t>
+            </a:r>
+          </a:p>
+          <a:p>
+            <a:pPr lvl="1"/>
+            <a:r>
+              <a:rPr lang="en-US" sz="1200" dirty="0" smtClean="0"/>
+              <a:t>Create </a:t>
+            </a:r>
+            <a:r>
+              <a:rPr lang="en-US" sz="1200" dirty="0"/>
+              <a:t>Checkers game as a proof </a:t>
+            </a:r>
+            <a:r>
+              <a:rPr lang="en-US" sz="1200" dirty="0" smtClean="0"/>
+              <a:t>of concept</a:t>
+            </a:r>
+          </a:p>
+          <a:p>
+            <a:pPr lvl="1"/>
+            <a:r>
+              <a:rPr lang="en-US" sz="1200" dirty="0" smtClean="0"/>
+              <a:t>Prove </a:t>
+            </a:r>
+            <a:r>
+              <a:rPr lang="en-US" sz="1200" dirty="0"/>
+              <a:t>out and implement </a:t>
+            </a:r>
+            <a:r>
+              <a:rPr lang="en-US" sz="1200" dirty="0" err="1" smtClean="0"/>
+              <a:t>QUiLoader</a:t>
+            </a:r>
+            <a:endParaRPr lang="en-US" sz="1200" dirty="0"/>
+          </a:p>
+          <a:p>
+            <a:pPr lvl="1"/>
+            <a:r>
+              <a:rPr lang="en-US" sz="1200" dirty="0" smtClean="0"/>
+              <a:t>Research </a:t>
+            </a:r>
+            <a:r>
+              <a:rPr lang="en-US" sz="1200" dirty="0"/>
+              <a:t>Dynamic </a:t>
+            </a:r>
+            <a:r>
+              <a:rPr lang="en-US" sz="1200" dirty="0" smtClean="0"/>
+              <a:t>UI</a:t>
+            </a:r>
+          </a:p>
+          <a:p>
+            <a:pPr lvl="1"/>
+            <a:r>
+              <a:rPr lang="en-US" sz="1200" dirty="0" smtClean="0"/>
+              <a:t>Refactor </a:t>
+            </a:r>
+            <a:r>
+              <a:rPr lang="en-US" sz="1200" dirty="0"/>
+              <a:t>existing STB game </a:t>
+            </a:r>
+            <a:r>
+              <a:rPr lang="en-US" sz="1200" dirty="0" smtClean="0"/>
+              <a:t>view/model </a:t>
+            </a:r>
+            <a:r>
+              <a:rPr lang="en-US" sz="1200" dirty="0"/>
+              <a:t>architecture to meet STBMF </a:t>
+            </a:r>
+            <a:r>
+              <a:rPr lang="en-US" sz="1200" dirty="0" smtClean="0"/>
+              <a:t>requirements</a:t>
+            </a:r>
+          </a:p>
+          <a:p>
+            <a:pPr lvl="1"/>
+            <a:r>
+              <a:rPr lang="en-US" sz="1200" dirty="0" smtClean="0"/>
+              <a:t>Create </a:t>
+            </a:r>
+            <a:r>
+              <a:rPr lang="en-US" sz="1200" dirty="0"/>
+              <a:t>Memory game as a proof of </a:t>
+            </a:r>
+            <a:r>
+              <a:rPr lang="en-US" sz="1200" dirty="0" smtClean="0"/>
+              <a:t>concept</a:t>
+            </a:r>
+          </a:p>
+          <a:p>
+            <a:r>
+              <a:rPr lang="en-US" sz="1200" b="1" dirty="0" err="1" smtClean="0"/>
+              <a:t>vAPMAX</a:t>
+            </a:r>
+            <a:endParaRPr lang="en-US" sz="1200" b="1" dirty="0"/>
+          </a:p>
+          <a:p>
+            <a:pPr lvl="1"/>
+            <a:r>
+              <a:rPr lang="en-US" sz="1200" dirty="0" smtClean="0"/>
+              <a:t>Integrate </a:t>
+            </a:r>
+            <a:r>
+              <a:rPr lang="en-US" sz="1200" dirty="0"/>
+              <a:t>Logger into project and </a:t>
+            </a:r>
+            <a:r>
+              <a:rPr lang="en-US" sz="1200" dirty="0" smtClean="0"/>
+              <a:t>provide basic </a:t>
+            </a:r>
+            <a:r>
+              <a:rPr lang="en-US" sz="1200" dirty="0"/>
+              <a:t>command line usage to view</a:t>
+            </a:r>
+            <a:r>
+              <a:rPr lang="en-US" sz="1200" dirty="0" smtClean="0"/>
+              <a:t>.</a:t>
+            </a:r>
+          </a:p>
+          <a:p>
+            <a:pPr lvl="1"/>
+            <a:r>
+              <a:rPr lang="en-US" sz="1200" dirty="0" smtClean="0"/>
+              <a:t>Unit Testing</a:t>
+            </a:r>
+          </a:p>
+          <a:p>
+            <a:pPr lvl="1"/>
+            <a:r>
+              <a:rPr lang="en-US" sz="1200" dirty="0" smtClean="0"/>
+              <a:t>update </a:t>
+            </a:r>
+            <a:r>
+              <a:rPr lang="en-US" sz="1200" dirty="0"/>
+              <a:t>Reactive Extension package to </a:t>
+            </a:r>
+            <a:r>
+              <a:rPr lang="en-US" sz="1200" dirty="0" smtClean="0"/>
+              <a:t>latest</a:t>
+            </a:r>
+            <a:endParaRPr lang="en-US" sz="1200" dirty="0"/>
+          </a:p>
+          <a:p>
+            <a:r>
+              <a:rPr lang="en-US" sz="1200" b="1" dirty="0" smtClean="0"/>
+              <a:t>Game Server</a:t>
+            </a:r>
+          </a:p>
+          <a:p>
+            <a:pPr lvl="1"/>
+            <a:r>
+              <a:rPr lang="en-US" sz="1200" dirty="0" smtClean="0"/>
+              <a:t> </a:t>
+            </a:r>
+            <a:r>
+              <a:rPr lang="en-US" sz="1200" dirty="0"/>
+              <a:t>TCP: connections to </a:t>
+            </a:r>
+            <a:r>
+              <a:rPr lang="en-US" sz="1200" dirty="0" err="1"/>
+              <a:t>APMax</a:t>
+            </a:r>
+            <a:r>
+              <a:rPr lang="en-US" sz="1200" dirty="0"/>
+              <a:t>, - </a:t>
+            </a:r>
+            <a:r>
+              <a:rPr lang="en-US" sz="1200" dirty="0" smtClean="0"/>
+              <a:t>receiving and sending</a:t>
+            </a:r>
+          </a:p>
+          <a:p>
+            <a:pPr lvl="1"/>
+            <a:r>
+              <a:rPr lang="en-US" sz="1200" dirty="0" smtClean="0"/>
+              <a:t>Server</a:t>
+            </a:r>
+            <a:r>
+              <a:rPr lang="en-US" sz="1200" dirty="0"/>
+              <a:t>: Plugin </a:t>
+            </a:r>
+            <a:r>
+              <a:rPr lang="en-US" sz="1200" dirty="0" smtClean="0"/>
+              <a:t>Interface</a:t>
+            </a:r>
+          </a:p>
+          <a:p>
+            <a:pPr lvl="1"/>
+            <a:r>
+              <a:rPr lang="en-US" sz="1200" dirty="0" smtClean="0"/>
+              <a:t>Server</a:t>
+            </a:r>
+            <a:r>
+              <a:rPr lang="en-US" sz="1200" dirty="0"/>
+              <a:t>: </a:t>
+            </a:r>
+            <a:r>
+              <a:rPr lang="en-US" sz="1200" dirty="0" smtClean="0"/>
+              <a:t>Database</a:t>
+            </a:r>
+          </a:p>
+          <a:p>
+            <a:pPr lvl="1"/>
+            <a:r>
+              <a:rPr lang="en-US" sz="1200" dirty="0" smtClean="0"/>
+              <a:t>Server</a:t>
+            </a:r>
+            <a:r>
+              <a:rPr lang="en-US" sz="1200" dirty="0"/>
+              <a:t>: UI - Stats, </a:t>
+            </a:r>
+            <a:r>
+              <a:rPr lang="en-US" sz="1200" dirty="0" smtClean="0"/>
+              <a:t>Import</a:t>
+            </a:r>
+          </a:p>
+          <a:p>
+            <a:pPr lvl="1"/>
+            <a:r>
+              <a:rPr lang="en-US" sz="1200" dirty="0" smtClean="0"/>
+              <a:t>Server</a:t>
+            </a:r>
+            <a:r>
+              <a:rPr lang="en-US" sz="1200" dirty="0"/>
+              <a:t>: Future - server components, </a:t>
+            </a:r>
+            <a:r>
+              <a:rPr lang="en-US" sz="1200" dirty="0" smtClean="0"/>
+              <a:t>database</a:t>
+            </a:r>
+          </a:p>
+          <a:p>
+            <a:pPr lvl="1"/>
+            <a:r>
+              <a:rPr lang="en-US" sz="1200" dirty="0" smtClean="0"/>
+              <a:t>Server</a:t>
+            </a:r>
+            <a:r>
+              <a:rPr lang="en-US" sz="1200" dirty="0"/>
+              <a:t>: Design: game interface - loading </a:t>
+            </a:r>
+            <a:r>
+              <a:rPr lang="en-US" sz="1200" dirty="0" smtClean="0"/>
+              <a:t>game, playing game</a:t>
+            </a:r>
+          </a:p>
+          <a:p>
+            <a:pPr lvl="1"/>
+            <a:r>
+              <a:rPr lang="en-US" sz="1200" dirty="0" smtClean="0"/>
+              <a:t>Server</a:t>
+            </a:r>
+            <a:r>
+              <a:rPr lang="en-US" sz="1200" dirty="0"/>
+              <a:t>: </a:t>
+            </a:r>
+            <a:r>
+              <a:rPr lang="en-US" sz="1200" dirty="0" smtClean="0"/>
+              <a:t>logger</a:t>
+            </a:r>
+          </a:p>
+          <a:p>
+            <a:pPr lvl="1"/>
+            <a:r>
+              <a:rPr lang="en-US" sz="1200" dirty="0" smtClean="0"/>
+              <a:t>Server</a:t>
+            </a:r>
+            <a:r>
+              <a:rPr lang="en-US" sz="1200" dirty="0"/>
+              <a:t>: Unit </a:t>
+            </a:r>
+            <a:r>
+              <a:rPr lang="en-US" sz="1200" dirty="0" smtClean="0"/>
+              <a:t>Test</a:t>
+            </a:r>
+          </a:p>
+          <a:p>
+            <a:pPr lvl="1"/>
+            <a:r>
+              <a:rPr lang="en-US" sz="1200" dirty="0" smtClean="0"/>
+              <a:t>Server</a:t>
+            </a:r>
+            <a:r>
+              <a:rPr lang="en-US" sz="1200" dirty="0"/>
+              <a:t>: Build template </a:t>
+            </a:r>
+            <a:r>
+              <a:rPr lang="en-US" sz="1200" dirty="0" smtClean="0"/>
+              <a:t>GUI</a:t>
+            </a:r>
+          </a:p>
+          <a:p>
+            <a:pPr lvl="1"/>
+            <a:r>
+              <a:rPr lang="en-US" sz="1200" dirty="0" smtClean="0"/>
+              <a:t>Server</a:t>
+            </a:r>
+            <a:r>
+              <a:rPr lang="en-US" sz="1200" dirty="0"/>
+              <a:t>: Research Server operating </a:t>
+            </a:r>
+            <a:r>
+              <a:rPr lang="en-US" sz="1200" dirty="0" smtClean="0"/>
+              <a:t>systems</a:t>
+            </a:r>
+          </a:p>
+          <a:p>
+            <a:pPr lvl="1"/>
+            <a:r>
+              <a:rPr lang="en-US" sz="1200" dirty="0" smtClean="0"/>
+              <a:t>Server</a:t>
+            </a:r>
+            <a:r>
+              <a:rPr lang="en-US" sz="1200" dirty="0"/>
+              <a:t>: Research </a:t>
+            </a:r>
+            <a:r>
+              <a:rPr lang="en-US" sz="1200" dirty="0" smtClean="0"/>
+              <a:t>Security</a:t>
+            </a:r>
+          </a:p>
+          <a:p>
+            <a:pPr lvl="1"/>
+            <a:r>
+              <a:rPr lang="en-US" sz="1200" dirty="0" smtClean="0"/>
+              <a:t>Server</a:t>
+            </a:r>
+            <a:r>
+              <a:rPr lang="en-US" sz="1200" dirty="0"/>
+              <a:t>: Convert to a </a:t>
+            </a:r>
+            <a:r>
+              <a:rPr lang="en-US" sz="1200" dirty="0" smtClean="0"/>
+              <a:t>service</a:t>
+            </a:r>
+          </a:p>
+          <a:p>
+            <a:pPr lvl="1"/>
+            <a:r>
+              <a:rPr lang="en-US" sz="1200" dirty="0" smtClean="0"/>
+              <a:t>Server</a:t>
+            </a:r>
+            <a:r>
+              <a:rPr lang="en-US" sz="1200" dirty="0"/>
+              <a:t>: Research attaching a GUI to a </a:t>
+            </a:r>
+            <a:r>
+              <a:rPr lang="en-US" sz="1200" dirty="0" smtClean="0"/>
+              <a:t>service using </a:t>
+            </a:r>
+            <a:r>
+              <a:rPr lang="en-US" sz="1200" dirty="0"/>
+              <a:t>C</a:t>
+            </a:r>
+            <a:r>
+              <a:rPr lang="en-US" sz="1200" dirty="0" smtClean="0"/>
+              <a:t>#</a:t>
+            </a:r>
+            <a:endParaRPr lang="en-US" sz="1200" dirty="0"/>
+          </a:p>
+        </p:txBody>
+      </p:sp>
+    </p:spTree>
+    <p:extLst>
+      <p:ext uri="{BB962C8B-B14F-4D97-AF65-F5344CB8AC3E}">
+        <p14:creationId xmlns:p14="http://schemas.microsoft.com/office/powerpoint/2010/main" val="3805795148"/>
+      </p:ext>
+    </p:extLst>
+  </p:cSld>
+  <p:clrMapOvr>
+    <a:masterClrMapping/>
+  </p:clrMapOvr>
+  <p:timing>
+    <p:tnLst>
+      <p:par>
+        <p:cTn id="1" dur="indefinite" restart="never" nodeType="tmRoot"/>
+      </p:par>
+    </p:tnLst>
+  </p:timing>
+</p:sld>
+</file>
+
+<file path=ppt/slides/slide15.xml><?xml version="1.0" encoding="utf-8"?>
+<p:sld xmlns:a="http://schemas.openxmlformats.org/drawingml/2006/main" xmlns:r="http://schemas.openxmlformats.org/officeDocument/2006/relationships" xmlns:p="http://schemas.openxmlformats.org/presentationml/2006/main">
+  <p:cSld>
+    <p:spTree>
+      <p:nvGrpSpPr>
+        <p:cNvPr id="1" name=""/>
+        <p:cNvGrpSpPr/>
+        <p:nvPr/>
+      </p:nvGrpSpPr>
+      <p:grpSpPr>
+        <a:xfrm>
+          <a:off x="0" y="0"/>
+          <a:ext cx="0" cy="0"/>
+          <a:chOff x="0" y="0"/>
+          <a:chExt cx="0" cy="0"/>
+        </a:xfrm>
+      </p:grpSpPr>
+      <p:sp>
+        <p:nvSpPr>
+          <p:cNvPr id="2" name="Title 1"/>
+          <p:cNvSpPr>
+            <a:spLocks noGrp="1"/>
+          </p:cNvSpPr>
+          <p:nvPr>
+            <p:ph type="title"/>
+          </p:nvPr>
+        </p:nvSpPr>
+        <p:spPr/>
+        <p:txBody>
+          <a:bodyPr/>
+          <a:lstStyle/>
+          <a:p>
+            <a:r>
+              <a:rPr lang="en-US" dirty="0" smtClean="0"/>
+              <a:t>Questions</a:t>
+            </a:r>
+            <a:endParaRPr lang="en-US" dirty="0"/>
+          </a:p>
+        </p:txBody>
+      </p:sp>
+      <p:sp>
+        <p:nvSpPr>
+          <p:cNvPr id="3" name="Content Placeholder 2"/>
+          <p:cNvSpPr>
+            <a:spLocks noGrp="1"/>
+          </p:cNvSpPr>
+          <p:nvPr>
+            <p:ph idx="1"/>
+          </p:nvPr>
+        </p:nvSpPr>
+        <p:spPr/>
+        <p:txBody>
+          <a:bodyPr/>
+          <a:lstStyle/>
+          <a:p>
+            <a:endParaRPr lang="en-US" dirty="0"/>
+          </a:p>
+        </p:txBody>
+      </p:sp>
+    </p:spTree>
+    <p:extLst>
+      <p:ext uri="{BB962C8B-B14F-4D97-AF65-F5344CB8AC3E}">
+        <p14:creationId xmlns:p14="http://schemas.microsoft.com/office/powerpoint/2010/main" val="2940516112"/>
+      </p:ext>
+    </p:extLst>
+  </p:cSld>
+  <p:clrMapOvr>
+    <a:masterClrMapping/>
+  </p:clrMapOvr>
+</p:sld>
+</file>
+
+<file path=ppt/slides/slide2.xml><?xml version="1.0" encoding="utf-8"?>
+<p:sld xmlns:a="http://schemas.openxmlformats.org/drawingml/2006/main" xmlns:r="http://schemas.openxmlformats.org/officeDocument/2006/relationships" xmlns:p="http://schemas.openxmlformats.org/presentationml/2006/main">
+  <p:cSld>
+    <p:spTree>
+      <p:nvGrpSpPr>
+        <p:cNvPr id="1" name=""/>
+        <p:cNvGrpSpPr/>
+        <p:nvPr/>
+      </p:nvGrpSpPr>
+      <p:grpSpPr>
+        <a:xfrm>
+          <a:off x="0" y="0"/>
+          <a:ext cx="0" cy="0"/>
+          <a:chOff x="0" y="0"/>
+          <a:chExt cx="0" cy="0"/>
+        </a:xfrm>
+      </p:grpSpPr>
+      <p:sp>
+        <p:nvSpPr>
+          <p:cNvPr id="2" name="Title 1"/>
+          <p:cNvSpPr>
+            <a:spLocks noGrp="1"/>
+          </p:cNvSpPr>
+          <p:nvPr>
+            <p:ph type="title"/>
+          </p:nvPr>
+        </p:nvSpPr>
+        <p:spPr/>
+        <p:txBody>
+          <a:bodyPr/>
+          <a:lstStyle/>
+          <a:p>
+            <a:r>
+              <a:rPr lang="en-US" dirty="0" smtClean="0"/>
+              <a:t>Client</a:t>
+            </a:r>
+            <a:endParaRPr lang="en-US" dirty="0"/>
+          </a:p>
+        </p:txBody>
+      </p:sp>
+      <p:sp>
+        <p:nvSpPr>
+          <p:cNvPr id="3" name="Content Placeholder 2"/>
+          <p:cNvSpPr>
+            <a:spLocks noGrp="1"/>
+          </p:cNvSpPr>
+          <p:nvPr>
+            <p:ph idx="1"/>
+          </p:nvPr>
+        </p:nvSpPr>
+        <p:spPr/>
+        <p:txBody>
+          <a:bodyPr>
+            <a:normAutofit fontScale="92500" lnSpcReduction="10000"/>
+          </a:bodyPr>
+          <a:lstStyle/>
+          <a:p>
+            <a:r>
+              <a:rPr lang="en-US" sz="2800" dirty="0" smtClean="0"/>
+              <a:t>Innovative Systems</a:t>
+            </a:r>
+          </a:p>
+          <a:p>
+            <a:pPr lvl="1"/>
+            <a:r>
+              <a:rPr lang="en-US" sz="2400" dirty="0"/>
+              <a:t>P</a:t>
+            </a:r>
+            <a:r>
+              <a:rPr lang="en-US" sz="2400" dirty="0" smtClean="0"/>
+              <a:t>rovides integrated solutions for the independent telecommunications industry.</a:t>
+            </a:r>
+          </a:p>
+          <a:p>
+            <a:r>
+              <a:rPr lang="en-US" sz="2800" dirty="0" smtClean="0"/>
+              <a:t>APMAX</a:t>
+            </a:r>
+          </a:p>
+          <a:p>
+            <a:pPr lvl="1"/>
+            <a:r>
+              <a:rPr lang="en-US" sz="2400" dirty="0"/>
+              <a:t>Application </a:t>
+            </a:r>
+            <a:r>
+              <a:rPr lang="en-US" sz="2400" dirty="0" smtClean="0"/>
+              <a:t>Server providing services such as:</a:t>
+            </a:r>
+          </a:p>
+          <a:p>
+            <a:pPr lvl="2"/>
+            <a:r>
+              <a:rPr lang="en-US" sz="2000" dirty="0" smtClean="0"/>
+              <a:t>IPTV Video Solutions</a:t>
+            </a:r>
+          </a:p>
+          <a:p>
+            <a:pPr lvl="2"/>
+            <a:r>
+              <a:rPr lang="en-US" sz="2000" dirty="0" smtClean="0"/>
+              <a:t>Unified Messaging</a:t>
+            </a:r>
+          </a:p>
+          <a:p>
+            <a:pPr lvl="2"/>
+            <a:r>
+              <a:rPr lang="en-US" sz="2000" dirty="0" smtClean="0"/>
+              <a:t>Single Number Service</a:t>
+            </a:r>
+          </a:p>
+          <a:p>
+            <a:r>
+              <a:rPr lang="en-US" dirty="0" smtClean="0"/>
+              <a:t>STB</a:t>
+            </a:r>
+          </a:p>
+          <a:p>
+            <a:pPr lvl="1"/>
+            <a:r>
+              <a:rPr lang="en-US" dirty="0" smtClean="0"/>
+              <a:t>Set-top-box providing television and integrated telephony applications</a:t>
+            </a:r>
+            <a:endParaRPr lang="en-US" dirty="0"/>
+          </a:p>
+        </p:txBody>
+      </p:sp>
+    </p:spTree>
+    <p:extLst>
+      <p:ext uri="{BB962C8B-B14F-4D97-AF65-F5344CB8AC3E}">
+        <p14:creationId xmlns:p14="http://schemas.microsoft.com/office/powerpoint/2010/main" val="2493944366"/>
+      </p:ext>
+    </p:extLst>
+  </p:cSld>
+  <p:clrMapOvr>
+    <a:masterClrMapping/>
+  </p:clrMapOvr>
+</p:sld>
+</file>
+
+<file path=ppt/slides/slide3.xml><?xml version="1.0" encoding="utf-8"?>
+<p:sld xmlns:a="http://schemas.openxmlformats.org/drawingml/2006/main" xmlns:r="http://schemas.openxmlformats.org/officeDocument/2006/relationships" xmlns:p="http://schemas.openxmlformats.org/presentationml/2006/main">
+  <p:cSld>
+    <p:spTree>
+      <p:nvGrpSpPr>
+        <p:cNvPr id="1" name=""/>
+        <p:cNvGrpSpPr/>
+        <p:nvPr/>
+      </p:nvGrpSpPr>
+      <p:grpSpPr>
+        <a:xfrm>
+          <a:off x="0" y="0"/>
+          <a:ext cx="0" cy="0"/>
+          <a:chOff x="0" y="0"/>
+          <a:chExt cx="0" cy="0"/>
+        </a:xfrm>
+      </p:grpSpPr>
+      <p:sp>
+        <p:nvSpPr>
+          <p:cNvPr id="2" name="Title 1"/>
+          <p:cNvSpPr>
+            <a:spLocks noGrp="1"/>
+          </p:cNvSpPr>
+          <p:nvPr>
+            <p:ph type="title"/>
+          </p:nvPr>
+        </p:nvSpPr>
+        <p:spPr/>
+        <p:txBody>
+          <a:bodyPr/>
+          <a:lstStyle/>
+          <a:p>
+            <a:r>
+              <a:rPr lang="en-US" dirty="0" smtClean="0"/>
+              <a:t>Project</a:t>
+            </a:r>
+            <a:endParaRPr lang="en-US" dirty="0"/>
+          </a:p>
+        </p:txBody>
+      </p:sp>
+      <p:sp>
+        <p:nvSpPr>
+          <p:cNvPr id="3" name="Content Placeholder 2"/>
+          <p:cNvSpPr>
+            <a:spLocks noGrp="1"/>
+          </p:cNvSpPr>
+          <p:nvPr>
+            <p:ph idx="1"/>
+          </p:nvPr>
+        </p:nvSpPr>
+        <p:spPr/>
+        <p:txBody>
+          <a:bodyPr/>
+          <a:lstStyle/>
+          <a:p>
+            <a:r>
+              <a:rPr lang="en-US" dirty="0" smtClean="0"/>
+              <a:t>Create a server to host STB multiplayer game plugins</a:t>
+            </a:r>
+          </a:p>
+          <a:p>
+            <a:r>
+              <a:rPr lang="en-US" dirty="0" smtClean="0"/>
+              <a:t>Design a template game UI for STBs in an APMAX environment</a:t>
+            </a:r>
+          </a:p>
+          <a:p>
+            <a:r>
+              <a:rPr lang="en-US" dirty="0" smtClean="0"/>
+              <a:t>Build a virtual APMAX to simulate future communication protocols.</a:t>
+            </a:r>
+          </a:p>
+          <a:p>
+            <a:r>
+              <a:rPr lang="en-US" dirty="0" smtClean="0"/>
+              <a:t>Convert games to proof-of-concept multiplayer games.</a:t>
+            </a:r>
+          </a:p>
+          <a:p>
+            <a:pPr marL="0" indent="0">
+              <a:buNone/>
+            </a:pPr>
+            <a:endParaRPr lang="en-US" dirty="0"/>
+          </a:p>
+        </p:txBody>
+      </p:sp>
+    </p:spTree>
+    <p:extLst>
+      <p:ext uri="{BB962C8B-B14F-4D97-AF65-F5344CB8AC3E}">
+        <p14:creationId xmlns:p14="http://schemas.microsoft.com/office/powerpoint/2010/main" val="1517087465"/>
+      </p:ext>
+    </p:extLst>
+  </p:cSld>
+  <p:clrMapOvr>
+    <a:masterClrMapping/>
+  </p:clrMapOvr>
+</p:sld>
+</file>
+
+<file path=ppt/slides/slide4.xml><?xml version="1.0" encoding="utf-8"?>
+<p:sld xmlns:a="http://schemas.openxmlformats.org/drawingml/2006/main" xmlns:r="http://schemas.openxmlformats.org/officeDocument/2006/relationships" xmlns:p="http://schemas.openxmlformats.org/presentationml/2006/main">
+  <p:cSld>
+    <p:spTree>
+      <p:nvGrpSpPr>
+        <p:cNvPr id="1" name=""/>
+        <p:cNvGrpSpPr/>
+        <p:nvPr/>
+      </p:nvGrpSpPr>
+      <p:grpSpPr>
+        <a:xfrm>
+          <a:off x="0" y="0"/>
+          <a:ext cx="0" cy="0"/>
+          <a:chOff x="0" y="0"/>
+          <a:chExt cx="0" cy="0"/>
+        </a:xfrm>
+      </p:grpSpPr>
+      <p:sp>
+        <p:nvSpPr>
+          <p:cNvPr id="2" name="Title 1"/>
+          <p:cNvSpPr>
+            <a:spLocks noGrp="1"/>
+          </p:cNvSpPr>
+          <p:nvPr>
+            <p:ph type="title"/>
+          </p:nvPr>
+        </p:nvSpPr>
+        <p:spPr/>
+        <p:txBody>
+          <a:bodyPr/>
+          <a:lstStyle/>
+          <a:p>
+            <a:r>
+              <a:rPr lang="en-US" dirty="0" smtClean="0"/>
+              <a:t>Sprint Review</a:t>
+            </a:r>
+            <a:endParaRPr lang="en-US" dirty="0"/>
+          </a:p>
+        </p:txBody>
+      </p:sp>
+      <p:sp>
+        <p:nvSpPr>
+          <p:cNvPr id="3" name="Content Placeholder 2"/>
+          <p:cNvSpPr>
+            <a:spLocks noGrp="1"/>
+          </p:cNvSpPr>
+          <p:nvPr>
+            <p:ph idx="1"/>
+          </p:nvPr>
+        </p:nvSpPr>
+        <p:spPr/>
+        <p:txBody>
+          <a:bodyPr>
+            <a:normAutofit lnSpcReduction="10000"/>
+          </a:bodyPr>
+          <a:lstStyle/>
+          <a:p>
+            <a:r>
+              <a:rPr lang="en-US" dirty="0" smtClean="0"/>
+              <a:t>Sprint #1</a:t>
+            </a:r>
+          </a:p>
+          <a:p>
+            <a:pPr lvl="1"/>
+            <a:r>
+              <a:rPr lang="en-US" sz="2400" dirty="0" smtClean="0"/>
+              <a:t>Initial design of STBMF system</a:t>
+            </a:r>
+          </a:p>
+          <a:p>
+            <a:pPr lvl="1"/>
+            <a:r>
+              <a:rPr lang="en-US" sz="2400" dirty="0" smtClean="0"/>
+              <a:t>Learn current Innovative System network communications</a:t>
+            </a:r>
+          </a:p>
+          <a:p>
+            <a:r>
+              <a:rPr lang="en-US" dirty="0" smtClean="0"/>
+              <a:t>Sprint #2</a:t>
+            </a:r>
+          </a:p>
+          <a:p>
+            <a:pPr lvl="1"/>
+            <a:r>
+              <a:rPr lang="en-US" sz="2400" dirty="0" smtClean="0"/>
+              <a:t>Refined prototypes of STBMF System (</a:t>
+            </a:r>
+            <a:r>
+              <a:rPr lang="en-US" sz="2400" dirty="0" err="1" smtClean="0"/>
+              <a:t>vSTB</a:t>
+            </a:r>
+            <a:r>
+              <a:rPr lang="en-US" sz="2400" dirty="0" smtClean="0"/>
+              <a:t>, </a:t>
+            </a:r>
+            <a:r>
+              <a:rPr lang="en-US" sz="2400" dirty="0" err="1" smtClean="0"/>
+              <a:t>vAPMAX</a:t>
+            </a:r>
+            <a:r>
+              <a:rPr lang="en-US" sz="2400" dirty="0" smtClean="0"/>
+              <a:t>, Game Server) </a:t>
+            </a:r>
+          </a:p>
+          <a:p>
+            <a:pPr lvl="1"/>
+            <a:r>
+              <a:rPr lang="en-US" sz="2400" dirty="0" smtClean="0"/>
+              <a:t>Designed communication definitions for STBMF</a:t>
+            </a:r>
+            <a:endParaRPr lang="en-US" sz="2400" dirty="0"/>
+          </a:p>
+          <a:p>
+            <a:r>
+              <a:rPr lang="en-US" dirty="0" smtClean="0"/>
+              <a:t>Sprint #3</a:t>
+            </a:r>
+          </a:p>
+          <a:p>
+            <a:pPr lvl="1"/>
+            <a:r>
+              <a:rPr lang="en-US" sz="2400" dirty="0" smtClean="0"/>
+              <a:t>Implemented prototypes to test designed communication definitions</a:t>
+            </a:r>
+          </a:p>
+          <a:p>
+            <a:pPr lvl="1"/>
+            <a:endParaRPr lang="en-US" dirty="0" smtClean="0"/>
+          </a:p>
+        </p:txBody>
+      </p:sp>
+    </p:spTree>
+    <p:extLst>
+      <p:ext uri="{BB962C8B-B14F-4D97-AF65-F5344CB8AC3E}">
+        <p14:creationId xmlns:p14="http://schemas.microsoft.com/office/powerpoint/2010/main" val="3876032928"/>
+      </p:ext>
+    </p:extLst>
+  </p:cSld>
+  <p:clrMapOvr>
+    <a:masterClrMapping/>
+  </p:clrMapOvr>
+</p:sld>
+</file>
+
+<file path=ppt/slides/slide5.xml><?xml version="1.0" encoding="utf-8"?>
+<p:sld xmlns:a="http://schemas.openxmlformats.org/drawingml/2006/main" xmlns:r="http://schemas.openxmlformats.org/officeDocument/2006/relationships" xmlns:p="http://schemas.openxmlformats.org/presentationml/2006/main">
+  <p:cSld>
+    <p:spTree>
+      <p:nvGrpSpPr>
+        <p:cNvPr id="1" name=""/>
+        <p:cNvGrpSpPr/>
+        <p:nvPr/>
+      </p:nvGrpSpPr>
+      <p:grpSpPr>
+        <a:xfrm>
+          <a:off x="0" y="0"/>
+          <a:ext cx="0" cy="0"/>
+          <a:chOff x="0" y="0"/>
+          <a:chExt cx="0" cy="0"/>
+        </a:xfrm>
+      </p:grpSpPr>
+      <p:sp>
+        <p:nvSpPr>
+          <p:cNvPr id="2" name="Title 1"/>
+          <p:cNvSpPr>
+            <a:spLocks noGrp="1"/>
+          </p:cNvSpPr>
+          <p:nvPr>
+            <p:ph type="title"/>
+          </p:nvPr>
+        </p:nvSpPr>
+        <p:spPr/>
+        <p:txBody>
+          <a:bodyPr/>
+          <a:lstStyle/>
+          <a:p>
+            <a:r>
+              <a:rPr lang="en-US" dirty="0" smtClean="0"/>
+              <a:t>System Design</a:t>
+            </a:r>
+            <a:endParaRPr lang="en-US" dirty="0"/>
+          </a:p>
+        </p:txBody>
+      </p:sp>
+      <p:sp>
+        <p:nvSpPr>
+          <p:cNvPr id="3" name="Content Placeholder 2"/>
+          <p:cNvSpPr>
+            <a:spLocks noGrp="1"/>
+          </p:cNvSpPr>
+          <p:nvPr>
+            <p:ph idx="1"/>
+          </p:nvPr>
+        </p:nvSpPr>
+        <p:spPr/>
+        <p:txBody>
+          <a:bodyPr/>
+          <a:lstStyle/>
+          <a:p>
+            <a:r>
+              <a:rPr lang="en-US" dirty="0" smtClean="0"/>
+              <a:t>3 Major Components:</a:t>
+            </a:r>
+          </a:p>
+          <a:p>
+            <a:pPr lvl="1"/>
+            <a:r>
+              <a:rPr lang="en-US" dirty="0" err="1" smtClean="0"/>
+              <a:t>vSTB</a:t>
+            </a:r>
+            <a:endParaRPr lang="en-US" dirty="0" smtClean="0"/>
+          </a:p>
+          <a:p>
+            <a:pPr lvl="1"/>
+            <a:r>
+              <a:rPr lang="en-US" dirty="0" err="1" smtClean="0"/>
+              <a:t>vAPMAX</a:t>
+            </a:r>
+            <a:endParaRPr lang="en-US" dirty="0" smtClean="0"/>
+          </a:p>
+          <a:p>
+            <a:pPr lvl="1"/>
+            <a:r>
+              <a:rPr lang="en-US" dirty="0" smtClean="0"/>
+              <a:t>Game Server</a:t>
+            </a:r>
+          </a:p>
+          <a:p>
+            <a:r>
+              <a:rPr lang="en-US" dirty="0" smtClean="0"/>
+              <a:t>Communication:</a:t>
+            </a:r>
+          </a:p>
+          <a:p>
+            <a:pPr lvl="1"/>
+            <a:r>
+              <a:rPr lang="en-US" dirty="0" smtClean="0"/>
+              <a:t>UDP</a:t>
+            </a:r>
+          </a:p>
+          <a:p>
+            <a:pPr lvl="1"/>
+            <a:r>
+              <a:rPr lang="en-US" dirty="0" smtClean="0"/>
+              <a:t>TCP</a:t>
+            </a:r>
+          </a:p>
+        </p:txBody>
+      </p:sp>
+    </p:spTree>
+    <p:extLst>
+      <p:ext uri="{BB962C8B-B14F-4D97-AF65-F5344CB8AC3E}">
+        <p14:creationId xmlns:p14="http://schemas.microsoft.com/office/powerpoint/2010/main" val="3216653805"/>
+      </p:ext>
+    </p:extLst>
+  </p:cSld>
+  <p:clrMapOvr>
+    <a:masterClrMapping/>
+  </p:clrMapOvr>
+</p:sld>
+</file>
+
+<file path=ppt/slides/slide6.xml><?xml version="1.0" encoding="utf-8"?>
+<p:sld xmlns:a="http://schemas.openxmlformats.org/drawingml/2006/main" xmlns:r="http://schemas.openxmlformats.org/officeDocument/2006/relationships" xmlns:p="http://schemas.openxmlformats.org/presentationml/2006/main">
+  <p:cSld>
+    <p:spTree>
+      <p:nvGrpSpPr>
+        <p:cNvPr id="1" name=""/>
+        <p:cNvGrpSpPr/>
+        <p:nvPr/>
+      </p:nvGrpSpPr>
+      <p:grpSpPr>
+        <a:xfrm>
+          <a:off x="0" y="0"/>
+          <a:ext cx="0" cy="0"/>
+          <a:chOff x="0" y="0"/>
+          <a:chExt cx="0" cy="0"/>
+        </a:xfrm>
+      </p:grpSpPr>
+      <p:sp>
+        <p:nvSpPr>
+          <p:cNvPr id="2" name="Title 1"/>
+          <p:cNvSpPr>
+            <a:spLocks noGrp="1"/>
+          </p:cNvSpPr>
+          <p:nvPr>
+            <p:ph type="title"/>
+          </p:nvPr>
+        </p:nvSpPr>
+        <p:spPr/>
+        <p:txBody>
+          <a:bodyPr/>
+          <a:lstStyle/>
+          <a:p>
+            <a:r>
+              <a:rPr lang="en-US" dirty="0" smtClean="0"/>
+              <a:t>Prototypes</a:t>
+            </a:r>
+            <a:endParaRPr lang="en-US" dirty="0"/>
+          </a:p>
+        </p:txBody>
+      </p:sp>
+      <p:sp>
+        <p:nvSpPr>
+          <p:cNvPr id="3" name="Content Placeholder 2"/>
+          <p:cNvSpPr>
+            <a:spLocks noGrp="1"/>
+          </p:cNvSpPr>
+          <p:nvPr>
+            <p:ph idx="1"/>
+          </p:nvPr>
+        </p:nvSpPr>
+        <p:spPr>
+          <a:xfrm>
+            <a:off x="457200" y="1600200"/>
+            <a:ext cx="8229600" cy="4525963"/>
+          </a:xfrm>
+        </p:spPr>
+        <p:txBody>
+          <a:bodyPr/>
+          <a:lstStyle/>
+          <a:p>
+            <a:pPr lvl="1"/>
+            <a:r>
+              <a:rPr lang="en-US" dirty="0" err="1" smtClean="0"/>
+              <a:t>vSTB</a:t>
+            </a:r>
+            <a:endParaRPr lang="en-US" dirty="0" smtClean="0"/>
+          </a:p>
+          <a:p>
+            <a:pPr lvl="2"/>
+            <a:r>
+              <a:rPr lang="en-US" dirty="0" smtClean="0"/>
+              <a:t>Scalable module to handle game environment request/response from user</a:t>
+            </a:r>
+          </a:p>
+          <a:p>
+            <a:pPr lvl="1"/>
+            <a:r>
+              <a:rPr lang="en-US" dirty="0" err="1" smtClean="0"/>
+              <a:t>vAPMAX</a:t>
+            </a:r>
+            <a:endParaRPr lang="en-US" dirty="0" smtClean="0"/>
+          </a:p>
+          <a:p>
+            <a:pPr lvl="2"/>
+            <a:r>
+              <a:rPr lang="en-US" dirty="0" smtClean="0"/>
+              <a:t>Message handler between </a:t>
+            </a:r>
+            <a:r>
+              <a:rPr lang="en-US" dirty="0" err="1" smtClean="0"/>
+              <a:t>vSTB</a:t>
+            </a:r>
+            <a:r>
+              <a:rPr lang="en-US" dirty="0" smtClean="0"/>
+              <a:t> and Game Server</a:t>
+            </a:r>
+          </a:p>
+          <a:p>
+            <a:pPr lvl="1"/>
+            <a:r>
+              <a:rPr lang="en-US" dirty="0" smtClean="0"/>
+              <a:t>Game Server</a:t>
+            </a:r>
+          </a:p>
+          <a:p>
+            <a:pPr lvl="2"/>
+            <a:r>
+              <a:rPr lang="en-US" dirty="0" smtClean="0"/>
+              <a:t>Process requests from/responses to users on vSTB</a:t>
+            </a:r>
+          </a:p>
+          <a:p>
+            <a:endParaRPr lang="en-US" dirty="0"/>
+          </a:p>
+        </p:txBody>
+      </p:sp>
+    </p:spTree>
+    <p:extLst>
+      <p:ext uri="{BB962C8B-B14F-4D97-AF65-F5344CB8AC3E}">
+        <p14:creationId xmlns:p14="http://schemas.microsoft.com/office/powerpoint/2010/main" val="1491991968"/>
+      </p:ext>
+    </p:extLst>
+  </p:cSld>
+  <p:clrMapOvr>
+    <a:masterClrMapping/>
+  </p:clrMapOvr>
+</p:sld>
+</file>
+
+<file path=ppt/slides/slide7.xml><?xml version="1.0" encoding="utf-8"?>
+<p:sld xmlns:a="http://schemas.openxmlformats.org/drawingml/2006/main" xmlns:r="http://schemas.openxmlformats.org/officeDocument/2006/relationships" xmlns:p="http://schemas.openxmlformats.org/presentationml/2006/main">
+  <p:cSld>
+    <p:spTree>
+      <p:nvGrpSpPr>
+        <p:cNvPr id="1" name=""/>
+        <p:cNvGrpSpPr/>
+        <p:nvPr/>
+      </p:nvGrpSpPr>
+      <p:grpSpPr>
+        <a:xfrm>
+          <a:off x="0" y="0"/>
+          <a:ext cx="0" cy="0"/>
+          <a:chOff x="0" y="0"/>
+          <a:chExt cx="0" cy="0"/>
+        </a:xfrm>
+      </p:grpSpPr>
+      <p:sp>
+        <p:nvSpPr>
+          <p:cNvPr id="2" name="Title 1"/>
+          <p:cNvSpPr>
+            <a:spLocks noGrp="1"/>
+          </p:cNvSpPr>
+          <p:nvPr>
+            <p:ph type="title"/>
+          </p:nvPr>
+        </p:nvSpPr>
+        <p:spPr/>
+        <p:txBody>
+          <a:bodyPr/>
+          <a:lstStyle/>
+          <a:p>
+            <a:r>
+              <a:rPr lang="en-US" dirty="0" err="1" smtClean="0"/>
+              <a:t>vSTB</a:t>
+            </a:r>
+            <a:endParaRPr lang="en-US" dirty="0"/>
+          </a:p>
+        </p:txBody>
+      </p:sp>
+      <p:sp>
+        <p:nvSpPr>
+          <p:cNvPr id="3" name="Content Placeholder 2"/>
+          <p:cNvSpPr>
+            <a:spLocks noGrp="1"/>
+          </p:cNvSpPr>
+          <p:nvPr>
+            <p:ph idx="1"/>
+          </p:nvPr>
+        </p:nvSpPr>
+        <p:spPr/>
+        <p:txBody>
+          <a:bodyPr/>
+          <a:lstStyle/>
+          <a:p>
+            <a:r>
+              <a:rPr lang="en-US" dirty="0" smtClean="0"/>
+              <a:t>New request response definitions</a:t>
+            </a:r>
+            <a:endParaRPr lang="en-US" dirty="0" smtClean="0"/>
+          </a:p>
+          <a:p>
+            <a:r>
+              <a:rPr lang="en-US" dirty="0" smtClean="0"/>
+              <a:t>Scalable</a:t>
+            </a:r>
+          </a:p>
+          <a:p>
+            <a:r>
+              <a:rPr lang="en-US" dirty="0" smtClean="0"/>
+              <a:t>Modular (</a:t>
+            </a:r>
+            <a:r>
+              <a:rPr lang="en-US" dirty="0" err="1" smtClean="0"/>
+              <a:t>vSTB</a:t>
+            </a:r>
+            <a:r>
+              <a:rPr lang="en-US" dirty="0" smtClean="0"/>
+              <a:t> Tester, </a:t>
+            </a:r>
+            <a:r>
+              <a:rPr lang="en-US" dirty="0" err="1" smtClean="0"/>
+              <a:t>vSTB</a:t>
+            </a:r>
+            <a:r>
+              <a:rPr lang="en-US" dirty="0" smtClean="0"/>
+              <a:t> Multiplayer)</a:t>
+            </a:r>
+            <a:endParaRPr lang="en-US" dirty="0" smtClean="0"/>
+          </a:p>
+          <a:p>
+            <a:r>
+              <a:rPr lang="en-US" dirty="0" smtClean="0"/>
+              <a:t>Platform independent</a:t>
+            </a:r>
+          </a:p>
+          <a:p>
+            <a:r>
+              <a:rPr lang="en-US" dirty="0" smtClean="0"/>
+              <a:t>Increased </a:t>
+            </a:r>
+            <a:r>
+              <a:rPr lang="en-US" dirty="0" smtClean="0"/>
+              <a:t>availability to Users</a:t>
+            </a:r>
+            <a:endParaRPr lang="en-US" dirty="0" smtClean="0"/>
+          </a:p>
+          <a:p>
+            <a:endParaRPr lang="en-US" dirty="0"/>
+          </a:p>
+        </p:txBody>
+      </p:sp>
+    </p:spTree>
+    <p:extLst>
+      <p:ext uri="{BB962C8B-B14F-4D97-AF65-F5344CB8AC3E}">
+        <p14:creationId xmlns:p14="http://schemas.microsoft.com/office/powerpoint/2010/main" val="2177279113"/>
+      </p:ext>
+    </p:extLst>
+  </p:cSld>
+  <p:clrMapOvr>
+    <a:masterClrMapping/>
+  </p:clrMapOvr>
+  <p:timing>
+    <p:tnLst>
+      <p:par>
+        <p:cTn id="1" dur="indefinite" restart="never" nodeType="tmRoot"/>
+      </p:par>
+    </p:tnLst>
+  </p:timing>
+</p:sld>
+</file>
+
+<file path=ppt/slides/slide8.xml><?xml version="1.0" encoding="utf-8"?>
+<p:sld xmlns:a="http://schemas.openxmlformats.org/drawingml/2006/main" xmlns:r="http://schemas.openxmlformats.org/officeDocument/2006/relationships" xmlns:p="http://schemas.openxmlformats.org/presentationml/2006/main">
+  <p:cSld>
+    <p:spTree>
+      <p:nvGrpSpPr>
+        <p:cNvPr id="1" name=""/>
+        <p:cNvGrpSpPr/>
+        <p:nvPr/>
+      </p:nvGrpSpPr>
+      <p:grpSpPr>
+        <a:xfrm>
+          <a:off x="0" y="0"/>
+          <a:ext cx="0" cy="0"/>
+          <a:chOff x="0" y="0"/>
+          <a:chExt cx="0" cy="0"/>
+        </a:xfrm>
+      </p:grpSpPr>
+      <p:sp>
+        <p:nvSpPr>
+          <p:cNvPr id="2" name="Title 1"/>
+          <p:cNvSpPr>
+            <a:spLocks noGrp="1"/>
+          </p:cNvSpPr>
+          <p:nvPr>
+            <p:ph type="title"/>
+          </p:nvPr>
+        </p:nvSpPr>
+        <p:spPr/>
+        <p:txBody>
+          <a:bodyPr/>
+          <a:lstStyle/>
+          <a:p>
+            <a:r>
+              <a:rPr lang="en-US" dirty="0" err="1" smtClean="0"/>
+              <a:t>vSTB</a:t>
+            </a:r>
+            <a:r>
+              <a:rPr lang="en-US" dirty="0"/>
+              <a:t> </a:t>
+            </a:r>
+            <a:r>
+              <a:rPr lang="en-US" dirty="0" smtClean="0"/>
+              <a:t>Design</a:t>
+            </a:r>
+            <a:endParaRPr lang="en-US" dirty="0"/>
+          </a:p>
+        </p:txBody>
+      </p:sp>
+      <p:sp>
+        <p:nvSpPr>
+          <p:cNvPr id="4" name="TextBox 3"/>
+          <p:cNvSpPr txBox="1"/>
+          <p:nvPr/>
+        </p:nvSpPr>
+        <p:spPr>
+          <a:xfrm>
+            <a:off x="819150" y="4572000"/>
+            <a:ext cx="3448050" cy="1754326"/>
+          </a:xfrm>
+          <a:prstGeom prst="rect">
+            <a:avLst/>
+          </a:prstGeom>
+          <a:noFill/>
+        </p:spPr>
+        <p:txBody>
+          <a:bodyPr wrap="square" rtlCol="0">
+            <a:spAutoFit/>
+          </a:bodyPr>
+          <a:lstStyle/>
+          <a:p>
+            <a:r>
+              <a:rPr lang="en-US" u="sng" dirty="0" err="1" smtClean="0"/>
+              <a:t>vSTB</a:t>
+            </a:r>
+            <a:r>
+              <a:rPr lang="en-US" u="sng" dirty="0" smtClean="0"/>
+              <a:t> Tester</a:t>
+            </a:r>
+          </a:p>
+          <a:p>
+            <a:pPr marL="285750" indent="-285750">
+              <a:buFont typeface="Arial" pitchFamily="34" charset="0"/>
+              <a:buChar char="•"/>
+            </a:pPr>
+            <a:r>
+              <a:rPr lang="en-US" dirty="0" smtClean="0"/>
+              <a:t>Provides </a:t>
+            </a:r>
+            <a:r>
+              <a:rPr lang="en-US" dirty="0" err="1" smtClean="0"/>
+              <a:t>vAPMAX</a:t>
+            </a:r>
+            <a:r>
+              <a:rPr lang="en-US" dirty="0" smtClean="0"/>
+              <a:t> intuitive interface to test environment</a:t>
+            </a:r>
+          </a:p>
+          <a:p>
+            <a:pPr marL="285750" indent="-285750">
+              <a:buFont typeface="Arial" pitchFamily="34" charset="0"/>
+              <a:buChar char="•"/>
+            </a:pPr>
+            <a:r>
+              <a:rPr lang="en-US" dirty="0" smtClean="0"/>
+              <a:t>Provides Game Server a flexible tool to view deployed objects</a:t>
+            </a:r>
+          </a:p>
+          <a:p>
+            <a:pPr marL="285750" indent="-285750">
+              <a:buFont typeface="Arial" pitchFamily="34" charset="0"/>
+              <a:buChar char="•"/>
+            </a:pPr>
+            <a:endParaRPr lang="en-US" dirty="0"/>
+          </a:p>
+        </p:txBody>
+      </p:sp>
+      <p:sp>
+        <p:nvSpPr>
+          <p:cNvPr id="5" name="TextBox 4"/>
+          <p:cNvSpPr txBox="1"/>
+          <p:nvPr/>
+        </p:nvSpPr>
+        <p:spPr>
+          <a:xfrm>
+            <a:off x="4876800" y="4572000"/>
+            <a:ext cx="4114800" cy="1754326"/>
+          </a:xfrm>
+          <a:prstGeom prst="rect">
+            <a:avLst/>
+          </a:prstGeom>
+          <a:noFill/>
+        </p:spPr>
+        <p:txBody>
+          <a:bodyPr wrap="square" rtlCol="0">
+            <a:spAutoFit/>
+          </a:bodyPr>
+          <a:lstStyle/>
+          <a:p>
+            <a:r>
+              <a:rPr lang="en-US" u="sng" dirty="0" err="1" smtClean="0"/>
+              <a:t>vSTB</a:t>
+            </a:r>
+            <a:r>
+              <a:rPr lang="en-US" u="sng" dirty="0" smtClean="0"/>
+              <a:t> Multiplayer Environment</a:t>
+            </a:r>
+          </a:p>
+          <a:p>
+            <a:pPr marL="285750" indent="-285750">
+              <a:buFont typeface="Arial" pitchFamily="34" charset="0"/>
+              <a:buChar char="•"/>
+            </a:pPr>
+            <a:r>
+              <a:rPr lang="en-US" dirty="0" smtClean="0"/>
+              <a:t>Reduces current load on STB</a:t>
+            </a:r>
+          </a:p>
+          <a:p>
+            <a:pPr marL="285750" indent="-285750">
+              <a:buFont typeface="Arial" pitchFamily="34" charset="0"/>
+              <a:buChar char="•"/>
+            </a:pPr>
+            <a:r>
+              <a:rPr lang="en-US" dirty="0" smtClean="0"/>
+              <a:t>Framework provides foundation to add future features to meet demand of end user and technology</a:t>
+            </a:r>
+          </a:p>
+          <a:p>
+            <a:pPr marL="285750" indent="-285750">
+              <a:buFont typeface="Arial" pitchFamily="34" charset="0"/>
+              <a:buChar char="•"/>
+            </a:pPr>
+            <a:endParaRPr lang="en-US" dirty="0"/>
+          </a:p>
+        </p:txBody>
+      </p:sp>
+      <p:pic>
+        <p:nvPicPr>
+          <p:cNvPr id="2052" name="Picture 4"/>
+          <p:cNvPicPr>
+            <a:picLocks noChangeAspect="1" noChangeArrowheads="1"/>
+          </p:cNvPicPr>
+          <p:nvPr/>
+        </p:nvPicPr>
+        <p:blipFill>
+          <a:blip r:embed="rId2">
+            <a:extLst>
+              <a:ext uri="{28A0092B-C50C-407E-A947-70E740481C1C}">
+                <a14:useLocalDpi xmlns:a14="http://schemas.microsoft.com/office/drawing/2010/main" val="0"/>
+              </a:ext>
+            </a:extLst>
+          </a:blip>
+          <a:srcRect/>
+          <a:stretch>
+            <a:fillRect/>
+          </a:stretch>
+        </p:blipFill>
+        <p:spPr bwMode="auto">
+          <a:xfrm>
+            <a:off x="671513" y="1190625"/>
+            <a:ext cx="7800975" cy="3228975"/>
+          </a:xfrm>
+          <a:prstGeom prst="rect">
+            <a:avLst/>
+          </a:prstGeom>
+          <a:noFill/>
+          <a:ln>
+            <a:noFill/>
+          </a:ln>
+          <a:effectLst/>
+          <a:extLst>
+            <a:ext uri="{909E8E84-426E-40DD-AFC4-6F175D3DCCD1}">
+              <a14:hiddenFill xmlns:a14="http://schemas.microsoft.com/office/drawing/2010/main">
+                <a:solidFill>
+                  <a:schemeClr val="accent1"/>
+                </a:solidFill>
+              </a14:hiddenFill>
+            </a:ext>
+            <a:ext uri="{91240B29-F687-4F45-9708-019B960494DF}">
+              <a14:hiddenLine xmlns:a14="http://schemas.microsoft.com/office/drawing/2010/main" w="9525">
+                <a:solidFill>
+                  <a:schemeClr val="tx1"/>
+                </a:solidFill>
+                <a:miter lim="800000"/>
+                <a:headEnd/>
+                <a:tailEnd/>
+              </a14:hiddenLine>
+            </a:ext>
+            <a:ext uri="{AF507438-7753-43E0-B8FC-AC1667EBCBE1}">
+              <a14:hiddenEffects xmlns:a14="http://schemas.microsoft.com/office/drawing/2010/main">
+                <a:effectLst>
+                  <a:outerShdw dist="35921" dir="2700000" algn="ctr" rotWithShape="0">
+                    <a:schemeClr val="bg2"/>
+                  </a:outerShdw>
+                </a:effectLst>
+              </a14:hiddenEffects>
+            </a:ext>
+          </a:extLst>
+        </p:spPr>
+      </p:pic>
+    </p:spTree>
+    <p:extLst>
+      <p:ext uri="{BB962C8B-B14F-4D97-AF65-F5344CB8AC3E}">
+        <p14:creationId xmlns:p14="http://schemas.microsoft.com/office/powerpoint/2010/main" val="1660071136"/>
+      </p:ext>
+    </p:extLst>
+  </p:cSld>
+  <p:clrMapOvr>
+    <a:masterClrMapping/>
+  </p:clrMapOvr>
+  <p:timing>
+    <p:tnLst>
+      <p:par>
+        <p:cTn id="1" dur="indefinite" restart="never" nodeType="tmRoot"/>
+      </p:par>
+    </p:tnLst>
+  </p:timing>
+</p:sld>
+</file>
+
+<file path=ppt/slides/slide9.xml><?xml version="1.0" encoding="utf-8"?>
+<p:sld xmlns:a="http://schemas.openxmlformats.org/drawingml/2006/main" xmlns:r="http://schemas.openxmlformats.org/officeDocument/2006/relationships" xmlns:p="http://schemas.openxmlformats.org/presentationml/2006/main">
+  <p:cSld>
+    <p:spTree>
+      <p:nvGrpSpPr>
+        <p:cNvPr id="1" name=""/>
+        <p:cNvGrpSpPr/>
+        <p:nvPr/>
+      </p:nvGrpSpPr>
+      <p:grpSpPr>
+        <a:xfrm>
+          <a:off x="0" y="0"/>
+          <a:ext cx="0" cy="0"/>
+          <a:chOff x="0" y="0"/>
+          <a:chExt cx="0" cy="0"/>
+        </a:xfrm>
+      </p:grpSpPr>
+      <p:sp>
+        <p:nvSpPr>
+          <p:cNvPr id="2" name="Title 1"/>
+          <p:cNvSpPr>
+            <a:spLocks noGrp="1"/>
+          </p:cNvSpPr>
+          <p:nvPr>
+            <p:ph type="title"/>
+          </p:nvPr>
+        </p:nvSpPr>
+        <p:spPr>
+          <a:xfrm>
+            <a:off x="457200" y="0"/>
+            <a:ext cx="8229600" cy="1143000"/>
+          </a:xfrm>
+        </p:spPr>
+        <p:txBody>
+          <a:bodyPr/>
+          <a:lstStyle/>
+          <a:p>
+            <a:r>
+              <a:rPr lang="en-US" dirty="0" smtClean="0"/>
+              <a:t>Current STB Game Architecture</a:t>
+            </a:r>
+            <a:endParaRPr lang="en-US" dirty="0"/>
+          </a:p>
+        </p:txBody>
+      </p:sp>
+      <p:pic>
+        <p:nvPicPr>
+          <p:cNvPr id="1029" name="Picture 5"/>
+          <p:cNvPicPr>
+            <a:picLocks noChangeAspect="1" noChangeArrowheads="1"/>
+          </p:cNvPicPr>
+          <p:nvPr/>
+        </p:nvPicPr>
+        <p:blipFill>
+          <a:blip r:embed="rId2">
+            <a:extLst>
+              <a:ext uri="{28A0092B-C50C-407E-A947-70E740481C1C}">
+                <a14:useLocalDpi xmlns:a14="http://schemas.microsoft.com/office/drawing/2010/main" val="0"/>
+              </a:ext>
+            </a:extLst>
+          </a:blip>
+          <a:srcRect/>
+          <a:stretch>
+            <a:fillRect/>
+          </a:stretch>
+        </p:blipFill>
+        <p:spPr bwMode="auto">
+          <a:xfrm>
+            <a:off x="1676400" y="990600"/>
+            <a:ext cx="5165725" cy="5675313"/>
+          </a:xfrm>
+          <a:prstGeom prst="rect">
+            <a:avLst/>
+          </a:prstGeom>
+          <a:noFill/>
+          <a:ln>
+            <a:noFill/>
+          </a:ln>
+          <a:effectLst/>
+          <a:extLst>
+            <a:ext uri="{909E8E84-426E-40DD-AFC4-6F175D3DCCD1}">
+              <a14:hiddenFill xmlns:a14="http://schemas.microsoft.com/office/drawing/2010/main">
+                <a:solidFill>
+                  <a:schemeClr val="accent1"/>
+                </a:solidFill>
+              </a14:hiddenFill>
+            </a:ext>
+            <a:ext uri="{91240B29-F687-4F45-9708-019B960494DF}">
+              <a14:hiddenLine xmlns:a14="http://schemas.microsoft.com/office/drawing/2010/main" w="9525">
+                <a:solidFill>
+                  <a:schemeClr val="tx1"/>
+                </a:solidFill>
+                <a:miter lim="800000"/>
+                <a:headEnd/>
+                <a:tailEnd/>
+              </a14:hiddenLine>
+            </a:ext>
+            <a:ext uri="{AF507438-7753-43E0-B8FC-AC1667EBCBE1}">
+              <a14:hiddenEffects xmlns:a14="http://schemas.microsoft.com/office/drawing/2010/main">
+                <a:effectLst>
+                  <a:outerShdw dist="35921" dir="2700000" algn="ctr" rotWithShape="0">
+                    <a:schemeClr val="bg2"/>
+                  </a:outerShdw>
+                </a:effectLst>
+              </a14:hiddenEffects>
+            </a:ext>
+          </a:extLst>
+        </p:spPr>
+      </p:pic>
+      <p:sp>
+        <p:nvSpPr>
+          <p:cNvPr id="6" name="Rectangle 5"/>
+          <p:cNvSpPr/>
+          <p:nvPr/>
+        </p:nvSpPr>
+        <p:spPr>
+          <a:xfrm>
+            <a:off x="2057400" y="5791200"/>
+            <a:ext cx="5029200" cy="990600"/>
+          </a:xfrm>
+          <a:prstGeom prst="rect">
+            <a:avLst/>
+          </a:prstGeom>
+          <a:noFill/>
+          <a:ln>
+            <a:solidFill>
+              <a:srgbClr val="FF0000"/>
+            </a:solidFill>
+          </a:ln>
+        </p:spPr>
+        <p:style>
+          <a:lnRef idx="2">
+            <a:schemeClr val="accent1">
+              <a:shade val="50000"/>
+            </a:schemeClr>
+          </a:lnRef>
+          <a:fillRef idx="1">
+            <a:schemeClr val="accent1"/>
+          </a:fillRef>
+          <a:effectRef idx="0">
+            <a:schemeClr val="accent1"/>
+          </a:effectRef>
+          <a:fontRef idx="minor">
+            <a:schemeClr val="lt1"/>
+          </a:fontRef>
+        </p:style>
+        <p:txBody>
+          <a:bodyPr rtlCol="0" anchor="ctr"/>
+          <a:lstStyle/>
+          <a:p>
+            <a:pPr algn="ctr"/>
+            <a:endParaRPr lang="en-US">
+              <a:solidFill>
+                <a:srgbClr val="FF0000"/>
+              </a:solidFill>
+            </a:endParaRPr>
+          </a:p>
+        </p:txBody>
+      </p:sp>
+      <p:sp>
+        <p:nvSpPr>
+          <p:cNvPr id="7" name="TextBox 6"/>
+          <p:cNvSpPr txBox="1"/>
+          <p:nvPr/>
+        </p:nvSpPr>
+        <p:spPr>
+          <a:xfrm>
+            <a:off x="7086600" y="3429000"/>
+            <a:ext cx="1752600" cy="1200329"/>
+          </a:xfrm>
+          <a:prstGeom prst="rect">
+            <a:avLst/>
+          </a:prstGeom>
+          <a:noFill/>
+          <a:ln>
+            <a:solidFill>
+              <a:srgbClr val="FF0000"/>
+            </a:solidFill>
+          </a:ln>
+        </p:spPr>
+        <p:txBody>
+          <a:bodyPr wrap="square" rtlCol="0">
+            <a:spAutoFit/>
+          </a:bodyPr>
+          <a:lstStyle/>
+          <a:p>
+            <a:pPr algn="ctr"/>
+            <a:r>
+              <a:rPr lang="en-US" dirty="0" err="1" smtClean="0"/>
+              <a:t>vSTB</a:t>
+            </a:r>
+            <a:r>
+              <a:rPr lang="en-US" dirty="0" smtClean="0"/>
+              <a:t> removes current load to be stored on Game Server</a:t>
+            </a:r>
+            <a:endParaRPr lang="en-US" dirty="0"/>
+          </a:p>
+        </p:txBody>
+      </p:sp>
+      <p:cxnSp>
+        <p:nvCxnSpPr>
+          <p:cNvPr id="9" name="Straight Arrow Connector 8"/>
+          <p:cNvCxnSpPr>
+            <a:stCxn id="7" idx="2"/>
+          </p:cNvCxnSpPr>
+          <p:nvPr/>
+        </p:nvCxnSpPr>
+        <p:spPr>
+          <a:xfrm flipH="1">
+            <a:off x="7086600" y="4629329"/>
+            <a:ext cx="876300" cy="1161871"/>
+          </a:xfrm>
+          <a:prstGeom prst="straightConnector1">
+            <a:avLst/>
+          </a:prstGeom>
+          <a:ln>
+            <a:solidFill>
+              <a:srgbClr val="FF0000"/>
+            </a:solidFill>
+            <a:tailEnd type="arrow"/>
+          </a:ln>
+        </p:spPr>
+        <p:style>
+          <a:lnRef idx="1">
+            <a:schemeClr val="accent1"/>
+          </a:lnRef>
+          <a:fillRef idx="0">
+            <a:schemeClr val="accent1"/>
+          </a:fillRef>
+          <a:effectRef idx="0">
+            <a:schemeClr val="accent1"/>
+          </a:effectRef>
+          <a:fontRef idx="minor">
+            <a:schemeClr val="tx1"/>
+          </a:fontRef>
+        </p:style>
+      </p:cxnSp>
+    </p:spTree>
+    <p:extLst>
+      <p:ext uri="{BB962C8B-B14F-4D97-AF65-F5344CB8AC3E}">
+        <p14:creationId xmlns:p14="http://schemas.microsoft.com/office/powerpoint/2010/main" val="2184670609"/>
+      </p:ext>
+    </p:extLst>
+  </p:cSld>
+  <p:clrMapOvr>
+    <a:masterClrMapping/>
+  </p:clrMapOvr>
+  <p:timing>
+    <p:tnLst>
+      <p:par>
+        <p:cTn id="1" dur="indefinite" restart="never" nodeType="tmRoot"/>
+      </p:par>
+    </p:tnLst>
+  </p:timing>
 </p:sld>
 </file>
 

--- a/docs/srDesign_ClientPresentation2.pptx
+++ b/docs/srDesign_ClientPresentation2.pptx
@@ -4,6 +4,9 @@
   <p:sldMasterIdLst>
     <p:sldMasterId id="2147483648" r:id="rId1"/>
   </p:sldMasterIdLst>
+  <p:notesMasterIdLst>
+    <p:notesMasterId r:id="rId18"/>
+  </p:notesMasterIdLst>
   <p:sldIdLst>
     <p:sldId id="256" r:id="rId2"/>
     <p:sldId id="257" r:id="rId3"/>
@@ -16,10 +19,11 @@
     <p:sldId id="270" r:id="rId10"/>
     <p:sldId id="272" r:id="rId11"/>
     <p:sldId id="265" r:id="rId12"/>
-    <p:sldId id="266" r:id="rId13"/>
-    <p:sldId id="267" r:id="rId14"/>
-    <p:sldId id="269" r:id="rId15"/>
-    <p:sldId id="268" r:id="rId16"/>
+    <p:sldId id="273" r:id="rId13"/>
+    <p:sldId id="266" r:id="rId14"/>
+    <p:sldId id="267" r:id="rId15"/>
+    <p:sldId id="269" r:id="rId16"/>
+    <p:sldId id="268" r:id="rId17"/>
   </p:sldIdLst>
   <p:sldSz cx="9144000" cy="6858000" type="screen4x3"/>
   <p:notesSz cx="6858000" cy="9144000"/>
@@ -119,6 +123,1236 @@
     </a:lvl9pPr>
   </p:defaultTextStyle>
 </p:presentation>
+</file>
+
+<file path=ppt/notesMasters/notesMaster1.xml><?xml version="1.0" encoding="utf-8"?>
+<p:notesMaster xmlns:a="http://schemas.openxmlformats.org/drawingml/2006/main" xmlns:r="http://schemas.openxmlformats.org/officeDocument/2006/relationships" xmlns:p="http://schemas.openxmlformats.org/presentationml/2006/main">
+  <p:cSld>
+    <p:bg>
+      <p:bgRef idx="1001">
+        <a:schemeClr val="bg1"/>
+      </p:bgRef>
+    </p:bg>
+    <p:spTree>
+      <p:nvGrpSpPr>
+        <p:cNvPr id="1" name=""/>
+        <p:cNvGrpSpPr/>
+        <p:nvPr/>
+      </p:nvGrpSpPr>
+      <p:grpSpPr>
+        <a:xfrm>
+          <a:off x="0" y="0"/>
+          <a:ext cx="0" cy="0"/>
+          <a:chOff x="0" y="0"/>
+          <a:chExt cx="0" cy="0"/>
+        </a:xfrm>
+      </p:grpSpPr>
+      <p:sp>
+        <p:nvSpPr>
+          <p:cNvPr id="2" name="Header Placeholder 1"/>
+          <p:cNvSpPr>
+            <a:spLocks noGrp="1"/>
+          </p:cNvSpPr>
+          <p:nvPr>
+            <p:ph type="hdr" sz="quarter"/>
+          </p:nvPr>
+        </p:nvSpPr>
+        <p:spPr>
+          <a:xfrm>
+            <a:off x="0" y="0"/>
+            <a:ext cx="2971800" cy="457200"/>
+          </a:xfrm>
+          <a:prstGeom prst="rect">
+            <a:avLst/>
+          </a:prstGeom>
+        </p:spPr>
+        <p:txBody>
+          <a:bodyPr vert="horz" lIns="91440" tIns="45720" rIns="91440" bIns="45720" rtlCol="0"/>
+          <a:lstStyle>
+            <a:lvl1pPr algn="l">
+              <a:defRPr sz="1200"/>
+            </a:lvl1pPr>
+          </a:lstStyle>
+          <a:p>
+            <a:endParaRPr lang="en-US"/>
+          </a:p>
+        </p:txBody>
+      </p:sp>
+      <p:sp>
+        <p:nvSpPr>
+          <p:cNvPr id="3" name="Date Placeholder 2"/>
+          <p:cNvSpPr>
+            <a:spLocks noGrp="1"/>
+          </p:cNvSpPr>
+          <p:nvPr>
+            <p:ph type="dt" idx="1"/>
+          </p:nvPr>
+        </p:nvSpPr>
+        <p:spPr>
+          <a:xfrm>
+            <a:off x="3884613" y="0"/>
+            <a:ext cx="2971800" cy="457200"/>
+          </a:xfrm>
+          <a:prstGeom prst="rect">
+            <a:avLst/>
+          </a:prstGeom>
+        </p:spPr>
+        <p:txBody>
+          <a:bodyPr vert="horz" lIns="91440" tIns="45720" rIns="91440" bIns="45720" rtlCol="0"/>
+          <a:lstStyle>
+            <a:lvl1pPr algn="r">
+              <a:defRPr sz="1200"/>
+            </a:lvl1pPr>
+          </a:lstStyle>
+          <a:p>
+            <a:fld id="{3E1C3486-C119-448E-A265-041371F09A66}" type="datetimeFigureOut">
+              <a:rPr lang="en-US" smtClean="0"/>
+              <a:t>12/6/2012</a:t>
+            </a:fld>
+            <a:endParaRPr lang="en-US"/>
+          </a:p>
+        </p:txBody>
+      </p:sp>
+      <p:sp>
+        <p:nvSpPr>
+          <p:cNvPr id="4" name="Slide Image Placeholder 3"/>
+          <p:cNvSpPr>
+            <a:spLocks noGrp="1" noRot="1" noChangeAspect="1"/>
+          </p:cNvSpPr>
+          <p:nvPr>
+            <p:ph type="sldImg" idx="2"/>
+          </p:nvPr>
+        </p:nvSpPr>
+        <p:spPr>
+          <a:xfrm>
+            <a:off x="1143000" y="685800"/>
+            <a:ext cx="4572000" cy="3429000"/>
+          </a:xfrm>
+          <a:prstGeom prst="rect">
+            <a:avLst/>
+          </a:prstGeom>
+          <a:noFill/>
+          <a:ln w="12700">
+            <a:solidFill>
+              <a:prstClr val="black"/>
+            </a:solidFill>
+          </a:ln>
+        </p:spPr>
+        <p:txBody>
+          <a:bodyPr vert="horz" lIns="91440" tIns="45720" rIns="91440" bIns="45720" rtlCol="0" anchor="ctr"/>
+          <a:lstStyle/>
+          <a:p>
+            <a:endParaRPr lang="en-US"/>
+          </a:p>
+        </p:txBody>
+      </p:sp>
+      <p:sp>
+        <p:nvSpPr>
+          <p:cNvPr id="5" name="Notes Placeholder 4"/>
+          <p:cNvSpPr>
+            <a:spLocks noGrp="1"/>
+          </p:cNvSpPr>
+          <p:nvPr>
+            <p:ph type="body" sz="quarter" idx="3"/>
+          </p:nvPr>
+        </p:nvSpPr>
+        <p:spPr>
+          <a:xfrm>
+            <a:off x="685800" y="4343400"/>
+            <a:ext cx="5486400" cy="4114800"/>
+          </a:xfrm>
+          <a:prstGeom prst="rect">
+            <a:avLst/>
+          </a:prstGeom>
+        </p:spPr>
+        <p:txBody>
+          <a:bodyPr vert="horz" lIns="91440" tIns="45720" rIns="91440" bIns="45720" rtlCol="0"/>
+          <a:lstStyle/>
+          <a:p>
+            <a:pPr lvl="0"/>
+            <a:r>
+              <a:rPr lang="en-US" smtClean="0"/>
+              <a:t>Click to edit Master text styles</a:t>
+            </a:r>
+          </a:p>
+          <a:p>
+            <a:pPr lvl="1"/>
+            <a:r>
+              <a:rPr lang="en-US" smtClean="0"/>
+              <a:t>Second level</a:t>
+            </a:r>
+          </a:p>
+          <a:p>
+            <a:pPr lvl="2"/>
+            <a:r>
+              <a:rPr lang="en-US" smtClean="0"/>
+              <a:t>Third level</a:t>
+            </a:r>
+          </a:p>
+          <a:p>
+            <a:pPr lvl="3"/>
+            <a:r>
+              <a:rPr lang="en-US" smtClean="0"/>
+              <a:t>Fourth level</a:t>
+            </a:r>
+          </a:p>
+          <a:p>
+            <a:pPr lvl="4"/>
+            <a:r>
+              <a:rPr lang="en-US" smtClean="0"/>
+              <a:t>Fifth level</a:t>
+            </a:r>
+            <a:endParaRPr lang="en-US"/>
+          </a:p>
+        </p:txBody>
+      </p:sp>
+      <p:sp>
+        <p:nvSpPr>
+          <p:cNvPr id="6" name="Footer Placeholder 5"/>
+          <p:cNvSpPr>
+            <a:spLocks noGrp="1"/>
+          </p:cNvSpPr>
+          <p:nvPr>
+            <p:ph type="ftr" sz="quarter" idx="4"/>
+          </p:nvPr>
+        </p:nvSpPr>
+        <p:spPr>
+          <a:xfrm>
+            <a:off x="0" y="8685213"/>
+            <a:ext cx="2971800" cy="457200"/>
+          </a:xfrm>
+          <a:prstGeom prst="rect">
+            <a:avLst/>
+          </a:prstGeom>
+        </p:spPr>
+        <p:txBody>
+          <a:bodyPr vert="horz" lIns="91440" tIns="45720" rIns="91440" bIns="45720" rtlCol="0" anchor="b"/>
+          <a:lstStyle>
+            <a:lvl1pPr algn="l">
+              <a:defRPr sz="1200"/>
+            </a:lvl1pPr>
+          </a:lstStyle>
+          <a:p>
+            <a:endParaRPr lang="en-US"/>
+          </a:p>
+        </p:txBody>
+      </p:sp>
+      <p:sp>
+        <p:nvSpPr>
+          <p:cNvPr id="7" name="Slide Number Placeholder 6"/>
+          <p:cNvSpPr>
+            <a:spLocks noGrp="1"/>
+          </p:cNvSpPr>
+          <p:nvPr>
+            <p:ph type="sldNum" sz="quarter" idx="5"/>
+          </p:nvPr>
+        </p:nvSpPr>
+        <p:spPr>
+          <a:xfrm>
+            <a:off x="3884613" y="8685213"/>
+            <a:ext cx="2971800" cy="457200"/>
+          </a:xfrm>
+          <a:prstGeom prst="rect">
+            <a:avLst/>
+          </a:prstGeom>
+        </p:spPr>
+        <p:txBody>
+          <a:bodyPr vert="horz" lIns="91440" tIns="45720" rIns="91440" bIns="45720" rtlCol="0" anchor="b"/>
+          <a:lstStyle>
+            <a:lvl1pPr algn="r">
+              <a:defRPr sz="1200"/>
+            </a:lvl1pPr>
+          </a:lstStyle>
+          <a:p>
+            <a:fld id="{4FA95CE1-299B-42DC-A2C0-27ACC2F8D3F4}" type="slidenum">
+              <a:rPr lang="en-US" smtClean="0"/>
+              <a:t>‹#›</a:t>
+            </a:fld>
+            <a:endParaRPr lang="en-US"/>
+          </a:p>
+        </p:txBody>
+      </p:sp>
+    </p:spTree>
+    <p:extLst>
+      <p:ext uri="{BB962C8B-B14F-4D97-AF65-F5344CB8AC3E}">
+        <p14:creationId xmlns:p14="http://schemas.microsoft.com/office/powerpoint/2010/main" val="1849407289"/>
+      </p:ext>
+    </p:extLst>
+  </p:cSld>
+  <p:clrMap bg1="lt1" tx1="dk1" bg2="lt2" tx2="dk2" accent1="accent1" accent2="accent2" accent3="accent3" accent4="accent4" accent5="accent5" accent6="accent6" hlink="hlink" folHlink="folHlink"/>
+  <p:notesStyle>
+    <a:lvl1pPr marL="0" algn="l" defTabSz="914400" rtl="0" eaLnBrk="1" latinLnBrk="0" hangingPunct="1">
+      <a:defRPr sz="1200" kern="1200">
+        <a:solidFill>
+          <a:schemeClr val="tx1"/>
+        </a:solidFill>
+        <a:latin typeface="+mn-lt"/>
+        <a:ea typeface="+mn-ea"/>
+        <a:cs typeface="+mn-cs"/>
+      </a:defRPr>
+    </a:lvl1pPr>
+    <a:lvl2pPr marL="457200" algn="l" defTabSz="914400" rtl="0" eaLnBrk="1" latinLnBrk="0" hangingPunct="1">
+      <a:defRPr sz="1200" kern="1200">
+        <a:solidFill>
+          <a:schemeClr val="tx1"/>
+        </a:solidFill>
+        <a:latin typeface="+mn-lt"/>
+        <a:ea typeface="+mn-ea"/>
+        <a:cs typeface="+mn-cs"/>
+      </a:defRPr>
+    </a:lvl2pPr>
+    <a:lvl3pPr marL="914400" algn="l" defTabSz="914400" rtl="0" eaLnBrk="1" latinLnBrk="0" hangingPunct="1">
+      <a:defRPr sz="1200" kern="1200">
+        <a:solidFill>
+          <a:schemeClr val="tx1"/>
+        </a:solidFill>
+        <a:latin typeface="+mn-lt"/>
+        <a:ea typeface="+mn-ea"/>
+        <a:cs typeface="+mn-cs"/>
+      </a:defRPr>
+    </a:lvl3pPr>
+    <a:lvl4pPr marL="1371600" algn="l" defTabSz="914400" rtl="0" eaLnBrk="1" latinLnBrk="0" hangingPunct="1">
+      <a:defRPr sz="1200" kern="1200">
+        <a:solidFill>
+          <a:schemeClr val="tx1"/>
+        </a:solidFill>
+        <a:latin typeface="+mn-lt"/>
+        <a:ea typeface="+mn-ea"/>
+        <a:cs typeface="+mn-cs"/>
+      </a:defRPr>
+    </a:lvl4pPr>
+    <a:lvl5pPr marL="1828800" algn="l" defTabSz="914400" rtl="0" eaLnBrk="1" latinLnBrk="0" hangingPunct="1">
+      <a:defRPr sz="1200" kern="1200">
+        <a:solidFill>
+          <a:schemeClr val="tx1"/>
+        </a:solidFill>
+        <a:latin typeface="+mn-lt"/>
+        <a:ea typeface="+mn-ea"/>
+        <a:cs typeface="+mn-cs"/>
+      </a:defRPr>
+    </a:lvl5pPr>
+    <a:lvl6pPr marL="2286000" algn="l" defTabSz="914400" rtl="0" eaLnBrk="1" latinLnBrk="0" hangingPunct="1">
+      <a:defRPr sz="1200" kern="1200">
+        <a:solidFill>
+          <a:schemeClr val="tx1"/>
+        </a:solidFill>
+        <a:latin typeface="+mn-lt"/>
+        <a:ea typeface="+mn-ea"/>
+        <a:cs typeface="+mn-cs"/>
+      </a:defRPr>
+    </a:lvl6pPr>
+    <a:lvl7pPr marL="2743200" algn="l" defTabSz="914400" rtl="0" eaLnBrk="1" latinLnBrk="0" hangingPunct="1">
+      <a:defRPr sz="1200" kern="1200">
+        <a:solidFill>
+          <a:schemeClr val="tx1"/>
+        </a:solidFill>
+        <a:latin typeface="+mn-lt"/>
+        <a:ea typeface="+mn-ea"/>
+        <a:cs typeface="+mn-cs"/>
+      </a:defRPr>
+    </a:lvl7pPr>
+    <a:lvl8pPr marL="3200400" algn="l" defTabSz="914400" rtl="0" eaLnBrk="1" latinLnBrk="0" hangingPunct="1">
+      <a:defRPr sz="1200" kern="1200">
+        <a:solidFill>
+          <a:schemeClr val="tx1"/>
+        </a:solidFill>
+        <a:latin typeface="+mn-lt"/>
+        <a:ea typeface="+mn-ea"/>
+        <a:cs typeface="+mn-cs"/>
+      </a:defRPr>
+    </a:lvl8pPr>
+    <a:lvl9pPr marL="3657600" algn="l" defTabSz="914400" rtl="0" eaLnBrk="1" latinLnBrk="0" hangingPunct="1">
+      <a:defRPr sz="1200" kern="1200">
+        <a:solidFill>
+          <a:schemeClr val="tx1"/>
+        </a:solidFill>
+        <a:latin typeface="+mn-lt"/>
+        <a:ea typeface="+mn-ea"/>
+        <a:cs typeface="+mn-cs"/>
+      </a:defRPr>
+    </a:lvl9pPr>
+  </p:notesStyle>
+</p:notesMaster>
+</file>
+
+<file path=ppt/notesSlides/notesSlide1.xml><?xml version="1.0" encoding="utf-8"?>
+<p:notes xmlns:a="http://schemas.openxmlformats.org/drawingml/2006/main" xmlns:r="http://schemas.openxmlformats.org/officeDocument/2006/relationships" xmlns:p="http://schemas.openxmlformats.org/presentationml/2006/main">
+  <p:cSld>
+    <p:spTree>
+      <p:nvGrpSpPr>
+        <p:cNvPr id="1" name=""/>
+        <p:cNvGrpSpPr/>
+        <p:nvPr/>
+      </p:nvGrpSpPr>
+      <p:grpSpPr>
+        <a:xfrm>
+          <a:off x="0" y="0"/>
+          <a:ext cx="0" cy="0"/>
+          <a:chOff x="0" y="0"/>
+          <a:chExt cx="0" cy="0"/>
+        </a:xfrm>
+      </p:grpSpPr>
+      <p:sp>
+        <p:nvSpPr>
+          <p:cNvPr id="2" name="Slide Image Placeholder 1"/>
+          <p:cNvSpPr>
+            <a:spLocks noGrp="1" noRot="1" noChangeAspect="1"/>
+          </p:cNvSpPr>
+          <p:nvPr>
+            <p:ph type="sldImg"/>
+          </p:nvPr>
+        </p:nvSpPr>
+        <p:spPr/>
+      </p:sp>
+      <p:sp>
+        <p:nvSpPr>
+          <p:cNvPr id="3" name="Notes Placeholder 2"/>
+          <p:cNvSpPr>
+            <a:spLocks noGrp="1"/>
+          </p:cNvSpPr>
+          <p:nvPr>
+            <p:ph type="body" idx="1"/>
+          </p:nvPr>
+        </p:nvSpPr>
+        <p:spPr/>
+        <p:txBody>
+          <a:bodyPr/>
+          <a:lstStyle/>
+          <a:p>
+            <a:r>
+              <a:rPr lang="en-US" dirty="0" smtClean="0"/>
+              <a:t>Introduction</a:t>
+            </a:r>
+            <a:endParaRPr lang="en-US" b="1" dirty="0"/>
+          </a:p>
+        </p:txBody>
+      </p:sp>
+      <p:sp>
+        <p:nvSpPr>
+          <p:cNvPr id="4" name="Slide Number Placeholder 3"/>
+          <p:cNvSpPr>
+            <a:spLocks noGrp="1"/>
+          </p:cNvSpPr>
+          <p:nvPr>
+            <p:ph type="sldNum" sz="quarter" idx="10"/>
+          </p:nvPr>
+        </p:nvSpPr>
+        <p:spPr/>
+        <p:txBody>
+          <a:bodyPr/>
+          <a:lstStyle/>
+          <a:p>
+            <a:fld id="{4FA95CE1-299B-42DC-A2C0-27ACC2F8D3F4}" type="slidenum">
+              <a:rPr lang="en-US" smtClean="0"/>
+              <a:t>1</a:t>
+            </a:fld>
+            <a:endParaRPr lang="en-US"/>
+          </a:p>
+        </p:txBody>
+      </p:sp>
+    </p:spTree>
+    <p:extLst>
+      <p:ext uri="{BB962C8B-B14F-4D97-AF65-F5344CB8AC3E}">
+        <p14:creationId xmlns:p14="http://schemas.microsoft.com/office/powerpoint/2010/main" val="3755951669"/>
+      </p:ext>
+    </p:extLst>
+  </p:cSld>
+  <p:clrMapOvr>
+    <a:masterClrMapping/>
+  </p:clrMapOvr>
+</p:notes>
+</file>
+
+<file path=ppt/notesSlides/notesSlide10.xml><?xml version="1.0" encoding="utf-8"?>
+<p:notes xmlns:a="http://schemas.openxmlformats.org/drawingml/2006/main" xmlns:r="http://schemas.openxmlformats.org/officeDocument/2006/relationships" xmlns:p="http://schemas.openxmlformats.org/presentationml/2006/main">
+  <p:cSld>
+    <p:spTree>
+      <p:nvGrpSpPr>
+        <p:cNvPr id="1" name=""/>
+        <p:cNvGrpSpPr/>
+        <p:nvPr/>
+      </p:nvGrpSpPr>
+      <p:grpSpPr>
+        <a:xfrm>
+          <a:off x="0" y="0"/>
+          <a:ext cx="0" cy="0"/>
+          <a:chOff x="0" y="0"/>
+          <a:chExt cx="0" cy="0"/>
+        </a:xfrm>
+      </p:grpSpPr>
+      <p:sp>
+        <p:nvSpPr>
+          <p:cNvPr id="2" name="Slide Image Placeholder 1"/>
+          <p:cNvSpPr>
+            <a:spLocks noGrp="1" noRot="1" noChangeAspect="1"/>
+          </p:cNvSpPr>
+          <p:nvPr>
+            <p:ph type="sldImg"/>
+          </p:nvPr>
+        </p:nvSpPr>
+        <p:spPr/>
+      </p:sp>
+      <p:sp>
+        <p:nvSpPr>
+          <p:cNvPr id="3" name="Notes Placeholder 2"/>
+          <p:cNvSpPr>
+            <a:spLocks noGrp="1"/>
+          </p:cNvSpPr>
+          <p:nvPr>
+            <p:ph type="body" idx="1"/>
+          </p:nvPr>
+        </p:nvSpPr>
+        <p:spPr/>
+        <p:txBody>
+          <a:bodyPr/>
+          <a:lstStyle/>
+          <a:p>
+            <a:r>
+              <a:rPr lang="en-US" smtClean="0"/>
+              <a:t>Kevin</a:t>
+            </a:r>
+            <a:endParaRPr lang="en-US"/>
+          </a:p>
+        </p:txBody>
+      </p:sp>
+      <p:sp>
+        <p:nvSpPr>
+          <p:cNvPr id="4" name="Slide Number Placeholder 3"/>
+          <p:cNvSpPr>
+            <a:spLocks noGrp="1"/>
+          </p:cNvSpPr>
+          <p:nvPr>
+            <p:ph type="sldNum" sz="quarter" idx="10"/>
+          </p:nvPr>
+        </p:nvSpPr>
+        <p:spPr/>
+        <p:txBody>
+          <a:bodyPr/>
+          <a:lstStyle/>
+          <a:p>
+            <a:fld id="{4FA95CE1-299B-42DC-A2C0-27ACC2F8D3F4}" type="slidenum">
+              <a:rPr lang="en-US" smtClean="0"/>
+              <a:t>15</a:t>
+            </a:fld>
+            <a:endParaRPr lang="en-US"/>
+          </a:p>
+        </p:txBody>
+      </p:sp>
+    </p:spTree>
+    <p:extLst>
+      <p:ext uri="{BB962C8B-B14F-4D97-AF65-F5344CB8AC3E}">
+        <p14:creationId xmlns:p14="http://schemas.microsoft.com/office/powerpoint/2010/main" val="942787799"/>
+      </p:ext>
+    </p:extLst>
+  </p:cSld>
+  <p:clrMapOvr>
+    <a:masterClrMapping/>
+  </p:clrMapOvr>
+</p:notes>
+</file>
+
+<file path=ppt/notesSlides/notesSlide2.xml><?xml version="1.0" encoding="utf-8"?>
+<p:notes xmlns:a="http://schemas.openxmlformats.org/drawingml/2006/main" xmlns:r="http://schemas.openxmlformats.org/officeDocument/2006/relationships" xmlns:p="http://schemas.openxmlformats.org/presentationml/2006/main">
+  <p:cSld>
+    <p:spTree>
+      <p:nvGrpSpPr>
+        <p:cNvPr id="1" name=""/>
+        <p:cNvGrpSpPr/>
+        <p:nvPr/>
+      </p:nvGrpSpPr>
+      <p:grpSpPr>
+        <a:xfrm>
+          <a:off x="0" y="0"/>
+          <a:ext cx="0" cy="0"/>
+          <a:chOff x="0" y="0"/>
+          <a:chExt cx="0" cy="0"/>
+        </a:xfrm>
+      </p:grpSpPr>
+      <p:sp>
+        <p:nvSpPr>
+          <p:cNvPr id="2" name="Slide Image Placeholder 1"/>
+          <p:cNvSpPr>
+            <a:spLocks noGrp="1" noRot="1" noChangeAspect="1"/>
+          </p:cNvSpPr>
+          <p:nvPr>
+            <p:ph type="sldImg"/>
+          </p:nvPr>
+        </p:nvSpPr>
+        <p:spPr/>
+      </p:sp>
+      <p:sp>
+        <p:nvSpPr>
+          <p:cNvPr id="3" name="Notes Placeholder 2"/>
+          <p:cNvSpPr>
+            <a:spLocks noGrp="1"/>
+          </p:cNvSpPr>
+          <p:nvPr>
+            <p:ph type="body" idx="1"/>
+          </p:nvPr>
+        </p:nvSpPr>
+        <p:spPr/>
+        <p:txBody>
+          <a:bodyPr/>
+          <a:lstStyle/>
+          <a:p>
+            <a:r>
+              <a:rPr lang="en-US" dirty="0" smtClean="0"/>
+              <a:t>David</a:t>
+            </a:r>
+            <a:endParaRPr lang="en-US" dirty="0"/>
+          </a:p>
+        </p:txBody>
+      </p:sp>
+      <p:sp>
+        <p:nvSpPr>
+          <p:cNvPr id="4" name="Slide Number Placeholder 3"/>
+          <p:cNvSpPr>
+            <a:spLocks noGrp="1"/>
+          </p:cNvSpPr>
+          <p:nvPr>
+            <p:ph type="sldNum" sz="quarter" idx="10"/>
+          </p:nvPr>
+        </p:nvSpPr>
+        <p:spPr/>
+        <p:txBody>
+          <a:bodyPr/>
+          <a:lstStyle/>
+          <a:p>
+            <a:fld id="{4FA95CE1-299B-42DC-A2C0-27ACC2F8D3F4}" type="slidenum">
+              <a:rPr lang="en-US" smtClean="0"/>
+              <a:t>2</a:t>
+            </a:fld>
+            <a:endParaRPr lang="en-US"/>
+          </a:p>
+        </p:txBody>
+      </p:sp>
+    </p:spTree>
+    <p:extLst>
+      <p:ext uri="{BB962C8B-B14F-4D97-AF65-F5344CB8AC3E}">
+        <p14:creationId xmlns:p14="http://schemas.microsoft.com/office/powerpoint/2010/main" val="2628270311"/>
+      </p:ext>
+    </p:extLst>
+  </p:cSld>
+  <p:clrMapOvr>
+    <a:masterClrMapping/>
+  </p:clrMapOvr>
+</p:notes>
+</file>
+
+<file path=ppt/notesSlides/notesSlide3.xml><?xml version="1.0" encoding="utf-8"?>
+<p:notes xmlns:a="http://schemas.openxmlformats.org/drawingml/2006/main" xmlns:r="http://schemas.openxmlformats.org/officeDocument/2006/relationships" xmlns:p="http://schemas.openxmlformats.org/presentationml/2006/main">
+  <p:cSld>
+    <p:spTree>
+      <p:nvGrpSpPr>
+        <p:cNvPr id="1" name=""/>
+        <p:cNvGrpSpPr/>
+        <p:nvPr/>
+      </p:nvGrpSpPr>
+      <p:grpSpPr>
+        <a:xfrm>
+          <a:off x="0" y="0"/>
+          <a:ext cx="0" cy="0"/>
+          <a:chOff x="0" y="0"/>
+          <a:chExt cx="0" cy="0"/>
+        </a:xfrm>
+      </p:grpSpPr>
+      <p:sp>
+        <p:nvSpPr>
+          <p:cNvPr id="2" name="Slide Image Placeholder 1"/>
+          <p:cNvSpPr>
+            <a:spLocks noGrp="1" noRot="1" noChangeAspect="1"/>
+          </p:cNvSpPr>
+          <p:nvPr>
+            <p:ph type="sldImg"/>
+          </p:nvPr>
+        </p:nvSpPr>
+        <p:spPr/>
+      </p:sp>
+      <p:sp>
+        <p:nvSpPr>
+          <p:cNvPr id="3" name="Notes Placeholder 2"/>
+          <p:cNvSpPr>
+            <a:spLocks noGrp="1"/>
+          </p:cNvSpPr>
+          <p:nvPr>
+            <p:ph type="body" idx="1"/>
+          </p:nvPr>
+        </p:nvSpPr>
+        <p:spPr/>
+        <p:txBody>
+          <a:bodyPr/>
+          <a:lstStyle/>
+          <a:p>
+            <a:r>
+              <a:rPr lang="en-US" dirty="0" smtClean="0"/>
+              <a:t>David</a:t>
+            </a:r>
+            <a:endParaRPr lang="en-US" dirty="0"/>
+          </a:p>
+        </p:txBody>
+      </p:sp>
+      <p:sp>
+        <p:nvSpPr>
+          <p:cNvPr id="4" name="Slide Number Placeholder 3"/>
+          <p:cNvSpPr>
+            <a:spLocks noGrp="1"/>
+          </p:cNvSpPr>
+          <p:nvPr>
+            <p:ph type="sldNum" sz="quarter" idx="10"/>
+          </p:nvPr>
+        </p:nvSpPr>
+        <p:spPr/>
+        <p:txBody>
+          <a:bodyPr/>
+          <a:lstStyle/>
+          <a:p>
+            <a:fld id="{4FA95CE1-299B-42DC-A2C0-27ACC2F8D3F4}" type="slidenum">
+              <a:rPr lang="en-US" smtClean="0"/>
+              <a:t>3</a:t>
+            </a:fld>
+            <a:endParaRPr lang="en-US"/>
+          </a:p>
+        </p:txBody>
+      </p:sp>
+    </p:spTree>
+    <p:extLst>
+      <p:ext uri="{BB962C8B-B14F-4D97-AF65-F5344CB8AC3E}">
+        <p14:creationId xmlns:p14="http://schemas.microsoft.com/office/powerpoint/2010/main" val="2605315357"/>
+      </p:ext>
+    </p:extLst>
+  </p:cSld>
+  <p:clrMapOvr>
+    <a:masterClrMapping/>
+  </p:clrMapOvr>
+</p:notes>
+</file>
+
+<file path=ppt/notesSlides/notesSlide4.xml><?xml version="1.0" encoding="utf-8"?>
+<p:notes xmlns:a="http://schemas.openxmlformats.org/drawingml/2006/main" xmlns:r="http://schemas.openxmlformats.org/officeDocument/2006/relationships" xmlns:p="http://schemas.openxmlformats.org/presentationml/2006/main">
+  <p:cSld>
+    <p:spTree>
+      <p:nvGrpSpPr>
+        <p:cNvPr id="1" name=""/>
+        <p:cNvGrpSpPr/>
+        <p:nvPr/>
+      </p:nvGrpSpPr>
+      <p:grpSpPr>
+        <a:xfrm>
+          <a:off x="0" y="0"/>
+          <a:ext cx="0" cy="0"/>
+          <a:chOff x="0" y="0"/>
+          <a:chExt cx="0" cy="0"/>
+        </a:xfrm>
+      </p:grpSpPr>
+      <p:sp>
+        <p:nvSpPr>
+          <p:cNvPr id="2" name="Slide Image Placeholder 1"/>
+          <p:cNvSpPr>
+            <a:spLocks noGrp="1" noRot="1" noChangeAspect="1"/>
+          </p:cNvSpPr>
+          <p:nvPr>
+            <p:ph type="sldImg"/>
+          </p:nvPr>
+        </p:nvSpPr>
+        <p:spPr/>
+      </p:sp>
+      <p:sp>
+        <p:nvSpPr>
+          <p:cNvPr id="3" name="Notes Placeholder 2"/>
+          <p:cNvSpPr>
+            <a:spLocks noGrp="1"/>
+          </p:cNvSpPr>
+          <p:nvPr>
+            <p:ph type="body" idx="1"/>
+          </p:nvPr>
+        </p:nvSpPr>
+        <p:spPr/>
+        <p:txBody>
+          <a:bodyPr/>
+          <a:lstStyle/>
+          <a:p>
+            <a:r>
+              <a:rPr lang="en-US" dirty="0" smtClean="0"/>
+              <a:t>Kevin</a:t>
+            </a:r>
+            <a:endParaRPr lang="en-US" dirty="0"/>
+          </a:p>
+        </p:txBody>
+      </p:sp>
+      <p:sp>
+        <p:nvSpPr>
+          <p:cNvPr id="4" name="Slide Number Placeholder 3"/>
+          <p:cNvSpPr>
+            <a:spLocks noGrp="1"/>
+          </p:cNvSpPr>
+          <p:nvPr>
+            <p:ph type="sldNum" sz="quarter" idx="10"/>
+          </p:nvPr>
+        </p:nvSpPr>
+        <p:spPr/>
+        <p:txBody>
+          <a:bodyPr/>
+          <a:lstStyle/>
+          <a:p>
+            <a:fld id="{4FA95CE1-299B-42DC-A2C0-27ACC2F8D3F4}" type="slidenum">
+              <a:rPr lang="en-US" smtClean="0"/>
+              <a:t>4</a:t>
+            </a:fld>
+            <a:endParaRPr lang="en-US"/>
+          </a:p>
+        </p:txBody>
+      </p:sp>
+    </p:spTree>
+    <p:extLst>
+      <p:ext uri="{BB962C8B-B14F-4D97-AF65-F5344CB8AC3E}">
+        <p14:creationId xmlns:p14="http://schemas.microsoft.com/office/powerpoint/2010/main" val="2426041241"/>
+      </p:ext>
+    </p:extLst>
+  </p:cSld>
+  <p:clrMapOvr>
+    <a:masterClrMapping/>
+  </p:clrMapOvr>
+</p:notes>
+</file>
+
+<file path=ppt/notesSlides/notesSlide5.xml><?xml version="1.0" encoding="utf-8"?>
+<p:notes xmlns:a="http://schemas.openxmlformats.org/drawingml/2006/main" xmlns:r="http://schemas.openxmlformats.org/officeDocument/2006/relationships" xmlns:p="http://schemas.openxmlformats.org/presentationml/2006/main">
+  <p:cSld>
+    <p:spTree>
+      <p:nvGrpSpPr>
+        <p:cNvPr id="1" name=""/>
+        <p:cNvGrpSpPr/>
+        <p:nvPr/>
+      </p:nvGrpSpPr>
+      <p:grpSpPr>
+        <a:xfrm>
+          <a:off x="0" y="0"/>
+          <a:ext cx="0" cy="0"/>
+          <a:chOff x="0" y="0"/>
+          <a:chExt cx="0" cy="0"/>
+        </a:xfrm>
+      </p:grpSpPr>
+      <p:sp>
+        <p:nvSpPr>
+          <p:cNvPr id="2" name="Slide Image Placeholder 1"/>
+          <p:cNvSpPr>
+            <a:spLocks noGrp="1" noRot="1" noChangeAspect="1"/>
+          </p:cNvSpPr>
+          <p:nvPr>
+            <p:ph type="sldImg"/>
+          </p:nvPr>
+        </p:nvSpPr>
+        <p:spPr/>
+      </p:sp>
+      <p:sp>
+        <p:nvSpPr>
+          <p:cNvPr id="3" name="Notes Placeholder 2"/>
+          <p:cNvSpPr>
+            <a:spLocks noGrp="1"/>
+          </p:cNvSpPr>
+          <p:nvPr>
+            <p:ph type="body" idx="1"/>
+          </p:nvPr>
+        </p:nvSpPr>
+        <p:spPr/>
+        <p:txBody>
+          <a:bodyPr/>
+          <a:lstStyle/>
+          <a:p>
+            <a:r>
+              <a:rPr lang="en-US" dirty="0" smtClean="0"/>
+              <a:t>Kevin</a:t>
+            </a:r>
+            <a:endParaRPr lang="en-US" dirty="0"/>
+          </a:p>
+        </p:txBody>
+      </p:sp>
+      <p:sp>
+        <p:nvSpPr>
+          <p:cNvPr id="4" name="Slide Number Placeholder 3"/>
+          <p:cNvSpPr>
+            <a:spLocks noGrp="1"/>
+          </p:cNvSpPr>
+          <p:nvPr>
+            <p:ph type="sldNum" sz="quarter" idx="10"/>
+          </p:nvPr>
+        </p:nvSpPr>
+        <p:spPr/>
+        <p:txBody>
+          <a:bodyPr/>
+          <a:lstStyle/>
+          <a:p>
+            <a:fld id="{4FA95CE1-299B-42DC-A2C0-27ACC2F8D3F4}" type="slidenum">
+              <a:rPr lang="en-US" smtClean="0"/>
+              <a:t>5</a:t>
+            </a:fld>
+            <a:endParaRPr lang="en-US"/>
+          </a:p>
+        </p:txBody>
+      </p:sp>
+    </p:spTree>
+    <p:extLst>
+      <p:ext uri="{BB962C8B-B14F-4D97-AF65-F5344CB8AC3E}">
+        <p14:creationId xmlns:p14="http://schemas.microsoft.com/office/powerpoint/2010/main" val="2909448747"/>
+      </p:ext>
+    </p:extLst>
+  </p:cSld>
+  <p:clrMapOvr>
+    <a:masterClrMapping/>
+  </p:clrMapOvr>
+</p:notes>
+</file>
+
+<file path=ppt/notesSlides/notesSlide6.xml><?xml version="1.0" encoding="utf-8"?>
+<p:notes xmlns:a="http://schemas.openxmlformats.org/drawingml/2006/main" xmlns:r="http://schemas.openxmlformats.org/officeDocument/2006/relationships" xmlns:p="http://schemas.openxmlformats.org/presentationml/2006/main">
+  <p:cSld>
+    <p:spTree>
+      <p:nvGrpSpPr>
+        <p:cNvPr id="1" name=""/>
+        <p:cNvGrpSpPr/>
+        <p:nvPr/>
+      </p:nvGrpSpPr>
+      <p:grpSpPr>
+        <a:xfrm>
+          <a:off x="0" y="0"/>
+          <a:ext cx="0" cy="0"/>
+          <a:chOff x="0" y="0"/>
+          <a:chExt cx="0" cy="0"/>
+        </a:xfrm>
+      </p:grpSpPr>
+      <p:sp>
+        <p:nvSpPr>
+          <p:cNvPr id="2" name="Slide Image Placeholder 1"/>
+          <p:cNvSpPr>
+            <a:spLocks noGrp="1" noRot="1" noChangeAspect="1"/>
+          </p:cNvSpPr>
+          <p:nvPr>
+            <p:ph type="sldImg"/>
+          </p:nvPr>
+        </p:nvSpPr>
+        <p:spPr/>
+      </p:sp>
+      <p:sp>
+        <p:nvSpPr>
+          <p:cNvPr id="3" name="Notes Placeholder 2"/>
+          <p:cNvSpPr>
+            <a:spLocks noGrp="1"/>
+          </p:cNvSpPr>
+          <p:nvPr>
+            <p:ph type="body" idx="1"/>
+          </p:nvPr>
+        </p:nvSpPr>
+        <p:spPr/>
+        <p:txBody>
+          <a:bodyPr/>
+          <a:lstStyle/>
+          <a:p>
+            <a:r>
+              <a:rPr lang="en-US" dirty="0" smtClean="0"/>
+              <a:t>Kevin</a:t>
+            </a:r>
+            <a:endParaRPr lang="en-US" dirty="0"/>
+          </a:p>
+        </p:txBody>
+      </p:sp>
+      <p:sp>
+        <p:nvSpPr>
+          <p:cNvPr id="4" name="Slide Number Placeholder 3"/>
+          <p:cNvSpPr>
+            <a:spLocks noGrp="1"/>
+          </p:cNvSpPr>
+          <p:nvPr>
+            <p:ph type="sldNum" sz="quarter" idx="10"/>
+          </p:nvPr>
+        </p:nvSpPr>
+        <p:spPr/>
+        <p:txBody>
+          <a:bodyPr/>
+          <a:lstStyle/>
+          <a:p>
+            <a:fld id="{4FA95CE1-299B-42DC-A2C0-27ACC2F8D3F4}" type="slidenum">
+              <a:rPr lang="en-US" smtClean="0"/>
+              <a:t>6</a:t>
+            </a:fld>
+            <a:endParaRPr lang="en-US"/>
+          </a:p>
+        </p:txBody>
+      </p:sp>
+    </p:spTree>
+    <p:extLst>
+      <p:ext uri="{BB962C8B-B14F-4D97-AF65-F5344CB8AC3E}">
+        <p14:creationId xmlns:p14="http://schemas.microsoft.com/office/powerpoint/2010/main" val="986245528"/>
+      </p:ext>
+    </p:extLst>
+  </p:cSld>
+  <p:clrMapOvr>
+    <a:masterClrMapping/>
+  </p:clrMapOvr>
+</p:notes>
+</file>
+
+<file path=ppt/notesSlides/notesSlide7.xml><?xml version="1.0" encoding="utf-8"?>
+<p:notes xmlns:a="http://schemas.openxmlformats.org/drawingml/2006/main" xmlns:r="http://schemas.openxmlformats.org/officeDocument/2006/relationships" xmlns:p="http://schemas.openxmlformats.org/presentationml/2006/main">
+  <p:cSld>
+    <p:spTree>
+      <p:nvGrpSpPr>
+        <p:cNvPr id="1" name=""/>
+        <p:cNvGrpSpPr/>
+        <p:nvPr/>
+      </p:nvGrpSpPr>
+      <p:grpSpPr>
+        <a:xfrm>
+          <a:off x="0" y="0"/>
+          <a:ext cx="0" cy="0"/>
+          <a:chOff x="0" y="0"/>
+          <a:chExt cx="0" cy="0"/>
+        </a:xfrm>
+      </p:grpSpPr>
+      <p:sp>
+        <p:nvSpPr>
+          <p:cNvPr id="2" name="Slide Image Placeholder 1"/>
+          <p:cNvSpPr>
+            <a:spLocks noGrp="1" noRot="1" noChangeAspect="1"/>
+          </p:cNvSpPr>
+          <p:nvPr>
+            <p:ph type="sldImg"/>
+          </p:nvPr>
+        </p:nvSpPr>
+        <p:spPr/>
+      </p:sp>
+      <p:sp>
+        <p:nvSpPr>
+          <p:cNvPr id="3" name="Notes Placeholder 2"/>
+          <p:cNvSpPr>
+            <a:spLocks noGrp="1"/>
+          </p:cNvSpPr>
+          <p:nvPr>
+            <p:ph type="body" idx="1"/>
+          </p:nvPr>
+        </p:nvSpPr>
+        <p:spPr/>
+        <p:txBody>
+          <a:bodyPr/>
+          <a:lstStyle/>
+          <a:p>
+            <a:r>
+              <a:rPr lang="en-US" dirty="0" smtClean="0"/>
+              <a:t>David</a:t>
+            </a:r>
+            <a:endParaRPr lang="en-US" dirty="0"/>
+          </a:p>
+        </p:txBody>
+      </p:sp>
+      <p:sp>
+        <p:nvSpPr>
+          <p:cNvPr id="4" name="Slide Number Placeholder 3"/>
+          <p:cNvSpPr>
+            <a:spLocks noGrp="1"/>
+          </p:cNvSpPr>
+          <p:nvPr>
+            <p:ph type="sldNum" sz="quarter" idx="10"/>
+          </p:nvPr>
+        </p:nvSpPr>
+        <p:spPr/>
+        <p:txBody>
+          <a:bodyPr/>
+          <a:lstStyle/>
+          <a:p>
+            <a:fld id="{4FA95CE1-299B-42DC-A2C0-27ACC2F8D3F4}" type="slidenum">
+              <a:rPr lang="en-US" smtClean="0"/>
+              <a:t>11</a:t>
+            </a:fld>
+            <a:endParaRPr lang="en-US"/>
+          </a:p>
+        </p:txBody>
+      </p:sp>
+    </p:spTree>
+    <p:extLst>
+      <p:ext uri="{BB962C8B-B14F-4D97-AF65-F5344CB8AC3E}">
+        <p14:creationId xmlns:p14="http://schemas.microsoft.com/office/powerpoint/2010/main" val="3734626152"/>
+      </p:ext>
+    </p:extLst>
+  </p:cSld>
+  <p:clrMapOvr>
+    <a:masterClrMapping/>
+  </p:clrMapOvr>
+</p:notes>
+</file>
+
+<file path=ppt/notesSlides/notesSlide8.xml><?xml version="1.0" encoding="utf-8"?>
+<p:notes xmlns:a="http://schemas.openxmlformats.org/drawingml/2006/main" xmlns:r="http://schemas.openxmlformats.org/officeDocument/2006/relationships" xmlns:p="http://schemas.openxmlformats.org/presentationml/2006/main">
+  <p:cSld>
+    <p:spTree>
+      <p:nvGrpSpPr>
+        <p:cNvPr id="1" name=""/>
+        <p:cNvGrpSpPr/>
+        <p:nvPr/>
+      </p:nvGrpSpPr>
+      <p:grpSpPr>
+        <a:xfrm>
+          <a:off x="0" y="0"/>
+          <a:ext cx="0" cy="0"/>
+          <a:chOff x="0" y="0"/>
+          <a:chExt cx="0" cy="0"/>
+        </a:xfrm>
+      </p:grpSpPr>
+      <p:sp>
+        <p:nvSpPr>
+          <p:cNvPr id="2" name="Slide Image Placeholder 1"/>
+          <p:cNvSpPr>
+            <a:spLocks noGrp="1" noRot="1" noChangeAspect="1"/>
+          </p:cNvSpPr>
+          <p:nvPr>
+            <p:ph type="sldImg"/>
+          </p:nvPr>
+        </p:nvSpPr>
+        <p:spPr/>
+      </p:sp>
+      <p:sp>
+        <p:nvSpPr>
+          <p:cNvPr id="3" name="Notes Placeholder 2"/>
+          <p:cNvSpPr>
+            <a:spLocks noGrp="1"/>
+          </p:cNvSpPr>
+          <p:nvPr>
+            <p:ph type="body" idx="1"/>
+          </p:nvPr>
+        </p:nvSpPr>
+        <p:spPr/>
+        <p:txBody>
+          <a:bodyPr/>
+          <a:lstStyle/>
+          <a:p>
+            <a:r>
+              <a:rPr lang="en-US" dirty="0" smtClean="0"/>
+              <a:t>David</a:t>
+            </a:r>
+            <a:endParaRPr lang="en-US" dirty="0"/>
+          </a:p>
+        </p:txBody>
+      </p:sp>
+      <p:sp>
+        <p:nvSpPr>
+          <p:cNvPr id="4" name="Slide Number Placeholder 3"/>
+          <p:cNvSpPr>
+            <a:spLocks noGrp="1"/>
+          </p:cNvSpPr>
+          <p:nvPr>
+            <p:ph type="sldNum" sz="quarter" idx="10"/>
+          </p:nvPr>
+        </p:nvSpPr>
+        <p:spPr/>
+        <p:txBody>
+          <a:bodyPr/>
+          <a:lstStyle/>
+          <a:p>
+            <a:fld id="{4FA95CE1-299B-42DC-A2C0-27ACC2F8D3F4}" type="slidenum">
+              <a:rPr lang="en-US" smtClean="0"/>
+              <a:t>12</a:t>
+            </a:fld>
+            <a:endParaRPr lang="en-US"/>
+          </a:p>
+        </p:txBody>
+      </p:sp>
+    </p:spTree>
+    <p:extLst>
+      <p:ext uri="{BB962C8B-B14F-4D97-AF65-F5344CB8AC3E}">
+        <p14:creationId xmlns:p14="http://schemas.microsoft.com/office/powerpoint/2010/main" val="87975715"/>
+      </p:ext>
+    </p:extLst>
+  </p:cSld>
+  <p:clrMapOvr>
+    <a:masterClrMapping/>
+  </p:clrMapOvr>
+</p:notes>
+</file>
+
+<file path=ppt/notesSlides/notesSlide9.xml><?xml version="1.0" encoding="utf-8"?>
+<p:notes xmlns:a="http://schemas.openxmlformats.org/drawingml/2006/main" xmlns:r="http://schemas.openxmlformats.org/officeDocument/2006/relationships" xmlns:p="http://schemas.openxmlformats.org/presentationml/2006/main">
+  <p:cSld>
+    <p:spTree>
+      <p:nvGrpSpPr>
+        <p:cNvPr id="1" name=""/>
+        <p:cNvGrpSpPr/>
+        <p:nvPr/>
+      </p:nvGrpSpPr>
+      <p:grpSpPr>
+        <a:xfrm>
+          <a:off x="0" y="0"/>
+          <a:ext cx="0" cy="0"/>
+          <a:chOff x="0" y="0"/>
+          <a:chExt cx="0" cy="0"/>
+        </a:xfrm>
+      </p:grpSpPr>
+      <p:sp>
+        <p:nvSpPr>
+          <p:cNvPr id="2" name="Slide Image Placeholder 1"/>
+          <p:cNvSpPr>
+            <a:spLocks noGrp="1" noRot="1" noChangeAspect="1"/>
+          </p:cNvSpPr>
+          <p:nvPr>
+            <p:ph type="sldImg"/>
+          </p:nvPr>
+        </p:nvSpPr>
+        <p:spPr/>
+      </p:sp>
+      <p:sp>
+        <p:nvSpPr>
+          <p:cNvPr id="3" name="Notes Placeholder 2"/>
+          <p:cNvSpPr>
+            <a:spLocks noGrp="1"/>
+          </p:cNvSpPr>
+          <p:nvPr>
+            <p:ph type="body" idx="1"/>
+          </p:nvPr>
+        </p:nvSpPr>
+        <p:spPr/>
+        <p:txBody>
+          <a:bodyPr/>
+          <a:lstStyle/>
+          <a:p>
+            <a:r>
+              <a:rPr lang="en-US" dirty="0" smtClean="0"/>
+              <a:t>Kevin</a:t>
+            </a:r>
+            <a:endParaRPr lang="en-US" dirty="0"/>
+          </a:p>
+        </p:txBody>
+      </p:sp>
+      <p:sp>
+        <p:nvSpPr>
+          <p:cNvPr id="4" name="Slide Number Placeholder 3"/>
+          <p:cNvSpPr>
+            <a:spLocks noGrp="1"/>
+          </p:cNvSpPr>
+          <p:nvPr>
+            <p:ph type="sldNum" sz="quarter" idx="10"/>
+          </p:nvPr>
+        </p:nvSpPr>
+        <p:spPr/>
+        <p:txBody>
+          <a:bodyPr/>
+          <a:lstStyle/>
+          <a:p>
+            <a:fld id="{4FA95CE1-299B-42DC-A2C0-27ACC2F8D3F4}" type="slidenum">
+              <a:rPr lang="en-US" smtClean="0"/>
+              <a:t>13</a:t>
+            </a:fld>
+            <a:endParaRPr lang="en-US"/>
+          </a:p>
+        </p:txBody>
+      </p:sp>
+    </p:spTree>
+    <p:extLst>
+      <p:ext uri="{BB962C8B-B14F-4D97-AF65-F5344CB8AC3E}">
+        <p14:creationId xmlns:p14="http://schemas.microsoft.com/office/powerpoint/2010/main" val="1654069049"/>
+      </p:ext>
+    </p:extLst>
+  </p:cSld>
+  <p:clrMapOvr>
+    <a:masterClrMapping/>
+  </p:clrMapOvr>
+</p:notes>
 </file>
 
 <file path=ppt/slideLayouts/slideLayout1.xml><?xml version="1.0" encoding="utf-8"?>
@@ -3180,6 +4414,13 @@
   <p:clrMapOvr>
     <a:masterClrMapping/>
   </p:clrMapOvr>
+  <p:timing>
+    <p:tnLst>
+      <p:par>
+        <p:cTn id="1" dur="indefinite" restart="never" nodeType="tmRoot"/>
+      </p:par>
+    </p:tnLst>
+  </p:timing>
 </p:sld>
 </file>
 
@@ -3323,8 +4564,8 @@
           <a:lstStyle/>
           <a:p>
             <a:r>
-              <a:rPr lang="en-US" dirty="0" err="1" smtClean="0"/>
-              <a:t>vAPMAX</a:t>
+              <a:rPr lang="en-US" dirty="0" smtClean="0"/>
+              <a:t>vAPMax</a:t>
             </a:r>
             <a:endParaRPr lang="en-US" dirty="0"/>
           </a:p>
@@ -3346,23 +4587,51 @@
           <a:lstStyle/>
           <a:p>
             <a:r>
+              <a:rPr lang="en-US" dirty="0"/>
+              <a:t>Pass through system messaging </a:t>
+            </a:r>
+            <a:r>
               <a:rPr lang="en-US" dirty="0" smtClean="0"/>
-              <a:t>Message Handler from </a:t>
-            </a:r>
-            <a:r>
-              <a:rPr lang="en-US" dirty="0" err="1" smtClean="0"/>
-              <a:t>vSTB</a:t>
-            </a:r>
+              <a:t>system</a:t>
+            </a:r>
+            <a:endParaRPr lang="en-US" dirty="0" smtClean="0"/>
+          </a:p>
+          <a:p>
+            <a:pPr lvl="1"/>
             <a:r>
               <a:rPr lang="en-US" dirty="0" smtClean="0"/>
-              <a:t> to Game Server</a:t>
-            </a:r>
-          </a:p>
-          <a:p>
-            <a:pPr marL="0" indent="0">
-              <a:buNone/>
-            </a:pPr>
-            <a:endParaRPr lang="en-US" dirty="0"/>
+              <a:t>STB</a:t>
+            </a:r>
+          </a:p>
+          <a:p>
+            <a:pPr lvl="1"/>
+            <a:r>
+              <a:rPr lang="en-US" dirty="0" smtClean="0"/>
+              <a:t>Game Server</a:t>
+            </a:r>
+          </a:p>
+          <a:p>
+            <a:r>
+              <a:rPr lang="en-US" dirty="0" smtClean="0"/>
+              <a:t>Performs quick formatting</a:t>
+            </a:r>
+            <a:endParaRPr lang="en-US" dirty="0" smtClean="0"/>
+          </a:p>
+          <a:p>
+            <a:r>
+              <a:rPr lang="en-US" dirty="0" smtClean="0"/>
+              <a:t>Important part of sandbox environment</a:t>
+            </a:r>
+          </a:p>
+          <a:p>
+            <a:r>
+              <a:rPr lang="en-US" dirty="0" smtClean="0"/>
+              <a:t>Allows q</a:t>
+            </a:r>
+            <a:r>
+              <a:rPr lang="en-US" dirty="0" smtClean="0"/>
+              <a:t>uicker development</a:t>
+            </a:r>
           </a:p>
         </p:txBody>
       </p:sp>
@@ -3387,6 +4656,95 @@
 </file>
 
 <file path=ppt/slides/slide12.xml><?xml version="1.0" encoding="utf-8"?>
+<p:sld xmlns:a="http://schemas.openxmlformats.org/drawingml/2006/main" xmlns:r="http://schemas.openxmlformats.org/officeDocument/2006/relationships" xmlns:p="http://schemas.openxmlformats.org/presentationml/2006/main">
+  <p:cSld>
+    <p:spTree>
+      <p:nvGrpSpPr>
+        <p:cNvPr id="1" name=""/>
+        <p:cNvGrpSpPr/>
+        <p:nvPr/>
+      </p:nvGrpSpPr>
+      <p:grpSpPr>
+        <a:xfrm>
+          <a:off x="0" y="0"/>
+          <a:ext cx="0" cy="0"/>
+          <a:chOff x="0" y="0"/>
+          <a:chExt cx="0" cy="0"/>
+        </a:xfrm>
+      </p:grpSpPr>
+      <p:sp>
+        <p:nvSpPr>
+          <p:cNvPr id="2" name="Title 1"/>
+          <p:cNvSpPr>
+            <a:spLocks noGrp="1"/>
+          </p:cNvSpPr>
+          <p:nvPr>
+            <p:ph type="title"/>
+          </p:nvPr>
+        </p:nvSpPr>
+        <p:spPr/>
+        <p:txBody>
+          <a:bodyPr/>
+          <a:lstStyle/>
+          <a:p>
+            <a:r>
+              <a:rPr lang="en-US" dirty="0" smtClean="0"/>
+              <a:t>vAPMax Dataflow</a:t>
+            </a:r>
+            <a:endParaRPr lang="en-US" dirty="0"/>
+          </a:p>
+        </p:txBody>
+      </p:sp>
+      <p:pic>
+        <p:nvPicPr>
+          <p:cNvPr id="10" name="Content Placeholder 9"/>
+          <p:cNvPicPr>
+            <a:picLocks noGrp="1" noChangeAspect="1"/>
+          </p:cNvPicPr>
+          <p:nvPr>
+            <p:ph idx="1"/>
+          </p:nvPr>
+        </p:nvPicPr>
+        <p:blipFill>
+          <a:blip r:embed="rId3">
+            <a:extLst>
+              <a:ext uri="{28A0092B-C50C-407E-A947-70E740481C1C}">
+                <a14:useLocalDpi xmlns:a14="http://schemas.microsoft.com/office/drawing/2010/main" val="0"/>
+              </a:ext>
+            </a:extLst>
+          </a:blip>
+          <a:stretch>
+            <a:fillRect/>
+          </a:stretch>
+        </p:blipFill>
+        <p:spPr>
+          <a:xfrm>
+            <a:off x="2514600" y="1363426"/>
+            <a:ext cx="4267200" cy="5184680"/>
+          </a:xfrm>
+        </p:spPr>
+      </p:pic>
+    </p:spTree>
+    <p:extLst>
+      <p:ext uri="{BB962C8B-B14F-4D97-AF65-F5344CB8AC3E}">
+        <p14:creationId xmlns:p14="http://schemas.microsoft.com/office/powerpoint/2010/main" val="4056671421"/>
+      </p:ext>
+    </p:extLst>
+  </p:cSld>
+  <p:clrMapOvr>
+    <a:masterClrMapping/>
+  </p:clrMapOvr>
+  <p:timing>
+    <p:tnLst>
+      <p:par>
+        <p:cTn id="1" dur="indefinite" restart="never" nodeType="tmRoot"/>
+      </p:par>
+    </p:tnLst>
+  </p:timing>
+</p:sld>
+</file>
+
+<file path=ppt/slides/slide13.xml><?xml version="1.0" encoding="utf-8"?>
 <p:sld xmlns:a="http://schemas.openxmlformats.org/drawingml/2006/main" xmlns:r="http://schemas.openxmlformats.org/officeDocument/2006/relationships" xmlns:p="http://schemas.openxmlformats.org/presentationml/2006/main">
   <p:cSld>
     <p:spTree>
@@ -4263,89 +5621,6 @@
 </p:sld>
 </file>
 
-<file path=ppt/slides/slide13.xml><?xml version="1.0" encoding="utf-8"?>
-<p:sld xmlns:a="http://schemas.openxmlformats.org/drawingml/2006/main" xmlns:r="http://schemas.openxmlformats.org/officeDocument/2006/relationships" xmlns:p="http://schemas.openxmlformats.org/presentationml/2006/main">
-  <p:cSld>
-    <p:spTree>
-      <p:nvGrpSpPr>
-        <p:cNvPr id="1" name=""/>
-        <p:cNvGrpSpPr/>
-        <p:nvPr/>
-      </p:nvGrpSpPr>
-      <p:grpSpPr>
-        <a:xfrm>
-          <a:off x="0" y="0"/>
-          <a:ext cx="0" cy="0"/>
-          <a:chOff x="0" y="0"/>
-          <a:chExt cx="0" cy="0"/>
-        </a:xfrm>
-      </p:grpSpPr>
-      <p:sp>
-        <p:nvSpPr>
-          <p:cNvPr id="2" name="Title 1"/>
-          <p:cNvSpPr>
-            <a:spLocks noGrp="1"/>
-          </p:cNvSpPr>
-          <p:nvPr>
-            <p:ph type="title"/>
-          </p:nvPr>
-        </p:nvSpPr>
-        <p:spPr/>
-        <p:txBody>
-          <a:bodyPr/>
-          <a:lstStyle/>
-          <a:p>
-            <a:r>
-              <a:rPr lang="en-US" dirty="0" smtClean="0"/>
-              <a:t>Demo</a:t>
-            </a:r>
-            <a:endParaRPr lang="en-US" dirty="0"/>
-          </a:p>
-        </p:txBody>
-      </p:sp>
-      <p:sp>
-        <p:nvSpPr>
-          <p:cNvPr id="3" name="Content Placeholder 2"/>
-          <p:cNvSpPr>
-            <a:spLocks noGrp="1"/>
-          </p:cNvSpPr>
-          <p:nvPr>
-            <p:ph idx="1"/>
-          </p:nvPr>
-        </p:nvSpPr>
-        <p:spPr/>
-        <p:txBody>
-          <a:bodyPr/>
-          <a:lstStyle/>
-          <a:p>
-            <a:r>
-              <a:rPr lang="en-US" dirty="0" smtClean="0"/>
-              <a:t>HERE WE GGOOOOOOO</a:t>
-            </a:r>
-            <a:endParaRPr lang="en-US" dirty="0"/>
-          </a:p>
-        </p:txBody>
-      </p:sp>
-    </p:spTree>
-    <p:extLst>
-      <p:ext uri="{BB962C8B-B14F-4D97-AF65-F5344CB8AC3E}">
-        <p14:creationId xmlns:p14="http://schemas.microsoft.com/office/powerpoint/2010/main" val="625723072"/>
-      </p:ext>
-    </p:extLst>
-  </p:cSld>
-  <p:clrMapOvr>
-    <a:masterClrMapping/>
-  </p:clrMapOvr>
-  <p:timing>
-    <p:tnLst>
-      <p:par>
-        <p:cTn id="1" dur="indefinite" restart="never" nodeType="tmRoot"/>
-      </p:par>
-    </p:tnLst>
-  </p:timing>
-</p:sld>
-</file>
-
 <file path=ppt/slides/slide14.xml><?xml version="1.0" encoding="utf-8"?>
 <p:sld xmlns:a="http://schemas.openxmlformats.org/drawingml/2006/main" xmlns:r="http://schemas.openxmlformats.org/officeDocument/2006/relationships" xmlns:p="http://schemas.openxmlformats.org/presentationml/2006/main">
   <p:cSld>
@@ -4380,7 +5655,7 @@
           <a:p>
             <a:r>
               <a:rPr lang="en-US" dirty="0" smtClean="0"/>
-              <a:t>Product Backlog</a:t>
+              <a:t>Demo</a:t>
             </a:r>
             <a:endParaRPr lang="en-US" dirty="0"/>
           </a:p>
@@ -4396,400 +5671,23 @@
             <p:ph idx="1"/>
           </p:nvPr>
         </p:nvSpPr>
-        <p:spPr>
-          <a:xfrm>
-            <a:off x="457200" y="1219200"/>
-            <a:ext cx="8229600" cy="5486400"/>
-          </a:xfrm>
-        </p:spPr>
-        <p:txBody>
-          <a:bodyPr>
-            <a:noAutofit/>
-          </a:bodyPr>
-          <a:lstStyle/>
-          <a:p>
-            <a:r>
-              <a:rPr lang="en-US" sz="1200" b="1" dirty="0" err="1" smtClean="0"/>
-              <a:t>vSTB</a:t>
-            </a:r>
-            <a:endParaRPr lang="en-US" sz="1200" b="1" dirty="0"/>
-          </a:p>
-          <a:p>
-            <a:pPr lvl="1"/>
-            <a:r>
-              <a:rPr lang="en-US" sz="1200" dirty="0"/>
-              <a:t>Research </a:t>
-            </a:r>
-            <a:r>
-              <a:rPr lang="en-US" sz="1200" dirty="0" err="1"/>
-              <a:t>Qt</a:t>
-            </a:r>
-            <a:r>
-              <a:rPr lang="en-US" sz="1200" dirty="0"/>
-              <a:t> Unit Testing</a:t>
-            </a:r>
-          </a:p>
-          <a:p>
-            <a:pPr lvl="1"/>
-            <a:r>
-              <a:rPr lang="en-US" sz="1200" dirty="0" smtClean="0"/>
-              <a:t>Create </a:t>
-            </a:r>
-            <a:r>
-              <a:rPr lang="en-US" sz="1200" dirty="0"/>
-              <a:t>Checkers game as a proof </a:t>
-            </a:r>
-            <a:r>
-              <a:rPr lang="en-US" sz="1200" dirty="0" smtClean="0"/>
-              <a:t>of concept</a:t>
-            </a:r>
-          </a:p>
-          <a:p>
-            <a:pPr lvl="1"/>
-            <a:r>
-              <a:rPr lang="en-US" sz="1200" dirty="0" smtClean="0"/>
-              <a:t>Prove </a:t>
-            </a:r>
-            <a:r>
-              <a:rPr lang="en-US" sz="1200" dirty="0"/>
-              <a:t>out and implement </a:t>
-            </a:r>
-            <a:r>
-              <a:rPr lang="en-US" sz="1200" dirty="0" err="1" smtClean="0"/>
-              <a:t>QUiLoader</a:t>
-            </a:r>
-            <a:endParaRPr lang="en-US" sz="1200" dirty="0"/>
-          </a:p>
-          <a:p>
-            <a:pPr lvl="1"/>
-            <a:r>
-              <a:rPr lang="en-US" sz="1200" dirty="0" smtClean="0"/>
-              <a:t>Research </a:t>
-            </a:r>
-            <a:r>
-              <a:rPr lang="en-US" sz="1200" dirty="0"/>
-              <a:t>Dynamic </a:t>
-            </a:r>
-            <a:r>
-              <a:rPr lang="en-US" sz="1200" dirty="0" smtClean="0"/>
-              <a:t>UI</a:t>
-            </a:r>
-          </a:p>
-          <a:p>
-            <a:pPr lvl="1"/>
-            <a:r>
-              <a:rPr lang="en-US" sz="1200" dirty="0" smtClean="0"/>
-              <a:t>Refactor </a:t>
-            </a:r>
-            <a:r>
-              <a:rPr lang="en-US" sz="1200" dirty="0"/>
-              <a:t>existing STB game </a:t>
-            </a:r>
-            <a:r>
-              <a:rPr lang="en-US" sz="1200" dirty="0" smtClean="0"/>
-              <a:t>view/model </a:t>
-            </a:r>
-            <a:r>
-              <a:rPr lang="en-US" sz="1200" dirty="0"/>
-              <a:t>architecture to meet STBMF </a:t>
-            </a:r>
-            <a:r>
-              <a:rPr lang="en-US" sz="1200" dirty="0" smtClean="0"/>
-              <a:t>requirements</a:t>
-            </a:r>
-          </a:p>
-          <a:p>
-            <a:pPr lvl="1"/>
-            <a:r>
-              <a:rPr lang="en-US" sz="1200" dirty="0" smtClean="0"/>
-              <a:t>Create </a:t>
-            </a:r>
-            <a:r>
-              <a:rPr lang="en-US" sz="1200" dirty="0"/>
-              <a:t>Memory game as a proof of </a:t>
-            </a:r>
-            <a:r>
-              <a:rPr lang="en-US" sz="1200" dirty="0" smtClean="0"/>
-              <a:t>concept</a:t>
-            </a:r>
-          </a:p>
-          <a:p>
-            <a:r>
-              <a:rPr lang="en-US" sz="1200" b="1" dirty="0" err="1" smtClean="0"/>
-              <a:t>vAPMAX</a:t>
-            </a:r>
-            <a:endParaRPr lang="en-US" sz="1200" b="1" dirty="0"/>
-          </a:p>
-          <a:p>
-            <a:pPr lvl="1"/>
-            <a:r>
-              <a:rPr lang="en-US" sz="1200" dirty="0" smtClean="0"/>
-              <a:t>Integrate </a:t>
-            </a:r>
-            <a:r>
-              <a:rPr lang="en-US" sz="1200" dirty="0"/>
-              <a:t>Logger into project and </a:t>
-            </a:r>
-            <a:r>
-              <a:rPr lang="en-US" sz="1200" dirty="0" smtClean="0"/>
-              <a:t>provide basic </a:t>
-            </a:r>
-            <a:r>
-              <a:rPr lang="en-US" sz="1200" dirty="0"/>
-              <a:t>command line usage to view</a:t>
-            </a:r>
-            <a:r>
-              <a:rPr lang="en-US" sz="1200" dirty="0" smtClean="0"/>
-              <a:t>.</a:t>
-            </a:r>
-          </a:p>
-          <a:p>
-            <a:pPr lvl="1"/>
-            <a:r>
-              <a:rPr lang="en-US" sz="1200" dirty="0" smtClean="0"/>
-              <a:t>Unit Testing</a:t>
-            </a:r>
-          </a:p>
-          <a:p>
-            <a:pPr lvl="1"/>
-            <a:r>
-              <a:rPr lang="en-US" sz="1200" dirty="0" smtClean="0"/>
-              <a:t>update </a:t>
-            </a:r>
-            <a:r>
-              <a:rPr lang="en-US" sz="1200" dirty="0"/>
-              <a:t>Reactive Extension package to </a:t>
-            </a:r>
-            <a:r>
-              <a:rPr lang="en-US" sz="1200" dirty="0" smtClean="0"/>
-              <a:t>latest</a:t>
-            </a:r>
-            <a:endParaRPr lang="en-US" sz="1200" dirty="0"/>
-          </a:p>
-          <a:p>
-            <a:r>
-              <a:rPr lang="en-US" sz="1200" b="1" dirty="0" smtClean="0"/>
-              <a:t>Game Server</a:t>
-            </a:r>
-          </a:p>
-          <a:p>
-            <a:pPr lvl="1"/>
-            <a:r>
-              <a:rPr lang="en-US" sz="1200" dirty="0" smtClean="0"/>
-              <a:t> </a:t>
-            </a:r>
-            <a:r>
-              <a:rPr lang="en-US" sz="1200" dirty="0"/>
-              <a:t>TCP: connections to </a:t>
-            </a:r>
-            <a:r>
-              <a:rPr lang="en-US" sz="1200" dirty="0" err="1"/>
-              <a:t>APMax</a:t>
-            </a:r>
-            <a:r>
-              <a:rPr lang="en-US" sz="1200" dirty="0"/>
-              <a:t>, - </a:t>
-            </a:r>
-            <a:r>
-              <a:rPr lang="en-US" sz="1200" dirty="0" smtClean="0"/>
-              <a:t>receiving and sending</a:t>
-            </a:r>
-          </a:p>
-          <a:p>
-            <a:pPr lvl="1"/>
-            <a:r>
-              <a:rPr lang="en-US" sz="1200" dirty="0" smtClean="0"/>
-              <a:t>Server</a:t>
-            </a:r>
-            <a:r>
-              <a:rPr lang="en-US" sz="1200" dirty="0"/>
-              <a:t>: Plugin </a:t>
-            </a:r>
-            <a:r>
-              <a:rPr lang="en-US" sz="1200" dirty="0" smtClean="0"/>
-              <a:t>Interface</a:t>
-            </a:r>
-          </a:p>
-          <a:p>
-            <a:pPr lvl="1"/>
-            <a:r>
-              <a:rPr lang="en-US" sz="1200" dirty="0" smtClean="0"/>
-              <a:t>Server</a:t>
-            </a:r>
-            <a:r>
-              <a:rPr lang="en-US" sz="1200" dirty="0"/>
-              <a:t>: </a:t>
-            </a:r>
-            <a:r>
-              <a:rPr lang="en-US" sz="1200" dirty="0" smtClean="0"/>
-              <a:t>Database</a:t>
-            </a:r>
-          </a:p>
-          <a:p>
-            <a:pPr lvl="1"/>
-            <a:r>
-              <a:rPr lang="en-US" sz="1200" dirty="0" smtClean="0"/>
-              <a:t>Server</a:t>
-            </a:r>
-            <a:r>
-              <a:rPr lang="en-US" sz="1200" dirty="0"/>
-              <a:t>: UI - Stats, </a:t>
-            </a:r>
-            <a:r>
-              <a:rPr lang="en-US" sz="1200" dirty="0" smtClean="0"/>
-              <a:t>Import</a:t>
-            </a:r>
-          </a:p>
-          <a:p>
-            <a:pPr lvl="1"/>
-            <a:r>
-              <a:rPr lang="en-US" sz="1200" dirty="0" smtClean="0"/>
-              <a:t>Server</a:t>
-            </a:r>
-            <a:r>
-              <a:rPr lang="en-US" sz="1200" dirty="0"/>
-              <a:t>: Future - server components, </a:t>
-            </a:r>
-            <a:r>
-              <a:rPr lang="en-US" sz="1200" dirty="0" smtClean="0"/>
-              <a:t>database</a:t>
-            </a:r>
-          </a:p>
-          <a:p>
-            <a:pPr lvl="1"/>
-            <a:r>
-              <a:rPr lang="en-US" sz="1200" dirty="0" smtClean="0"/>
-              <a:t>Server</a:t>
-            </a:r>
-            <a:r>
-              <a:rPr lang="en-US" sz="1200" dirty="0"/>
-              <a:t>: Design: game interface - loading </a:t>
-            </a:r>
-            <a:r>
-              <a:rPr lang="en-US" sz="1200" dirty="0" smtClean="0"/>
-              <a:t>game, playing game</a:t>
-            </a:r>
-          </a:p>
-          <a:p>
-            <a:pPr lvl="1"/>
-            <a:r>
-              <a:rPr lang="en-US" sz="1200" dirty="0" smtClean="0"/>
-              <a:t>Server</a:t>
-            </a:r>
-            <a:r>
-              <a:rPr lang="en-US" sz="1200" dirty="0"/>
-              <a:t>: </a:t>
-            </a:r>
-            <a:r>
-              <a:rPr lang="en-US" sz="1200" dirty="0" smtClean="0"/>
-              <a:t>logger</a:t>
-            </a:r>
-          </a:p>
-          <a:p>
-            <a:pPr lvl="1"/>
-            <a:r>
-              <a:rPr lang="en-US" sz="1200" dirty="0" smtClean="0"/>
-              <a:t>Server</a:t>
-            </a:r>
-            <a:r>
-              <a:rPr lang="en-US" sz="1200" dirty="0"/>
-              <a:t>: Unit </a:t>
-            </a:r>
-            <a:r>
-              <a:rPr lang="en-US" sz="1200" dirty="0" smtClean="0"/>
-              <a:t>Test</a:t>
-            </a:r>
-          </a:p>
-          <a:p>
-            <a:pPr lvl="1"/>
-            <a:r>
-              <a:rPr lang="en-US" sz="1200" dirty="0" smtClean="0"/>
-              <a:t>Server</a:t>
-            </a:r>
-            <a:r>
-              <a:rPr lang="en-US" sz="1200" dirty="0"/>
-              <a:t>: Build template </a:t>
-            </a:r>
-            <a:r>
-              <a:rPr lang="en-US" sz="1200" dirty="0" smtClean="0"/>
-              <a:t>GUI</a:t>
-            </a:r>
-          </a:p>
-          <a:p>
-            <a:pPr lvl="1"/>
-            <a:r>
-              <a:rPr lang="en-US" sz="1200" dirty="0" smtClean="0"/>
-              <a:t>Server</a:t>
-            </a:r>
-            <a:r>
-              <a:rPr lang="en-US" sz="1200" dirty="0"/>
-              <a:t>: Research Server operating </a:t>
-            </a:r>
-            <a:r>
-              <a:rPr lang="en-US" sz="1200" dirty="0" smtClean="0"/>
-              <a:t>systems</a:t>
-            </a:r>
-          </a:p>
-          <a:p>
-            <a:pPr lvl="1"/>
-            <a:r>
-              <a:rPr lang="en-US" sz="1200" dirty="0" smtClean="0"/>
-              <a:t>Server</a:t>
-            </a:r>
-            <a:r>
-              <a:rPr lang="en-US" sz="1200" dirty="0"/>
-              <a:t>: Research </a:t>
-            </a:r>
-            <a:r>
-              <a:rPr lang="en-US" sz="1200" dirty="0" smtClean="0"/>
-              <a:t>Security</a:t>
-            </a:r>
-          </a:p>
-          <a:p>
-            <a:pPr lvl="1"/>
-            <a:r>
-              <a:rPr lang="en-US" sz="1200" dirty="0" smtClean="0"/>
-              <a:t>Server</a:t>
-            </a:r>
-            <a:r>
-              <a:rPr lang="en-US" sz="1200" dirty="0"/>
-              <a:t>: Convert to a </a:t>
-            </a:r>
-            <a:r>
-              <a:rPr lang="en-US" sz="1200" dirty="0" smtClean="0"/>
-              <a:t>service</a:t>
-            </a:r>
-          </a:p>
-          <a:p>
-            <a:pPr lvl="1"/>
-            <a:r>
-              <a:rPr lang="en-US" sz="1200" dirty="0" smtClean="0"/>
-              <a:t>Server</a:t>
-            </a:r>
-            <a:r>
-              <a:rPr lang="en-US" sz="1200" dirty="0"/>
-              <a:t>: Research attaching a GUI to a </a:t>
-            </a:r>
-            <a:r>
-              <a:rPr lang="en-US" sz="1200" dirty="0" smtClean="0"/>
-              <a:t>service using </a:t>
-            </a:r>
-            <a:r>
-              <a:rPr lang="en-US" sz="1200" dirty="0"/>
-              <a:t>C</a:t>
-            </a:r>
-            <a:r>
-              <a:rPr lang="en-US" sz="1200" dirty="0" smtClean="0"/>
-              <a:t>#</a:t>
-            </a:r>
-            <a:endParaRPr lang="en-US" sz="1200" dirty="0"/>
+        <p:spPr/>
+        <p:txBody>
+          <a:bodyPr/>
+          <a:lstStyle/>
+          <a:p>
+            <a:r>
+              <a:rPr lang="en-US" dirty="0" smtClean="0"/>
+              <a:t>HERE WE GGOOOOOOO</a:t>
+            </a:r>
+            <a:endParaRPr lang="en-US" dirty="0"/>
           </a:p>
         </p:txBody>
       </p:sp>
     </p:spTree>
     <p:extLst>
       <p:ext uri="{BB962C8B-B14F-4D97-AF65-F5344CB8AC3E}">
-        <p14:creationId xmlns:p14="http://schemas.microsoft.com/office/powerpoint/2010/main" val="3805795148"/>
+        <p14:creationId xmlns:p14="http://schemas.microsoft.com/office/powerpoint/2010/main" val="625723072"/>
       </p:ext>
     </p:extLst>
   </p:cSld>
@@ -4840,6 +5738,432 @@
           <a:p>
             <a:r>
               <a:rPr lang="en-US" dirty="0" smtClean="0"/>
+              <a:t>Product Backlog</a:t>
+            </a:r>
+            <a:endParaRPr lang="en-US" dirty="0"/>
+          </a:p>
+        </p:txBody>
+      </p:sp>
+      <p:sp>
+        <p:nvSpPr>
+          <p:cNvPr id="3" name="Content Placeholder 2"/>
+          <p:cNvSpPr>
+            <a:spLocks noGrp="1"/>
+          </p:cNvSpPr>
+          <p:nvPr>
+            <p:ph idx="1"/>
+          </p:nvPr>
+        </p:nvSpPr>
+        <p:spPr>
+          <a:xfrm>
+            <a:off x="457200" y="1219200"/>
+            <a:ext cx="8229600" cy="5486400"/>
+          </a:xfrm>
+        </p:spPr>
+        <p:txBody>
+          <a:bodyPr>
+            <a:noAutofit/>
+          </a:bodyPr>
+          <a:lstStyle/>
+          <a:p>
+            <a:r>
+              <a:rPr lang="en-US" sz="1200" b="1" dirty="0" err="1" smtClean="0"/>
+              <a:t>vSTB</a:t>
+            </a:r>
+            <a:endParaRPr lang="en-US" sz="1200" b="1" dirty="0"/>
+          </a:p>
+          <a:p>
+            <a:pPr lvl="1"/>
+            <a:r>
+              <a:rPr lang="en-US" sz="1200" dirty="0"/>
+              <a:t>Research </a:t>
+            </a:r>
+            <a:r>
+              <a:rPr lang="en-US" sz="1200" dirty="0" err="1"/>
+              <a:t>Qt</a:t>
+            </a:r>
+            <a:r>
+              <a:rPr lang="en-US" sz="1200" dirty="0"/>
+              <a:t> Unit Testing</a:t>
+            </a:r>
+          </a:p>
+          <a:p>
+            <a:pPr lvl="1"/>
+            <a:r>
+              <a:rPr lang="en-US" sz="1200" dirty="0" smtClean="0"/>
+              <a:t>Create </a:t>
+            </a:r>
+            <a:r>
+              <a:rPr lang="en-US" sz="1200" dirty="0"/>
+              <a:t>Checkers game as a proof </a:t>
+            </a:r>
+            <a:r>
+              <a:rPr lang="en-US" sz="1200" dirty="0" smtClean="0"/>
+              <a:t>of concept</a:t>
+            </a:r>
+          </a:p>
+          <a:p>
+            <a:pPr lvl="1"/>
+            <a:r>
+              <a:rPr lang="en-US" sz="1200" dirty="0" smtClean="0"/>
+              <a:t>Prove </a:t>
+            </a:r>
+            <a:r>
+              <a:rPr lang="en-US" sz="1200" dirty="0"/>
+              <a:t>out and implement </a:t>
+            </a:r>
+            <a:r>
+              <a:rPr lang="en-US" sz="1200" dirty="0" err="1" smtClean="0"/>
+              <a:t>QUiLoader</a:t>
+            </a:r>
+            <a:endParaRPr lang="en-US" sz="1200" dirty="0"/>
+          </a:p>
+          <a:p>
+            <a:pPr lvl="1"/>
+            <a:r>
+              <a:rPr lang="en-US" sz="1200" dirty="0" smtClean="0"/>
+              <a:t>Research </a:t>
+            </a:r>
+            <a:r>
+              <a:rPr lang="en-US" sz="1200" dirty="0"/>
+              <a:t>Dynamic </a:t>
+            </a:r>
+            <a:r>
+              <a:rPr lang="en-US" sz="1200" dirty="0" smtClean="0"/>
+              <a:t>UI</a:t>
+            </a:r>
+          </a:p>
+          <a:p>
+            <a:pPr lvl="1"/>
+            <a:r>
+              <a:rPr lang="en-US" sz="1200" dirty="0" smtClean="0"/>
+              <a:t>Refactor </a:t>
+            </a:r>
+            <a:r>
+              <a:rPr lang="en-US" sz="1200" dirty="0"/>
+              <a:t>existing STB game </a:t>
+            </a:r>
+            <a:r>
+              <a:rPr lang="en-US" sz="1200" dirty="0" smtClean="0"/>
+              <a:t>view/model </a:t>
+            </a:r>
+            <a:r>
+              <a:rPr lang="en-US" sz="1200" dirty="0"/>
+              <a:t>architecture to meet STBMF </a:t>
+            </a:r>
+            <a:r>
+              <a:rPr lang="en-US" sz="1200" dirty="0" smtClean="0"/>
+              <a:t>requirements</a:t>
+            </a:r>
+          </a:p>
+          <a:p>
+            <a:pPr lvl="1"/>
+            <a:r>
+              <a:rPr lang="en-US" sz="1200" dirty="0" smtClean="0"/>
+              <a:t>Create </a:t>
+            </a:r>
+            <a:r>
+              <a:rPr lang="en-US" sz="1200" dirty="0"/>
+              <a:t>Memory game as a proof of </a:t>
+            </a:r>
+            <a:r>
+              <a:rPr lang="en-US" sz="1200" dirty="0" smtClean="0"/>
+              <a:t>concept</a:t>
+            </a:r>
+          </a:p>
+          <a:p>
+            <a:r>
+              <a:rPr lang="en-US" sz="1200" b="1" dirty="0" err="1" smtClean="0"/>
+              <a:t>vAPMAX</a:t>
+            </a:r>
+            <a:endParaRPr lang="en-US" sz="1200" b="1" dirty="0"/>
+          </a:p>
+          <a:p>
+            <a:pPr lvl="1"/>
+            <a:r>
+              <a:rPr lang="en-US" sz="1200" dirty="0" smtClean="0"/>
+              <a:t>Integrate </a:t>
+            </a:r>
+            <a:r>
+              <a:rPr lang="en-US" sz="1200" dirty="0"/>
+              <a:t>Logger into project and </a:t>
+            </a:r>
+            <a:r>
+              <a:rPr lang="en-US" sz="1200" dirty="0" smtClean="0"/>
+              <a:t>provide basic </a:t>
+            </a:r>
+            <a:r>
+              <a:rPr lang="en-US" sz="1200" dirty="0"/>
+              <a:t>command line usage to view</a:t>
+            </a:r>
+            <a:r>
+              <a:rPr lang="en-US" sz="1200" dirty="0" smtClean="0"/>
+              <a:t>.</a:t>
+            </a:r>
+          </a:p>
+          <a:p>
+            <a:pPr lvl="1"/>
+            <a:r>
+              <a:rPr lang="en-US" sz="1200" dirty="0" smtClean="0"/>
+              <a:t>Unit Testing</a:t>
+            </a:r>
+          </a:p>
+          <a:p>
+            <a:pPr lvl="1"/>
+            <a:r>
+              <a:rPr lang="en-US" sz="1200" dirty="0"/>
+              <a:t>U</a:t>
+            </a:r>
+            <a:r>
+              <a:rPr lang="en-US" sz="1200" dirty="0" smtClean="0"/>
+              <a:t>pdate </a:t>
+            </a:r>
+            <a:r>
+              <a:rPr lang="en-US" sz="1200" dirty="0"/>
+              <a:t>Reactive Extension package to </a:t>
+            </a:r>
+            <a:r>
+              <a:rPr lang="en-US" sz="1200" dirty="0" smtClean="0"/>
+              <a:t>latest</a:t>
+            </a:r>
+            <a:endParaRPr lang="en-US" sz="1200" dirty="0"/>
+          </a:p>
+          <a:p>
+            <a:r>
+              <a:rPr lang="en-US" sz="1200" b="1" dirty="0" smtClean="0"/>
+              <a:t>Game Server</a:t>
+            </a:r>
+          </a:p>
+          <a:p>
+            <a:pPr lvl="1"/>
+            <a:r>
+              <a:rPr lang="en-US" sz="1200" dirty="0" smtClean="0"/>
+              <a:t>Server</a:t>
+            </a:r>
+            <a:r>
+              <a:rPr lang="en-US" sz="1200" dirty="0"/>
+              <a:t>: Plugin </a:t>
+            </a:r>
+            <a:r>
+              <a:rPr lang="en-US" sz="1200" dirty="0" smtClean="0"/>
+              <a:t>Interface</a:t>
+            </a:r>
+          </a:p>
+          <a:p>
+            <a:pPr lvl="1"/>
+            <a:r>
+              <a:rPr lang="en-US" sz="1200" dirty="0" smtClean="0"/>
+              <a:t>Server</a:t>
+            </a:r>
+            <a:r>
+              <a:rPr lang="en-US" sz="1200" dirty="0"/>
+              <a:t>: </a:t>
+            </a:r>
+            <a:r>
+              <a:rPr lang="en-US" sz="1200" dirty="0" smtClean="0"/>
+              <a:t>Database</a:t>
+            </a:r>
+          </a:p>
+          <a:p>
+            <a:pPr lvl="1"/>
+            <a:r>
+              <a:rPr lang="en-US" sz="1200" dirty="0" smtClean="0"/>
+              <a:t>Server</a:t>
+            </a:r>
+            <a:r>
+              <a:rPr lang="en-US" sz="1200" dirty="0"/>
+              <a:t>: UI - Stats, </a:t>
+            </a:r>
+            <a:r>
+              <a:rPr lang="en-US" sz="1200" dirty="0" smtClean="0"/>
+              <a:t>Import</a:t>
+            </a:r>
+          </a:p>
+          <a:p>
+            <a:pPr lvl="1"/>
+            <a:r>
+              <a:rPr lang="en-US" sz="1200" dirty="0" smtClean="0"/>
+              <a:t>Server</a:t>
+            </a:r>
+            <a:r>
+              <a:rPr lang="en-US" sz="1200" dirty="0"/>
+              <a:t>: Future - server components, </a:t>
+            </a:r>
+            <a:r>
+              <a:rPr lang="en-US" sz="1200" dirty="0" smtClean="0"/>
+              <a:t>database</a:t>
+            </a:r>
+          </a:p>
+          <a:p>
+            <a:pPr lvl="1"/>
+            <a:r>
+              <a:rPr lang="en-US" sz="1200" dirty="0" smtClean="0"/>
+              <a:t>Server</a:t>
+            </a:r>
+            <a:r>
+              <a:rPr lang="en-US" sz="1200" dirty="0"/>
+              <a:t>: Design: game interface - loading </a:t>
+            </a:r>
+            <a:r>
+              <a:rPr lang="en-US" sz="1200" dirty="0" smtClean="0"/>
+              <a:t>game, playing game</a:t>
+            </a:r>
+          </a:p>
+          <a:p>
+            <a:pPr lvl="1"/>
+            <a:r>
+              <a:rPr lang="en-US" sz="1200" dirty="0" smtClean="0"/>
+              <a:t>Server</a:t>
+            </a:r>
+            <a:r>
+              <a:rPr lang="en-US" sz="1200" dirty="0"/>
+              <a:t>: Unit </a:t>
+            </a:r>
+            <a:r>
+              <a:rPr lang="en-US" sz="1200" dirty="0" smtClean="0"/>
+              <a:t>Test</a:t>
+            </a:r>
+          </a:p>
+          <a:p>
+            <a:pPr lvl="1"/>
+            <a:r>
+              <a:rPr lang="en-US" sz="1200" dirty="0" smtClean="0"/>
+              <a:t>Server</a:t>
+            </a:r>
+            <a:r>
+              <a:rPr lang="en-US" sz="1200" dirty="0"/>
+              <a:t>: Build template </a:t>
+            </a:r>
+            <a:r>
+              <a:rPr lang="en-US" sz="1200" dirty="0" smtClean="0"/>
+              <a:t>GUI</a:t>
+            </a:r>
+          </a:p>
+          <a:p>
+            <a:pPr lvl="1"/>
+            <a:r>
+              <a:rPr lang="en-US" sz="1200" dirty="0" smtClean="0"/>
+              <a:t>Server</a:t>
+            </a:r>
+            <a:r>
+              <a:rPr lang="en-US" sz="1200" dirty="0"/>
+              <a:t>: Research Server operating </a:t>
+            </a:r>
+            <a:r>
+              <a:rPr lang="en-US" sz="1200" dirty="0" smtClean="0"/>
+              <a:t>systems</a:t>
+            </a:r>
+          </a:p>
+          <a:p>
+            <a:pPr lvl="1"/>
+            <a:r>
+              <a:rPr lang="en-US" sz="1200" dirty="0" smtClean="0"/>
+              <a:t>Server</a:t>
+            </a:r>
+            <a:r>
+              <a:rPr lang="en-US" sz="1200" dirty="0"/>
+              <a:t>: Research </a:t>
+            </a:r>
+            <a:r>
+              <a:rPr lang="en-US" sz="1200" dirty="0" smtClean="0"/>
+              <a:t>Security</a:t>
+            </a:r>
+          </a:p>
+          <a:p>
+            <a:pPr lvl="1"/>
+            <a:r>
+              <a:rPr lang="en-US" sz="1200" dirty="0" smtClean="0"/>
+              <a:t>Server</a:t>
+            </a:r>
+            <a:r>
+              <a:rPr lang="en-US" sz="1200" dirty="0"/>
+              <a:t>: Convert to a </a:t>
+            </a:r>
+            <a:r>
+              <a:rPr lang="en-US" sz="1200" dirty="0" smtClean="0"/>
+              <a:t>service</a:t>
+            </a:r>
+          </a:p>
+          <a:p>
+            <a:pPr lvl="1"/>
+            <a:r>
+              <a:rPr lang="en-US" sz="1200" dirty="0" smtClean="0"/>
+              <a:t>Server</a:t>
+            </a:r>
+            <a:r>
+              <a:rPr lang="en-US" sz="1200" dirty="0"/>
+              <a:t>: Research attaching a GUI to a </a:t>
+            </a:r>
+            <a:r>
+              <a:rPr lang="en-US" sz="1200" dirty="0" smtClean="0"/>
+              <a:t>service using </a:t>
+            </a:r>
+            <a:r>
+              <a:rPr lang="en-US" sz="1200" dirty="0"/>
+              <a:t>C</a:t>
+            </a:r>
+            <a:r>
+              <a:rPr lang="en-US" sz="1200" dirty="0" smtClean="0"/>
+              <a:t>#</a:t>
+            </a:r>
+            <a:endParaRPr lang="en-US" sz="1200" dirty="0"/>
+          </a:p>
+        </p:txBody>
+      </p:sp>
+    </p:spTree>
+    <p:extLst>
+      <p:ext uri="{BB962C8B-B14F-4D97-AF65-F5344CB8AC3E}">
+        <p14:creationId xmlns:p14="http://schemas.microsoft.com/office/powerpoint/2010/main" val="3805795148"/>
+      </p:ext>
+    </p:extLst>
+  </p:cSld>
+  <p:clrMapOvr>
+    <a:masterClrMapping/>
+  </p:clrMapOvr>
+  <p:timing>
+    <p:tnLst>
+      <p:par>
+        <p:cTn id="1" dur="indefinite" restart="never" nodeType="tmRoot"/>
+      </p:par>
+    </p:tnLst>
+  </p:timing>
+</p:sld>
+</file>
+
+<file path=ppt/slides/slide16.xml><?xml version="1.0" encoding="utf-8"?>
+<p:sld xmlns:a="http://schemas.openxmlformats.org/drawingml/2006/main" xmlns:r="http://schemas.openxmlformats.org/officeDocument/2006/relationships" xmlns:p="http://schemas.openxmlformats.org/presentationml/2006/main">
+  <p:cSld>
+    <p:spTree>
+      <p:nvGrpSpPr>
+        <p:cNvPr id="1" name=""/>
+        <p:cNvGrpSpPr/>
+        <p:nvPr/>
+      </p:nvGrpSpPr>
+      <p:grpSpPr>
+        <a:xfrm>
+          <a:off x="0" y="0"/>
+          <a:ext cx="0" cy="0"/>
+          <a:chOff x="0" y="0"/>
+          <a:chExt cx="0" cy="0"/>
+        </a:xfrm>
+      </p:grpSpPr>
+      <p:sp>
+        <p:nvSpPr>
+          <p:cNvPr id="2" name="Title 1"/>
+          <p:cNvSpPr>
+            <a:spLocks noGrp="1"/>
+          </p:cNvSpPr>
+          <p:nvPr>
+            <p:ph type="title"/>
+          </p:nvPr>
+        </p:nvSpPr>
+        <p:spPr/>
+        <p:txBody>
+          <a:bodyPr/>
+          <a:lstStyle/>
+          <a:p>
+            <a:r>
+              <a:rPr lang="en-US" dirty="0" smtClean="0"/>
               <a:t>Questions</a:t>
             </a:r>
             <a:endParaRPr lang="en-US" dirty="0"/>
@@ -4875,6 +6199,13 @@
   <p:clrMapOvr>
     <a:masterClrMapping/>
   </p:clrMapOvr>
+  <p:timing>
+    <p:tnLst>
+      <p:par>
+        <p:cTn id="1" dur="indefinite" restart="never" nodeType="tmRoot"/>
+      </p:par>
+    </p:tnLst>
+  </p:timing>
 </p:sld>
 </file>
 
@@ -4954,8 +6285,9 @@
           <a:p>
             <a:r>
               <a:rPr lang="en-US" sz="2800" dirty="0" smtClean="0"/>
-              <a:t>APMAX</a:t>
-            </a:r>
+              <a:t>APMax</a:t>
+            </a:r>
+            <a:endParaRPr lang="en-US" sz="2800" dirty="0" smtClean="0"/>
           </a:p>
           <a:p>
             <a:pPr lvl="1"/>
@@ -5015,6 +6347,13 @@
   <p:clrMapOvr>
     <a:masterClrMapping/>
   </p:clrMapOvr>
+  <p:timing>
+    <p:tnLst>
+      <p:par>
+        <p:cTn id="1" dur="indefinite" restart="never" nodeType="tmRoot"/>
+      </p:par>
+    </p:tnLst>
+  </p:timing>
 </p:sld>
 </file>
 
@@ -5081,14 +6420,35 @@
           <a:p>
             <a:r>
               <a:rPr lang="en-US" dirty="0" smtClean="0"/>
-              <a:t>Design a template game UI for STBs in an APMAX environment</a:t>
-            </a:r>
-          </a:p>
-          <a:p>
+              <a:t>Design a template game UI for STBs in an </a:t>
+            </a:r>
             <a:r>
               <a:rPr lang="en-US" dirty="0" smtClean="0"/>
-              <a:t>Build a virtual APMAX to simulate future communication protocols.</a:t>
-            </a:r>
+              <a:t>APMax </a:t>
+            </a:r>
+            <a:r>
+              <a:rPr lang="en-US" dirty="0" smtClean="0"/>
+              <a:t>environment</a:t>
+            </a:r>
+          </a:p>
+          <a:p>
+            <a:r>
+              <a:rPr lang="en-US" dirty="0" smtClean="0"/>
+              <a:t>Build a virtual </a:t>
+            </a:r>
+            <a:r>
+              <a:rPr lang="en-US" dirty="0" smtClean="0"/>
+              <a:t>APMax </a:t>
+            </a:r>
+            <a:r>
+              <a:rPr lang="en-US" dirty="0" smtClean="0"/>
+              <a:t>to simulate future communication </a:t>
+            </a:r>
+            <a:r>
+              <a:rPr lang="en-US" dirty="0" smtClean="0"/>
+              <a:t>protocols</a:t>
+            </a:r>
+            <a:endParaRPr lang="en-US" dirty="0" smtClean="0"/>
           </a:p>
           <a:p>
             <a:r>
@@ -5114,6 +6474,13 @@
   <p:clrMapOvr>
     <a:masterClrMapping/>
   </p:clrMapOvr>
+  <p:timing>
+    <p:tnLst>
+      <p:par>
+        <p:cTn id="1" dur="indefinite" restart="never" nodeType="tmRoot"/>
+      </p:par>
+    </p:tnLst>
+  </p:timing>
 </p:sld>
 </file>
 
@@ -5259,6 +6626,13 @@
   <p:clrMapOvr>
     <a:masterClrMapping/>
   </p:clrMapOvr>
+  <p:timing>
+    <p:tnLst>
+      <p:par>
+        <p:cTn id="1" dur="indefinite" restart="never" nodeType="tmRoot"/>
+      </p:par>
+    </p:tnLst>
+  </p:timing>
 </p:sld>
 </file>
 
@@ -5377,6 +6751,13 @@
   <p:clrMapOvr>
     <a:masterClrMapping/>
   </p:clrMapOvr>
+  <p:timing>
+    <p:tnLst>
+      <p:par>
+        <p:cTn id="1" dur="indefinite" restart="never" nodeType="tmRoot"/>
+      </p:par>
+    </p:tnLst>
+  </p:timing>
 </p:sld>
 </file>
 
@@ -5506,6 +6887,13 @@
   <p:clrMapOvr>
     <a:masterClrMapping/>
   </p:clrMapOvr>
+  <p:timing>
+    <p:tnLst>
+      <p:par>
+        <p:cTn id="1" dur="indefinite" restart="never" nodeType="tmRoot"/>
+      </p:par>
+    </p:tnLst>
+  </p:timing>
 </p:sld>
 </file>
 
@@ -5568,7 +6956,6 @@
               <a:rPr lang="en-US" dirty="0" smtClean="0"/>
               <a:t>New request response definitions</a:t>
             </a:r>
-            <a:endParaRPr lang="en-US" dirty="0" smtClean="0"/>
           </a:p>
           <a:p>
             <a:r>
@@ -5597,7 +6984,6 @@
               <a:rPr lang="en-US" dirty="0" smtClean="0"/>
               <a:t> Multiplayer)</a:t>
             </a:r>
-            <a:endParaRPr lang="en-US" dirty="0" smtClean="0"/>
           </a:p>
           <a:p>
             <a:r>
@@ -5608,13 +6994,8 @@
           <a:p>
             <a:r>
               <a:rPr lang="en-US" dirty="0" smtClean="0"/>
-              <a:t>Increased </a:t>
-            </a:r>
-            <a:r>
-              <a:rPr lang="en-US" dirty="0" smtClean="0"/>
-              <a:t>availability to Users</a:t>
-            </a:r>
-            <a:endParaRPr lang="en-US" dirty="0" smtClean="0"/>
+              <a:t>Increased availability to Users</a:t>
+            </a:r>
           </a:p>
           <a:p>
             <a:endParaRPr lang="en-US" dirty="0"/>
@@ -6441,4 +7822,289 @@
   <a:objectDefaults/>
   <a:extraClrSchemeLst/>
 </a:theme>
+</file>
+
+<file path=ppt/theme/theme2.xml><?xml version="1.0" encoding="utf-8"?>
+<a:theme xmlns:a="http://schemas.openxmlformats.org/drawingml/2006/main" name="Office Theme">
+  <a:themeElements>
+    <a:clrScheme name="Office">
+      <a:dk1>
+        <a:sysClr val="windowText" lastClr="000000"/>
+      </a:dk1>
+      <a:lt1>
+        <a:sysClr val="window" lastClr="FFFFFF"/>
+      </a:lt1>
+      <a:dk2>
+        <a:srgbClr val="1F497D"/>
+      </a:dk2>
+      <a:lt2>
+        <a:srgbClr val="EEECE1"/>
+      </a:lt2>
+      <a:accent1>
+        <a:srgbClr val="4F81BD"/>
+      </a:accent1>
+      <a:accent2>
+        <a:srgbClr val="C0504D"/>
+      </a:accent2>
+      <a:accent3>
+        <a:srgbClr val="9BBB59"/>
+      </a:accent3>
+      <a:accent4>
+        <a:srgbClr val="8064A2"/>
+      </a:accent4>
+      <a:accent5>
+        <a:srgbClr val="4BACC6"/>
+      </a:accent5>
+      <a:accent6>
+        <a:srgbClr val="F79646"/>
+      </a:accent6>
+      <a:hlink>
+        <a:srgbClr val="0000FF"/>
+      </a:hlink>
+      <a:folHlink>
+        <a:srgbClr val="800080"/>
+      </a:folHlink>
+    </a:clrScheme>
+    <a:fontScheme name="Office">
+      <a:majorFont>
+        <a:latin typeface="Calibri"/>
+        <a:ea typeface=""/>
+        <a:cs typeface=""/>
+        <a:font script="Jpan" typeface="ＭＳ Ｐゴシック"/>
+        <a:font script="Hang" typeface="맑은 고딕"/>
+        <a:font script="Hans" typeface="宋体"/>
+        <a:font script="Hant" typeface="新細明體"/>
+        <a:font script="Arab" typeface="Times New Roman"/>
+        <a:font script="Hebr" typeface="Times New Roman"/>
+        <a:font script="Thai" typeface="Angsana New"/>
+        <a:font script="Ethi" typeface="Nyala"/>
+        <a:font script="Beng" typeface="Vrinda"/>
+        <a:font script="Gujr" typeface="Shruti"/>
+        <a:font script="Khmr" typeface="MoolBoran"/>
+        <a:font script="Knda" typeface="Tunga"/>
+        <a:font script="Guru" typeface="Raavi"/>
+        <a:font script="Cans" typeface="Euphemia"/>
+        <a:font script="Cher" typeface="Plantagenet Cherokee"/>
+        <a:font script="Yiii" typeface="Microsoft Yi Baiti"/>
+        <a:font script="Tibt" typeface="Microsoft Himalaya"/>
+        <a:font script="Thaa" typeface="MV Boli"/>
+        <a:font script="Deva" typeface="Mangal"/>
+        <a:font script="Telu" typeface="Gautami"/>
+        <a:font script="Taml" typeface="Latha"/>
+        <a:font script="Syrc" typeface="Estrangelo Edessa"/>
+        <a:font script="Orya" typeface="Kalinga"/>
+        <a:font script="Mlym" typeface="Kartika"/>
+        <a:font script="Laoo" typeface="DokChampa"/>
+        <a:font script="Sinh" typeface="Iskoola Pota"/>
+        <a:font script="Mong" typeface="Mongolian Baiti"/>
+        <a:font script="Viet" typeface="Times New Roman"/>
+        <a:font script="Uigh" typeface="Microsoft Uighur"/>
+        <a:font script="Geor" typeface="Sylfaen"/>
+      </a:majorFont>
+      <a:minorFont>
+        <a:latin typeface="Calibri"/>
+        <a:ea typeface=""/>
+        <a:cs typeface=""/>
+        <a:font script="Jpan" typeface="ＭＳ Ｐゴシック"/>
+        <a:font script="Hang" typeface="맑은 고딕"/>
+        <a:font script="Hans" typeface="宋体"/>
+        <a:font script="Hant" typeface="新細明體"/>
+        <a:font script="Arab" typeface="Arial"/>
+        <a:font script="Hebr" typeface="Arial"/>
+        <a:font script="Thai" typeface="Cordia New"/>
+        <a:font script="Ethi" typeface="Nyala"/>
+        <a:font script="Beng" typeface="Vrinda"/>
+        <a:font script="Gujr" typeface="Shruti"/>
+        <a:font script="Khmr" typeface="DaunPenh"/>
+        <a:font script="Knda" typeface="Tunga"/>
+        <a:font script="Guru" typeface="Raavi"/>
+        <a:font script="Cans" typeface="Euphemia"/>
+        <a:font script="Cher" typeface="Plantagenet Cherokee"/>
+        <a:font script="Yiii" typeface="Microsoft Yi Baiti"/>
+        <a:font script="Tibt" typeface="Microsoft Himalaya"/>
+        <a:font script="Thaa" typeface="MV Boli"/>
+        <a:font script="Deva" typeface="Mangal"/>
+        <a:font script="Telu" typeface="Gautami"/>
+        <a:font script="Taml" typeface="Latha"/>
+        <a:font script="Syrc" typeface="Estrangelo Edessa"/>
+        <a:font script="Orya" typeface="Kalinga"/>
+        <a:font script="Mlym" typeface="Kartika"/>
+        <a:font script="Laoo" typeface="DokChampa"/>
+        <a:font script="Sinh" typeface="Iskoola Pota"/>
+        <a:font script="Mong" typeface="Mongolian Baiti"/>
+        <a:font script="Viet" typeface="Arial"/>
+        <a:font script="Uigh" typeface="Microsoft Uighur"/>
+        <a:font script="Geor" typeface="Sylfaen"/>
+      </a:minorFont>
+    </a:fontScheme>
+    <a:fmtScheme name="Office">
+      <a:fillStyleLst>
+        <a:solidFill>
+          <a:schemeClr val="phClr"/>
+        </a:solidFill>
+        <a:gradFill rotWithShape="1">
+          <a:gsLst>
+            <a:gs pos="0">
+              <a:schemeClr val="phClr">
+                <a:tint val="50000"/>
+                <a:satMod val="300000"/>
+              </a:schemeClr>
+            </a:gs>
+            <a:gs pos="35000">
+              <a:schemeClr val="phClr">
+                <a:tint val="37000"/>
+                <a:satMod val="300000"/>
+              </a:schemeClr>
+            </a:gs>
+            <a:gs pos="100000">
+              <a:schemeClr val="phClr">
+                <a:tint val="15000"/>
+                <a:satMod val="350000"/>
+              </a:schemeClr>
+            </a:gs>
+          </a:gsLst>
+          <a:lin ang="16200000" scaled="1"/>
+        </a:gradFill>
+        <a:gradFill rotWithShape="1">
+          <a:gsLst>
+            <a:gs pos="0">
+              <a:schemeClr val="phClr">
+                <a:shade val="51000"/>
+                <a:satMod val="130000"/>
+              </a:schemeClr>
+            </a:gs>
+            <a:gs pos="80000">
+              <a:schemeClr val="phClr">
+                <a:shade val="93000"/>
+                <a:satMod val="130000"/>
+              </a:schemeClr>
+            </a:gs>
+            <a:gs pos="100000">
+              <a:schemeClr val="phClr">
+                <a:shade val="94000"/>
+                <a:satMod val="135000"/>
+              </a:schemeClr>
+            </a:gs>
+          </a:gsLst>
+          <a:lin ang="16200000" scaled="0"/>
+        </a:gradFill>
+      </a:fillStyleLst>
+      <a:lnStyleLst>
+        <a:ln w="9525" cap="flat" cmpd="sng" algn="ctr">
+          <a:solidFill>
+            <a:schemeClr val="phClr">
+              <a:shade val="95000"/>
+              <a:satMod val="105000"/>
+            </a:schemeClr>
+          </a:solidFill>
+          <a:prstDash val="solid"/>
+        </a:ln>
+        <a:ln w="25400" cap="flat" cmpd="sng" algn="ctr">
+          <a:solidFill>
+            <a:schemeClr val="phClr"/>
+          </a:solidFill>
+          <a:prstDash val="solid"/>
+        </a:ln>
+        <a:ln w="38100" cap="flat" cmpd="sng" algn="ctr">
+          <a:solidFill>
+            <a:schemeClr val="phClr"/>
+          </a:solidFill>
+          <a:prstDash val="solid"/>
+        </a:ln>
+      </a:lnStyleLst>
+      <a:effectStyleLst>
+        <a:effectStyle>
+          <a:effectLst>
+            <a:outerShdw blurRad="40000" dist="20000" dir="5400000" rotWithShape="0">
+              <a:srgbClr val="000000">
+                <a:alpha val="38000"/>
+              </a:srgbClr>
+            </a:outerShdw>
+          </a:effectLst>
+        </a:effectStyle>
+        <a:effectStyle>
+          <a:effectLst>
+            <a:outerShdw blurRad="40000" dist="23000" dir="5400000" rotWithShape="0">
+              <a:srgbClr val="000000">
+                <a:alpha val="35000"/>
+              </a:srgbClr>
+            </a:outerShdw>
+          </a:effectLst>
+        </a:effectStyle>
+        <a:effectStyle>
+          <a:effectLst>
+            <a:outerShdw blurRad="40000" dist="23000" dir="5400000" rotWithShape="0">
+              <a:srgbClr val="000000">
+                <a:alpha val="35000"/>
+              </a:srgbClr>
+            </a:outerShdw>
+          </a:effectLst>
+          <a:scene3d>
+            <a:camera prst="orthographicFront">
+              <a:rot lat="0" lon="0" rev="0"/>
+            </a:camera>
+            <a:lightRig rig="threePt" dir="t">
+              <a:rot lat="0" lon="0" rev="1200000"/>
+            </a:lightRig>
+          </a:scene3d>
+          <a:sp3d>
+            <a:bevelT w="63500" h="25400"/>
+          </a:sp3d>
+        </a:effectStyle>
+      </a:effectStyleLst>
+      <a:bgFillStyleLst>
+        <a:solidFill>
+          <a:schemeClr val="phClr"/>
+        </a:solidFill>
+        <a:gradFill rotWithShape="1">
+          <a:gsLst>
+            <a:gs pos="0">
+              <a:schemeClr val="phClr">
+                <a:tint val="40000"/>
+                <a:satMod val="350000"/>
+              </a:schemeClr>
+            </a:gs>
+            <a:gs pos="40000">
+              <a:schemeClr val="phClr">
+                <a:tint val="45000"/>
+                <a:shade val="99000"/>
+                <a:satMod val="350000"/>
+              </a:schemeClr>
+            </a:gs>
+            <a:gs pos="100000">
+              <a:schemeClr val="phClr">
+                <a:shade val="20000"/>
+                <a:satMod val="255000"/>
+              </a:schemeClr>
+            </a:gs>
+          </a:gsLst>
+          <a:path path="circle">
+            <a:fillToRect l="50000" t="-80000" r="50000" b="180000"/>
+          </a:path>
+        </a:gradFill>
+        <a:gradFill rotWithShape="1">
+          <a:gsLst>
+            <a:gs pos="0">
+              <a:schemeClr val="phClr">
+                <a:tint val="80000"/>
+                <a:satMod val="300000"/>
+              </a:schemeClr>
+            </a:gs>
+            <a:gs pos="100000">
+              <a:schemeClr val="phClr">
+                <a:shade val="30000"/>
+                <a:satMod val="200000"/>
+              </a:schemeClr>
+            </a:gs>
+          </a:gsLst>
+          <a:path path="circle">
+            <a:fillToRect l="50000" t="50000" r="50000" b="50000"/>
+          </a:path>
+        </a:gradFill>
+      </a:bgFillStyleLst>
+    </a:fmtScheme>
+  </a:themeElements>
+  <a:objectDefaults/>
+  <a:extraClrSchemeLst/>
+</a:theme>
 </file>
--- a/docs/srDesign_ClientPresentation2.pptx
+++ b/docs/srDesign_ClientPresentation2.pptx
@@ -2,10 +2,10 @@
 <file path=ppt/presentation.xml><?xml version="1.0" encoding="utf-8"?>
 <p:presentation xmlns:a="http://schemas.openxmlformats.org/drawingml/2006/main" xmlns:r="http://schemas.openxmlformats.org/officeDocument/2006/relationships" xmlns:p="http://schemas.openxmlformats.org/presentationml/2006/main" saveSubsetFonts="1">
   <p:sldMasterIdLst>
-    <p:sldMasterId id="2147483648" r:id="rId1"/>
+    <p:sldMasterId id="2147483660" r:id="rId1"/>
   </p:sldMasterIdLst>
   <p:notesMasterIdLst>
-    <p:notesMasterId r:id="rId18"/>
+    <p:notesMasterId r:id="rId22"/>
   </p:notesMasterIdLst>
   <p:sldIdLst>
     <p:sldId id="256" r:id="rId2"/>
@@ -15,15 +15,19 @@
     <p:sldId id="262" r:id="rId6"/>
     <p:sldId id="263" r:id="rId7"/>
     <p:sldId id="264" r:id="rId8"/>
-    <p:sldId id="271" r:id="rId9"/>
-    <p:sldId id="270" r:id="rId10"/>
-    <p:sldId id="272" r:id="rId11"/>
-    <p:sldId id="265" r:id="rId12"/>
-    <p:sldId id="273" r:id="rId13"/>
-    <p:sldId id="266" r:id="rId14"/>
-    <p:sldId id="267" r:id="rId15"/>
-    <p:sldId id="269" r:id="rId16"/>
-    <p:sldId id="268" r:id="rId17"/>
+    <p:sldId id="274" r:id="rId9"/>
+    <p:sldId id="275" r:id="rId10"/>
+    <p:sldId id="271" r:id="rId11"/>
+    <p:sldId id="276" r:id="rId12"/>
+    <p:sldId id="277" r:id="rId13"/>
+    <p:sldId id="278" r:id="rId14"/>
+    <p:sldId id="265" r:id="rId15"/>
+    <p:sldId id="273" r:id="rId16"/>
+    <p:sldId id="279" r:id="rId17"/>
+    <p:sldId id="266" r:id="rId18"/>
+    <p:sldId id="280" r:id="rId19"/>
+    <p:sldId id="269" r:id="rId20"/>
+    <p:sldId id="268" r:id="rId21"/>
   </p:sldIdLst>
   <p:sldSz cx="9144000" cy="6858000" type="screen4x3"/>
   <p:notesSz cx="6858000" cy="9144000"/>
@@ -608,10 +612,10 @@
           <a:lstStyle/>
           <a:p>
             <a:r>
-              <a:rPr lang="en-US" smtClean="0"/>
-              <a:t>Kevin</a:t>
-            </a:r>
-            <a:endParaRPr lang="en-US"/>
+              <a:rPr lang="en-US" dirty="0" smtClean="0"/>
+              <a:t>David</a:t>
+            </a:r>
+            <a:endParaRPr lang="en-US" dirty="0"/>
           </a:p>
         </p:txBody>
       </p:sp>
@@ -633,6 +637,182 @@
             <a:fld id="{4FA95CE1-299B-42DC-A2C0-27ACC2F8D3F4}" type="slidenum">
               <a:rPr lang="en-US" smtClean="0"/>
               <a:t>15</a:t>
+            </a:fld>
+            <a:endParaRPr lang="en-US"/>
+          </a:p>
+        </p:txBody>
+      </p:sp>
+    </p:spTree>
+    <p:extLst>
+      <p:ext uri="{BB962C8B-B14F-4D97-AF65-F5344CB8AC3E}">
+        <p14:creationId xmlns:p14="http://schemas.microsoft.com/office/powerpoint/2010/main" val="87975715"/>
+      </p:ext>
+    </p:extLst>
+  </p:cSld>
+  <p:clrMapOvr>
+    <a:masterClrMapping/>
+  </p:clrMapOvr>
+</p:notes>
+</file>
+
+<file path=ppt/notesSlides/notesSlide11.xml><?xml version="1.0" encoding="utf-8"?>
+<p:notes xmlns:a="http://schemas.openxmlformats.org/drawingml/2006/main" xmlns:r="http://schemas.openxmlformats.org/officeDocument/2006/relationships" xmlns:p="http://schemas.openxmlformats.org/presentationml/2006/main">
+  <p:cSld>
+    <p:spTree>
+      <p:nvGrpSpPr>
+        <p:cNvPr id="1" name=""/>
+        <p:cNvGrpSpPr/>
+        <p:nvPr/>
+      </p:nvGrpSpPr>
+      <p:grpSpPr>
+        <a:xfrm>
+          <a:off x="0" y="0"/>
+          <a:ext cx="0" cy="0"/>
+          <a:chOff x="0" y="0"/>
+          <a:chExt cx="0" cy="0"/>
+        </a:xfrm>
+      </p:grpSpPr>
+      <p:sp>
+        <p:nvSpPr>
+          <p:cNvPr id="2" name="Slide Image Placeholder 1"/>
+          <p:cNvSpPr>
+            <a:spLocks noGrp="1" noRot="1" noChangeAspect="1"/>
+          </p:cNvSpPr>
+          <p:nvPr>
+            <p:ph type="sldImg"/>
+          </p:nvPr>
+        </p:nvSpPr>
+        <p:spPr/>
+      </p:sp>
+      <p:sp>
+        <p:nvSpPr>
+          <p:cNvPr id="3" name="Notes Placeholder 2"/>
+          <p:cNvSpPr>
+            <a:spLocks noGrp="1"/>
+          </p:cNvSpPr>
+          <p:nvPr>
+            <p:ph type="body" idx="1"/>
+          </p:nvPr>
+        </p:nvSpPr>
+        <p:spPr/>
+        <p:txBody>
+          <a:bodyPr/>
+          <a:lstStyle/>
+          <a:p>
+            <a:r>
+              <a:rPr lang="en-US" dirty="0" smtClean="0"/>
+              <a:t>Kevin</a:t>
+            </a:r>
+            <a:endParaRPr lang="en-US" dirty="0"/>
+          </a:p>
+        </p:txBody>
+      </p:sp>
+      <p:sp>
+        <p:nvSpPr>
+          <p:cNvPr id="4" name="Slide Number Placeholder 3"/>
+          <p:cNvSpPr>
+            <a:spLocks noGrp="1"/>
+          </p:cNvSpPr>
+          <p:nvPr>
+            <p:ph type="sldNum" sz="quarter" idx="10"/>
+          </p:nvPr>
+        </p:nvSpPr>
+        <p:spPr/>
+        <p:txBody>
+          <a:bodyPr/>
+          <a:lstStyle/>
+          <a:p>
+            <a:fld id="{4FA95CE1-299B-42DC-A2C0-27ACC2F8D3F4}" type="slidenum">
+              <a:rPr lang="en-US" smtClean="0"/>
+              <a:t>17</a:t>
+            </a:fld>
+            <a:endParaRPr lang="en-US"/>
+          </a:p>
+        </p:txBody>
+      </p:sp>
+    </p:spTree>
+    <p:extLst>
+      <p:ext uri="{BB962C8B-B14F-4D97-AF65-F5344CB8AC3E}">
+        <p14:creationId xmlns:p14="http://schemas.microsoft.com/office/powerpoint/2010/main" val="1654069049"/>
+      </p:ext>
+    </p:extLst>
+  </p:cSld>
+  <p:clrMapOvr>
+    <a:masterClrMapping/>
+  </p:clrMapOvr>
+</p:notes>
+</file>
+
+<file path=ppt/notesSlides/notesSlide12.xml><?xml version="1.0" encoding="utf-8"?>
+<p:notes xmlns:a="http://schemas.openxmlformats.org/drawingml/2006/main" xmlns:r="http://schemas.openxmlformats.org/officeDocument/2006/relationships" xmlns:p="http://schemas.openxmlformats.org/presentationml/2006/main">
+  <p:cSld>
+    <p:spTree>
+      <p:nvGrpSpPr>
+        <p:cNvPr id="1" name=""/>
+        <p:cNvGrpSpPr/>
+        <p:nvPr/>
+      </p:nvGrpSpPr>
+      <p:grpSpPr>
+        <a:xfrm>
+          <a:off x="0" y="0"/>
+          <a:ext cx="0" cy="0"/>
+          <a:chOff x="0" y="0"/>
+          <a:chExt cx="0" cy="0"/>
+        </a:xfrm>
+      </p:grpSpPr>
+      <p:sp>
+        <p:nvSpPr>
+          <p:cNvPr id="2" name="Slide Image Placeholder 1"/>
+          <p:cNvSpPr>
+            <a:spLocks noGrp="1" noRot="1" noChangeAspect="1"/>
+          </p:cNvSpPr>
+          <p:nvPr>
+            <p:ph type="sldImg"/>
+          </p:nvPr>
+        </p:nvSpPr>
+        <p:spPr/>
+      </p:sp>
+      <p:sp>
+        <p:nvSpPr>
+          <p:cNvPr id="3" name="Notes Placeholder 2"/>
+          <p:cNvSpPr>
+            <a:spLocks noGrp="1"/>
+          </p:cNvSpPr>
+          <p:nvPr>
+            <p:ph type="body" idx="1"/>
+          </p:nvPr>
+        </p:nvSpPr>
+        <p:spPr/>
+        <p:txBody>
+          <a:bodyPr/>
+          <a:lstStyle/>
+          <a:p>
+            <a:r>
+              <a:rPr lang="en-US" smtClean="0"/>
+              <a:t>Kevin</a:t>
+            </a:r>
+            <a:endParaRPr lang="en-US"/>
+          </a:p>
+        </p:txBody>
+      </p:sp>
+      <p:sp>
+        <p:nvSpPr>
+          <p:cNvPr id="4" name="Slide Number Placeholder 3"/>
+          <p:cNvSpPr>
+            <a:spLocks noGrp="1"/>
+          </p:cNvSpPr>
+          <p:nvPr>
+            <p:ph type="sldNum" sz="quarter" idx="10"/>
+          </p:nvPr>
+        </p:nvSpPr>
+        <p:spPr/>
+        <p:txBody>
+          <a:bodyPr/>
+          <a:lstStyle/>
+          <a:p>
+            <a:fld id="{4FA95CE1-299B-42DC-A2C0-27ACC2F8D3F4}" type="slidenum">
+              <a:rPr lang="en-US" smtClean="0"/>
+              <a:t>19</a:t>
             </a:fld>
             <a:endParaRPr lang="en-US"/>
           </a:p>
@@ -1137,7 +1317,7 @@
           <a:p>
             <a:r>
               <a:rPr lang="en-US" dirty="0" smtClean="0"/>
-              <a:t>David</a:t>
+              <a:t>Marshall</a:t>
             </a:r>
             <a:endParaRPr lang="en-US" dirty="0"/>
           </a:p>
@@ -1160,7 +1340,7 @@
           <a:p>
             <a:fld id="{4FA95CE1-299B-42DC-A2C0-27ACC2F8D3F4}" type="slidenum">
               <a:rPr lang="en-US" smtClean="0"/>
-              <a:t>11</a:t>
+              <a:t>7</a:t>
             </a:fld>
             <a:endParaRPr lang="en-US"/>
           </a:p>
@@ -1169,7 +1349,7 @@
     </p:spTree>
     <p:extLst>
       <p:ext uri="{BB962C8B-B14F-4D97-AF65-F5344CB8AC3E}">
-        <p14:creationId xmlns:p14="http://schemas.microsoft.com/office/powerpoint/2010/main" val="3734626152"/>
+        <p14:creationId xmlns:p14="http://schemas.microsoft.com/office/powerpoint/2010/main" val="549371919"/>
       </p:ext>
     </p:extLst>
   </p:cSld>
@@ -1223,10 +1403,29 @@
           <a:bodyPr/>
           <a:lstStyle/>
           <a:p>
+            <a:pPr marL="0" marR="0" indent="0" algn="l" defTabSz="914400" rtl="0" eaLnBrk="1" fontAlgn="auto" latinLnBrk="0" hangingPunct="1">
+              <a:lnSpc>
+                <a:spcPct val="100000"/>
+              </a:lnSpc>
+              <a:spcBef>
+                <a:spcPts val="0"/>
+              </a:spcBef>
+              <a:spcAft>
+                <a:spcPts val="0"/>
+              </a:spcAft>
+              <a:buClrTx/>
+              <a:buSzTx/>
+              <a:buFontTx/>
+              <a:buNone/>
+              <a:tabLst/>
+              <a:defRPr/>
+            </a:pPr>
             <a:r>
               <a:rPr lang="en-US" dirty="0" smtClean="0"/>
-              <a:t>David</a:t>
-            </a:r>
+              <a:t>Marshall</a:t>
+            </a:r>
+          </a:p>
+          <a:p>
             <a:endParaRPr lang="en-US" dirty="0"/>
           </a:p>
         </p:txBody>
@@ -1248,7 +1447,7 @@
           <a:p>
             <a:fld id="{4FA95CE1-299B-42DC-A2C0-27ACC2F8D3F4}" type="slidenum">
               <a:rPr lang="en-US" smtClean="0"/>
-              <a:t>12</a:t>
+              <a:t>10</a:t>
             </a:fld>
             <a:endParaRPr lang="en-US"/>
           </a:p>
@@ -1257,7 +1456,7 @@
     </p:spTree>
     <p:extLst>
       <p:ext uri="{BB962C8B-B14F-4D97-AF65-F5344CB8AC3E}">
-        <p14:creationId xmlns:p14="http://schemas.microsoft.com/office/powerpoint/2010/main" val="87975715"/>
+        <p14:creationId xmlns:p14="http://schemas.microsoft.com/office/powerpoint/2010/main" val="2665847914"/>
       </p:ext>
     </p:extLst>
   </p:cSld>
@@ -1313,7 +1512,7 @@
           <a:p>
             <a:r>
               <a:rPr lang="en-US" dirty="0" smtClean="0"/>
-              <a:t>Kevin</a:t>
+              <a:t>David</a:t>
             </a:r>
             <a:endParaRPr lang="en-US" dirty="0"/>
           </a:p>
@@ -1336,7 +1535,7 @@
           <a:p>
             <a:fld id="{4FA95CE1-299B-42DC-A2C0-27ACC2F8D3F4}" type="slidenum">
               <a:rPr lang="en-US" smtClean="0"/>
-              <a:t>13</a:t>
+              <a:t>14</a:t>
             </a:fld>
             <a:endParaRPr lang="en-US"/>
           </a:p>
@@ -1345,7 +1544,7 @@
     </p:spTree>
     <p:extLst>
       <p:ext uri="{BB962C8B-B14F-4D97-AF65-F5344CB8AC3E}">
-        <p14:creationId xmlns:p14="http://schemas.microsoft.com/office/powerpoint/2010/main" val="1654069049"/>
+        <p14:creationId xmlns:p14="http://schemas.microsoft.com/office/powerpoint/2010/main" val="3734626152"/>
       </p:ext>
     </p:extLst>
   </p:cSld>
@@ -1356,7 +1555,7 @@
 </file>
 
 <file path=ppt/slideLayouts/slideLayout1.xml><?xml version="1.0" encoding="utf-8"?>
-<p:sldLayout xmlns:a="http://schemas.openxmlformats.org/drawingml/2006/main" xmlns:r="http://schemas.openxmlformats.org/officeDocument/2006/relationships" xmlns:p="http://schemas.openxmlformats.org/presentationml/2006/main" type="title" preserve="1">
+<p:sldLayout xmlns:a="http://schemas.openxmlformats.org/drawingml/2006/main" xmlns:r="http://schemas.openxmlformats.org/officeDocument/2006/relationships" xmlns:p="http://schemas.openxmlformats.org/presentationml/2006/main" showMasterSp="0" type="title" preserve="1">
   <p:cSld name="Title Slide">
     <p:spTree>
       <p:nvGrpSpPr>
@@ -1374,35 +1573,132 @@
       </p:grpSpPr>
       <p:sp>
         <p:nvSpPr>
-          <p:cNvPr id="2" name="Title 1"/>
-          <p:cNvSpPr>
-            <a:spLocks noGrp="1"/>
-          </p:cNvSpPr>
-          <p:nvPr>
-            <p:ph type="ctrTitle"/>
-          </p:nvPr>
+          <p:cNvPr id="10" name="Right Triangle 9"/>
+          <p:cNvSpPr/>
+          <p:nvPr/>
         </p:nvSpPr>
         <p:spPr>
           <a:xfrm>
-            <a:off x="685800" y="2130425"/>
-            <a:ext cx="7772400" cy="1470025"/>
+            <a:off x="-2" y="4664147"/>
+            <a:ext cx="9151089" cy="0"/>
+          </a:xfrm>
+          <a:prstGeom prst="rtTriangle">
+            <a:avLst/>
+          </a:prstGeom>
+          <a:gradFill flip="none" rotWithShape="1">
+            <a:gsLst>
+              <a:gs pos="0">
+                <a:schemeClr val="accent1">
+                  <a:shade val="35000"/>
+                  <a:satMod val="170000"/>
+                  <a:alpha val="100000"/>
+                </a:schemeClr>
+              </a:gs>
+              <a:gs pos="55000">
+                <a:schemeClr val="accent1">
+                  <a:tint val="90000"/>
+                  <a:satMod val="150000"/>
+                  <a:alpha val="100000"/>
+                </a:schemeClr>
+              </a:gs>
+              <a:gs pos="100000">
+                <a:schemeClr val="accent1">
+                  <a:shade val="35000"/>
+                  <a:satMod val="170000"/>
+                  <a:alpha val="100000"/>
+                </a:schemeClr>
+              </a:gs>
+            </a:gsLst>
+            <a:lin ang="3000000" scaled="1"/>
+            <a:tileRect/>
+          </a:gradFill>
+          <a:ln w="12700" cap="rnd" cmpd="thickThin" algn="ctr">
+            <a:noFill/>
+            <a:prstDash val="solid"/>
+          </a:ln>
+          <a:effectLst/>
+        </p:spPr>
+        <p:style>
+          <a:lnRef idx="3">
+            <a:schemeClr val="lt1"/>
+          </a:lnRef>
+          <a:fillRef idx="1">
+            <a:schemeClr val="accent1"/>
+          </a:fillRef>
+          <a:effectRef idx="1">
+            <a:schemeClr val="accent1"/>
+          </a:effectRef>
+          <a:fontRef idx="minor">
+            <a:schemeClr val="lt1"/>
+          </a:fontRef>
+        </p:style>
+        <p:txBody>
+          <a:bodyPr anchor="ctr"/>
+          <a:lstStyle>
+            <a:extLst/>
+          </a:lstStyle>
+          <a:p>
+            <a:pPr algn="ctr" eaLnBrk="1" latinLnBrk="0" hangingPunct="1"/>
+            <a:endParaRPr kumimoji="0" lang="en-US"/>
+          </a:p>
+        </p:txBody>
+      </p:sp>
+      <p:sp>
+        <p:nvSpPr>
+          <p:cNvPr id="9" name="Title 8"/>
+          <p:cNvSpPr>
+            <a:spLocks noGrp="1"/>
+          </p:cNvSpPr>
+          <p:nvPr>
+            <p:ph type="ctrTitle"/>
+          </p:nvPr>
+        </p:nvSpPr>
+        <p:spPr>
+          <a:xfrm>
+            <a:off x="685800" y="1752601"/>
+            <a:ext cx="7772400" cy="1829761"/>
           </a:xfrm>
         </p:spPr>
         <p:txBody>
-          <a:bodyPr/>
-          <a:lstStyle/>
-          <a:p>
-            <a:r>
-              <a:rPr lang="en-US" smtClean="0"/>
+          <a:bodyPr vert="horz" anchor="b">
+            <a:normAutofit/>
+            <a:scene3d>
+              <a:camera prst="orthographicFront"/>
+              <a:lightRig rig="soft" dir="t"/>
+            </a:scene3d>
+            <a:sp3d prstMaterial="softEdge">
+              <a:bevelT w="25400" h="25400"/>
+            </a:sp3d>
+          </a:bodyPr>
+          <a:lstStyle>
+            <a:lvl1pPr algn="r">
+              <a:defRPr sz="4800" b="1">
+                <a:solidFill>
+                  <a:schemeClr val="tx2"/>
+                </a:solidFill>
+                <a:effectLst>
+                  <a:outerShdw blurRad="31750" dist="25400" dir="5400000" algn="tl" rotWithShape="0">
+                    <a:srgbClr val="000000">
+                      <a:alpha val="25000"/>
+                    </a:srgbClr>
+                  </a:outerShdw>
+                </a:effectLst>
+              </a:defRPr>
+            </a:lvl1pPr>
+            <a:extLst/>
+          </a:lstStyle>
+          <a:p>
+            <a:r>
+              <a:rPr kumimoji="0" lang="en-US" smtClean="0"/>
               <a:t>Click to edit Master title style</a:t>
             </a:r>
-            <a:endParaRPr lang="en-US"/>
-          </a:p>
-        </p:txBody>
-      </p:sp>
-      <p:sp>
-        <p:nvSpPr>
-          <p:cNvPr id="3" name="Subtitle 2"/>
+            <a:endParaRPr kumimoji="0" lang="en-US"/>
+          </a:p>
+        </p:txBody>
+      </p:sp>
+      <p:sp>
+        <p:nvSpPr>
+          <p:cNvPr id="17" name="Subtitle 16"/>
           <p:cNvSpPr>
             <a:spLocks noGrp="1"/>
           </p:cNvSpPr>
@@ -1412,169 +1708,536 @@
         </p:nvSpPr>
         <p:spPr>
           <a:xfrm>
-            <a:off x="1371600" y="3886200"/>
-            <a:ext cx="6400800" cy="1752600"/>
+            <a:off x="685800" y="3611607"/>
+            <a:ext cx="7772400" cy="1199704"/>
           </a:xfrm>
         </p:spPr>
         <p:txBody>
-          <a:bodyPr/>
+          <a:bodyPr lIns="45720" rIns="45720"/>
           <a:lstStyle>
-            <a:lvl1pPr marL="0" indent="0" algn="ctr">
+            <a:lvl1pPr marL="0" marR="64008" indent="0" algn="r">
               <a:buNone/>
               <a:defRPr>
                 <a:solidFill>
-                  <a:schemeClr val="tx1">
-                    <a:tint val="75000"/>
-                  </a:schemeClr>
+                  <a:schemeClr val="tx2"/>
                 </a:solidFill>
               </a:defRPr>
             </a:lvl1pPr>
             <a:lvl2pPr marL="457200" indent="0" algn="ctr">
               <a:buNone/>
+            </a:lvl2pPr>
+            <a:lvl3pPr marL="914400" indent="0" algn="ctr">
+              <a:buNone/>
+            </a:lvl3pPr>
+            <a:lvl4pPr marL="1371600" indent="0" algn="ctr">
+              <a:buNone/>
+            </a:lvl4pPr>
+            <a:lvl5pPr marL="1828800" indent="0" algn="ctr">
+              <a:buNone/>
+            </a:lvl5pPr>
+            <a:lvl6pPr marL="2286000" indent="0" algn="ctr">
+              <a:buNone/>
+            </a:lvl6pPr>
+            <a:lvl7pPr marL="2743200" indent="0" algn="ctr">
+              <a:buNone/>
+            </a:lvl7pPr>
+            <a:lvl8pPr marL="3200400" indent="0" algn="ctr">
+              <a:buNone/>
+            </a:lvl8pPr>
+            <a:lvl9pPr marL="3657600" indent="0" algn="ctr">
+              <a:buNone/>
+            </a:lvl9pPr>
+            <a:extLst/>
+          </a:lstStyle>
+          <a:p>
+            <a:r>
+              <a:rPr kumimoji="0" lang="en-US" smtClean="0"/>
+              <a:t>Click to edit Master subtitle style</a:t>
+            </a:r>
+            <a:endParaRPr kumimoji="0" lang="en-US"/>
+          </a:p>
+        </p:txBody>
+      </p:sp>
+      <p:grpSp>
+        <p:nvGrpSpPr>
+          <p:cNvPr id="2" name="Group 1"/>
+          <p:cNvGrpSpPr/>
+          <p:nvPr/>
+        </p:nvGrpSpPr>
+        <p:grpSpPr>
+          <a:xfrm>
+            <a:off x="-3765" y="4953000"/>
+            <a:ext cx="9147765" cy="1912088"/>
+            <a:chOff x="-3765" y="4832896"/>
+            <a:chExt cx="9147765" cy="2032192"/>
+          </a:xfrm>
+        </p:grpSpPr>
+        <p:sp>
+          <p:nvSpPr>
+            <p:cNvPr id="7" name="Freeform 6"/>
+            <p:cNvSpPr>
+              <a:spLocks/>
+            </p:cNvSpPr>
+            <p:nvPr/>
+          </p:nvSpPr>
+          <p:spPr bwMode="auto">
+            <a:xfrm>
+              <a:off x="1687513" y="4832896"/>
+              <a:ext cx="7456487" cy="518816"/>
+            </a:xfrm>
+            <a:custGeom>
+              <a:avLst>
+                <a:gd name="A1" fmla="val 0"/>
+                <a:gd name="A2" fmla="val 0"/>
+                <a:gd name="A3" fmla="val 0"/>
+                <a:gd name="A4" fmla="val 0"/>
+                <a:gd name="A5" fmla="val 0"/>
+                <a:gd name="A6" fmla="val 0"/>
+                <a:gd name="A7" fmla="val 0"/>
+                <a:gd name="A8" fmla="val 0"/>
+              </a:avLst>
+              <a:gdLst/>
+              <a:ahLst/>
+              <a:cxnLst>
+                <a:cxn ang="0">
+                  <a:pos x="4697" y="0"/>
+                </a:cxn>
+                <a:cxn ang="0">
+                  <a:pos x="4697" y="367"/>
+                </a:cxn>
+                <a:cxn ang="0">
+                  <a:pos x="0" y="218"/>
+                </a:cxn>
+                <a:cxn ang="0">
+                  <a:pos x="4697" y="0"/>
+                </a:cxn>
+              </a:cxnLst>
+              <a:rect l="0" t="0" r="0" b="0"/>
+              <a:pathLst>
+                <a:path w="4697" h="367">
+                  <a:moveTo>
+                    <a:pt x="4697" y="0"/>
+                  </a:moveTo>
+                  <a:lnTo>
+                    <a:pt x="4697" y="367"/>
+                  </a:lnTo>
+                  <a:lnTo>
+                    <a:pt x="0" y="218"/>
+                  </a:lnTo>
+                  <a:lnTo>
+                    <a:pt x="4697" y="0"/>
+                  </a:lnTo>
+                  <a:close/>
+                </a:path>
+              </a:pathLst>
+            </a:custGeom>
+            <a:solidFill>
+              <a:schemeClr val="accent1">
+                <a:tint val="65000"/>
+                <a:satMod val="115000"/>
+                <a:alpha val="40000"/>
+              </a:schemeClr>
+            </a:solidFill>
+            <a:ln w="9525" cap="flat" cmpd="sng" algn="ctr">
+              <a:noFill/>
+              <a:prstDash val="solid"/>
+              <a:round/>
+              <a:headEnd type="none" w="med" len="med"/>
+              <a:tailEnd type="none" w="med" len="med"/>
+            </a:ln>
+            <a:effectLst/>
+          </p:spPr>
+          <p:txBody>
+            <a:bodyPr vert="horz" wrap="square" lIns="91440" tIns="45720" rIns="91440" bIns="45720" anchor="t" compatLnSpc="1"/>
+            <a:lstStyle>
+              <a:extLst/>
+            </a:lstStyle>
+            <a:p>
+              <a:endParaRPr kumimoji="0" lang="en-US"/>
+            </a:p>
+          </p:txBody>
+        </p:sp>
+        <p:sp>
+          <p:nvSpPr>
+            <p:cNvPr id="8" name="Freeform 7"/>
+            <p:cNvSpPr>
+              <a:spLocks/>
+            </p:cNvSpPr>
+            <p:nvPr/>
+          </p:nvSpPr>
+          <p:spPr bwMode="auto">
+            <a:xfrm>
+              <a:off x="35443" y="5135526"/>
+              <a:ext cx="9108557" cy="838200"/>
+            </a:xfrm>
+            <a:custGeom>
+              <a:avLst>
+                <a:gd name="A1" fmla="val 0"/>
+                <a:gd name="A2" fmla="val 0"/>
+                <a:gd name="A3" fmla="val 0"/>
+                <a:gd name="A4" fmla="val 0"/>
+                <a:gd name="A5" fmla="val 0"/>
+                <a:gd name="A6" fmla="val 0"/>
+                <a:gd name="A7" fmla="val 0"/>
+                <a:gd name="A8" fmla="val 0"/>
+              </a:avLst>
+              <a:gdLst/>
+              <a:ahLst/>
+              <a:cxnLst>
+                <a:cxn ang="0">
+                  <a:pos x="0" y="0"/>
+                </a:cxn>
+                <a:cxn ang="0">
+                  <a:pos x="5760" y="0"/>
+                </a:cxn>
+                <a:cxn ang="0">
+                  <a:pos x="5760" y="528"/>
+                </a:cxn>
+                <a:cxn ang="0">
+                  <a:pos x="48" y="0"/>
+                </a:cxn>
+              </a:cxnLst>
+              <a:rect l="0" t="0" r="0" b="0"/>
+              <a:pathLst>
+                <a:path w="5760" h="528">
+                  <a:moveTo>
+                    <a:pt x="0" y="0"/>
+                  </a:moveTo>
+                  <a:lnTo>
+                    <a:pt x="5760" y="0"/>
+                  </a:lnTo>
+                  <a:lnTo>
+                    <a:pt x="5760" y="528"/>
+                  </a:lnTo>
+                  <a:lnTo>
+                    <a:pt x="48" y="0"/>
+                  </a:lnTo>
+                </a:path>
+              </a:pathLst>
+            </a:custGeom>
+            <a:solidFill>
+              <a:srgbClr val="000000">
+                <a:alpha val="100000"/>
+              </a:srgbClr>
+            </a:solidFill>
+            <a:ln w="9525" cap="flat" cmpd="sng" algn="ctr">
+              <a:noFill/>
+              <a:prstDash val="solid"/>
+              <a:round/>
+              <a:headEnd type="none" w="med" len="med"/>
+              <a:tailEnd type="none" w="med" len="med"/>
+            </a:ln>
+            <a:effectLst/>
+          </p:spPr>
+          <p:txBody>
+            <a:bodyPr vert="horz" wrap="square" lIns="91440" tIns="45720" rIns="91440" bIns="45720" anchor="t" compatLnSpc="1"/>
+            <a:lstStyle>
+              <a:extLst/>
+            </a:lstStyle>
+            <a:p>
+              <a:endParaRPr kumimoji="0" lang="en-US"/>
+            </a:p>
+          </p:txBody>
+        </p:sp>
+        <p:sp>
+          <p:nvSpPr>
+            <p:cNvPr id="11" name="Freeform 10"/>
+            <p:cNvSpPr>
+              <a:spLocks/>
+            </p:cNvSpPr>
+            <p:nvPr/>
+          </p:nvSpPr>
+          <p:spPr bwMode="auto">
+            <a:xfrm>
+              <a:off x="0" y="4883888"/>
+              <a:ext cx="9144000" cy="1981200"/>
+            </a:xfrm>
+            <a:custGeom>
+              <a:avLst>
+                <a:gd name="A1" fmla="val 0"/>
+                <a:gd name="A2" fmla="val 0"/>
+                <a:gd name="A3" fmla="val 0"/>
+                <a:gd name="A4" fmla="val 0"/>
+                <a:gd name="A5" fmla="val 0"/>
+                <a:gd name="A6" fmla="val 0"/>
+                <a:gd name="A7" fmla="val 0"/>
+                <a:gd name="A8" fmla="val 0"/>
+              </a:avLst>
+              <a:gdLst/>
+              <a:ahLst/>
+              <a:cxnLst>
+                <a:cxn ang="0">
+                  <a:pos x="0" y="0"/>
+                </a:cxn>
+                <a:cxn ang="0">
+                  <a:pos x="0" y="1248"/>
+                </a:cxn>
+                <a:cxn ang="0">
+                  <a:pos x="5760" y="1248"/>
+                </a:cxn>
+                <a:cxn ang="0">
+                  <a:pos x="5760" y="528"/>
+                </a:cxn>
+                <a:cxn ang="0">
+                  <a:pos x="0" y="0"/>
+                </a:cxn>
+              </a:cxnLst>
+              <a:rect l="0" t="0" r="0" b="0"/>
+              <a:pathLst>
+                <a:path w="5760" h="1248">
+                  <a:moveTo>
+                    <a:pt x="0" y="0"/>
+                  </a:moveTo>
+                  <a:lnTo>
+                    <a:pt x="0" y="1248"/>
+                  </a:lnTo>
+                  <a:lnTo>
+                    <a:pt x="5760" y="1248"/>
+                  </a:lnTo>
+                  <a:lnTo>
+                    <a:pt x="5760" y="528"/>
+                  </a:lnTo>
+                  <a:lnTo>
+                    <a:pt x="0" y="0"/>
+                  </a:lnTo>
+                  <a:close/>
+                </a:path>
+              </a:pathLst>
+            </a:custGeom>
+            <a:blipFill>
+              <a:blip r:embed="rId2">
+                <a:alphaModFix amt="50000"/>
+              </a:blip>
+              <a:tile tx="0" ty="0" sx="50000" sy="50000" flip="none" algn="t"/>
+            </a:blipFill>
+            <a:ln w="12700" cap="rnd" cmpd="thickThin" algn="ctr">
+              <a:noFill/>
+              <a:prstDash val="solid"/>
+            </a:ln>
+            <a:effectLst>
+              <a:fillOverlay blend="mult">
+                <a:gradFill flip="none" rotWithShape="1">
+                  <a:gsLst>
+                    <a:gs pos="0">
+                      <a:schemeClr val="accent1">
+                        <a:shade val="20000"/>
+                        <a:satMod val="176000"/>
+                        <a:alpha val="100000"/>
+                      </a:schemeClr>
+                    </a:gs>
+                    <a:gs pos="18000">
+                      <a:schemeClr val="accent1">
+                        <a:shade val="48000"/>
+                        <a:satMod val="153000"/>
+                        <a:alpha val="100000"/>
+                      </a:schemeClr>
+                    </a:gs>
+                    <a:gs pos="43000">
+                      <a:schemeClr val="accent1">
+                        <a:tint val="86000"/>
+                        <a:satMod val="149000"/>
+                        <a:alpha val="100000"/>
+                      </a:schemeClr>
+                    </a:gs>
+                    <a:gs pos="45000">
+                      <a:schemeClr val="accent1">
+                        <a:tint val="85000"/>
+                        <a:satMod val="150000"/>
+                        <a:alpha val="100000"/>
+                      </a:schemeClr>
+                    </a:gs>
+                    <a:gs pos="50000">
+                      <a:schemeClr val="accent1">
+                        <a:tint val="86000"/>
+                        <a:satMod val="149000"/>
+                        <a:alpha val="100000"/>
+                      </a:schemeClr>
+                    </a:gs>
+                    <a:gs pos="79000">
+                      <a:schemeClr val="accent1">
+                        <a:shade val="53000"/>
+                        <a:satMod val="150000"/>
+                        <a:alpha val="100000"/>
+                      </a:schemeClr>
+                    </a:gs>
+                    <a:gs pos="100000">
+                      <a:schemeClr val="accent1">
+                        <a:shade val="25000"/>
+                        <a:satMod val="170000"/>
+                        <a:alpha val="100000"/>
+                      </a:schemeClr>
+                    </a:gs>
+                  </a:gsLst>
+                  <a:lin ang="450000" scaled="1"/>
+                  <a:tileRect/>
+                </a:gradFill>
+              </a:fillOverlay>
+            </a:effectLst>
+          </p:spPr>
+          <p:style>
+            <a:lnRef idx="3">
+              <a:schemeClr val="lt1"/>
+            </a:lnRef>
+            <a:fillRef idx="1">
+              <a:schemeClr val="accent1"/>
+            </a:fillRef>
+            <a:effectRef idx="1">
+              <a:schemeClr val="accent1"/>
+            </a:effectRef>
+            <a:fontRef idx="minor">
+              <a:schemeClr val="lt1"/>
+            </a:fontRef>
+          </p:style>
+          <p:txBody>
+            <a:bodyPr vert="horz" wrap="square" lIns="91440" tIns="45720" rIns="91440" bIns="45720" anchor="ctr" compatLnSpc="1"/>
+            <a:lstStyle>
+              <a:extLst/>
+            </a:lstStyle>
+            <a:p>
+              <a:pPr algn="ctr" eaLnBrk="1" latinLnBrk="0" hangingPunct="1"/>
+              <a:endParaRPr kumimoji="0" lang="en-US"/>
+            </a:p>
+          </p:txBody>
+        </p:sp>
+        <p:cxnSp>
+          <p:nvCxnSpPr>
+            <p:cNvPr id="12" name="Straight Connector 11"/>
+            <p:cNvCxnSpPr/>
+            <p:nvPr/>
+          </p:nvCxnSpPr>
+          <p:spPr>
+            <a:xfrm>
+              <a:off x="-3765" y="4880373"/>
+              <a:ext cx="9147765" cy="839943"/>
+            </a:xfrm>
+            <a:prstGeom prst="line">
+              <a:avLst/>
+            </a:prstGeom>
+            <a:noFill/>
+            <a:ln w="12065" cap="flat" cmpd="sng" algn="ctr">
+              <a:gradFill>
+                <a:gsLst>
+                  <a:gs pos="45000">
+                    <a:schemeClr val="accent1">
+                      <a:tint val="70000"/>
+                      <a:satMod val="110000"/>
+                    </a:schemeClr>
+                  </a:gs>
+                  <a:gs pos="15000">
+                    <a:schemeClr val="accent1">
+                      <a:shade val="40000"/>
+                      <a:satMod val="110000"/>
+                    </a:schemeClr>
+                  </a:gs>
+                </a:gsLst>
+                <a:lin ang="5400000" scaled="1"/>
+              </a:gradFill>
+              <a:prstDash val="solid"/>
+              <a:miter lim="800000"/>
+            </a:ln>
+            <a:effectLst/>
+          </p:spPr>
+          <p:style>
+            <a:lnRef idx="2">
+              <a:schemeClr val="accent1"/>
+            </a:lnRef>
+            <a:fillRef idx="0">
+              <a:schemeClr val="accent1"/>
+            </a:fillRef>
+            <a:effectRef idx="1">
+              <a:schemeClr val="accent1"/>
+            </a:effectRef>
+            <a:fontRef idx="minor">
+              <a:schemeClr val="tx1"/>
+            </a:fontRef>
+          </p:style>
+        </p:cxnSp>
+      </p:grpSp>
+      <p:sp>
+        <p:nvSpPr>
+          <p:cNvPr id="30" name="Date Placeholder 29"/>
+          <p:cNvSpPr>
+            <a:spLocks noGrp="1"/>
+          </p:cNvSpPr>
+          <p:nvPr>
+            <p:ph type="dt" sz="half" idx="10"/>
+          </p:nvPr>
+        </p:nvSpPr>
+        <p:spPr/>
+        <p:txBody>
+          <a:bodyPr/>
+          <a:lstStyle>
+            <a:lvl1pPr>
               <a:defRPr>
                 <a:solidFill>
-                  <a:schemeClr val="tx1">
-                    <a:tint val="75000"/>
+                  <a:srgbClr val="FFFFFF"/>
+                </a:solidFill>
+              </a:defRPr>
+            </a:lvl1pPr>
+            <a:extLst/>
+          </a:lstStyle>
+          <a:p>
+            <a:fld id="{8096CBEF-B388-4E9F-94F0-5BE1A698433D}" type="datetimeFigureOut">
+              <a:rPr lang="en-US" smtClean="0"/>
+              <a:t>12/6/2012</a:t>
+            </a:fld>
+            <a:endParaRPr lang="en-US"/>
+          </a:p>
+        </p:txBody>
+      </p:sp>
+      <p:sp>
+        <p:nvSpPr>
+          <p:cNvPr id="19" name="Footer Placeholder 18"/>
+          <p:cNvSpPr>
+            <a:spLocks noGrp="1"/>
+          </p:cNvSpPr>
+          <p:nvPr>
+            <p:ph type="ftr" sz="quarter" idx="11"/>
+          </p:nvPr>
+        </p:nvSpPr>
+        <p:spPr/>
+        <p:txBody>
+          <a:bodyPr/>
+          <a:lstStyle>
+            <a:lvl1pPr>
+              <a:defRPr>
+                <a:solidFill>
+                  <a:schemeClr val="accent1">
+                    <a:tint val="20000"/>
                   </a:schemeClr>
                 </a:solidFill>
               </a:defRPr>
-            </a:lvl2pPr>
-            <a:lvl3pPr marL="914400" indent="0" algn="ctr">
-              <a:buNone/>
+            </a:lvl1pPr>
+            <a:extLst/>
+          </a:lstStyle>
+          <a:p>
+            <a:endParaRPr lang="en-US"/>
+          </a:p>
+        </p:txBody>
+      </p:sp>
+      <p:sp>
+        <p:nvSpPr>
+          <p:cNvPr id="27" name="Slide Number Placeholder 26"/>
+          <p:cNvSpPr>
+            <a:spLocks noGrp="1"/>
+          </p:cNvSpPr>
+          <p:nvPr>
+            <p:ph type="sldNum" sz="quarter" idx="12"/>
+          </p:nvPr>
+        </p:nvSpPr>
+        <p:spPr/>
+        <p:txBody>
+          <a:bodyPr/>
+          <a:lstStyle>
+            <a:lvl1pPr>
               <a:defRPr>
                 <a:solidFill>
-                  <a:schemeClr val="tx1">
-                    <a:tint val="75000"/>
-                  </a:schemeClr>
+                  <a:srgbClr val="FFFFFF"/>
                 </a:solidFill>
               </a:defRPr>
-            </a:lvl3pPr>
-            <a:lvl4pPr marL="1371600" indent="0" algn="ctr">
-              <a:buNone/>
-              <a:defRPr>
-                <a:solidFill>
-                  <a:schemeClr val="tx1">
-                    <a:tint val="75000"/>
-                  </a:schemeClr>
-                </a:solidFill>
-              </a:defRPr>
-            </a:lvl4pPr>
-            <a:lvl5pPr marL="1828800" indent="0" algn="ctr">
-              <a:buNone/>
-              <a:defRPr>
-                <a:solidFill>
-                  <a:schemeClr val="tx1">
-                    <a:tint val="75000"/>
-                  </a:schemeClr>
-                </a:solidFill>
-              </a:defRPr>
-            </a:lvl5pPr>
-            <a:lvl6pPr marL="2286000" indent="0" algn="ctr">
-              <a:buNone/>
-              <a:defRPr>
-                <a:solidFill>
-                  <a:schemeClr val="tx1">
-                    <a:tint val="75000"/>
-                  </a:schemeClr>
-                </a:solidFill>
-              </a:defRPr>
-            </a:lvl6pPr>
-            <a:lvl7pPr marL="2743200" indent="0" algn="ctr">
-              <a:buNone/>
-              <a:defRPr>
-                <a:solidFill>
-                  <a:schemeClr val="tx1">
-                    <a:tint val="75000"/>
-                  </a:schemeClr>
-                </a:solidFill>
-              </a:defRPr>
-            </a:lvl7pPr>
-            <a:lvl8pPr marL="3200400" indent="0" algn="ctr">
-              <a:buNone/>
-              <a:defRPr>
-                <a:solidFill>
-                  <a:schemeClr val="tx1">
-                    <a:tint val="75000"/>
-                  </a:schemeClr>
-                </a:solidFill>
-              </a:defRPr>
-            </a:lvl8pPr>
-            <a:lvl9pPr marL="3657600" indent="0" algn="ctr">
-              <a:buNone/>
-              <a:defRPr>
-                <a:solidFill>
-                  <a:schemeClr val="tx1">
-                    <a:tint val="75000"/>
-                  </a:schemeClr>
-                </a:solidFill>
-              </a:defRPr>
-            </a:lvl9pPr>
+            </a:lvl1pPr>
+            <a:extLst/>
           </a:lstStyle>
-          <a:p>
-            <a:r>
-              <a:rPr lang="en-US" smtClean="0"/>
-              <a:t>Click to edit Master subtitle style</a:t>
-            </a:r>
-            <a:endParaRPr lang="en-US"/>
-          </a:p>
-        </p:txBody>
-      </p:sp>
-      <p:sp>
-        <p:nvSpPr>
-          <p:cNvPr id="4" name="Date Placeholder 3"/>
-          <p:cNvSpPr>
-            <a:spLocks noGrp="1"/>
-          </p:cNvSpPr>
-          <p:nvPr>
-            <p:ph type="dt" sz="half" idx="10"/>
-          </p:nvPr>
-        </p:nvSpPr>
-        <p:spPr/>
-        <p:txBody>
-          <a:bodyPr/>
-          <a:lstStyle/>
-          <a:p>
-            <a:fld id="{8096CBEF-B388-4E9F-94F0-5BE1A698433D}" type="datetimeFigureOut">
-              <a:rPr lang="en-US" smtClean="0"/>
-              <a:t>12/5/2012</a:t>
-            </a:fld>
-            <a:endParaRPr lang="en-US"/>
-          </a:p>
-        </p:txBody>
-      </p:sp>
-      <p:sp>
-        <p:nvSpPr>
-          <p:cNvPr id="5" name="Footer Placeholder 4"/>
-          <p:cNvSpPr>
-            <a:spLocks noGrp="1"/>
-          </p:cNvSpPr>
-          <p:nvPr>
-            <p:ph type="ftr" sz="quarter" idx="11"/>
-          </p:nvPr>
-        </p:nvSpPr>
-        <p:spPr/>
-        <p:txBody>
-          <a:bodyPr/>
-          <a:lstStyle/>
-          <a:p>
-            <a:endParaRPr lang="en-US"/>
-          </a:p>
-        </p:txBody>
-      </p:sp>
-      <p:sp>
-        <p:nvSpPr>
-          <p:cNvPr id="6" name="Slide Number Placeholder 5"/>
-          <p:cNvSpPr>
-            <a:spLocks noGrp="1"/>
-          </p:cNvSpPr>
-          <p:nvPr>
-            <p:ph type="sldNum" sz="quarter" idx="12"/>
-          </p:nvPr>
-        </p:nvSpPr>
-        <p:spPr/>
-        <p:txBody>
-          <a:bodyPr/>
-          <a:lstStyle/>
           <a:p>
             <a:fld id="{24BDE544-15E2-4E42-8238-153692337462}" type="slidenum">
               <a:rPr lang="en-US" smtClean="0"/>
@@ -1585,11 +2248,6 @@
         </p:txBody>
       </p:sp>
     </p:spTree>
-    <p:extLst>
-      <p:ext uri="{BB962C8B-B14F-4D97-AF65-F5344CB8AC3E}">
-        <p14:creationId xmlns:p14="http://schemas.microsoft.com/office/powerpoint/2010/main" val="1568558243"/>
-      </p:ext>
-    </p:extLst>
   </p:cSld>
   <p:clrMapOvr>
     <a:masterClrMapping/>
@@ -1627,13 +2285,15 @@
         <p:spPr/>
         <p:txBody>
           <a:bodyPr/>
-          <a:lstStyle/>
-          <a:p>
-            <a:r>
-              <a:rPr lang="en-US" smtClean="0"/>
+          <a:lstStyle>
+            <a:extLst/>
+          </a:lstStyle>
+          <a:p>
+            <a:r>
+              <a:rPr kumimoji="0" lang="en-US" smtClean="0"/>
               <a:t>Click to edit Master title style</a:t>
             </a:r>
-            <a:endParaRPr lang="en-US"/>
+            <a:endParaRPr kumimoji="0" lang="en-US"/>
           </a:p>
         </p:txBody>
       </p:sp>
@@ -1647,45 +2307,52 @@
             <p:ph type="body" orient="vert" idx="1"/>
           </p:nvPr>
         </p:nvSpPr>
-        <p:spPr/>
+        <p:spPr>
+          <a:xfrm>
+            <a:off x="457200" y="1481329"/>
+            <a:ext cx="8229600" cy="4386071"/>
+          </a:xfrm>
+        </p:spPr>
         <p:txBody>
           <a:bodyPr vert="eaVert"/>
-          <a:lstStyle/>
-          <a:p>
-            <a:pPr lvl="0"/>
+          <a:lstStyle>
+            <a:extLst/>
+          </a:lstStyle>
+          <a:p>
+            <a:pPr lvl="0" eaLnBrk="1" latinLnBrk="0" hangingPunct="1"/>
             <a:r>
               <a:rPr lang="en-US" smtClean="0"/>
               <a:t>Click to edit Master text styles</a:t>
             </a:r>
           </a:p>
           <a:p>
-            <a:pPr lvl="1"/>
+            <a:pPr lvl="1" eaLnBrk="1" latinLnBrk="0" hangingPunct="1"/>
             <a:r>
               <a:rPr lang="en-US" smtClean="0"/>
               <a:t>Second level</a:t>
             </a:r>
           </a:p>
           <a:p>
-            <a:pPr lvl="2"/>
+            <a:pPr lvl="2" eaLnBrk="1" latinLnBrk="0" hangingPunct="1"/>
             <a:r>
               <a:rPr lang="en-US" smtClean="0"/>
               <a:t>Third level</a:t>
             </a:r>
           </a:p>
           <a:p>
-            <a:pPr lvl="3"/>
+            <a:pPr lvl="3" eaLnBrk="1" latinLnBrk="0" hangingPunct="1"/>
             <a:r>
               <a:rPr lang="en-US" smtClean="0"/>
               <a:t>Fourth level</a:t>
             </a:r>
           </a:p>
           <a:p>
-            <a:pPr lvl="4"/>
+            <a:pPr lvl="4" eaLnBrk="1" latinLnBrk="0" hangingPunct="1"/>
             <a:r>
               <a:rPr lang="en-US" smtClean="0"/>
               <a:t>Fifth level</a:t>
             </a:r>
-            <a:endParaRPr lang="en-US"/>
+            <a:endParaRPr kumimoji="0" lang="en-US"/>
           </a:p>
         </p:txBody>
       </p:sp>
@@ -1702,11 +2369,13 @@
         <p:spPr/>
         <p:txBody>
           <a:bodyPr/>
-          <a:lstStyle/>
+          <a:lstStyle>
+            <a:extLst/>
+          </a:lstStyle>
           <a:p>
             <a:fld id="{8096CBEF-B388-4E9F-94F0-5BE1A698433D}" type="datetimeFigureOut">
               <a:rPr lang="en-US" smtClean="0"/>
-              <a:t>12/5/2012</a:t>
+              <a:t>12/6/2012</a:t>
             </a:fld>
             <a:endParaRPr lang="en-US"/>
           </a:p>
@@ -1725,7 +2394,9 @@
         <p:spPr/>
         <p:txBody>
           <a:bodyPr/>
-          <a:lstStyle/>
+          <a:lstStyle>
+            <a:extLst/>
+          </a:lstStyle>
           <a:p>
             <a:endParaRPr lang="en-US"/>
           </a:p>
@@ -1744,7 +2415,9 @@
         <p:spPr/>
         <p:txBody>
           <a:bodyPr/>
-          <a:lstStyle/>
+          <a:lstStyle>
+            <a:extLst/>
+          </a:lstStyle>
           <a:p>
             <a:fld id="{24BDE544-15E2-4E42-8238-153692337462}" type="slidenum">
               <a:rPr lang="en-US" smtClean="0"/>
@@ -1755,11 +2428,6 @@
         </p:txBody>
       </p:sp>
     </p:spTree>
-    <p:extLst>
-      <p:ext uri="{BB962C8B-B14F-4D97-AF65-F5344CB8AC3E}">
-        <p14:creationId xmlns:p14="http://schemas.microsoft.com/office/powerpoint/2010/main" val="2749892681"/>
-      </p:ext>
-    </p:extLst>
   </p:cSld>
   <p:clrMapOvr>
     <a:masterClrMapping/>
@@ -1796,19 +2464,21 @@
         </p:nvSpPr>
         <p:spPr>
           <a:xfrm>
-            <a:off x="6629400" y="274638"/>
-            <a:ext cx="2057400" cy="5851525"/>
+            <a:off x="6844013" y="274640"/>
+            <a:ext cx="1777470" cy="5592761"/>
           </a:xfrm>
         </p:spPr>
         <p:txBody>
           <a:bodyPr vert="eaVert"/>
-          <a:lstStyle/>
-          <a:p>
-            <a:r>
-              <a:rPr lang="en-US" smtClean="0"/>
+          <a:lstStyle>
+            <a:extLst/>
+          </a:lstStyle>
+          <a:p>
+            <a:r>
+              <a:rPr kumimoji="0" lang="en-US" smtClean="0"/>
               <a:t>Click to edit Master title style</a:t>
             </a:r>
-            <a:endParaRPr lang="en-US"/>
+            <a:endParaRPr kumimoji="0" lang="en-US"/>
           </a:p>
         </p:txBody>
       </p:sp>
@@ -1824,48 +2494,50 @@
         </p:nvSpPr>
         <p:spPr>
           <a:xfrm>
-            <a:off x="457200" y="274638"/>
-            <a:ext cx="6019800" cy="5851525"/>
+            <a:off x="457200" y="274641"/>
+            <a:ext cx="6324600" cy="5592760"/>
           </a:xfrm>
         </p:spPr>
         <p:txBody>
           <a:bodyPr vert="eaVert"/>
-          <a:lstStyle/>
-          <a:p>
-            <a:pPr lvl="0"/>
+          <a:lstStyle>
+            <a:extLst/>
+          </a:lstStyle>
+          <a:p>
+            <a:pPr lvl="0" eaLnBrk="1" latinLnBrk="0" hangingPunct="1"/>
             <a:r>
               <a:rPr lang="en-US" smtClean="0"/>
               <a:t>Click to edit Master text styles</a:t>
             </a:r>
           </a:p>
           <a:p>
-            <a:pPr lvl="1"/>
+            <a:pPr lvl="1" eaLnBrk="1" latinLnBrk="0" hangingPunct="1"/>
             <a:r>
               <a:rPr lang="en-US" smtClean="0"/>
               <a:t>Second level</a:t>
             </a:r>
           </a:p>
           <a:p>
-            <a:pPr lvl="2"/>
+            <a:pPr lvl="2" eaLnBrk="1" latinLnBrk="0" hangingPunct="1"/>
             <a:r>
               <a:rPr lang="en-US" smtClean="0"/>
               <a:t>Third level</a:t>
             </a:r>
           </a:p>
           <a:p>
-            <a:pPr lvl="3"/>
+            <a:pPr lvl="3" eaLnBrk="1" latinLnBrk="0" hangingPunct="1"/>
             <a:r>
               <a:rPr lang="en-US" smtClean="0"/>
               <a:t>Fourth level</a:t>
             </a:r>
           </a:p>
           <a:p>
-            <a:pPr lvl="4"/>
+            <a:pPr lvl="4" eaLnBrk="1" latinLnBrk="0" hangingPunct="1"/>
             <a:r>
               <a:rPr lang="en-US" smtClean="0"/>
               <a:t>Fifth level</a:t>
             </a:r>
-            <a:endParaRPr lang="en-US"/>
+            <a:endParaRPr kumimoji="0" lang="en-US"/>
           </a:p>
         </p:txBody>
       </p:sp>
@@ -1882,11 +2554,13 @@
         <p:spPr/>
         <p:txBody>
           <a:bodyPr/>
-          <a:lstStyle/>
+          <a:lstStyle>
+            <a:extLst/>
+          </a:lstStyle>
           <a:p>
             <a:fld id="{8096CBEF-B388-4E9F-94F0-5BE1A698433D}" type="datetimeFigureOut">
               <a:rPr lang="en-US" smtClean="0"/>
-              <a:t>12/5/2012</a:t>
+              <a:t>12/6/2012</a:t>
             </a:fld>
             <a:endParaRPr lang="en-US"/>
           </a:p>
@@ -1905,7 +2579,9 @@
         <p:spPr/>
         <p:txBody>
           <a:bodyPr/>
-          <a:lstStyle/>
+          <a:lstStyle>
+            <a:extLst/>
+          </a:lstStyle>
           <a:p>
             <a:endParaRPr lang="en-US"/>
           </a:p>
@@ -1924,7 +2600,9 @@
         <p:spPr/>
         <p:txBody>
           <a:bodyPr/>
-          <a:lstStyle/>
+          <a:lstStyle>
+            <a:extLst/>
+          </a:lstStyle>
           <a:p>
             <a:fld id="{24BDE544-15E2-4E42-8238-153692337462}" type="slidenum">
               <a:rPr lang="en-US" smtClean="0"/>
@@ -1935,11 +2613,6 @@
         </p:txBody>
       </p:sp>
     </p:spTree>
-    <p:extLst>
-      <p:ext uri="{BB962C8B-B14F-4D97-AF65-F5344CB8AC3E}">
-        <p14:creationId xmlns:p14="http://schemas.microsoft.com/office/powerpoint/2010/main" val="1816543143"/>
-      </p:ext>
-    </p:extLst>
   </p:cSld>
   <p:clrMapOvr>
     <a:masterClrMapping/>
@@ -1966,76 +2639,55 @@
       </p:grpSpPr>
       <p:sp>
         <p:nvSpPr>
-          <p:cNvPr id="2" name="Title 1"/>
-          <p:cNvSpPr>
-            <a:spLocks noGrp="1"/>
-          </p:cNvSpPr>
-          <p:nvPr>
-            <p:ph type="title"/>
+          <p:cNvPr id="3" name="Content Placeholder 2"/>
+          <p:cNvSpPr>
+            <a:spLocks noGrp="1"/>
+          </p:cNvSpPr>
+          <p:nvPr>
+            <p:ph idx="1"/>
           </p:nvPr>
         </p:nvSpPr>
         <p:spPr/>
         <p:txBody>
           <a:bodyPr/>
-          <a:lstStyle/>
-          <a:p>
-            <a:r>
-              <a:rPr lang="en-US" smtClean="0"/>
-              <a:t>Click to edit Master title style</a:t>
-            </a:r>
-            <a:endParaRPr lang="en-US"/>
-          </a:p>
-        </p:txBody>
-      </p:sp>
-      <p:sp>
-        <p:nvSpPr>
-          <p:cNvPr id="3" name="Content Placeholder 2"/>
-          <p:cNvSpPr>
-            <a:spLocks noGrp="1"/>
-          </p:cNvSpPr>
-          <p:nvPr>
-            <p:ph idx="1"/>
-          </p:nvPr>
-        </p:nvSpPr>
-        <p:spPr/>
-        <p:txBody>
-          <a:bodyPr/>
-          <a:lstStyle/>
-          <a:p>
-            <a:pPr lvl="0"/>
+          <a:lstStyle>
+            <a:extLst/>
+          </a:lstStyle>
+          <a:p>
+            <a:pPr lvl="0" eaLnBrk="1" latinLnBrk="0" hangingPunct="1"/>
             <a:r>
               <a:rPr lang="en-US" smtClean="0"/>
               <a:t>Click to edit Master text styles</a:t>
             </a:r>
           </a:p>
           <a:p>
-            <a:pPr lvl="1"/>
+            <a:pPr lvl="1" eaLnBrk="1" latinLnBrk="0" hangingPunct="1"/>
             <a:r>
               <a:rPr lang="en-US" smtClean="0"/>
               <a:t>Second level</a:t>
             </a:r>
           </a:p>
           <a:p>
-            <a:pPr lvl="2"/>
+            <a:pPr lvl="2" eaLnBrk="1" latinLnBrk="0" hangingPunct="1"/>
             <a:r>
               <a:rPr lang="en-US" smtClean="0"/>
               <a:t>Third level</a:t>
             </a:r>
           </a:p>
           <a:p>
-            <a:pPr lvl="3"/>
+            <a:pPr lvl="3" eaLnBrk="1" latinLnBrk="0" hangingPunct="1"/>
             <a:r>
               <a:rPr lang="en-US" smtClean="0"/>
               <a:t>Fourth level</a:t>
             </a:r>
           </a:p>
           <a:p>
-            <a:pPr lvl="4"/>
+            <a:pPr lvl="4" eaLnBrk="1" latinLnBrk="0" hangingPunct="1"/>
             <a:r>
               <a:rPr lang="en-US" smtClean="0"/>
               <a:t>Fifth level</a:t>
             </a:r>
-            <a:endParaRPr lang="en-US"/>
+            <a:endParaRPr kumimoji="0" lang="en-US"/>
           </a:p>
         </p:txBody>
       </p:sp>
@@ -2052,11 +2704,13 @@
         <p:spPr/>
         <p:txBody>
           <a:bodyPr/>
-          <a:lstStyle/>
+          <a:lstStyle>
+            <a:extLst/>
+          </a:lstStyle>
           <a:p>
             <a:fld id="{8096CBEF-B388-4E9F-94F0-5BE1A698433D}" type="datetimeFigureOut">
               <a:rPr lang="en-US" smtClean="0"/>
-              <a:t>12/5/2012</a:t>
+              <a:t>12/6/2012</a:t>
             </a:fld>
             <a:endParaRPr lang="en-US"/>
           </a:p>
@@ -2075,7 +2729,9 @@
         <p:spPr/>
         <p:txBody>
           <a:bodyPr/>
-          <a:lstStyle/>
+          <a:lstStyle>
+            <a:extLst/>
+          </a:lstStyle>
           <a:p>
             <a:endParaRPr lang="en-US"/>
           </a:p>
@@ -2094,7 +2750,9 @@
         <p:spPr/>
         <p:txBody>
           <a:bodyPr/>
-          <a:lstStyle/>
+          <a:lstStyle>
+            <a:extLst/>
+          </a:lstStyle>
           <a:p>
             <a:fld id="{24BDE544-15E2-4E42-8238-153692337462}" type="slidenum">
               <a:rPr lang="en-US" smtClean="0"/>
@@ -2104,12 +2762,32 @@
           </a:p>
         </p:txBody>
       </p:sp>
+      <p:sp>
+        <p:nvSpPr>
+          <p:cNvPr id="7" name="Title 6"/>
+          <p:cNvSpPr>
+            <a:spLocks noGrp="1"/>
+          </p:cNvSpPr>
+          <p:nvPr>
+            <p:ph type="title"/>
+          </p:nvPr>
+        </p:nvSpPr>
+        <p:spPr/>
+        <p:txBody>
+          <a:bodyPr rtlCol="0"/>
+          <a:lstStyle>
+            <a:extLst/>
+          </a:lstStyle>
+          <a:p>
+            <a:r>
+              <a:rPr kumimoji="0" lang="en-US" smtClean="0"/>
+              <a:t>Click to edit Master title style</a:t>
+            </a:r>
+            <a:endParaRPr kumimoji="0" lang="en-US"/>
+          </a:p>
+        </p:txBody>
+      </p:sp>
     </p:spTree>
-    <p:extLst>
-      <p:ext uri="{BB962C8B-B14F-4D97-AF65-F5344CB8AC3E}">
-        <p14:creationId xmlns:p14="http://schemas.microsoft.com/office/powerpoint/2010/main" val="1710886221"/>
-      </p:ext>
-    </p:extLst>
   </p:cSld>
   <p:clrMapOvr>
     <a:masterClrMapping/>
@@ -2120,6 +2798,11 @@
 <file path=ppt/slideLayouts/slideLayout3.xml><?xml version="1.0" encoding="utf-8"?>
 <p:sldLayout xmlns:a="http://schemas.openxmlformats.org/drawingml/2006/main" xmlns:r="http://schemas.openxmlformats.org/officeDocument/2006/relationships" xmlns:p="http://schemas.openxmlformats.org/presentationml/2006/main" type="secHead" preserve="1">
   <p:cSld name="Section Header">
+    <p:bg>
+      <p:bgRef idx="1002">
+        <a:schemeClr val="bg1"/>
+      </p:bgRef>
+    </p:bg>
     <p:spTree>
       <p:nvGrpSpPr>
         <p:cNvPr id="1" name=""/>
@@ -2146,23 +2829,42 @@
         </p:nvSpPr>
         <p:spPr>
           <a:xfrm>
-            <a:off x="722313" y="4406900"/>
-            <a:ext cx="7772400" cy="1362075"/>
+            <a:off x="722376" y="1059712"/>
+            <a:ext cx="7772400" cy="1828800"/>
           </a:xfrm>
         </p:spPr>
         <p:txBody>
-          <a:bodyPr anchor="t"/>
+          <a:bodyPr vert="horz" anchor="b">
+            <a:normAutofit/>
+            <a:scene3d>
+              <a:camera prst="orthographicFront"/>
+              <a:lightRig rig="soft" dir="t"/>
+            </a:scene3d>
+            <a:sp3d prstMaterial="softEdge">
+              <a:bevelT w="25400" h="25400"/>
+            </a:sp3d>
+          </a:bodyPr>
           <a:lstStyle>
-            <a:lvl1pPr algn="l">
-              <a:defRPr sz="4000" b="1" cap="all"/>
+            <a:lvl1pPr algn="r">
+              <a:buNone/>
+              <a:defRPr sz="4800" b="1" cap="none" baseline="0">
+                <a:effectLst>
+                  <a:outerShdw blurRad="31750" dist="25400" dir="5400000" algn="tl" rotWithShape="0">
+                    <a:srgbClr val="000000">
+                      <a:alpha val="25000"/>
+                    </a:srgbClr>
+                  </a:outerShdw>
+                </a:effectLst>
+              </a:defRPr>
             </a:lvl1pPr>
+            <a:extLst/>
           </a:lstStyle>
           <a:p>
             <a:r>
-              <a:rPr lang="en-US" smtClean="0"/>
+              <a:rPr kumimoji="0" lang="en-US" smtClean="0"/>
               <a:t>Click to edit Master title style</a:t>
             </a:r>
-            <a:endParaRPr lang="en-US"/>
+            <a:endParaRPr kumimoji="0" lang="en-US"/>
           </a:p>
         </p:txBody>
       </p:sp>
@@ -2178,24 +2880,22 @@
         </p:nvSpPr>
         <p:spPr>
           <a:xfrm>
-            <a:off x="722313" y="2906713"/>
-            <a:ext cx="7772400" cy="1500187"/>
+            <a:off x="3922713" y="2931712"/>
+            <a:ext cx="4572000" cy="1454888"/>
           </a:xfrm>
         </p:spPr>
         <p:txBody>
-          <a:bodyPr anchor="b"/>
+          <a:bodyPr lIns="91440" rIns="91440" anchor="t"/>
           <a:lstStyle>
-            <a:lvl1pPr marL="0" indent="0">
+            <a:lvl1pPr marL="0" indent="0" algn="l">
               <a:buNone/>
-              <a:defRPr sz="2000">
+              <a:defRPr sz="2300">
                 <a:solidFill>
-                  <a:schemeClr val="tx1">
-                    <a:tint val="75000"/>
-                  </a:schemeClr>
+                  <a:schemeClr val="tx1"/>
                 </a:solidFill>
               </a:defRPr>
             </a:lvl1pPr>
-            <a:lvl2pPr marL="457200" indent="0">
+            <a:lvl2pPr>
               <a:buNone/>
               <a:defRPr sz="1800">
                 <a:solidFill>
@@ -2205,7 +2905,7 @@
                 </a:solidFill>
               </a:defRPr>
             </a:lvl2pPr>
-            <a:lvl3pPr marL="914400" indent="0">
+            <a:lvl3pPr>
               <a:buNone/>
               <a:defRPr sz="1600">
                 <a:solidFill>
@@ -2215,7 +2915,7 @@
                 </a:solidFill>
               </a:defRPr>
             </a:lvl3pPr>
-            <a:lvl4pPr marL="1371600" indent="0">
+            <a:lvl4pPr>
               <a:buNone/>
               <a:defRPr sz="1400">
                 <a:solidFill>
@@ -2225,7 +2925,7 @@
                 </a:solidFill>
               </a:defRPr>
             </a:lvl4pPr>
-            <a:lvl5pPr marL="1828800" indent="0">
+            <a:lvl5pPr>
               <a:buNone/>
               <a:defRPr sz="1400">
                 <a:solidFill>
@@ -2235,51 +2935,12 @@
                 </a:solidFill>
               </a:defRPr>
             </a:lvl5pPr>
-            <a:lvl6pPr marL="2286000" indent="0">
-              <a:buNone/>
-              <a:defRPr sz="1400">
-                <a:solidFill>
-                  <a:schemeClr val="tx1">
-                    <a:tint val="75000"/>
-                  </a:schemeClr>
-                </a:solidFill>
-              </a:defRPr>
-            </a:lvl6pPr>
-            <a:lvl7pPr marL="2743200" indent="0">
-              <a:buNone/>
-              <a:defRPr sz="1400">
-                <a:solidFill>
-                  <a:schemeClr val="tx1">
-                    <a:tint val="75000"/>
-                  </a:schemeClr>
-                </a:solidFill>
-              </a:defRPr>
-            </a:lvl7pPr>
-            <a:lvl8pPr marL="3200400" indent="0">
-              <a:buNone/>
-              <a:defRPr sz="1400">
-                <a:solidFill>
-                  <a:schemeClr val="tx1">
-                    <a:tint val="75000"/>
-                  </a:schemeClr>
-                </a:solidFill>
-              </a:defRPr>
-            </a:lvl8pPr>
-            <a:lvl9pPr marL="3657600" indent="0">
-              <a:buNone/>
-              <a:defRPr sz="1400">
-                <a:solidFill>
-                  <a:schemeClr val="tx1">
-                    <a:tint val="75000"/>
-                  </a:schemeClr>
-                </a:solidFill>
-              </a:defRPr>
-            </a:lvl9pPr>
+            <a:extLst/>
           </a:lstStyle>
           <a:p>
-            <a:pPr lvl="0"/>
-            <a:r>
-              <a:rPr lang="en-US" smtClean="0"/>
+            <a:pPr lvl="0" eaLnBrk="1" latinLnBrk="0" hangingPunct="1"/>
+            <a:r>
+              <a:rPr kumimoji="0" lang="en-US" smtClean="0"/>
               <a:t>Click to edit Master text styles</a:t>
             </a:r>
           </a:p>
@@ -2298,11 +2959,13 @@
         <p:spPr/>
         <p:txBody>
           <a:bodyPr/>
-          <a:lstStyle/>
+          <a:lstStyle>
+            <a:extLst/>
+          </a:lstStyle>
           <a:p>
             <a:fld id="{8096CBEF-B388-4E9F-94F0-5BE1A698433D}" type="datetimeFigureOut">
               <a:rPr lang="en-US" smtClean="0"/>
-              <a:t>12/5/2012</a:t>
+              <a:t>12/6/2012</a:t>
             </a:fld>
             <a:endParaRPr lang="en-US"/>
           </a:p>
@@ -2321,7 +2984,9 @@
         <p:spPr/>
         <p:txBody>
           <a:bodyPr/>
-          <a:lstStyle/>
+          <a:lstStyle>
+            <a:extLst/>
+          </a:lstStyle>
           <a:p>
             <a:endParaRPr lang="en-US"/>
           </a:p>
@@ -2340,7 +3005,9 @@
         <p:spPr/>
         <p:txBody>
           <a:bodyPr/>
-          <a:lstStyle/>
+          <a:lstStyle>
+            <a:extLst/>
+          </a:lstStyle>
           <a:p>
             <a:fld id="{24BDE544-15E2-4E42-8238-153692337462}" type="slidenum">
               <a:rPr lang="en-US" smtClean="0"/>
@@ -2350,15 +3017,170 @@
           </a:p>
         </p:txBody>
       </p:sp>
+      <p:sp>
+        <p:nvSpPr>
+          <p:cNvPr id="7" name="Chevron 6"/>
+          <p:cNvSpPr/>
+          <p:nvPr/>
+        </p:nvSpPr>
+        <p:spPr>
+          <a:xfrm>
+            <a:off x="3636680" y="3005472"/>
+            <a:ext cx="182880" cy="228600"/>
+          </a:xfrm>
+          <a:prstGeom prst="chevron">
+            <a:avLst>
+              <a:gd name="adj" fmla="val 50000"/>
+            </a:avLst>
+          </a:prstGeom>
+          <a:gradFill flip="none" rotWithShape="1">
+            <a:gsLst>
+              <a:gs pos="0">
+                <a:schemeClr val="accent1">
+                  <a:shade val="60000"/>
+                  <a:satMod val="125000"/>
+                </a:schemeClr>
+              </a:gs>
+              <a:gs pos="72000">
+                <a:schemeClr val="accent1">
+                  <a:tint val="90000"/>
+                  <a:satMod val="138000"/>
+                </a:schemeClr>
+              </a:gs>
+              <a:gs pos="100000">
+                <a:schemeClr val="accent1">
+                  <a:tint val="76000"/>
+                  <a:satMod val="136000"/>
+                </a:schemeClr>
+              </a:gs>
+            </a:gsLst>
+            <a:lin ang="16200000" scaled="0"/>
+          </a:gradFill>
+          <a:ln w="3175" cap="rnd" cmpd="sng" algn="ctr">
+            <a:solidFill>
+              <a:schemeClr val="accent1">
+                <a:shade val="50000"/>
+              </a:schemeClr>
+            </a:solidFill>
+            <a:prstDash val="solid"/>
+          </a:ln>
+          <a:effectLst>
+            <a:outerShdw blurRad="50800" dist="25400" dir="5400000">
+              <a:srgbClr val="000000">
+                <a:alpha val="46000"/>
+              </a:srgbClr>
+            </a:outerShdw>
+          </a:effectLst>
+        </p:spPr>
+        <p:style>
+          <a:lnRef idx="1">
+            <a:schemeClr val="accent1"/>
+          </a:lnRef>
+          <a:fillRef idx="3">
+            <a:schemeClr val="accent1"/>
+          </a:fillRef>
+          <a:effectRef idx="2">
+            <a:schemeClr val="accent1"/>
+          </a:effectRef>
+          <a:fontRef idx="minor">
+            <a:schemeClr val="lt1"/>
+          </a:fontRef>
+        </p:style>
+        <p:txBody>
+          <a:bodyPr anchor="ctr"/>
+          <a:lstStyle>
+            <a:extLst/>
+          </a:lstStyle>
+          <a:p>
+            <a:pPr algn="l" eaLnBrk="1" latinLnBrk="0" hangingPunct="1"/>
+            <a:endParaRPr kumimoji="0" lang="en-US"/>
+          </a:p>
+        </p:txBody>
+      </p:sp>
+      <p:sp>
+        <p:nvSpPr>
+          <p:cNvPr id="8" name="Chevron 7"/>
+          <p:cNvSpPr/>
+          <p:nvPr/>
+        </p:nvSpPr>
+        <p:spPr>
+          <a:xfrm>
+            <a:off x="3450264" y="3005472"/>
+            <a:ext cx="182880" cy="228600"/>
+          </a:xfrm>
+          <a:prstGeom prst="chevron">
+            <a:avLst>
+              <a:gd name="adj" fmla="val 50000"/>
+            </a:avLst>
+          </a:prstGeom>
+          <a:gradFill flip="none" rotWithShape="1">
+            <a:gsLst>
+              <a:gs pos="0">
+                <a:schemeClr val="accent1">
+                  <a:shade val="60000"/>
+                  <a:satMod val="125000"/>
+                </a:schemeClr>
+              </a:gs>
+              <a:gs pos="72000">
+                <a:schemeClr val="accent1">
+                  <a:tint val="90000"/>
+                  <a:satMod val="138000"/>
+                </a:schemeClr>
+              </a:gs>
+              <a:gs pos="100000">
+                <a:schemeClr val="accent1">
+                  <a:tint val="76000"/>
+                  <a:satMod val="136000"/>
+                </a:schemeClr>
+              </a:gs>
+            </a:gsLst>
+            <a:lin ang="16200000" scaled="0"/>
+          </a:gradFill>
+          <a:ln w="3175" cap="rnd" cmpd="sng" algn="ctr">
+            <a:solidFill>
+              <a:schemeClr val="accent1">
+                <a:shade val="50000"/>
+              </a:schemeClr>
+            </a:solidFill>
+            <a:prstDash val="solid"/>
+          </a:ln>
+          <a:effectLst>
+            <a:outerShdw blurRad="50800" dist="25400" dir="5400000">
+              <a:srgbClr val="000000">
+                <a:alpha val="46000"/>
+              </a:srgbClr>
+            </a:outerShdw>
+          </a:effectLst>
+        </p:spPr>
+        <p:style>
+          <a:lnRef idx="1">
+            <a:schemeClr val="accent1"/>
+          </a:lnRef>
+          <a:fillRef idx="3">
+            <a:schemeClr val="accent1"/>
+          </a:fillRef>
+          <a:effectRef idx="2">
+            <a:schemeClr val="accent1"/>
+          </a:effectRef>
+          <a:fontRef idx="minor">
+            <a:schemeClr val="lt1"/>
+          </a:fontRef>
+        </p:style>
+        <p:txBody>
+          <a:bodyPr anchor="ctr"/>
+          <a:lstStyle>
+            <a:extLst/>
+          </a:lstStyle>
+          <a:p>
+            <a:pPr algn="l" eaLnBrk="1" latinLnBrk="0" hangingPunct="1"/>
+            <a:endParaRPr kumimoji="0" lang="en-US"/>
+          </a:p>
+        </p:txBody>
+      </p:sp>
     </p:spTree>
-    <p:extLst>
-      <p:ext uri="{BB962C8B-B14F-4D97-AF65-F5344CB8AC3E}">
-        <p14:creationId xmlns:p14="http://schemas.microsoft.com/office/powerpoint/2010/main" val="2687161850"/>
-      </p:ext>
-    </p:extLst>
   </p:cSld>
   <p:clrMapOvr>
-    <a:masterClrMapping/>
+    <a:overrideClrMapping bg1="dk1" tx1="lt1" bg2="dk2" tx2="lt2" accent1="accent1" accent2="accent2" accent3="accent3" accent4="accent4" accent5="accent5" accent6="accent6" hlink="hlink" folHlink="folHlink"/>
   </p:clrMapOvr>
 </p:sldLayout>
 </file>
@@ -2366,6 +3188,11 @@
 <file path=ppt/slideLayouts/slideLayout4.xml><?xml version="1.0" encoding="utf-8"?>
 <p:sldLayout xmlns:a="http://schemas.openxmlformats.org/drawingml/2006/main" xmlns:r="http://schemas.openxmlformats.org/officeDocument/2006/relationships" xmlns:p="http://schemas.openxmlformats.org/presentationml/2006/main" type="twoObj" preserve="1">
   <p:cSld name="Two Content">
+    <p:bg>
+      <p:bgRef idx="1002">
+        <a:schemeClr val="bg1"/>
+      </p:bgRef>
+    </p:bg>
     <p:spTree>
       <p:nvGrpSpPr>
         <p:cNvPr id="1" name=""/>
@@ -2382,29 +3209,6 @@
       </p:grpSpPr>
       <p:sp>
         <p:nvSpPr>
-          <p:cNvPr id="2" name="Title 1"/>
-          <p:cNvSpPr>
-            <a:spLocks noGrp="1"/>
-          </p:cNvSpPr>
-          <p:nvPr>
-            <p:ph type="title"/>
-          </p:nvPr>
-        </p:nvSpPr>
-        <p:spPr/>
-        <p:txBody>
-          <a:bodyPr/>
-          <a:lstStyle/>
-          <a:p>
-            <a:r>
-              <a:rPr lang="en-US" smtClean="0"/>
-              <a:t>Click to edit Master title style</a:t>
-            </a:r>
-            <a:endParaRPr lang="en-US"/>
-          </a:p>
-        </p:txBody>
-      </p:sp>
-      <p:sp>
-        <p:nvSpPr>
           <p:cNvPr id="3" name="Content Placeholder 2"/>
           <p:cNvSpPr>
             <a:spLocks noGrp="1"/>
@@ -2415,7 +3219,7 @@
         </p:nvSpPr>
         <p:spPr>
           <a:xfrm>
-            <a:off x="457200" y="1600200"/>
+            <a:off x="457200" y="1481328"/>
             <a:ext cx="4038600" cy="4525963"/>
           </a:xfrm>
         </p:spPr>
@@ -2437,54 +3241,43 @@
             <a:lvl5pPr>
               <a:defRPr sz="1800"/>
             </a:lvl5pPr>
-            <a:lvl6pPr>
-              <a:defRPr sz="1800"/>
-            </a:lvl6pPr>
-            <a:lvl7pPr>
-              <a:defRPr sz="1800"/>
-            </a:lvl7pPr>
-            <a:lvl8pPr>
-              <a:defRPr sz="1800"/>
-            </a:lvl8pPr>
-            <a:lvl9pPr>
-              <a:defRPr sz="1800"/>
-            </a:lvl9pPr>
+            <a:extLst/>
           </a:lstStyle>
           <a:p>
-            <a:pPr lvl="0"/>
+            <a:pPr lvl="0" eaLnBrk="1" latinLnBrk="0" hangingPunct="1"/>
             <a:r>
               <a:rPr lang="en-US" smtClean="0"/>
               <a:t>Click to edit Master text styles</a:t>
             </a:r>
           </a:p>
           <a:p>
-            <a:pPr lvl="1"/>
+            <a:pPr lvl="1" eaLnBrk="1" latinLnBrk="0" hangingPunct="1"/>
             <a:r>
               <a:rPr lang="en-US" smtClean="0"/>
               <a:t>Second level</a:t>
             </a:r>
           </a:p>
           <a:p>
-            <a:pPr lvl="2"/>
+            <a:pPr lvl="2" eaLnBrk="1" latinLnBrk="0" hangingPunct="1"/>
             <a:r>
               <a:rPr lang="en-US" smtClean="0"/>
               <a:t>Third level</a:t>
             </a:r>
           </a:p>
           <a:p>
-            <a:pPr lvl="3"/>
+            <a:pPr lvl="3" eaLnBrk="1" latinLnBrk="0" hangingPunct="1"/>
             <a:r>
               <a:rPr lang="en-US" smtClean="0"/>
               <a:t>Fourth level</a:t>
             </a:r>
           </a:p>
           <a:p>
-            <a:pPr lvl="4"/>
+            <a:pPr lvl="4" eaLnBrk="1" latinLnBrk="0" hangingPunct="1"/>
             <a:r>
               <a:rPr lang="en-US" smtClean="0"/>
               <a:t>Fifth level</a:t>
             </a:r>
-            <a:endParaRPr lang="en-US"/>
+            <a:endParaRPr kumimoji="0" lang="en-US"/>
           </a:p>
         </p:txBody>
       </p:sp>
@@ -2500,7 +3293,7 @@
         </p:nvSpPr>
         <p:spPr>
           <a:xfrm>
-            <a:off x="4648200" y="1600200"/>
+            <a:off x="4648200" y="1481328"/>
             <a:ext cx="4038600" cy="4525963"/>
           </a:xfrm>
         </p:spPr>
@@ -2522,54 +3315,43 @@
             <a:lvl5pPr>
               <a:defRPr sz="1800"/>
             </a:lvl5pPr>
-            <a:lvl6pPr>
-              <a:defRPr sz="1800"/>
-            </a:lvl6pPr>
-            <a:lvl7pPr>
-              <a:defRPr sz="1800"/>
-            </a:lvl7pPr>
-            <a:lvl8pPr>
-              <a:defRPr sz="1800"/>
-            </a:lvl8pPr>
-            <a:lvl9pPr>
-              <a:defRPr sz="1800"/>
-            </a:lvl9pPr>
+            <a:extLst/>
           </a:lstStyle>
           <a:p>
-            <a:pPr lvl="0"/>
+            <a:pPr lvl="0" eaLnBrk="1" latinLnBrk="0" hangingPunct="1"/>
             <a:r>
               <a:rPr lang="en-US" smtClean="0"/>
               <a:t>Click to edit Master text styles</a:t>
             </a:r>
           </a:p>
           <a:p>
-            <a:pPr lvl="1"/>
+            <a:pPr lvl="1" eaLnBrk="1" latinLnBrk="0" hangingPunct="1"/>
             <a:r>
               <a:rPr lang="en-US" smtClean="0"/>
               <a:t>Second level</a:t>
             </a:r>
           </a:p>
           <a:p>
-            <a:pPr lvl="2"/>
+            <a:pPr lvl="2" eaLnBrk="1" latinLnBrk="0" hangingPunct="1"/>
             <a:r>
               <a:rPr lang="en-US" smtClean="0"/>
               <a:t>Third level</a:t>
             </a:r>
           </a:p>
           <a:p>
-            <a:pPr lvl="3"/>
+            <a:pPr lvl="3" eaLnBrk="1" latinLnBrk="0" hangingPunct="1"/>
             <a:r>
               <a:rPr lang="en-US" smtClean="0"/>
               <a:t>Fourth level</a:t>
             </a:r>
           </a:p>
           <a:p>
-            <a:pPr lvl="4"/>
+            <a:pPr lvl="4" eaLnBrk="1" latinLnBrk="0" hangingPunct="1"/>
             <a:r>
               <a:rPr lang="en-US" smtClean="0"/>
               <a:t>Fifth level</a:t>
             </a:r>
-            <a:endParaRPr lang="en-US"/>
+            <a:endParaRPr kumimoji="0" lang="en-US"/>
           </a:p>
         </p:txBody>
       </p:sp>
@@ -2586,11 +3368,13 @@
         <p:spPr/>
         <p:txBody>
           <a:bodyPr/>
-          <a:lstStyle/>
+          <a:lstStyle>
+            <a:extLst/>
+          </a:lstStyle>
           <a:p>
             <a:fld id="{8096CBEF-B388-4E9F-94F0-5BE1A698433D}" type="datetimeFigureOut">
               <a:rPr lang="en-US" smtClean="0"/>
-              <a:t>12/5/2012</a:t>
+              <a:t>12/6/2012</a:t>
             </a:fld>
             <a:endParaRPr lang="en-US"/>
           </a:p>
@@ -2609,7 +3393,9 @@
         <p:spPr/>
         <p:txBody>
           <a:bodyPr/>
-          <a:lstStyle/>
+          <a:lstStyle>
+            <a:extLst/>
+          </a:lstStyle>
           <a:p>
             <a:endParaRPr lang="en-US"/>
           </a:p>
@@ -2628,7 +3414,9 @@
         <p:spPr/>
         <p:txBody>
           <a:bodyPr/>
-          <a:lstStyle/>
+          <a:lstStyle>
+            <a:extLst/>
+          </a:lstStyle>
           <a:p>
             <a:fld id="{24BDE544-15E2-4E42-8238-153692337462}" type="slidenum">
               <a:rPr lang="en-US" smtClean="0"/>
@@ -2638,22 +3426,47 @@
           </a:p>
         </p:txBody>
       </p:sp>
+      <p:sp>
+        <p:nvSpPr>
+          <p:cNvPr id="8" name="Title 7"/>
+          <p:cNvSpPr>
+            <a:spLocks noGrp="1"/>
+          </p:cNvSpPr>
+          <p:nvPr>
+            <p:ph type="title"/>
+          </p:nvPr>
+        </p:nvSpPr>
+        <p:spPr/>
+        <p:txBody>
+          <a:bodyPr rtlCol="0"/>
+          <a:lstStyle>
+            <a:extLst/>
+          </a:lstStyle>
+          <a:p>
+            <a:r>
+              <a:rPr kumimoji="0" lang="en-US" smtClean="0"/>
+              <a:t>Click to edit Master title style</a:t>
+            </a:r>
+            <a:endParaRPr kumimoji="0" lang="en-US"/>
+          </a:p>
+        </p:txBody>
+      </p:sp>
     </p:spTree>
-    <p:extLst>
-      <p:ext uri="{BB962C8B-B14F-4D97-AF65-F5344CB8AC3E}">
-        <p14:creationId xmlns:p14="http://schemas.microsoft.com/office/powerpoint/2010/main" val="1795781918"/>
-      </p:ext>
-    </p:extLst>
   </p:cSld>
   <p:clrMapOvr>
-    <a:masterClrMapping/>
+    <a:overrideClrMapping bg1="dk1" tx1="lt1" bg2="dk2" tx2="lt2" accent1="accent1" accent2="accent2" accent3="accent3" accent4="accent4" accent5="accent5" accent6="accent6" hlink="hlink" folHlink="folHlink"/>
   </p:clrMapOvr>
 </p:sldLayout>
 </file>
 
 <file path=ppt/slideLayouts/slideLayout5.xml><?xml version="1.0" encoding="utf-8"?>
-<p:sldLayout xmlns:a="http://schemas.openxmlformats.org/drawingml/2006/main" xmlns:r="http://schemas.openxmlformats.org/officeDocument/2006/relationships" xmlns:p="http://schemas.openxmlformats.org/presentationml/2006/main" type="twoTxTwoObj" preserve="1">
+<p:sldLayout xmlns:a="http://schemas.openxmlformats.org/drawingml/2006/main" xmlns:r="http://schemas.openxmlformats.org/officeDocument/2006/relationships" xmlns:p="http://schemas.openxmlformats.org/presentationml/2006/main" showMasterSp="0" type="twoTxTwoObj" preserve="1">
   <p:cSld name="Comparison">
+    <p:bg>
+      <p:bgRef idx="1003">
+        <a:schemeClr val="bg1"/>
+      </p:bgRef>
+    </p:bg>
     <p:spTree>
       <p:nvGrpSpPr>
         <p:cNvPr id="1" name=""/>
@@ -2678,20 +3491,26 @@
             <p:ph type="title"/>
           </p:nvPr>
         </p:nvSpPr>
-        <p:spPr/>
-        <p:txBody>
-          <a:bodyPr/>
+        <p:spPr>
+          <a:xfrm>
+            <a:off x="457200" y="273050"/>
+            <a:ext cx="8229600" cy="1143000"/>
+          </a:xfrm>
+        </p:spPr>
+        <p:txBody>
+          <a:bodyPr anchor="ctr"/>
           <a:lstStyle>
             <a:lvl1pPr>
               <a:defRPr/>
             </a:lvl1pPr>
+            <a:extLst/>
           </a:lstStyle>
           <a:p>
             <a:r>
-              <a:rPr lang="en-US" smtClean="0"/>
+              <a:rPr kumimoji="0" lang="en-US" smtClean="0"/>
               <a:t>Click to edit Master title style</a:t>
             </a:r>
-            <a:endParaRPr lang="en-US"/>
+            <a:endParaRPr kumimoji="0" lang="en-US"/>
           </a:p>
         </p:txBody>
       </p:sp>
@@ -2707,54 +3526,115 @@
         </p:nvSpPr>
         <p:spPr>
           <a:xfrm>
-            <a:off x="457200" y="1535113"/>
-            <a:ext cx="4040188" cy="639762"/>
+            <a:off x="457200" y="5410200"/>
+            <a:ext cx="4040188" cy="762000"/>
           </a:xfrm>
+          <a:solidFill>
+            <a:schemeClr val="accent1"/>
+          </a:solidFill>
+          <a:ln w="9652">
+            <a:solidFill>
+              <a:schemeClr val="accent1"/>
+            </a:solidFill>
+            <a:miter lim="800000"/>
+          </a:ln>
         </p:spPr>
         <p:txBody>
-          <a:bodyPr anchor="b"/>
+          <a:bodyPr lIns="182880" anchor="ctr"/>
           <a:lstStyle>
             <a:lvl1pPr marL="0" indent="0">
               <a:buNone/>
-              <a:defRPr sz="2400" b="1"/>
+              <a:defRPr sz="2400" b="0">
+                <a:solidFill>
+                  <a:schemeClr val="bg1"/>
+                </a:solidFill>
+              </a:defRPr>
             </a:lvl1pPr>
-            <a:lvl2pPr marL="457200" indent="0">
+            <a:lvl2pPr>
               <a:buNone/>
               <a:defRPr sz="2000" b="1"/>
             </a:lvl2pPr>
-            <a:lvl3pPr marL="914400" indent="0">
+            <a:lvl3pPr>
               <a:buNone/>
               <a:defRPr sz="1800" b="1"/>
             </a:lvl3pPr>
-            <a:lvl4pPr marL="1371600" indent="0">
+            <a:lvl4pPr>
               <a:buNone/>
               <a:defRPr sz="1600" b="1"/>
             </a:lvl4pPr>
-            <a:lvl5pPr marL="1828800" indent="0">
+            <a:lvl5pPr>
               <a:buNone/>
               <a:defRPr sz="1600" b="1"/>
             </a:lvl5pPr>
-            <a:lvl6pPr marL="2286000" indent="0">
+            <a:extLst/>
+          </a:lstStyle>
+          <a:p>
+            <a:pPr lvl="0" eaLnBrk="1" latinLnBrk="0" hangingPunct="1"/>
+            <a:r>
+              <a:rPr kumimoji="0" lang="en-US" smtClean="0"/>
+              <a:t>Click to edit Master text styles</a:t>
+            </a:r>
+          </a:p>
+        </p:txBody>
+      </p:sp>
+      <p:sp>
+        <p:nvSpPr>
+          <p:cNvPr id="4" name="Text Placeholder 3"/>
+          <p:cNvSpPr>
+            <a:spLocks noGrp="1"/>
+          </p:cNvSpPr>
+          <p:nvPr>
+            <p:ph type="body" sz="half" idx="3"/>
+          </p:nvPr>
+        </p:nvSpPr>
+        <p:spPr>
+          <a:xfrm>
+            <a:off x="4645026" y="5410200"/>
+            <a:ext cx="4041775" cy="762000"/>
+          </a:xfrm>
+          <a:solidFill>
+            <a:schemeClr val="accent1"/>
+          </a:solidFill>
+          <a:ln w="9652">
+            <a:solidFill>
+              <a:schemeClr val="accent1"/>
+            </a:solidFill>
+            <a:miter lim="800000"/>
+          </a:ln>
+        </p:spPr>
+        <p:txBody>
+          <a:bodyPr lIns="182880" anchor="ctr"/>
+          <a:lstStyle>
+            <a:lvl1pPr marL="0" indent="0">
+              <a:buNone/>
+              <a:defRPr sz="2400" b="0">
+                <a:solidFill>
+                  <a:schemeClr val="bg1"/>
+                </a:solidFill>
+              </a:defRPr>
+            </a:lvl1pPr>
+            <a:lvl2pPr>
+              <a:buNone/>
+              <a:defRPr sz="2000" b="1"/>
+            </a:lvl2pPr>
+            <a:lvl3pPr>
+              <a:buNone/>
+              <a:defRPr sz="1800" b="1"/>
+            </a:lvl3pPr>
+            <a:lvl4pPr>
               <a:buNone/>
               <a:defRPr sz="1600" b="1"/>
-            </a:lvl6pPr>
-            <a:lvl7pPr marL="2743200" indent="0">
+            </a:lvl4pPr>
+            <a:lvl5pPr>
               <a:buNone/>
               <a:defRPr sz="1600" b="1"/>
-            </a:lvl7pPr>
-            <a:lvl8pPr marL="3200400" indent="0">
-              <a:buNone/>
-              <a:defRPr sz="1600" b="1"/>
-            </a:lvl8pPr>
-            <a:lvl9pPr marL="3657600" indent="0">
-              <a:buNone/>
-              <a:defRPr sz="1600" b="1"/>
-            </a:lvl9pPr>
+            </a:lvl5pPr>
+            <a:extLst/>
           </a:lstStyle>
           <a:p>
-            <a:pPr lvl="0"/>
-            <a:r>
-              <a:rPr lang="en-US" smtClean="0"/>
+            <a:pPr lvl="0" eaLnBrk="1" latinLnBrk="0" hangingPunct="1"/>
+            <a:r>
+              <a:rPr kumimoji="0" lang="en-US" smtClean="0"/>
               <a:t>Click to edit Master text styles</a:t>
             </a:r>
           </a:p>
@@ -2762,19 +3642,24 @@
       </p:sp>
       <p:sp>
         <p:nvSpPr>
-          <p:cNvPr id="4" name="Content Placeholder 3"/>
-          <p:cNvSpPr>
-            <a:spLocks noGrp="1"/>
-          </p:cNvSpPr>
-          <p:nvPr>
-            <p:ph sz="half" idx="2"/>
+          <p:cNvPr id="5" name="Content Placeholder 4"/>
+          <p:cNvSpPr>
+            <a:spLocks noGrp="1"/>
+          </p:cNvSpPr>
+          <p:nvPr>
+            <p:ph sz="quarter" idx="2"/>
           </p:nvPr>
         </p:nvSpPr>
         <p:spPr>
           <a:xfrm>
-            <a:off x="457200" y="2174875"/>
-            <a:ext cx="4040188" cy="3951288"/>
+            <a:off x="457200" y="1444294"/>
+            <a:ext cx="4040188" cy="3941763"/>
           </a:xfrm>
+          <a:ln>
+            <a:noFill/>
+            <a:prstDash val="sysDash"/>
+            <a:miter lim="800000"/>
+          </a:ln>
         </p:spPr>
         <p:txBody>
           <a:bodyPr/>
@@ -2794,142 +3679,74 @@
             <a:lvl5pPr>
               <a:defRPr sz="1600"/>
             </a:lvl5pPr>
-            <a:lvl6pPr>
-              <a:defRPr sz="1600"/>
-            </a:lvl6pPr>
-            <a:lvl7pPr>
-              <a:defRPr sz="1600"/>
-            </a:lvl7pPr>
-            <a:lvl8pPr>
-              <a:defRPr sz="1600"/>
-            </a:lvl8pPr>
-            <a:lvl9pPr>
-              <a:defRPr sz="1600"/>
-            </a:lvl9pPr>
+            <a:extLst/>
           </a:lstStyle>
           <a:p>
-            <a:pPr lvl="0"/>
+            <a:pPr lvl="0" eaLnBrk="1" latinLnBrk="0" hangingPunct="1"/>
             <a:r>
               <a:rPr lang="en-US" smtClean="0"/>
               <a:t>Click to edit Master text styles</a:t>
             </a:r>
           </a:p>
           <a:p>
-            <a:pPr lvl="1"/>
+            <a:pPr lvl="1" eaLnBrk="1" latinLnBrk="0" hangingPunct="1"/>
             <a:r>
               <a:rPr lang="en-US" smtClean="0"/>
               <a:t>Second level</a:t>
             </a:r>
           </a:p>
           <a:p>
-            <a:pPr lvl="2"/>
+            <a:pPr lvl="2" eaLnBrk="1" latinLnBrk="0" hangingPunct="1"/>
             <a:r>
               <a:rPr lang="en-US" smtClean="0"/>
               <a:t>Third level</a:t>
             </a:r>
           </a:p>
           <a:p>
-            <a:pPr lvl="3"/>
+            <a:pPr lvl="3" eaLnBrk="1" latinLnBrk="0" hangingPunct="1"/>
             <a:r>
               <a:rPr lang="en-US" smtClean="0"/>
               <a:t>Fourth level</a:t>
             </a:r>
           </a:p>
           <a:p>
-            <a:pPr lvl="4"/>
+            <a:pPr lvl="4" eaLnBrk="1" latinLnBrk="0" hangingPunct="1"/>
             <a:r>
               <a:rPr lang="en-US" smtClean="0"/>
               <a:t>Fifth level</a:t>
             </a:r>
-            <a:endParaRPr lang="en-US"/>
-          </a:p>
-        </p:txBody>
-      </p:sp>
-      <p:sp>
-        <p:nvSpPr>
-          <p:cNvPr id="5" name="Text Placeholder 4"/>
-          <p:cNvSpPr>
-            <a:spLocks noGrp="1"/>
-          </p:cNvSpPr>
-          <p:nvPr>
-            <p:ph type="body" sz="quarter" idx="3"/>
+            <a:endParaRPr kumimoji="0" lang="en-US"/>
+          </a:p>
+        </p:txBody>
+      </p:sp>
+      <p:sp>
+        <p:nvSpPr>
+          <p:cNvPr id="6" name="Content Placeholder 5"/>
+          <p:cNvSpPr>
+            <a:spLocks noGrp="1"/>
+          </p:cNvSpPr>
+          <p:nvPr>
+            <p:ph sz="quarter" idx="4"/>
           </p:nvPr>
         </p:nvSpPr>
         <p:spPr>
           <a:xfrm>
-            <a:off x="4645025" y="1535113"/>
-            <a:ext cx="4041775" cy="639762"/>
+            <a:off x="4645025" y="1444294"/>
+            <a:ext cx="4041775" cy="3941763"/>
           </a:xfrm>
-        </p:spPr>
-        <p:txBody>
-          <a:bodyPr anchor="b"/>
-          <a:lstStyle>
-            <a:lvl1pPr marL="0" indent="0">
-              <a:buNone/>
-              <a:defRPr sz="2400" b="1"/>
-            </a:lvl1pPr>
-            <a:lvl2pPr marL="457200" indent="0">
-              <a:buNone/>
-              <a:defRPr sz="2000" b="1"/>
-            </a:lvl2pPr>
-            <a:lvl3pPr marL="914400" indent="0">
-              <a:buNone/>
-              <a:defRPr sz="1800" b="1"/>
-            </a:lvl3pPr>
-            <a:lvl4pPr marL="1371600" indent="0">
-              <a:buNone/>
-              <a:defRPr sz="1600" b="1"/>
-            </a:lvl4pPr>
-            <a:lvl5pPr marL="1828800" indent="0">
-              <a:buNone/>
-              <a:defRPr sz="1600" b="1"/>
-            </a:lvl5pPr>
-            <a:lvl6pPr marL="2286000" indent="0">
-              <a:buNone/>
-              <a:defRPr sz="1600" b="1"/>
-            </a:lvl6pPr>
-            <a:lvl7pPr marL="2743200" indent="0">
-              <a:buNone/>
-              <a:defRPr sz="1600" b="1"/>
-            </a:lvl7pPr>
-            <a:lvl8pPr marL="3200400" indent="0">
-              <a:buNone/>
-              <a:defRPr sz="1600" b="1"/>
-            </a:lvl8pPr>
-            <a:lvl9pPr marL="3657600" indent="0">
-              <a:buNone/>
-              <a:defRPr sz="1600" b="1"/>
-            </a:lvl9pPr>
-          </a:lstStyle>
-          <a:p>
-            <a:pPr lvl="0"/>
-            <a:r>
-              <a:rPr lang="en-US" smtClean="0"/>
-              <a:t>Click to edit Master text styles</a:t>
-            </a:r>
-          </a:p>
-        </p:txBody>
-      </p:sp>
-      <p:sp>
-        <p:nvSpPr>
-          <p:cNvPr id="6" name="Content Placeholder 5"/>
-          <p:cNvSpPr>
-            <a:spLocks noGrp="1"/>
-          </p:cNvSpPr>
-          <p:nvPr>
-            <p:ph sz="quarter" idx="4"/>
-          </p:nvPr>
-        </p:nvSpPr>
-        <p:spPr>
-          <a:xfrm>
-            <a:off x="4645025" y="2174875"/>
-            <a:ext cx="4041775" cy="3951288"/>
-          </a:xfrm>
+          <a:ln>
+            <a:noFill/>
+            <a:prstDash val="sysDash"/>
+            <a:miter lim="800000"/>
+          </a:ln>
         </p:spPr>
         <p:txBody>
           <a:bodyPr/>
           <a:lstStyle>
             <a:lvl1pPr>
+              <a:spcBef>
+                <a:spcPts val="0"/>
+              </a:spcBef>
               <a:defRPr sz="2400"/>
             </a:lvl1pPr>
             <a:lvl2pPr>
@@ -2944,54 +3761,43 @@
             <a:lvl5pPr>
               <a:defRPr sz="1600"/>
             </a:lvl5pPr>
-            <a:lvl6pPr>
-              <a:defRPr sz="1600"/>
-            </a:lvl6pPr>
-            <a:lvl7pPr>
-              <a:defRPr sz="1600"/>
-            </a:lvl7pPr>
-            <a:lvl8pPr>
-              <a:defRPr sz="1600"/>
-            </a:lvl8pPr>
-            <a:lvl9pPr>
-              <a:defRPr sz="1600"/>
-            </a:lvl9pPr>
+            <a:extLst/>
           </a:lstStyle>
           <a:p>
-            <a:pPr lvl="0"/>
+            <a:pPr lvl="0" eaLnBrk="1" latinLnBrk="0" hangingPunct="1"/>
             <a:r>
               <a:rPr lang="en-US" smtClean="0"/>
               <a:t>Click to edit Master text styles</a:t>
             </a:r>
           </a:p>
           <a:p>
-            <a:pPr lvl="1"/>
+            <a:pPr lvl="1" eaLnBrk="1" latinLnBrk="0" hangingPunct="1"/>
             <a:r>
               <a:rPr lang="en-US" smtClean="0"/>
               <a:t>Second level</a:t>
             </a:r>
           </a:p>
           <a:p>
-            <a:pPr lvl="2"/>
+            <a:pPr lvl="2" eaLnBrk="1" latinLnBrk="0" hangingPunct="1"/>
             <a:r>
               <a:rPr lang="en-US" smtClean="0"/>
               <a:t>Third level</a:t>
             </a:r>
           </a:p>
           <a:p>
-            <a:pPr lvl="3"/>
+            <a:pPr lvl="3" eaLnBrk="1" latinLnBrk="0" hangingPunct="1"/>
             <a:r>
               <a:rPr lang="en-US" smtClean="0"/>
               <a:t>Fourth level</a:t>
             </a:r>
           </a:p>
           <a:p>
-            <a:pPr lvl="4"/>
+            <a:pPr lvl="4" eaLnBrk="1" latinLnBrk="0" hangingPunct="1"/>
             <a:r>
               <a:rPr lang="en-US" smtClean="0"/>
               <a:t>Fifth level</a:t>
             </a:r>
-            <a:endParaRPr lang="en-US"/>
+            <a:endParaRPr kumimoji="0" lang="en-US"/>
           </a:p>
         </p:txBody>
       </p:sp>
@@ -3008,11 +3814,13 @@
         <p:spPr/>
         <p:txBody>
           <a:bodyPr/>
-          <a:lstStyle/>
+          <a:lstStyle>
+            <a:extLst/>
+          </a:lstStyle>
           <a:p>
             <a:fld id="{8096CBEF-B388-4E9F-94F0-5BE1A698433D}" type="datetimeFigureOut">
               <a:rPr lang="en-US" smtClean="0"/>
-              <a:t>12/5/2012</a:t>
+              <a:t>12/6/2012</a:t>
             </a:fld>
             <a:endParaRPr lang="en-US"/>
           </a:p>
@@ -3031,7 +3839,9 @@
         <p:spPr/>
         <p:txBody>
           <a:bodyPr/>
-          <a:lstStyle/>
+          <a:lstStyle>
+            <a:extLst/>
+          </a:lstStyle>
           <a:p>
             <a:endParaRPr lang="en-US"/>
           </a:p>
@@ -3050,7 +3860,9 @@
         <p:spPr/>
         <p:txBody>
           <a:bodyPr/>
-          <a:lstStyle/>
+          <a:lstStyle>
+            <a:extLst/>
+          </a:lstStyle>
           <a:p>
             <a:fld id="{24BDE544-15E2-4E42-8238-153692337462}" type="slidenum">
               <a:rPr lang="en-US" smtClean="0"/>
@@ -3061,14 +3873,9 @@
         </p:txBody>
       </p:sp>
     </p:spTree>
-    <p:extLst>
-      <p:ext uri="{BB962C8B-B14F-4D97-AF65-F5344CB8AC3E}">
-        <p14:creationId xmlns:p14="http://schemas.microsoft.com/office/powerpoint/2010/main" val="2712968182"/>
-      </p:ext>
-    </p:extLst>
   </p:cSld>
   <p:clrMapOvr>
-    <a:masterClrMapping/>
+    <a:overrideClrMapping bg1="lt1" tx1="dk1" bg2="lt2" tx2="dk2" accent1="accent1" accent2="accent2" accent3="accent3" accent4="accent4" accent5="accent5" accent6="accent6" hlink="hlink" folHlink="folHlink"/>
   </p:clrMapOvr>
 </p:sldLayout>
 </file>
@@ -3076,6 +3883,11 @@
 <file path=ppt/slideLayouts/slideLayout6.xml><?xml version="1.0" encoding="utf-8"?>
 <p:sldLayout xmlns:a="http://schemas.openxmlformats.org/drawingml/2006/main" xmlns:r="http://schemas.openxmlformats.org/officeDocument/2006/relationships" xmlns:p="http://schemas.openxmlformats.org/presentationml/2006/main" type="titleOnly" preserve="1">
   <p:cSld name="Title Only">
+    <p:bg>
+      <p:bgRef idx="1002">
+        <a:schemeClr val="bg1"/>
+      </p:bgRef>
+    </p:bg>
     <p:spTree>
       <p:nvGrpSpPr>
         <p:cNvPr id="1" name=""/>
@@ -3092,45 +3904,24 @@
       </p:grpSpPr>
       <p:sp>
         <p:nvSpPr>
-          <p:cNvPr id="2" name="Title 1"/>
-          <p:cNvSpPr>
-            <a:spLocks noGrp="1"/>
-          </p:cNvSpPr>
-          <p:nvPr>
-            <p:ph type="title"/>
+          <p:cNvPr id="3" name="Date Placeholder 2"/>
+          <p:cNvSpPr>
+            <a:spLocks noGrp="1"/>
+          </p:cNvSpPr>
+          <p:nvPr>
+            <p:ph type="dt" sz="half" idx="10"/>
           </p:nvPr>
         </p:nvSpPr>
         <p:spPr/>
         <p:txBody>
           <a:bodyPr/>
-          <a:lstStyle/>
-          <a:p>
-            <a:r>
-              <a:rPr lang="en-US" smtClean="0"/>
-              <a:t>Click to edit Master title style</a:t>
-            </a:r>
-            <a:endParaRPr lang="en-US"/>
-          </a:p>
-        </p:txBody>
-      </p:sp>
-      <p:sp>
-        <p:nvSpPr>
-          <p:cNvPr id="3" name="Date Placeholder 2"/>
-          <p:cNvSpPr>
-            <a:spLocks noGrp="1"/>
-          </p:cNvSpPr>
-          <p:nvPr>
-            <p:ph type="dt" sz="half" idx="10"/>
-          </p:nvPr>
-        </p:nvSpPr>
-        <p:spPr/>
-        <p:txBody>
-          <a:bodyPr/>
-          <a:lstStyle/>
+          <a:lstStyle>
+            <a:extLst/>
+          </a:lstStyle>
           <a:p>
             <a:fld id="{8096CBEF-B388-4E9F-94F0-5BE1A698433D}" type="datetimeFigureOut">
               <a:rPr lang="en-US" smtClean="0"/>
-              <a:t>12/5/2012</a:t>
+              <a:t>12/6/2012</a:t>
             </a:fld>
             <a:endParaRPr lang="en-US"/>
           </a:p>
@@ -3149,7 +3940,9 @@
         <p:spPr/>
         <p:txBody>
           <a:bodyPr/>
-          <a:lstStyle/>
+          <a:lstStyle>
+            <a:extLst/>
+          </a:lstStyle>
           <a:p>
             <a:endParaRPr lang="en-US"/>
           </a:p>
@@ -3168,7 +3961,9 @@
         <p:spPr/>
         <p:txBody>
           <a:bodyPr/>
-          <a:lstStyle/>
+          <a:lstStyle>
+            <a:extLst/>
+          </a:lstStyle>
           <a:p>
             <a:fld id="{24BDE544-15E2-4E42-8238-153692337462}" type="slidenum">
               <a:rPr lang="en-US" smtClean="0"/>
@@ -3178,15 +3973,35 @@
           </a:p>
         </p:txBody>
       </p:sp>
+      <p:sp>
+        <p:nvSpPr>
+          <p:cNvPr id="6" name="Title 5"/>
+          <p:cNvSpPr>
+            <a:spLocks noGrp="1"/>
+          </p:cNvSpPr>
+          <p:nvPr>
+            <p:ph type="title"/>
+          </p:nvPr>
+        </p:nvSpPr>
+        <p:spPr/>
+        <p:txBody>
+          <a:bodyPr rtlCol="0"/>
+          <a:lstStyle>
+            <a:extLst/>
+          </a:lstStyle>
+          <a:p>
+            <a:r>
+              <a:rPr kumimoji="0" lang="en-US" smtClean="0"/>
+              <a:t>Click to edit Master title style</a:t>
+            </a:r>
+            <a:endParaRPr kumimoji="0" lang="en-US"/>
+          </a:p>
+        </p:txBody>
+      </p:sp>
     </p:spTree>
-    <p:extLst>
-      <p:ext uri="{BB962C8B-B14F-4D97-AF65-F5344CB8AC3E}">
-        <p14:creationId xmlns:p14="http://schemas.microsoft.com/office/powerpoint/2010/main" val="2942107320"/>
-      </p:ext>
-    </p:extLst>
   </p:cSld>
   <p:clrMapOvr>
-    <a:masterClrMapping/>
+    <a:overrideClrMapping bg1="dk1" tx1="lt1" bg2="dk2" tx2="lt2" accent1="accent1" accent2="accent2" accent3="accent3" accent4="accent4" accent5="accent5" accent6="accent6" hlink="hlink" folHlink="folHlink"/>
   </p:clrMapOvr>
 </p:sldLayout>
 </file>
@@ -3221,11 +4036,13 @@
         <p:spPr/>
         <p:txBody>
           <a:bodyPr/>
-          <a:lstStyle/>
+          <a:lstStyle>
+            <a:extLst/>
+          </a:lstStyle>
           <a:p>
             <a:fld id="{8096CBEF-B388-4E9F-94F0-5BE1A698433D}" type="datetimeFigureOut">
               <a:rPr lang="en-US" smtClean="0"/>
-              <a:t>12/5/2012</a:t>
+              <a:t>12/6/2012</a:t>
             </a:fld>
             <a:endParaRPr lang="en-US"/>
           </a:p>
@@ -3244,7 +4061,9 @@
         <p:spPr/>
         <p:txBody>
           <a:bodyPr/>
-          <a:lstStyle/>
+          <a:lstStyle>
+            <a:extLst/>
+          </a:lstStyle>
           <a:p>
             <a:endParaRPr lang="en-US"/>
           </a:p>
@@ -3263,7 +4082,9 @@
         <p:spPr/>
         <p:txBody>
           <a:bodyPr/>
-          <a:lstStyle/>
+          <a:lstStyle>
+            <a:extLst/>
+          </a:lstStyle>
           <a:p>
             <a:fld id="{24BDE544-15E2-4E42-8238-153692337462}" type="slidenum">
               <a:rPr lang="en-US" smtClean="0"/>
@@ -3274,11 +4095,6 @@
         </p:txBody>
       </p:sp>
     </p:spTree>
-    <p:extLst>
-      <p:ext uri="{BB962C8B-B14F-4D97-AF65-F5344CB8AC3E}">
-        <p14:creationId xmlns:p14="http://schemas.microsoft.com/office/powerpoint/2010/main" val="731412800"/>
-      </p:ext>
-    </p:extLst>
   </p:cSld>
   <p:clrMapOvr>
     <a:masterClrMapping/>
@@ -3287,8 +4103,13 @@
 </file>
 
 <file path=ppt/slideLayouts/slideLayout8.xml><?xml version="1.0" encoding="utf-8"?>
-<p:sldLayout xmlns:a="http://schemas.openxmlformats.org/drawingml/2006/main" xmlns:r="http://schemas.openxmlformats.org/officeDocument/2006/relationships" xmlns:p="http://schemas.openxmlformats.org/presentationml/2006/main" type="objTx" preserve="1">
+<p:sldLayout xmlns:a="http://schemas.openxmlformats.org/drawingml/2006/main" xmlns:r="http://schemas.openxmlformats.org/officeDocument/2006/relationships" xmlns:p="http://schemas.openxmlformats.org/presentationml/2006/main" showMasterSp="0" type="objTx" preserve="1">
   <p:cSld name="Content with Caption">
+    <p:bg>
+      <p:bgRef idx="1003">
+        <a:schemeClr val="bg1"/>
+      </p:bgRef>
+    </p:bg>
     <p:spTree>
       <p:nvGrpSpPr>
         <p:cNvPr id="1" name=""/>
@@ -3315,40 +4136,102 @@
         </p:nvSpPr>
         <p:spPr>
           <a:xfrm>
-            <a:off x="457200" y="273050"/>
-            <a:ext cx="3008313" cy="1162050"/>
+            <a:off x="914400" y="4876800"/>
+            <a:ext cx="7481776" cy="457200"/>
           </a:xfrm>
         </p:spPr>
         <p:txBody>
-          <a:bodyPr anchor="b"/>
+          <a:bodyPr vert="horz" anchor="t">
+            <a:noAutofit/>
+            <a:sp3d prstMaterial="softEdge">
+              <a:bevelT w="0" h="0"/>
+            </a:sp3d>
+          </a:bodyPr>
           <a:lstStyle>
-            <a:lvl1pPr algn="l">
-              <a:defRPr sz="2000" b="1"/>
+            <a:lvl1pPr algn="r">
+              <a:buNone/>
+              <a:defRPr sz="2500" b="0">
+                <a:solidFill>
+                  <a:schemeClr val="accent1"/>
+                </a:solidFill>
+                <a:effectLst/>
+              </a:defRPr>
             </a:lvl1pPr>
+            <a:extLst/>
           </a:lstStyle>
           <a:p>
             <a:r>
-              <a:rPr lang="en-US" smtClean="0"/>
+              <a:rPr kumimoji="0" lang="en-US" smtClean="0"/>
               <a:t>Click to edit Master title style</a:t>
             </a:r>
-            <a:endParaRPr lang="en-US"/>
-          </a:p>
-        </p:txBody>
-      </p:sp>
-      <p:sp>
-        <p:nvSpPr>
-          <p:cNvPr id="3" name="Content Placeholder 2"/>
-          <p:cNvSpPr>
-            <a:spLocks noGrp="1"/>
-          </p:cNvSpPr>
-          <p:nvPr>
-            <p:ph idx="1"/>
+            <a:endParaRPr kumimoji="0" lang="en-US"/>
+          </a:p>
+        </p:txBody>
+      </p:sp>
+      <p:sp>
+        <p:nvSpPr>
+          <p:cNvPr id="3" name="Text Placeholder 2"/>
+          <p:cNvSpPr>
+            <a:spLocks noGrp="1"/>
+          </p:cNvSpPr>
+          <p:nvPr>
+            <p:ph type="body" idx="2"/>
           </p:nvPr>
         </p:nvSpPr>
         <p:spPr>
           <a:xfrm>
-            <a:off x="3575050" y="273050"/>
-            <a:ext cx="5111750" cy="5853113"/>
+            <a:off x="4419600" y="5355102"/>
+            <a:ext cx="3974592" cy="914400"/>
+          </a:xfrm>
+        </p:spPr>
+        <p:txBody>
+          <a:bodyPr/>
+          <a:lstStyle>
+            <a:lvl1pPr marL="0" indent="0" algn="r">
+              <a:buNone/>
+              <a:defRPr sz="1600"/>
+            </a:lvl1pPr>
+            <a:lvl2pPr>
+              <a:buNone/>
+              <a:defRPr sz="1200"/>
+            </a:lvl2pPr>
+            <a:lvl3pPr>
+              <a:buNone/>
+              <a:defRPr sz="1000"/>
+            </a:lvl3pPr>
+            <a:lvl4pPr>
+              <a:buNone/>
+              <a:defRPr sz="900"/>
+            </a:lvl4pPr>
+            <a:lvl5pPr>
+              <a:buNone/>
+              <a:defRPr sz="900"/>
+            </a:lvl5pPr>
+            <a:extLst/>
+          </a:lstStyle>
+          <a:p>
+            <a:pPr lvl="0" eaLnBrk="1" latinLnBrk="0" hangingPunct="1"/>
+            <a:r>
+              <a:rPr kumimoji="0" lang="en-US" smtClean="0"/>
+              <a:t>Click to edit Master text styles</a:t>
+            </a:r>
+          </a:p>
+        </p:txBody>
+      </p:sp>
+      <p:sp>
+        <p:nvSpPr>
+          <p:cNvPr id="4" name="Content Placeholder 3"/>
+          <p:cNvSpPr>
+            <a:spLocks noGrp="1"/>
+          </p:cNvSpPr>
+          <p:nvPr>
+            <p:ph sz="half" idx="1"/>
+          </p:nvPr>
+        </p:nvSpPr>
+        <p:spPr>
+          <a:xfrm>
+            <a:off x="914400" y="274320"/>
+            <a:ext cx="7479792" cy="4572000"/>
           </a:xfrm>
         </p:spPr>
         <p:txBody>
@@ -3369,140 +4252,71 @@
             <a:lvl5pPr>
               <a:defRPr sz="2000"/>
             </a:lvl5pPr>
-            <a:lvl6pPr>
-              <a:defRPr sz="2000"/>
-            </a:lvl6pPr>
-            <a:lvl7pPr>
-              <a:defRPr sz="2000"/>
-            </a:lvl7pPr>
-            <a:lvl8pPr>
-              <a:defRPr sz="2000"/>
-            </a:lvl8pPr>
-            <a:lvl9pPr>
-              <a:defRPr sz="2000"/>
-            </a:lvl9pPr>
+            <a:extLst/>
           </a:lstStyle>
           <a:p>
-            <a:pPr lvl="0"/>
+            <a:pPr lvl="0" eaLnBrk="1" latinLnBrk="0" hangingPunct="1"/>
             <a:r>
               <a:rPr lang="en-US" smtClean="0"/>
               <a:t>Click to edit Master text styles</a:t>
             </a:r>
           </a:p>
           <a:p>
-            <a:pPr lvl="1"/>
+            <a:pPr lvl="1" eaLnBrk="1" latinLnBrk="0" hangingPunct="1"/>
             <a:r>
               <a:rPr lang="en-US" smtClean="0"/>
               <a:t>Second level</a:t>
             </a:r>
           </a:p>
           <a:p>
-            <a:pPr lvl="2"/>
+            <a:pPr lvl="2" eaLnBrk="1" latinLnBrk="0" hangingPunct="1"/>
             <a:r>
               <a:rPr lang="en-US" smtClean="0"/>
               <a:t>Third level</a:t>
             </a:r>
           </a:p>
           <a:p>
-            <a:pPr lvl="3"/>
+            <a:pPr lvl="3" eaLnBrk="1" latinLnBrk="0" hangingPunct="1"/>
             <a:r>
               <a:rPr lang="en-US" smtClean="0"/>
               <a:t>Fourth level</a:t>
             </a:r>
           </a:p>
           <a:p>
-            <a:pPr lvl="4"/>
+            <a:pPr lvl="4" eaLnBrk="1" latinLnBrk="0" hangingPunct="1"/>
             <a:r>
               <a:rPr lang="en-US" smtClean="0"/>
               <a:t>Fifth level</a:t>
             </a:r>
-            <a:endParaRPr lang="en-US"/>
-          </a:p>
-        </p:txBody>
-      </p:sp>
-      <p:sp>
-        <p:nvSpPr>
-          <p:cNvPr id="4" name="Text Placeholder 3"/>
-          <p:cNvSpPr>
-            <a:spLocks noGrp="1"/>
-          </p:cNvSpPr>
-          <p:nvPr>
-            <p:ph type="body" sz="half" idx="2"/>
+            <a:endParaRPr kumimoji="0" lang="en-US"/>
+          </a:p>
+        </p:txBody>
+      </p:sp>
+      <p:sp>
+        <p:nvSpPr>
+          <p:cNvPr id="5" name="Date Placeholder 4"/>
+          <p:cNvSpPr>
+            <a:spLocks noGrp="1"/>
+          </p:cNvSpPr>
+          <p:nvPr>
+            <p:ph type="dt" sz="half" idx="10"/>
           </p:nvPr>
         </p:nvSpPr>
         <p:spPr>
           <a:xfrm>
-            <a:off x="457200" y="1435100"/>
-            <a:ext cx="3008313" cy="4691063"/>
+            <a:off x="6727032" y="6407944"/>
+            <a:ext cx="1920240" cy="365760"/>
           </a:xfrm>
         </p:spPr>
         <p:txBody>
           <a:bodyPr/>
           <a:lstStyle>
-            <a:lvl1pPr marL="0" indent="0">
-              <a:buNone/>
-              <a:defRPr sz="1400"/>
-            </a:lvl1pPr>
-            <a:lvl2pPr marL="457200" indent="0">
-              <a:buNone/>
-              <a:defRPr sz="1200"/>
-            </a:lvl2pPr>
-            <a:lvl3pPr marL="914400" indent="0">
-              <a:buNone/>
-              <a:defRPr sz="1000"/>
-            </a:lvl3pPr>
-            <a:lvl4pPr marL="1371600" indent="0">
-              <a:buNone/>
-              <a:defRPr sz="900"/>
-            </a:lvl4pPr>
-            <a:lvl5pPr marL="1828800" indent="0">
-              <a:buNone/>
-              <a:defRPr sz="900"/>
-            </a:lvl5pPr>
-            <a:lvl6pPr marL="2286000" indent="0">
-              <a:buNone/>
-              <a:defRPr sz="900"/>
-            </a:lvl6pPr>
-            <a:lvl7pPr marL="2743200" indent="0">
-              <a:buNone/>
-              <a:defRPr sz="900"/>
-            </a:lvl7pPr>
-            <a:lvl8pPr marL="3200400" indent="0">
-              <a:buNone/>
-              <a:defRPr sz="900"/>
-            </a:lvl8pPr>
-            <a:lvl9pPr marL="3657600" indent="0">
-              <a:buNone/>
-              <a:defRPr sz="900"/>
-            </a:lvl9pPr>
+            <a:extLst/>
           </a:lstStyle>
-          <a:p>
-            <a:pPr lvl="0"/>
-            <a:r>
-              <a:rPr lang="en-US" smtClean="0"/>
-              <a:t>Click to edit Master text styles</a:t>
-            </a:r>
-          </a:p>
-        </p:txBody>
-      </p:sp>
-      <p:sp>
-        <p:nvSpPr>
-          <p:cNvPr id="5" name="Date Placeholder 4"/>
-          <p:cNvSpPr>
-            <a:spLocks noGrp="1"/>
-          </p:cNvSpPr>
-          <p:nvPr>
-            <p:ph type="dt" sz="half" idx="10"/>
-          </p:nvPr>
-        </p:nvSpPr>
-        <p:spPr/>
-        <p:txBody>
-          <a:bodyPr/>
-          <a:lstStyle/>
           <a:p>
             <a:fld id="{8096CBEF-B388-4E9F-94F0-5BE1A698433D}" type="datetimeFigureOut">
               <a:rPr lang="en-US" smtClean="0"/>
-              <a:t>12/5/2012</a:t>
+              <a:t>12/6/2012</a:t>
             </a:fld>
             <a:endParaRPr lang="en-US"/>
           </a:p>
@@ -3521,7 +4335,9 @@
         <p:spPr/>
         <p:txBody>
           <a:bodyPr/>
-          <a:lstStyle/>
+          <a:lstStyle>
+            <a:extLst/>
+          </a:lstStyle>
           <a:p>
             <a:endParaRPr lang="en-US"/>
           </a:p>
@@ -3540,7 +4356,9 @@
         <p:spPr/>
         <p:txBody>
           <a:bodyPr/>
-          <a:lstStyle/>
+          <a:lstStyle>
+            <a:extLst/>
+          </a:lstStyle>
           <a:p>
             <a:fld id="{24BDE544-15E2-4E42-8238-153692337462}" type="slidenum">
               <a:rPr lang="en-US" smtClean="0"/>
@@ -3551,21 +4369,21 @@
         </p:txBody>
       </p:sp>
     </p:spTree>
-    <p:extLst>
-      <p:ext uri="{BB962C8B-B14F-4D97-AF65-F5344CB8AC3E}">
-        <p14:creationId xmlns:p14="http://schemas.microsoft.com/office/powerpoint/2010/main" val="4173002758"/>
-      </p:ext>
-    </p:extLst>
   </p:cSld>
   <p:clrMapOvr>
-    <a:masterClrMapping/>
+    <a:overrideClrMapping bg1="lt1" tx1="dk1" bg2="lt2" tx2="dk2" accent1="accent1" accent2="accent2" accent3="accent3" accent4="accent4" accent5="accent5" accent6="accent6" hlink="hlink" folHlink="folHlink"/>
   </p:clrMapOvr>
 </p:sldLayout>
 </file>
 
 <file path=ppt/slideLayouts/slideLayout9.xml><?xml version="1.0" encoding="utf-8"?>
-<p:sldLayout xmlns:a="http://schemas.openxmlformats.org/drawingml/2006/main" xmlns:r="http://schemas.openxmlformats.org/officeDocument/2006/relationships" xmlns:p="http://schemas.openxmlformats.org/presentationml/2006/main" type="picTx" preserve="1">
+<p:sldLayout xmlns:a="http://schemas.openxmlformats.org/drawingml/2006/main" xmlns:r="http://schemas.openxmlformats.org/officeDocument/2006/relationships" xmlns:p="http://schemas.openxmlformats.org/presentationml/2006/main" showMasterSp="0" type="picTx" preserve="1">
   <p:cSld name="Picture with Caption">
+    <p:bg>
+      <p:bgRef idx="1002">
+        <a:schemeClr val="bg1"/>
+      </p:bgRef>
+    </p:bg>
     <p:spTree>
       <p:nvGrpSpPr>
         <p:cNvPr id="1" name=""/>
@@ -3582,33 +4400,48 @@
       </p:grpSpPr>
       <p:sp>
         <p:nvSpPr>
-          <p:cNvPr id="2" name="Title 1"/>
-          <p:cNvSpPr>
-            <a:spLocks noGrp="1"/>
-          </p:cNvSpPr>
-          <p:nvPr>
-            <p:ph type="title"/>
+          <p:cNvPr id="4" name="Text Placeholder 3"/>
+          <p:cNvSpPr>
+            <a:spLocks noGrp="1"/>
+          </p:cNvSpPr>
+          <p:nvPr>
+            <p:ph type="body" sz="half" idx="2"/>
           </p:nvPr>
         </p:nvSpPr>
         <p:spPr>
           <a:xfrm>
-            <a:off x="1792288" y="4800600"/>
-            <a:ext cx="5486400" cy="566738"/>
+            <a:off x="1141232" y="5443402"/>
+            <a:ext cx="7162800" cy="648232"/>
           </a:xfrm>
+          <a:noFill/>
         </p:spPr>
         <p:txBody>
-          <a:bodyPr anchor="b"/>
+          <a:bodyPr lIns="91440" tIns="0" rIns="91440" anchor="t"/>
           <a:lstStyle>
-            <a:lvl1pPr algn="l">
-              <a:defRPr sz="2000" b="1"/>
+            <a:lvl1pPr marL="0" marR="18288" indent="0" algn="r">
+              <a:buNone/>
+              <a:defRPr sz="1400"/>
             </a:lvl1pPr>
+            <a:lvl2pPr>
+              <a:defRPr sz="1200"/>
+            </a:lvl2pPr>
+            <a:lvl3pPr>
+              <a:defRPr sz="1000"/>
+            </a:lvl3pPr>
+            <a:lvl4pPr>
+              <a:defRPr sz="900"/>
+            </a:lvl4pPr>
+            <a:lvl5pPr>
+              <a:defRPr sz="900"/>
+            </a:lvl5pPr>
+            <a:extLst/>
           </a:lstStyle>
           <a:p>
-            <a:r>
-              <a:rPr lang="en-US" smtClean="0"/>
-              <a:t>Click to edit Master title style</a:t>
-            </a:r>
-            <a:endParaRPr lang="en-US"/>
+            <a:pPr lvl="0" eaLnBrk="1" latinLnBrk="0" hangingPunct="1"/>
+            <a:r>
+              <a:rPr kumimoji="0" lang="en-US" smtClean="0"/>
+              <a:t>Click to edit Master text styles</a:t>
+            </a:r>
           </a:p>
         </p:txBody>
       </p:sp>
@@ -3624,9 +4457,25 @@
         </p:nvSpPr>
         <p:spPr>
           <a:xfrm>
-            <a:off x="1792288" y="612775"/>
-            <a:ext cx="5486400" cy="4114800"/>
+            <a:off x="228600" y="189968"/>
+            <a:ext cx="8686800" cy="4389120"/>
           </a:xfrm>
+          <a:prstGeom prst="rect">
+            <a:avLst/>
+          </a:prstGeom>
+          <a:solidFill>
+            <a:schemeClr val="bg2"/>
+          </a:solidFill>
+          <a:ln>
+            <a:solidFill>
+              <a:schemeClr val="bg1"/>
+            </a:solidFill>
+          </a:ln>
+          <a:effectLst>
+            <a:innerShdw blurRad="95250">
+              <a:srgbClr val="000000"/>
+            </a:innerShdw>
+          </a:effectLst>
         </p:spPr>
         <p:txBody>
           <a:bodyPr/>
@@ -3635,165 +4484,105 @@
               <a:buNone/>
               <a:defRPr sz="3200"/>
             </a:lvl1pPr>
-            <a:lvl2pPr marL="457200" indent="0">
-              <a:buNone/>
-              <a:defRPr sz="2800"/>
-            </a:lvl2pPr>
-            <a:lvl3pPr marL="914400" indent="0">
-              <a:buNone/>
-              <a:defRPr sz="2400"/>
-            </a:lvl3pPr>
-            <a:lvl4pPr marL="1371600" indent="0">
-              <a:buNone/>
-              <a:defRPr sz="2000"/>
-            </a:lvl4pPr>
-            <a:lvl5pPr marL="1828800" indent="0">
-              <a:buNone/>
-              <a:defRPr sz="2000"/>
-            </a:lvl5pPr>
-            <a:lvl6pPr marL="2286000" indent="0">
-              <a:buNone/>
-              <a:defRPr sz="2000"/>
-            </a:lvl6pPr>
-            <a:lvl7pPr marL="2743200" indent="0">
-              <a:buNone/>
-              <a:defRPr sz="2000"/>
-            </a:lvl7pPr>
-            <a:lvl8pPr marL="3200400" indent="0">
-              <a:buNone/>
-              <a:defRPr sz="2000"/>
-            </a:lvl8pPr>
-            <a:lvl9pPr marL="3657600" indent="0">
-              <a:buNone/>
-              <a:defRPr sz="2000"/>
-            </a:lvl9pPr>
+            <a:extLst/>
           </a:lstStyle>
           <a:p>
+            <a:r>
+              <a:rPr kumimoji="0" lang="en-US" smtClean="0"/>
+              <a:t>Click icon to add picture</a:t>
+            </a:r>
+            <a:endParaRPr kumimoji="0" lang="en-US" dirty="0"/>
+          </a:p>
+        </p:txBody>
+      </p:sp>
+      <p:sp>
+        <p:nvSpPr>
+          <p:cNvPr id="5" name="Date Placeholder 4"/>
+          <p:cNvSpPr>
+            <a:spLocks noGrp="1"/>
+          </p:cNvSpPr>
+          <p:nvPr>
+            <p:ph type="dt" sz="half" idx="10"/>
+          </p:nvPr>
+        </p:nvSpPr>
+        <p:spPr/>
+        <p:txBody>
+          <a:bodyPr/>
+          <a:lstStyle>
+            <a:lvl1pPr>
+              <a:defRPr>
+                <a:solidFill>
+                  <a:schemeClr val="tx1"/>
+                </a:solidFill>
+              </a:defRPr>
+            </a:lvl1pPr>
+            <a:extLst/>
+          </a:lstStyle>
+          <a:p>
+            <a:fld id="{8096CBEF-B388-4E9F-94F0-5BE1A698433D}" type="datetimeFigureOut">
+              <a:rPr lang="en-US" smtClean="0"/>
+              <a:t>12/6/2012</a:t>
+            </a:fld>
             <a:endParaRPr lang="en-US"/>
           </a:p>
         </p:txBody>
       </p:sp>
       <p:sp>
         <p:nvSpPr>
-          <p:cNvPr id="4" name="Text Placeholder 3"/>
-          <p:cNvSpPr>
-            <a:spLocks noGrp="1"/>
-          </p:cNvSpPr>
-          <p:nvPr>
-            <p:ph type="body" sz="half" idx="2"/>
+          <p:cNvPr id="6" name="Footer Placeholder 5"/>
+          <p:cNvSpPr>
+            <a:spLocks noGrp="1"/>
+          </p:cNvSpPr>
+          <p:nvPr>
+            <p:ph type="ftr" sz="quarter" idx="11"/>
           </p:nvPr>
         </p:nvSpPr>
         <p:spPr>
           <a:xfrm>
-            <a:off x="1792288" y="5367338"/>
-            <a:ext cx="5486400" cy="804862"/>
+            <a:off x="4380072" y="6407944"/>
+            <a:ext cx="2350681" cy="365125"/>
           </a:xfrm>
         </p:spPr>
         <p:txBody>
           <a:bodyPr/>
           <a:lstStyle>
-            <a:lvl1pPr marL="0" indent="0">
-              <a:buNone/>
-              <a:defRPr sz="1400"/>
+            <a:lvl1pPr>
+              <a:defRPr>
+                <a:solidFill>
+                  <a:schemeClr val="tx1"/>
+                </a:solidFill>
+              </a:defRPr>
             </a:lvl1pPr>
-            <a:lvl2pPr marL="457200" indent="0">
-              <a:buNone/>
-              <a:defRPr sz="1200"/>
-            </a:lvl2pPr>
-            <a:lvl3pPr marL="914400" indent="0">
-              <a:buNone/>
-              <a:defRPr sz="1000"/>
-            </a:lvl3pPr>
-            <a:lvl4pPr marL="1371600" indent="0">
-              <a:buNone/>
-              <a:defRPr sz="900"/>
-            </a:lvl4pPr>
-            <a:lvl5pPr marL="1828800" indent="0">
-              <a:buNone/>
-              <a:defRPr sz="900"/>
-            </a:lvl5pPr>
-            <a:lvl6pPr marL="2286000" indent="0">
-              <a:buNone/>
-              <a:defRPr sz="900"/>
-            </a:lvl6pPr>
-            <a:lvl7pPr marL="2743200" indent="0">
-              <a:buNone/>
-              <a:defRPr sz="900"/>
-            </a:lvl7pPr>
-            <a:lvl8pPr marL="3200400" indent="0">
-              <a:buNone/>
-              <a:defRPr sz="900"/>
-            </a:lvl8pPr>
-            <a:lvl9pPr marL="3657600" indent="0">
-              <a:buNone/>
-              <a:defRPr sz="900"/>
-            </a:lvl9pPr>
+            <a:extLst/>
           </a:lstStyle>
           <a:p>
-            <a:pPr lvl="0"/>
-            <a:r>
-              <a:rPr lang="en-US" smtClean="0"/>
-              <a:t>Click to edit Master text styles</a:t>
-            </a:r>
-          </a:p>
-        </p:txBody>
-      </p:sp>
-      <p:sp>
-        <p:nvSpPr>
-          <p:cNvPr id="5" name="Date Placeholder 4"/>
-          <p:cNvSpPr>
-            <a:spLocks noGrp="1"/>
-          </p:cNvSpPr>
-          <p:nvPr>
-            <p:ph type="dt" sz="half" idx="10"/>
+            <a:endParaRPr lang="en-US"/>
+          </a:p>
+        </p:txBody>
+      </p:sp>
+      <p:sp>
+        <p:nvSpPr>
+          <p:cNvPr id="7" name="Slide Number Placeholder 6"/>
+          <p:cNvSpPr>
+            <a:spLocks noGrp="1"/>
+          </p:cNvSpPr>
+          <p:nvPr>
+            <p:ph type="sldNum" sz="quarter" idx="12"/>
           </p:nvPr>
         </p:nvSpPr>
         <p:spPr/>
         <p:txBody>
           <a:bodyPr/>
-          <a:lstStyle/>
-          <a:p>
-            <a:fld id="{8096CBEF-B388-4E9F-94F0-5BE1A698433D}" type="datetimeFigureOut">
-              <a:rPr lang="en-US" smtClean="0"/>
-              <a:t>12/5/2012</a:t>
-            </a:fld>
-            <a:endParaRPr lang="en-US"/>
-          </a:p>
-        </p:txBody>
-      </p:sp>
-      <p:sp>
-        <p:nvSpPr>
-          <p:cNvPr id="6" name="Footer Placeholder 5"/>
-          <p:cNvSpPr>
-            <a:spLocks noGrp="1"/>
-          </p:cNvSpPr>
-          <p:nvPr>
-            <p:ph type="ftr" sz="quarter" idx="11"/>
-          </p:nvPr>
-        </p:nvSpPr>
-        <p:spPr/>
-        <p:txBody>
-          <a:bodyPr/>
-          <a:lstStyle/>
-          <a:p>
-            <a:endParaRPr lang="en-US"/>
-          </a:p>
-        </p:txBody>
-      </p:sp>
-      <p:sp>
-        <p:nvSpPr>
-          <p:cNvPr id="7" name="Slide Number Placeholder 6"/>
-          <p:cNvSpPr>
-            <a:spLocks noGrp="1"/>
-          </p:cNvSpPr>
-          <p:nvPr>
-            <p:ph type="sldNum" sz="quarter" idx="12"/>
-          </p:nvPr>
-        </p:nvSpPr>
-        <p:spPr/>
-        <p:txBody>
-          <a:bodyPr/>
-          <a:lstStyle/>
+          <a:lstStyle>
+            <a:lvl1pPr>
+              <a:defRPr>
+                <a:solidFill>
+                  <a:schemeClr val="tx1"/>
+                </a:solidFill>
+              </a:defRPr>
+            </a:lvl1pPr>
+            <a:extLst/>
+          </a:lstStyle>
           <a:p>
             <a:fld id="{24BDE544-15E2-4E42-8238-153692337462}" type="slidenum">
               <a:rPr lang="en-US" smtClean="0"/>
@@ -3803,15 +4592,548 @@
           </a:p>
         </p:txBody>
       </p:sp>
+      <p:sp>
+        <p:nvSpPr>
+          <p:cNvPr id="2" name="Title 1"/>
+          <p:cNvSpPr>
+            <a:spLocks noGrp="1"/>
+          </p:cNvSpPr>
+          <p:nvPr>
+            <p:ph type="title"/>
+          </p:nvPr>
+        </p:nvSpPr>
+        <p:spPr>
+          <a:xfrm>
+            <a:off x="228600" y="4865122"/>
+            <a:ext cx="8075432" cy="562672"/>
+          </a:xfrm>
+          <a:noFill/>
+        </p:spPr>
+        <p:txBody>
+          <a:bodyPr anchor="t">
+            <a:sp3d prstMaterial="softEdge"/>
+          </a:bodyPr>
+          <a:lstStyle>
+            <a:lvl1pPr marR="0" algn="r">
+              <a:buNone/>
+              <a:defRPr sz="3000" b="0">
+                <a:solidFill>
+                  <a:schemeClr val="accent1"/>
+                </a:solidFill>
+                <a:effectLst>
+                  <a:outerShdw blurRad="50800" dist="25000" dir="5400000" algn="t" rotWithShape="0">
+                    <a:prstClr val="black">
+                      <a:alpha val="45000"/>
+                    </a:prstClr>
+                  </a:outerShdw>
+                </a:effectLst>
+              </a:defRPr>
+            </a:lvl1pPr>
+            <a:extLst/>
+          </a:lstStyle>
+          <a:p>
+            <a:r>
+              <a:rPr kumimoji="0" lang="en-US" smtClean="0"/>
+              <a:t>Click to edit Master title style</a:t>
+            </a:r>
+            <a:endParaRPr kumimoji="0" lang="en-US"/>
+          </a:p>
+        </p:txBody>
+      </p:sp>
+      <p:sp>
+        <p:nvSpPr>
+          <p:cNvPr id="8" name="Freeform 7"/>
+          <p:cNvSpPr>
+            <a:spLocks/>
+          </p:cNvSpPr>
+          <p:nvPr/>
+        </p:nvSpPr>
+        <p:spPr bwMode="auto">
+          <a:xfrm>
+            <a:off x="499273" y="5944936"/>
+            <a:ext cx="4940624" cy="921076"/>
+          </a:xfrm>
+          <a:custGeom>
+            <a:avLst>
+              <a:gd name="A1" fmla="val 0"/>
+              <a:gd name="A2" fmla="val 0"/>
+              <a:gd name="A3" fmla="val 0"/>
+              <a:gd name="A4" fmla="val 0"/>
+              <a:gd name="A5" fmla="val 0"/>
+              <a:gd name="A6" fmla="val 0"/>
+              <a:gd name="A7" fmla="val 0"/>
+              <a:gd name="A8" fmla="val 0"/>
+            </a:avLst>
+            <a:gdLst/>
+            <a:ahLst/>
+            <a:cxnLst>
+              <a:cxn ang="0">
+                <a:pos x="0" y="0"/>
+              </a:cxn>
+              <a:cxn ang="0">
+                <a:pos x="5760" y="0"/>
+              </a:cxn>
+              <a:cxn ang="0">
+                <a:pos x="5760" y="528"/>
+              </a:cxn>
+              <a:cxn ang="0">
+                <a:pos x="48" y="0"/>
+              </a:cxn>
+            </a:cxnLst>
+            <a:rect l="0" t="0" r="0" b="0"/>
+            <a:pathLst>
+              <a:path w="7485" h="337">
+                <a:moveTo>
+                  <a:pt x="0" y="2"/>
+                </a:moveTo>
+                <a:lnTo>
+                  <a:pt x="7485" y="337"/>
+                </a:lnTo>
+                <a:lnTo>
+                  <a:pt x="5558" y="337"/>
+                </a:lnTo>
+                <a:lnTo>
+                  <a:pt x="1" y="0"/>
+                </a:lnTo>
+              </a:path>
+            </a:pathLst>
+          </a:custGeom>
+          <a:solidFill>
+            <a:schemeClr val="accent1">
+              <a:tint val="65000"/>
+              <a:satMod val="115000"/>
+              <a:alpha val="40000"/>
+            </a:schemeClr>
+          </a:solidFill>
+          <a:ln w="9525" cap="flat" cmpd="sng" algn="ctr">
+            <a:noFill/>
+            <a:prstDash val="solid"/>
+            <a:round/>
+            <a:headEnd type="none" w="med" len="med"/>
+            <a:tailEnd type="none" w="med" len="med"/>
+          </a:ln>
+          <a:effectLst/>
+        </p:spPr>
+        <p:txBody>
+          <a:bodyPr vert="horz" wrap="square" lIns="91440" tIns="45720" rIns="91440" bIns="45720" anchor="t" compatLnSpc="1"/>
+          <a:lstStyle>
+            <a:extLst/>
+          </a:lstStyle>
+          <a:p>
+            <a:endParaRPr kumimoji="0" lang="en-US"/>
+          </a:p>
+        </p:txBody>
+      </p:sp>
+      <p:sp>
+        <p:nvSpPr>
+          <p:cNvPr id="9" name="Freeform 8"/>
+          <p:cNvSpPr>
+            <a:spLocks/>
+          </p:cNvSpPr>
+          <p:nvPr/>
+        </p:nvSpPr>
+        <p:spPr bwMode="auto">
+          <a:xfrm>
+            <a:off x="485717" y="5939011"/>
+            <a:ext cx="3690451" cy="933450"/>
+          </a:xfrm>
+          <a:custGeom>
+            <a:avLst>
+              <a:gd name="A1" fmla="val 0"/>
+              <a:gd name="A2" fmla="val 0"/>
+              <a:gd name="A3" fmla="val 0"/>
+              <a:gd name="A4" fmla="val 0"/>
+              <a:gd name="A5" fmla="val 0"/>
+              <a:gd name="A6" fmla="val 0"/>
+              <a:gd name="A7" fmla="val 0"/>
+              <a:gd name="A8" fmla="val 0"/>
+            </a:avLst>
+            <a:gdLst/>
+            <a:ahLst/>
+            <a:cxnLst>
+              <a:cxn ang="0">
+                <a:pos x="0" y="0"/>
+              </a:cxn>
+              <a:cxn ang="0">
+                <a:pos x="5760" y="0"/>
+              </a:cxn>
+              <a:cxn ang="0">
+                <a:pos x="5760" y="528"/>
+              </a:cxn>
+              <a:cxn ang="0">
+                <a:pos x="48" y="0"/>
+              </a:cxn>
+            </a:cxnLst>
+            <a:rect l="0" t="0" r="0" b="0"/>
+            <a:pathLst>
+              <a:path w="5591" h="588">
+                <a:moveTo>
+                  <a:pt x="0" y="0"/>
+                </a:moveTo>
+                <a:lnTo>
+                  <a:pt x="5591" y="585"/>
+                </a:lnTo>
+                <a:lnTo>
+                  <a:pt x="4415" y="588"/>
+                </a:lnTo>
+                <a:lnTo>
+                  <a:pt x="12" y="4"/>
+                </a:lnTo>
+              </a:path>
+            </a:pathLst>
+          </a:custGeom>
+          <a:solidFill>
+            <a:srgbClr val="000000">
+              <a:alpha val="100000"/>
+            </a:srgbClr>
+          </a:solidFill>
+          <a:ln w="9525" cap="flat" cmpd="sng" algn="ctr">
+            <a:noFill/>
+            <a:prstDash val="solid"/>
+            <a:round/>
+            <a:headEnd type="none" w="med" len="med"/>
+            <a:tailEnd type="none" w="med" len="med"/>
+          </a:ln>
+          <a:effectLst/>
+        </p:spPr>
+        <p:txBody>
+          <a:bodyPr vert="horz" wrap="square" lIns="91440" tIns="45720" rIns="91440" bIns="45720" anchor="t" compatLnSpc="1"/>
+          <a:lstStyle>
+            <a:extLst/>
+          </a:lstStyle>
+          <a:p>
+            <a:endParaRPr kumimoji="0" lang="en-US"/>
+          </a:p>
+        </p:txBody>
+      </p:sp>
+      <p:sp>
+        <p:nvSpPr>
+          <p:cNvPr id="10" name="Right Triangle 9"/>
+          <p:cNvSpPr>
+            <a:spLocks/>
+          </p:cNvSpPr>
+          <p:nvPr/>
+        </p:nvSpPr>
+        <p:spPr bwMode="auto">
+          <a:xfrm>
+            <a:off x="-6042" y="5791253"/>
+            <a:ext cx="3402314" cy="1080868"/>
+          </a:xfrm>
+          <a:prstGeom prst="rtTriangle">
+            <a:avLst/>
+          </a:prstGeom>
+          <a:blipFill>
+            <a:blip r:embed="rId2">
+              <a:alphaModFix amt="50000"/>
+            </a:blip>
+            <a:tile tx="0" ty="0" sx="50000" sy="50000" flip="none" algn="t"/>
+          </a:blipFill>
+          <a:ln w="12700" cap="rnd" cmpd="thickThin" algn="ctr">
+            <a:noFill/>
+            <a:prstDash val="solid"/>
+          </a:ln>
+          <a:effectLst>
+            <a:fillOverlay blend="mult">
+              <a:gradFill flip="none" rotWithShape="1">
+                <a:gsLst>
+                  <a:gs pos="0">
+                    <a:schemeClr val="accent1">
+                      <a:shade val="20000"/>
+                      <a:satMod val="176000"/>
+                      <a:alpha val="100000"/>
+                    </a:schemeClr>
+                  </a:gs>
+                  <a:gs pos="18000">
+                    <a:schemeClr val="accent1">
+                      <a:shade val="48000"/>
+                      <a:satMod val="153000"/>
+                      <a:alpha val="100000"/>
+                    </a:schemeClr>
+                  </a:gs>
+                  <a:gs pos="43000">
+                    <a:schemeClr val="accent1">
+                      <a:tint val="86000"/>
+                      <a:satMod val="149000"/>
+                      <a:alpha val="100000"/>
+                    </a:schemeClr>
+                  </a:gs>
+                  <a:gs pos="45000">
+                    <a:schemeClr val="accent1">
+                      <a:tint val="85000"/>
+                      <a:satMod val="150000"/>
+                      <a:alpha val="100000"/>
+                    </a:schemeClr>
+                  </a:gs>
+                  <a:gs pos="50000">
+                    <a:schemeClr val="accent1">
+                      <a:tint val="86000"/>
+                      <a:satMod val="149000"/>
+                      <a:alpha val="100000"/>
+                    </a:schemeClr>
+                  </a:gs>
+                  <a:gs pos="79000">
+                    <a:schemeClr val="accent1">
+                      <a:shade val="53000"/>
+                      <a:satMod val="150000"/>
+                      <a:alpha val="100000"/>
+                    </a:schemeClr>
+                  </a:gs>
+                  <a:gs pos="100000">
+                    <a:schemeClr val="accent1">
+                      <a:shade val="25000"/>
+                      <a:satMod val="170000"/>
+                      <a:alpha val="100000"/>
+                    </a:schemeClr>
+                  </a:gs>
+                </a:gsLst>
+                <a:lin ang="450000" scaled="1"/>
+                <a:tileRect/>
+              </a:gradFill>
+            </a:fillOverlay>
+          </a:effectLst>
+        </p:spPr>
+        <p:style>
+          <a:lnRef idx="3">
+            <a:schemeClr val="lt1"/>
+          </a:lnRef>
+          <a:fillRef idx="1">
+            <a:schemeClr val="accent1"/>
+          </a:fillRef>
+          <a:effectRef idx="1">
+            <a:schemeClr val="accent1"/>
+          </a:effectRef>
+          <a:fontRef idx="minor">
+            <a:schemeClr val="lt1"/>
+          </a:fontRef>
+        </p:style>
+        <p:txBody>
+          <a:bodyPr vert="horz" wrap="square" lIns="91440" tIns="45720" rIns="91440" bIns="45720" anchor="ctr" compatLnSpc="1"/>
+          <a:lstStyle>
+            <a:extLst/>
+          </a:lstStyle>
+          <a:p>
+            <a:pPr algn="ctr" eaLnBrk="1" latinLnBrk="0" hangingPunct="1"/>
+            <a:endParaRPr kumimoji="0" lang="en-US"/>
+          </a:p>
+        </p:txBody>
+      </p:sp>
+      <p:cxnSp>
+        <p:nvCxnSpPr>
+          <p:cNvPr id="11" name="Straight Connector 10"/>
+          <p:cNvCxnSpPr/>
+          <p:nvPr/>
+        </p:nvCxnSpPr>
+        <p:spPr>
+          <a:xfrm>
+            <a:off x="-9237" y="5787738"/>
+            <a:ext cx="3405509" cy="1084383"/>
+          </a:xfrm>
+          <a:prstGeom prst="line">
+            <a:avLst/>
+          </a:prstGeom>
+          <a:noFill/>
+          <a:ln w="12065" cap="flat" cmpd="sng" algn="ctr">
+            <a:gradFill>
+              <a:gsLst>
+                <a:gs pos="45000">
+                  <a:schemeClr val="accent1">
+                    <a:tint val="70000"/>
+                    <a:satMod val="110000"/>
+                  </a:schemeClr>
+                </a:gs>
+                <a:gs pos="15000">
+                  <a:schemeClr val="accent1">
+                    <a:shade val="40000"/>
+                    <a:satMod val="110000"/>
+                  </a:schemeClr>
+                </a:gs>
+              </a:gsLst>
+              <a:lin ang="5400000" scaled="1"/>
+            </a:gradFill>
+            <a:prstDash val="solid"/>
+            <a:miter lim="800000"/>
+          </a:ln>
+          <a:effectLst/>
+        </p:spPr>
+        <p:style>
+          <a:lnRef idx="2">
+            <a:schemeClr val="accent1"/>
+          </a:lnRef>
+          <a:fillRef idx="0">
+            <a:schemeClr val="accent1"/>
+          </a:fillRef>
+          <a:effectRef idx="1">
+            <a:schemeClr val="accent1"/>
+          </a:effectRef>
+          <a:fontRef idx="minor">
+            <a:schemeClr val="tx1"/>
+          </a:fontRef>
+        </p:style>
+      </p:cxnSp>
+      <p:sp>
+        <p:nvSpPr>
+          <p:cNvPr id="12" name="Chevron 11"/>
+          <p:cNvSpPr/>
+          <p:nvPr/>
+        </p:nvSpPr>
+        <p:spPr>
+          <a:xfrm>
+            <a:off x="8664112" y="4988440"/>
+            <a:ext cx="182880" cy="228600"/>
+          </a:xfrm>
+          <a:prstGeom prst="chevron">
+            <a:avLst>
+              <a:gd name="adj" fmla="val 50000"/>
+            </a:avLst>
+          </a:prstGeom>
+          <a:gradFill flip="none" rotWithShape="1">
+            <a:gsLst>
+              <a:gs pos="0">
+                <a:schemeClr val="accent1">
+                  <a:shade val="60000"/>
+                  <a:satMod val="125000"/>
+                </a:schemeClr>
+              </a:gs>
+              <a:gs pos="72000">
+                <a:schemeClr val="accent1">
+                  <a:tint val="90000"/>
+                  <a:satMod val="138000"/>
+                </a:schemeClr>
+              </a:gs>
+              <a:gs pos="100000">
+                <a:schemeClr val="accent1">
+                  <a:tint val="76000"/>
+                  <a:satMod val="136000"/>
+                </a:schemeClr>
+              </a:gs>
+            </a:gsLst>
+            <a:lin ang="16200000" scaled="0"/>
+          </a:gradFill>
+          <a:ln w="3175" cap="rnd" cmpd="sng" algn="ctr">
+            <a:solidFill>
+              <a:schemeClr val="accent1">
+                <a:shade val="50000"/>
+              </a:schemeClr>
+            </a:solidFill>
+            <a:prstDash val="solid"/>
+          </a:ln>
+          <a:effectLst>
+            <a:outerShdw blurRad="50800" dist="25400" dir="5400000">
+              <a:srgbClr val="000000">
+                <a:alpha val="46000"/>
+              </a:srgbClr>
+            </a:outerShdw>
+          </a:effectLst>
+        </p:spPr>
+        <p:style>
+          <a:lnRef idx="1">
+            <a:schemeClr val="accent1"/>
+          </a:lnRef>
+          <a:fillRef idx="3">
+            <a:schemeClr val="accent1"/>
+          </a:fillRef>
+          <a:effectRef idx="2">
+            <a:schemeClr val="accent1"/>
+          </a:effectRef>
+          <a:fontRef idx="minor">
+            <a:schemeClr val="lt1"/>
+          </a:fontRef>
+        </p:style>
+        <p:txBody>
+          <a:bodyPr anchor="ctr"/>
+          <a:lstStyle>
+            <a:extLst/>
+          </a:lstStyle>
+          <a:p>
+            <a:pPr algn="l" eaLnBrk="1" latinLnBrk="0" hangingPunct="1"/>
+            <a:endParaRPr kumimoji="0" lang="en-US"/>
+          </a:p>
+        </p:txBody>
+      </p:sp>
+      <p:sp>
+        <p:nvSpPr>
+          <p:cNvPr id="13" name="Chevron 12"/>
+          <p:cNvSpPr/>
+          <p:nvPr/>
+        </p:nvSpPr>
+        <p:spPr>
+          <a:xfrm>
+            <a:off x="8477696" y="4988440"/>
+            <a:ext cx="182880" cy="228600"/>
+          </a:xfrm>
+          <a:prstGeom prst="chevron">
+            <a:avLst>
+              <a:gd name="adj" fmla="val 50000"/>
+            </a:avLst>
+          </a:prstGeom>
+          <a:gradFill flip="none" rotWithShape="1">
+            <a:gsLst>
+              <a:gs pos="0">
+                <a:schemeClr val="accent1">
+                  <a:shade val="60000"/>
+                  <a:satMod val="125000"/>
+                </a:schemeClr>
+              </a:gs>
+              <a:gs pos="72000">
+                <a:schemeClr val="accent1">
+                  <a:tint val="90000"/>
+                  <a:satMod val="138000"/>
+                </a:schemeClr>
+              </a:gs>
+              <a:gs pos="100000">
+                <a:schemeClr val="accent1">
+                  <a:tint val="76000"/>
+                  <a:satMod val="136000"/>
+                </a:schemeClr>
+              </a:gs>
+            </a:gsLst>
+            <a:lin ang="16200000" scaled="0"/>
+          </a:gradFill>
+          <a:ln w="3175" cap="rnd" cmpd="sng" algn="ctr">
+            <a:solidFill>
+              <a:schemeClr val="accent1">
+                <a:shade val="50000"/>
+              </a:schemeClr>
+            </a:solidFill>
+            <a:prstDash val="solid"/>
+          </a:ln>
+          <a:effectLst>
+            <a:outerShdw blurRad="50800" dist="25400" dir="5400000">
+              <a:srgbClr val="000000">
+                <a:alpha val="46000"/>
+              </a:srgbClr>
+            </a:outerShdw>
+          </a:effectLst>
+        </p:spPr>
+        <p:style>
+          <a:lnRef idx="1">
+            <a:schemeClr val="accent1"/>
+          </a:lnRef>
+          <a:fillRef idx="3">
+            <a:schemeClr val="accent1"/>
+          </a:fillRef>
+          <a:effectRef idx="2">
+            <a:schemeClr val="accent1"/>
+          </a:effectRef>
+          <a:fontRef idx="minor">
+            <a:schemeClr val="lt1"/>
+          </a:fontRef>
+        </p:style>
+        <p:txBody>
+          <a:bodyPr anchor="ctr"/>
+          <a:lstStyle>
+            <a:extLst/>
+          </a:lstStyle>
+          <a:p>
+            <a:pPr algn="l" eaLnBrk="1" latinLnBrk="0" hangingPunct="1"/>
+            <a:endParaRPr kumimoji="0" lang="en-US"/>
+          </a:p>
+        </p:txBody>
+      </p:sp>
     </p:spTree>
-    <p:extLst>
-      <p:ext uri="{BB962C8B-B14F-4D97-AF65-F5344CB8AC3E}">
-        <p14:creationId xmlns:p14="http://schemas.microsoft.com/office/powerpoint/2010/main" val="4056609301"/>
-      </p:ext>
-    </p:extLst>
   </p:cSld>
   <p:clrMapOvr>
-    <a:masterClrMapping/>
+    <a:overrideClrMapping bg1="dk1" tx1="lt1" bg2="dk2" tx2="lt2" accent1="accent1" accent2="accent2" accent3="accent3" accent4="accent4" accent5="accent5" accent6="accent6" hlink="hlink" folHlink="folHlink"/>
   </p:clrMapOvr>
 </p:sldLayout>
 </file>
@@ -3840,7 +5162,337 @@
       </p:grpSpPr>
       <p:sp>
         <p:nvSpPr>
-          <p:cNvPr id="2" name="Title Placeholder 1"/>
+          <p:cNvPr id="13" name="Freeform 12"/>
+          <p:cNvSpPr>
+            <a:spLocks/>
+          </p:cNvSpPr>
+          <p:nvPr/>
+        </p:nvSpPr>
+        <p:spPr bwMode="auto">
+          <a:xfrm>
+            <a:off x="499273" y="5944936"/>
+            <a:ext cx="4940624" cy="921076"/>
+          </a:xfrm>
+          <a:custGeom>
+            <a:avLst>
+              <a:gd name="A1" fmla="val 0"/>
+              <a:gd name="A2" fmla="val 0"/>
+              <a:gd name="A3" fmla="val 0"/>
+              <a:gd name="A4" fmla="val 0"/>
+              <a:gd name="A5" fmla="val 0"/>
+              <a:gd name="A6" fmla="val 0"/>
+              <a:gd name="A7" fmla="val 0"/>
+              <a:gd name="A8" fmla="val 0"/>
+            </a:avLst>
+            <a:gdLst/>
+            <a:ahLst/>
+            <a:cxnLst>
+              <a:cxn ang="0">
+                <a:pos x="0" y="0"/>
+              </a:cxn>
+              <a:cxn ang="0">
+                <a:pos x="5760" y="0"/>
+              </a:cxn>
+              <a:cxn ang="0">
+                <a:pos x="5760" y="528"/>
+              </a:cxn>
+              <a:cxn ang="0">
+                <a:pos x="48" y="0"/>
+              </a:cxn>
+            </a:cxnLst>
+            <a:rect l="0" t="0" r="0" b="0"/>
+            <a:pathLst>
+              <a:path w="7485" h="337">
+                <a:moveTo>
+                  <a:pt x="0" y="2"/>
+                </a:moveTo>
+                <a:lnTo>
+                  <a:pt x="7485" y="337"/>
+                </a:lnTo>
+                <a:lnTo>
+                  <a:pt x="5558" y="337"/>
+                </a:lnTo>
+                <a:lnTo>
+                  <a:pt x="1" y="0"/>
+                </a:lnTo>
+              </a:path>
+            </a:pathLst>
+          </a:custGeom>
+          <a:solidFill>
+            <a:schemeClr val="accent1">
+              <a:tint val="65000"/>
+              <a:satMod val="115000"/>
+              <a:alpha val="40000"/>
+            </a:schemeClr>
+          </a:solidFill>
+          <a:ln w="9525" cap="flat" cmpd="sng" algn="ctr">
+            <a:noFill/>
+            <a:prstDash val="solid"/>
+            <a:round/>
+            <a:headEnd type="none" w="med" len="med"/>
+            <a:tailEnd type="none" w="med" len="med"/>
+          </a:ln>
+          <a:effectLst/>
+        </p:spPr>
+        <p:txBody>
+          <a:bodyPr vert="horz" wrap="square" lIns="91440" tIns="45720" rIns="91440" bIns="45720" anchor="t" compatLnSpc="1"/>
+          <a:lstStyle>
+            <a:extLst/>
+          </a:lstStyle>
+          <a:p>
+            <a:endParaRPr kumimoji="0" lang="en-US"/>
+          </a:p>
+        </p:txBody>
+      </p:sp>
+      <p:sp>
+        <p:nvSpPr>
+          <p:cNvPr id="12" name="Freeform 11"/>
+          <p:cNvSpPr>
+            <a:spLocks/>
+          </p:cNvSpPr>
+          <p:nvPr/>
+        </p:nvSpPr>
+        <p:spPr bwMode="auto">
+          <a:xfrm>
+            <a:off x="485717" y="5939011"/>
+            <a:ext cx="3690451" cy="933450"/>
+          </a:xfrm>
+          <a:custGeom>
+            <a:avLst>
+              <a:gd name="A1" fmla="val 0"/>
+              <a:gd name="A2" fmla="val 0"/>
+              <a:gd name="A3" fmla="val 0"/>
+              <a:gd name="A4" fmla="val 0"/>
+              <a:gd name="A5" fmla="val 0"/>
+              <a:gd name="A6" fmla="val 0"/>
+              <a:gd name="A7" fmla="val 0"/>
+              <a:gd name="A8" fmla="val 0"/>
+            </a:avLst>
+            <a:gdLst/>
+            <a:ahLst/>
+            <a:cxnLst>
+              <a:cxn ang="0">
+                <a:pos x="0" y="0"/>
+              </a:cxn>
+              <a:cxn ang="0">
+                <a:pos x="5760" y="0"/>
+              </a:cxn>
+              <a:cxn ang="0">
+                <a:pos x="5760" y="528"/>
+              </a:cxn>
+              <a:cxn ang="0">
+                <a:pos x="48" y="0"/>
+              </a:cxn>
+            </a:cxnLst>
+            <a:rect l="0" t="0" r="0" b="0"/>
+            <a:pathLst>
+              <a:path w="5591" h="588">
+                <a:moveTo>
+                  <a:pt x="0" y="0"/>
+                </a:moveTo>
+                <a:lnTo>
+                  <a:pt x="5591" y="585"/>
+                </a:lnTo>
+                <a:lnTo>
+                  <a:pt x="4415" y="588"/>
+                </a:lnTo>
+                <a:lnTo>
+                  <a:pt x="12" y="4"/>
+                </a:lnTo>
+              </a:path>
+            </a:pathLst>
+          </a:custGeom>
+          <a:solidFill>
+            <a:srgbClr val="000000">
+              <a:alpha val="100000"/>
+            </a:srgbClr>
+          </a:solidFill>
+          <a:ln w="9525" cap="flat" cmpd="sng" algn="ctr">
+            <a:noFill/>
+            <a:prstDash val="solid"/>
+            <a:round/>
+            <a:headEnd type="none" w="med" len="med"/>
+            <a:tailEnd type="none" w="med" len="med"/>
+          </a:ln>
+          <a:effectLst/>
+        </p:spPr>
+        <p:txBody>
+          <a:bodyPr vert="horz" wrap="square" lIns="91440" tIns="45720" rIns="91440" bIns="45720" anchor="t" compatLnSpc="1"/>
+          <a:lstStyle>
+            <a:extLst/>
+          </a:lstStyle>
+          <a:p>
+            <a:endParaRPr kumimoji="0" lang="en-US"/>
+          </a:p>
+        </p:txBody>
+      </p:sp>
+      <p:sp>
+        <p:nvSpPr>
+          <p:cNvPr id="14" name="Right Triangle 13"/>
+          <p:cNvSpPr>
+            <a:spLocks/>
+          </p:cNvSpPr>
+          <p:nvPr/>
+        </p:nvSpPr>
+        <p:spPr bwMode="auto">
+          <a:xfrm>
+            <a:off x="-6042" y="5791253"/>
+            <a:ext cx="3402314" cy="1080868"/>
+          </a:xfrm>
+          <a:prstGeom prst="rtTriangle">
+            <a:avLst/>
+          </a:prstGeom>
+          <a:blipFill>
+            <a:blip r:embed="rId13">
+              <a:alphaModFix amt="50000"/>
+            </a:blip>
+            <a:tile tx="0" ty="0" sx="50000" sy="50000" flip="none" algn="t"/>
+          </a:blipFill>
+          <a:ln w="12700" cap="rnd" cmpd="thickThin" algn="ctr">
+            <a:noFill/>
+            <a:prstDash val="solid"/>
+          </a:ln>
+          <a:effectLst>
+            <a:fillOverlay blend="mult">
+              <a:gradFill flip="none" rotWithShape="1">
+                <a:gsLst>
+                  <a:gs pos="0">
+                    <a:schemeClr val="accent1">
+                      <a:shade val="20000"/>
+                      <a:satMod val="176000"/>
+                      <a:alpha val="100000"/>
+                    </a:schemeClr>
+                  </a:gs>
+                  <a:gs pos="18000">
+                    <a:schemeClr val="accent1">
+                      <a:shade val="48000"/>
+                      <a:satMod val="153000"/>
+                      <a:alpha val="100000"/>
+                    </a:schemeClr>
+                  </a:gs>
+                  <a:gs pos="43000">
+                    <a:schemeClr val="accent1">
+                      <a:tint val="86000"/>
+                      <a:satMod val="149000"/>
+                      <a:alpha val="100000"/>
+                    </a:schemeClr>
+                  </a:gs>
+                  <a:gs pos="45000">
+                    <a:schemeClr val="accent1">
+                      <a:tint val="85000"/>
+                      <a:satMod val="150000"/>
+                      <a:alpha val="100000"/>
+                    </a:schemeClr>
+                  </a:gs>
+                  <a:gs pos="50000">
+                    <a:schemeClr val="accent1">
+                      <a:tint val="86000"/>
+                      <a:satMod val="149000"/>
+                      <a:alpha val="100000"/>
+                    </a:schemeClr>
+                  </a:gs>
+                  <a:gs pos="79000">
+                    <a:schemeClr val="accent1">
+                      <a:shade val="53000"/>
+                      <a:satMod val="150000"/>
+                      <a:alpha val="100000"/>
+                    </a:schemeClr>
+                  </a:gs>
+                  <a:gs pos="100000">
+                    <a:schemeClr val="accent1">
+                      <a:shade val="25000"/>
+                      <a:satMod val="170000"/>
+                      <a:alpha val="100000"/>
+                    </a:schemeClr>
+                  </a:gs>
+                </a:gsLst>
+                <a:lin ang="450000" scaled="1"/>
+                <a:tileRect/>
+              </a:gradFill>
+            </a:fillOverlay>
+          </a:effectLst>
+        </p:spPr>
+        <p:style>
+          <a:lnRef idx="3">
+            <a:schemeClr val="lt1"/>
+          </a:lnRef>
+          <a:fillRef idx="1">
+            <a:schemeClr val="accent1"/>
+          </a:fillRef>
+          <a:effectRef idx="1">
+            <a:schemeClr val="accent1"/>
+          </a:effectRef>
+          <a:fontRef idx="minor">
+            <a:schemeClr val="lt1"/>
+          </a:fontRef>
+        </p:style>
+        <p:txBody>
+          <a:bodyPr vert="horz" wrap="square" lIns="91440" tIns="45720" rIns="91440" bIns="45720" anchor="ctr" compatLnSpc="1"/>
+          <a:lstStyle>
+            <a:extLst/>
+          </a:lstStyle>
+          <a:p>
+            <a:pPr algn="ctr" eaLnBrk="1" latinLnBrk="0" hangingPunct="1"/>
+            <a:endParaRPr kumimoji="0" lang="en-US"/>
+          </a:p>
+        </p:txBody>
+      </p:sp>
+      <p:cxnSp>
+        <p:nvCxnSpPr>
+          <p:cNvPr id="15" name="Straight Connector 14"/>
+          <p:cNvCxnSpPr/>
+          <p:nvPr/>
+        </p:nvCxnSpPr>
+        <p:spPr>
+          <a:xfrm>
+            <a:off x="-9237" y="5787738"/>
+            <a:ext cx="3405509" cy="1084383"/>
+          </a:xfrm>
+          <a:prstGeom prst="line">
+            <a:avLst/>
+          </a:prstGeom>
+          <a:noFill/>
+          <a:ln w="12065" cap="flat" cmpd="sng" algn="ctr">
+            <a:gradFill>
+              <a:gsLst>
+                <a:gs pos="45000">
+                  <a:schemeClr val="accent1">
+                    <a:tint val="70000"/>
+                    <a:satMod val="110000"/>
+                  </a:schemeClr>
+                </a:gs>
+                <a:gs pos="15000">
+                  <a:schemeClr val="accent1">
+                    <a:shade val="40000"/>
+                    <a:satMod val="110000"/>
+                  </a:schemeClr>
+                </a:gs>
+              </a:gsLst>
+              <a:lin ang="5400000" scaled="1"/>
+            </a:gradFill>
+            <a:prstDash val="solid"/>
+            <a:miter lim="800000"/>
+          </a:ln>
+          <a:effectLst/>
+        </p:spPr>
+        <p:style>
+          <a:lnRef idx="2">
+            <a:schemeClr val="accent1"/>
+          </a:lnRef>
+          <a:fillRef idx="0">
+            <a:schemeClr val="accent1"/>
+          </a:fillRef>
+          <a:effectRef idx="1">
+            <a:schemeClr val="accent1"/>
+          </a:effectRef>
+          <a:fontRef idx="minor">
+            <a:schemeClr val="tx1"/>
+          </a:fontRef>
+        </p:style>
+      </p:cxnSp>
+      <p:sp>
+        <p:nvSpPr>
+          <p:cNvPr id="9" name="Title Placeholder 8"/>
           <p:cNvSpPr>
             <a:spLocks noGrp="1"/>
           </p:cNvSpPr>
@@ -3858,22 +5510,31 @@
           </a:prstGeom>
         </p:spPr>
         <p:txBody>
-          <a:bodyPr vert="horz" lIns="91440" tIns="45720" rIns="91440" bIns="45720" rtlCol="0" anchor="ctr">
+          <a:bodyPr vert="horz" anchor="ctr">
             <a:normAutofit/>
+            <a:scene3d>
+              <a:camera prst="orthographicFront"/>
+              <a:lightRig rig="soft" dir="t"/>
+            </a:scene3d>
+            <a:sp3d prstMaterial="softEdge">
+              <a:bevelT w="25400" h="25400"/>
+            </a:sp3d>
           </a:bodyPr>
-          <a:lstStyle/>
-          <a:p>
-            <a:r>
-              <a:rPr lang="en-US" smtClean="0"/>
+          <a:lstStyle>
+            <a:extLst/>
+          </a:lstStyle>
+          <a:p>
+            <a:r>
+              <a:rPr kumimoji="0" lang="en-US" smtClean="0"/>
               <a:t>Click to edit Master title style</a:t>
             </a:r>
-            <a:endParaRPr lang="en-US"/>
-          </a:p>
-        </p:txBody>
-      </p:sp>
-      <p:sp>
-        <p:nvSpPr>
-          <p:cNvPr id="3" name="Text Placeholder 2"/>
+            <a:endParaRPr kumimoji="0" lang="en-US"/>
+          </a:p>
+        </p:txBody>
+      </p:sp>
+      <p:sp>
+        <p:nvSpPr>
+          <p:cNvPr id="30" name="Text Placeholder 29"/>
           <p:cNvSpPr>
             <a:spLocks noGrp="1"/>
           </p:cNvSpPr>
@@ -3883,7 +5544,7 @@
         </p:nvSpPr>
         <p:spPr>
           <a:xfrm>
-            <a:off x="457200" y="1600200"/>
+            <a:off x="457200" y="1481328"/>
             <a:ext cx="8229600" cy="4525963"/>
           </a:xfrm>
           <a:prstGeom prst="rect">
@@ -3891,51 +5552,53 @@
           </a:prstGeom>
         </p:spPr>
         <p:txBody>
-          <a:bodyPr vert="horz" lIns="91440" tIns="45720" rIns="91440" bIns="45720" rtlCol="0">
+          <a:bodyPr vert="horz">
             <a:normAutofit/>
           </a:bodyPr>
-          <a:lstStyle/>
-          <a:p>
-            <a:pPr lvl="0"/>
-            <a:r>
-              <a:rPr lang="en-US" smtClean="0"/>
+          <a:lstStyle>
+            <a:extLst/>
+          </a:lstStyle>
+          <a:p>
+            <a:pPr lvl="0" eaLnBrk="1" latinLnBrk="0" hangingPunct="1"/>
+            <a:r>
+              <a:rPr kumimoji="0" lang="en-US" smtClean="0"/>
               <a:t>Click to edit Master text styles</a:t>
             </a:r>
           </a:p>
           <a:p>
-            <a:pPr lvl="1"/>
-            <a:r>
-              <a:rPr lang="en-US" smtClean="0"/>
+            <a:pPr lvl="1" eaLnBrk="1" latinLnBrk="0" hangingPunct="1"/>
+            <a:r>
+              <a:rPr kumimoji="0" lang="en-US" smtClean="0"/>
               <a:t>Second level</a:t>
             </a:r>
           </a:p>
           <a:p>
-            <a:pPr lvl="2"/>
-            <a:r>
-              <a:rPr lang="en-US" smtClean="0"/>
+            <a:pPr lvl="2" eaLnBrk="1" latinLnBrk="0" hangingPunct="1"/>
+            <a:r>
+              <a:rPr kumimoji="0" lang="en-US" smtClean="0"/>
               <a:t>Third level</a:t>
             </a:r>
           </a:p>
           <a:p>
-            <a:pPr lvl="3"/>
-            <a:r>
-              <a:rPr lang="en-US" smtClean="0"/>
+            <a:pPr lvl="3" eaLnBrk="1" latinLnBrk="0" hangingPunct="1"/>
+            <a:r>
+              <a:rPr kumimoji="0" lang="en-US" smtClean="0"/>
               <a:t>Fourth level</a:t>
             </a:r>
           </a:p>
           <a:p>
-            <a:pPr lvl="4"/>
-            <a:r>
-              <a:rPr lang="en-US" smtClean="0"/>
+            <a:pPr lvl="4" eaLnBrk="1" latinLnBrk="0" hangingPunct="1"/>
+            <a:r>
+              <a:rPr kumimoji="0" lang="en-US" smtClean="0"/>
               <a:t>Fifth level</a:t>
             </a:r>
-            <a:endParaRPr lang="en-US"/>
-          </a:p>
-        </p:txBody>
-      </p:sp>
-      <p:sp>
-        <p:nvSpPr>
-          <p:cNvPr id="4" name="Date Placeholder 3"/>
+            <a:endParaRPr kumimoji="0" lang="en-US"/>
+          </a:p>
+        </p:txBody>
+      </p:sp>
+      <p:sp>
+        <p:nvSpPr>
+          <p:cNvPr id="10" name="Date Placeholder 9"/>
           <p:cNvSpPr>
             <a:spLocks noGrp="1"/>
           </p:cNvSpPr>
@@ -3945,30 +5608,29 @@
         </p:nvSpPr>
         <p:spPr>
           <a:xfrm>
-            <a:off x="457200" y="6356350"/>
-            <a:ext cx="2133600" cy="365125"/>
+            <a:off x="6727032" y="6407944"/>
+            <a:ext cx="1920240" cy="365760"/>
           </a:xfrm>
           <a:prstGeom prst="rect">
             <a:avLst/>
           </a:prstGeom>
         </p:spPr>
         <p:txBody>
-          <a:bodyPr vert="horz" lIns="91440" tIns="45720" rIns="91440" bIns="45720" rtlCol="0" anchor="ctr"/>
+          <a:bodyPr vert="horz" anchor="b"/>
           <a:lstStyle>
-            <a:lvl1pPr algn="l">
-              <a:defRPr sz="1200">
+            <a:lvl1pPr algn="l" eaLnBrk="1" latinLnBrk="0" hangingPunct="1">
+              <a:defRPr kumimoji="0" sz="1000">
                 <a:solidFill>
-                  <a:schemeClr val="tx1">
-                    <a:tint val="75000"/>
-                  </a:schemeClr>
+                  <a:schemeClr val="tx1"/>
                 </a:solidFill>
               </a:defRPr>
             </a:lvl1pPr>
+            <a:extLst/>
           </a:lstStyle>
           <a:p>
             <a:fld id="{8096CBEF-B388-4E9F-94F0-5BE1A698433D}" type="datetimeFigureOut">
               <a:rPr lang="en-US" smtClean="0"/>
-              <a:t>12/5/2012</a:t>
+              <a:t>12/6/2012</a:t>
             </a:fld>
             <a:endParaRPr lang="en-US"/>
           </a:p>
@@ -3976,7 +5638,7 @@
       </p:sp>
       <p:sp>
         <p:nvSpPr>
-          <p:cNvPr id="5" name="Footer Placeholder 4"/>
+          <p:cNvPr id="22" name="Footer Placeholder 21"/>
           <p:cNvSpPr>
             <a:spLocks noGrp="1"/>
           </p:cNvSpPr>
@@ -3986,25 +5648,24 @@
         </p:nvSpPr>
         <p:spPr>
           <a:xfrm>
-            <a:off x="3124200" y="6356350"/>
-            <a:ext cx="2895600" cy="365125"/>
+            <a:off x="4380072" y="6407944"/>
+            <a:ext cx="2350681" cy="365125"/>
           </a:xfrm>
           <a:prstGeom prst="rect">
             <a:avLst/>
           </a:prstGeom>
         </p:spPr>
         <p:txBody>
-          <a:bodyPr vert="horz" lIns="91440" tIns="45720" rIns="91440" bIns="45720" rtlCol="0" anchor="ctr"/>
+          <a:bodyPr vert="horz" anchor="b"/>
           <a:lstStyle>
-            <a:lvl1pPr algn="ctr">
-              <a:defRPr sz="1200">
+            <a:lvl1pPr algn="r" eaLnBrk="1" latinLnBrk="0" hangingPunct="1">
+              <a:defRPr kumimoji="0" sz="1000">
                 <a:solidFill>
-                  <a:schemeClr val="tx1">
-                    <a:tint val="75000"/>
-                  </a:schemeClr>
+                  <a:schemeClr val="tx1"/>
                 </a:solidFill>
               </a:defRPr>
             </a:lvl1pPr>
+            <a:extLst/>
           </a:lstStyle>
           <a:p>
             <a:endParaRPr lang="en-US"/>
@@ -4013,7 +5674,7 @@
       </p:sp>
       <p:sp>
         <p:nvSpPr>
-          <p:cNvPr id="6" name="Slide Number Placeholder 5"/>
+          <p:cNvPr id="18" name="Slide Number Placeholder 17"/>
           <p:cNvSpPr>
             <a:spLocks noGrp="1"/>
           </p:cNvSpPr>
@@ -4023,25 +5684,24 @@
         </p:nvSpPr>
         <p:spPr>
           <a:xfrm>
-            <a:off x="6553200" y="6356350"/>
-            <a:ext cx="2133600" cy="365125"/>
+            <a:off x="8647272" y="6407944"/>
+            <a:ext cx="365760" cy="365125"/>
           </a:xfrm>
           <a:prstGeom prst="rect">
             <a:avLst/>
           </a:prstGeom>
         </p:spPr>
         <p:txBody>
-          <a:bodyPr vert="horz" lIns="91440" tIns="45720" rIns="91440" bIns="45720" rtlCol="0" anchor="ctr"/>
+          <a:bodyPr vert="horz" anchor="b"/>
           <a:lstStyle>
-            <a:lvl1pPr algn="r">
-              <a:defRPr sz="1200">
+            <a:lvl1pPr algn="r" eaLnBrk="1" latinLnBrk="0" hangingPunct="1">
+              <a:defRPr kumimoji="0" sz="1000" b="0">
                 <a:solidFill>
-                  <a:schemeClr val="tx1">
-                    <a:tint val="75000"/>
-                  </a:schemeClr>
+                  <a:schemeClr val="tx1"/>
                 </a:solidFill>
               </a:defRPr>
             </a:lvl1pPr>
+            <a:extLst/>
           </a:lstStyle>
           <a:p>
             <a:fld id="{24BDE544-15E2-4E42-8238-153692337462}" type="slidenum">
@@ -4053,51 +5713,61 @@
         </p:txBody>
       </p:sp>
     </p:spTree>
-    <p:extLst>
-      <p:ext uri="{BB962C8B-B14F-4D97-AF65-F5344CB8AC3E}">
-        <p14:creationId xmlns:p14="http://schemas.microsoft.com/office/powerpoint/2010/main" val="2728107090"/>
-      </p:ext>
-    </p:extLst>
   </p:cSld>
   <p:clrMap bg1="lt1" tx1="dk1" bg2="lt2" tx2="dk2" accent1="accent1" accent2="accent2" accent3="accent3" accent4="accent4" accent5="accent5" accent6="accent6" hlink="hlink" folHlink="folHlink"/>
   <p:sldLayoutIdLst>
-    <p:sldLayoutId id="2147483649" r:id="rId1"/>
-    <p:sldLayoutId id="2147483650" r:id="rId2"/>
-    <p:sldLayoutId id="2147483651" r:id="rId3"/>
-    <p:sldLayoutId id="2147483652" r:id="rId4"/>
-    <p:sldLayoutId id="2147483653" r:id="rId5"/>
-    <p:sldLayoutId id="2147483654" r:id="rId6"/>
-    <p:sldLayoutId id="2147483655" r:id="rId7"/>
-    <p:sldLayoutId id="2147483656" r:id="rId8"/>
-    <p:sldLayoutId id="2147483657" r:id="rId9"/>
-    <p:sldLayoutId id="2147483658" r:id="rId10"/>
-    <p:sldLayoutId id="2147483659" r:id="rId11"/>
+    <p:sldLayoutId id="2147483661" r:id="rId1"/>
+    <p:sldLayoutId id="2147483662" r:id="rId2"/>
+    <p:sldLayoutId id="2147483663" r:id="rId3"/>
+    <p:sldLayoutId id="2147483664" r:id="rId4"/>
+    <p:sldLayoutId id="2147483665" r:id="rId5"/>
+    <p:sldLayoutId id="2147483666" r:id="rId6"/>
+    <p:sldLayoutId id="2147483667" r:id="rId7"/>
+    <p:sldLayoutId id="2147483668" r:id="rId8"/>
+    <p:sldLayoutId id="2147483669" r:id="rId9"/>
+    <p:sldLayoutId id="2147483670" r:id="rId10"/>
+    <p:sldLayoutId id="2147483671" r:id="rId11"/>
   </p:sldLayoutIdLst>
   <p:txStyles>
     <p:titleStyle>
-      <a:lvl1pPr algn="ctr" defTabSz="914400" rtl="0" eaLnBrk="1" latinLnBrk="0" hangingPunct="1">
+      <a:lvl1pPr algn="l" rtl="0" eaLnBrk="1" latinLnBrk="0" hangingPunct="1">
         <a:spcBef>
           <a:spcPct val="0"/>
         </a:spcBef>
         <a:buNone/>
-        <a:defRPr sz="4400" kern="1200">
+        <a:defRPr kumimoji="0" sz="4100" b="1" kern="1200">
           <a:solidFill>
-            <a:schemeClr val="tx1"/>
+            <a:schemeClr val="tx2"/>
           </a:solidFill>
+          <a:effectLst>
+            <a:outerShdw blurRad="31750" dist="25400" dir="5400000" algn="tl" rotWithShape="0">
+              <a:srgbClr val="000000">
+                <a:alpha val="25000"/>
+              </a:srgbClr>
+            </a:outerShdw>
+          </a:effectLst>
           <a:latin typeface="+mj-lt"/>
           <a:ea typeface="+mj-ea"/>
           <a:cs typeface="+mj-cs"/>
         </a:defRPr>
       </a:lvl1pPr>
+      <a:extLst/>
     </p:titleStyle>
     <p:bodyStyle>
-      <a:lvl1pPr marL="342900" indent="-342900" algn="l" defTabSz="914400" rtl="0" eaLnBrk="1" latinLnBrk="0" hangingPunct="1">
+      <a:lvl1pPr marL="365760" indent="-256032" algn="l" rtl="0" eaLnBrk="1" latinLnBrk="0" hangingPunct="1">
         <a:spcBef>
-          <a:spcPct val="20000"/>
+          <a:spcPts val="400"/>
         </a:spcBef>
-        <a:buFont typeface="Arial" pitchFamily="34" charset="0"/>
-        <a:buChar char="•"/>
-        <a:defRPr sz="3200" kern="1200">
+        <a:spcAft>
+          <a:spcPts val="0"/>
+        </a:spcAft>
+        <a:buClr>
+          <a:schemeClr val="accent1"/>
+        </a:buClr>
+        <a:buSzPct val="68000"/>
+        <a:buFont typeface="Wingdings 3"/>
+        <a:buChar char=""/>
+        <a:defRPr kumimoji="0" sz="2700" kern="1200">
           <a:solidFill>
             <a:schemeClr val="tx1"/>
           </a:solidFill>
@@ -4106,13 +5776,16 @@
           <a:cs typeface="+mn-cs"/>
         </a:defRPr>
       </a:lvl1pPr>
-      <a:lvl2pPr marL="742950" indent="-285750" algn="l" defTabSz="914400" rtl="0" eaLnBrk="1" latinLnBrk="0" hangingPunct="1">
+      <a:lvl2pPr marL="621792" indent="-228600" algn="l" rtl="0" eaLnBrk="1" latinLnBrk="0" hangingPunct="1">
         <a:spcBef>
-          <a:spcPct val="20000"/>
+          <a:spcPts val="324"/>
         </a:spcBef>
-        <a:buFont typeface="Arial" pitchFamily="34" charset="0"/>
-        <a:buChar char="–"/>
-        <a:defRPr sz="2800" kern="1200">
+        <a:buClr>
+          <a:schemeClr val="accent1"/>
+        </a:buClr>
+        <a:buFont typeface="Verdana"/>
+        <a:buChar char="◦"/>
+        <a:defRPr kumimoji="0" sz="2300" kern="1200">
           <a:solidFill>
             <a:schemeClr val="tx1"/>
           </a:solidFill>
@@ -4121,13 +5794,17 @@
           <a:cs typeface="+mn-cs"/>
         </a:defRPr>
       </a:lvl2pPr>
-      <a:lvl3pPr marL="1143000" indent="-228600" algn="l" defTabSz="914400" rtl="0" eaLnBrk="1" latinLnBrk="0" hangingPunct="1">
+      <a:lvl3pPr marL="859536" indent="-228600" algn="l" rtl="0" eaLnBrk="1" latinLnBrk="0" hangingPunct="1">
         <a:spcBef>
-          <a:spcPct val="20000"/>
+          <a:spcPts val="350"/>
         </a:spcBef>
-        <a:buFont typeface="Arial" pitchFamily="34" charset="0"/>
-        <a:buChar char="•"/>
-        <a:defRPr sz="2400" kern="1200">
+        <a:buClr>
+          <a:schemeClr val="accent2"/>
+        </a:buClr>
+        <a:buSzPct val="100000"/>
+        <a:buFont typeface="Wingdings 2"/>
+        <a:buChar char=""/>
+        <a:defRPr kumimoji="0" sz="2100" kern="1200">
           <a:solidFill>
             <a:schemeClr val="tx1"/>
           </a:solidFill>
@@ -4136,13 +5813,16 @@
           <a:cs typeface="+mn-cs"/>
         </a:defRPr>
       </a:lvl3pPr>
-      <a:lvl4pPr marL="1600200" indent="-228600" algn="l" defTabSz="914400" rtl="0" eaLnBrk="1" latinLnBrk="0" hangingPunct="1">
+      <a:lvl4pPr marL="1143000" indent="-228600" algn="l" rtl="0" eaLnBrk="1" latinLnBrk="0" hangingPunct="1">
         <a:spcBef>
-          <a:spcPct val="20000"/>
+          <a:spcPts val="350"/>
         </a:spcBef>
-        <a:buFont typeface="Arial" pitchFamily="34" charset="0"/>
-        <a:buChar char="–"/>
-        <a:defRPr sz="2000" kern="1200">
+        <a:buClr>
+          <a:schemeClr val="accent2"/>
+        </a:buClr>
+        <a:buFont typeface="Wingdings 2"/>
+        <a:buChar char=""/>
+        <a:defRPr kumimoji="0" sz="1900" kern="1200">
           <a:solidFill>
             <a:schemeClr val="tx1"/>
           </a:solidFill>
@@ -4151,13 +5831,16 @@
           <a:cs typeface="+mn-cs"/>
         </a:defRPr>
       </a:lvl4pPr>
-      <a:lvl5pPr marL="2057400" indent="-228600" algn="l" defTabSz="914400" rtl="0" eaLnBrk="1" latinLnBrk="0" hangingPunct="1">
+      <a:lvl5pPr marL="1371600" indent="-228600" algn="l" rtl="0" eaLnBrk="1" latinLnBrk="0" hangingPunct="1">
         <a:spcBef>
-          <a:spcPct val="20000"/>
+          <a:spcPts val="350"/>
         </a:spcBef>
-        <a:buFont typeface="Arial" pitchFamily="34" charset="0"/>
-        <a:buChar char="»"/>
-        <a:defRPr sz="2000" kern="1200">
+        <a:buClr>
+          <a:schemeClr val="accent2"/>
+        </a:buClr>
+        <a:buFont typeface="Wingdings 2"/>
+        <a:buChar char=""/>
+        <a:defRPr kumimoji="0" sz="1800" kern="1200">
           <a:solidFill>
             <a:schemeClr val="tx1"/>
           </a:solidFill>
@@ -4166,13 +5849,16 @@
           <a:cs typeface="+mn-cs"/>
         </a:defRPr>
       </a:lvl5pPr>
-      <a:lvl6pPr marL="2514600" indent="-228600" algn="l" defTabSz="914400" rtl="0" eaLnBrk="1" latinLnBrk="0" hangingPunct="1">
+      <a:lvl6pPr marL="1600200" indent="-228600" algn="l" rtl="0" eaLnBrk="1" latinLnBrk="0" hangingPunct="1">
         <a:spcBef>
-          <a:spcPct val="20000"/>
+          <a:spcPts val="350"/>
         </a:spcBef>
-        <a:buFont typeface="Arial" pitchFamily="34" charset="0"/>
-        <a:buChar char="•"/>
-        <a:defRPr sz="2000" kern="1200">
+        <a:buClr>
+          <a:schemeClr val="accent3"/>
+        </a:buClr>
+        <a:buFont typeface="Wingdings 2"/>
+        <a:buChar char=""/>
+        <a:defRPr kumimoji="0" sz="1800" kern="1200">
           <a:solidFill>
             <a:schemeClr val="tx1"/>
           </a:solidFill>
@@ -4181,13 +5867,16 @@
           <a:cs typeface="+mn-cs"/>
         </a:defRPr>
       </a:lvl6pPr>
-      <a:lvl7pPr marL="2971800" indent="-228600" algn="l" defTabSz="914400" rtl="0" eaLnBrk="1" latinLnBrk="0" hangingPunct="1">
+      <a:lvl7pPr marL="1828800" indent="-228600" algn="l" rtl="0" eaLnBrk="1" latinLnBrk="0" hangingPunct="1">
         <a:spcBef>
-          <a:spcPct val="20000"/>
+          <a:spcPts val="350"/>
         </a:spcBef>
-        <a:buFont typeface="Arial" pitchFamily="34" charset="0"/>
-        <a:buChar char="•"/>
-        <a:defRPr sz="2000" kern="1200">
+        <a:buClr>
+          <a:schemeClr val="accent3"/>
+        </a:buClr>
+        <a:buFont typeface="Wingdings 2"/>
+        <a:buChar char=""/>
+        <a:defRPr kumimoji="0" sz="1600" kern="1200">
           <a:solidFill>
             <a:schemeClr val="tx1"/>
           </a:solidFill>
@@ -4196,13 +5885,16 @@
           <a:cs typeface="+mn-cs"/>
         </a:defRPr>
       </a:lvl7pPr>
-      <a:lvl8pPr marL="3429000" indent="-228600" algn="l" defTabSz="914400" rtl="0" eaLnBrk="1" latinLnBrk="0" hangingPunct="1">
+      <a:lvl8pPr marL="2057400" indent="-228600" algn="l" rtl="0" eaLnBrk="1" latinLnBrk="0" hangingPunct="1">
         <a:spcBef>
-          <a:spcPct val="20000"/>
+          <a:spcPts val="350"/>
         </a:spcBef>
-        <a:buFont typeface="Arial" pitchFamily="34" charset="0"/>
-        <a:buChar char="•"/>
-        <a:defRPr sz="2000" kern="1200">
+        <a:buClr>
+          <a:schemeClr val="accent3"/>
+        </a:buClr>
+        <a:buFont typeface="Wingdings 2"/>
+        <a:buChar char=""/>
+        <a:defRPr kumimoji="0" sz="1600" kern="1200">
           <a:solidFill>
             <a:schemeClr val="tx1"/>
           </a:solidFill>
@@ -4211,13 +5903,16 @@
           <a:cs typeface="+mn-cs"/>
         </a:defRPr>
       </a:lvl8pPr>
-      <a:lvl9pPr marL="3886200" indent="-228600" algn="l" defTabSz="914400" rtl="0" eaLnBrk="1" latinLnBrk="0" hangingPunct="1">
+      <a:lvl9pPr marL="2286000" indent="-228600" algn="l" rtl="0" eaLnBrk="1" latinLnBrk="0" hangingPunct="1">
         <a:spcBef>
-          <a:spcPct val="20000"/>
+          <a:spcPts val="350"/>
         </a:spcBef>
-        <a:buFont typeface="Arial" pitchFamily="34" charset="0"/>
-        <a:buChar char="•"/>
-        <a:defRPr sz="2000" kern="1200">
+        <a:buClr>
+          <a:schemeClr val="accent3"/>
+        </a:buClr>
+        <a:buFont typeface="Wingdings 2"/>
+        <a:buChar char=""/>
+        <a:defRPr kumimoji="0" sz="1600" kern="1200" baseline="0">
           <a:solidFill>
             <a:schemeClr val="tx1"/>
           </a:solidFill>
@@ -4226,13 +5921,11 @@
           <a:cs typeface="+mn-cs"/>
         </a:defRPr>
       </a:lvl9pPr>
+      <a:extLst/>
     </p:bodyStyle>
     <p:otherStyle>
-      <a:defPPr>
-        <a:defRPr lang="en-US"/>
-      </a:defPPr>
-      <a:lvl1pPr marL="0" algn="l" defTabSz="914400" rtl="0" eaLnBrk="1" latinLnBrk="0" hangingPunct="1">
-        <a:defRPr sz="1800" kern="1200">
+      <a:lvl1pPr marL="0" algn="l" rtl="0" eaLnBrk="1" latinLnBrk="0" hangingPunct="1">
+        <a:defRPr kumimoji="0" kern="1200">
           <a:solidFill>
             <a:schemeClr val="tx1"/>
           </a:solidFill>
@@ -4241,8 +5934,8 @@
           <a:cs typeface="+mn-cs"/>
         </a:defRPr>
       </a:lvl1pPr>
-      <a:lvl2pPr marL="457200" algn="l" defTabSz="914400" rtl="0" eaLnBrk="1" latinLnBrk="0" hangingPunct="1">
-        <a:defRPr sz="1800" kern="1200">
+      <a:lvl2pPr marL="457200" algn="l" rtl="0" eaLnBrk="1" latinLnBrk="0" hangingPunct="1">
+        <a:defRPr kumimoji="0" kern="1200">
           <a:solidFill>
             <a:schemeClr val="tx1"/>
           </a:solidFill>
@@ -4251,8 +5944,8 @@
           <a:cs typeface="+mn-cs"/>
         </a:defRPr>
       </a:lvl2pPr>
-      <a:lvl3pPr marL="914400" algn="l" defTabSz="914400" rtl="0" eaLnBrk="1" latinLnBrk="0" hangingPunct="1">
-        <a:defRPr sz="1800" kern="1200">
+      <a:lvl3pPr marL="914400" algn="l" rtl="0" eaLnBrk="1" latinLnBrk="0" hangingPunct="1">
+        <a:defRPr kumimoji="0" kern="1200">
           <a:solidFill>
             <a:schemeClr val="tx1"/>
           </a:solidFill>
@@ -4261,8 +5954,8 @@
           <a:cs typeface="+mn-cs"/>
         </a:defRPr>
       </a:lvl3pPr>
-      <a:lvl4pPr marL="1371600" algn="l" defTabSz="914400" rtl="0" eaLnBrk="1" latinLnBrk="0" hangingPunct="1">
-        <a:defRPr sz="1800" kern="1200">
+      <a:lvl4pPr marL="1371600" algn="l" rtl="0" eaLnBrk="1" latinLnBrk="0" hangingPunct="1">
+        <a:defRPr kumimoji="0" kern="1200">
           <a:solidFill>
             <a:schemeClr val="tx1"/>
           </a:solidFill>
@@ -4271,8 +5964,8 @@
           <a:cs typeface="+mn-cs"/>
         </a:defRPr>
       </a:lvl4pPr>
-      <a:lvl5pPr marL="1828800" algn="l" defTabSz="914400" rtl="0" eaLnBrk="1" latinLnBrk="0" hangingPunct="1">
-        <a:defRPr sz="1800" kern="1200">
+      <a:lvl5pPr marL="1828800" algn="l" rtl="0" eaLnBrk="1" latinLnBrk="0" hangingPunct="1">
+        <a:defRPr kumimoji="0" kern="1200">
           <a:solidFill>
             <a:schemeClr val="tx1"/>
           </a:solidFill>
@@ -4281,8 +5974,8 @@
           <a:cs typeface="+mn-cs"/>
         </a:defRPr>
       </a:lvl5pPr>
-      <a:lvl6pPr marL="2286000" algn="l" defTabSz="914400" rtl="0" eaLnBrk="1" latinLnBrk="0" hangingPunct="1">
-        <a:defRPr sz="1800" kern="1200">
+      <a:lvl6pPr marL="2286000" algn="l" rtl="0" eaLnBrk="1" latinLnBrk="0" hangingPunct="1">
+        <a:defRPr kumimoji="0" kern="1200">
           <a:solidFill>
             <a:schemeClr val="tx1"/>
           </a:solidFill>
@@ -4291,8 +5984,8 @@
           <a:cs typeface="+mn-cs"/>
         </a:defRPr>
       </a:lvl6pPr>
-      <a:lvl7pPr marL="2743200" algn="l" defTabSz="914400" rtl="0" eaLnBrk="1" latinLnBrk="0" hangingPunct="1">
-        <a:defRPr sz="1800" kern="1200">
+      <a:lvl7pPr marL="2743200" algn="l" rtl="0" eaLnBrk="1" latinLnBrk="0" hangingPunct="1">
+        <a:defRPr kumimoji="0" kern="1200">
           <a:solidFill>
             <a:schemeClr val="tx1"/>
           </a:solidFill>
@@ -4301,8 +5994,8 @@
           <a:cs typeface="+mn-cs"/>
         </a:defRPr>
       </a:lvl7pPr>
-      <a:lvl8pPr marL="3200400" algn="l" defTabSz="914400" rtl="0" eaLnBrk="1" latinLnBrk="0" hangingPunct="1">
-        <a:defRPr sz="1800" kern="1200">
+      <a:lvl8pPr marL="3200400" algn="l" rtl="0" eaLnBrk="1" latinLnBrk="0" hangingPunct="1">
+        <a:defRPr kumimoji="0" kern="1200">
           <a:solidFill>
             <a:schemeClr val="tx1"/>
           </a:solidFill>
@@ -4311,8 +6004,8 @@
           <a:cs typeface="+mn-cs"/>
         </a:defRPr>
       </a:lvl8pPr>
-      <a:lvl9pPr marL="3657600" algn="l" defTabSz="914400" rtl="0" eaLnBrk="1" latinLnBrk="0" hangingPunct="1">
-        <a:defRPr sz="1800" kern="1200">
+      <a:lvl9pPr marL="3657600" algn="l" rtl="0" eaLnBrk="1" latinLnBrk="0" hangingPunct="1">
+        <a:defRPr kumimoji="0" kern="1200">
           <a:solidFill>
             <a:schemeClr val="tx1"/>
           </a:solidFill>
@@ -4321,6 +6014,7 @@
           <a:cs typeface="+mn-cs"/>
         </a:defRPr>
       </a:lvl9pPr>
+      <a:extLst/>
     </p:otherStyle>
   </p:txStyles>
 </p:sldMaster>
@@ -4378,7 +6072,9 @@
         </p:nvSpPr>
         <p:spPr/>
         <p:txBody>
-          <a:bodyPr/>
+          <a:bodyPr>
+            <a:normAutofit lnSpcReduction="10000"/>
+          </a:bodyPr>
           <a:lstStyle/>
           <a:p>
             <a:pPr algn="r"/>
@@ -4461,8 +6157,12 @@
               <a:t>vSTB</a:t>
             </a:r>
             <a:r>
+              <a:rPr lang="en-US" dirty="0"/>
+              <a:t> </a:t>
+            </a:r>
+            <a:r>
               <a:rPr lang="en-US" dirty="0" smtClean="0"/>
-              <a:t> Direction</a:t>
+              <a:t>Design</a:t>
             </a:r>
             <a:endParaRPr lang="en-US" dirty="0"/>
           </a:p>
@@ -4470,51 +6170,200 @@
       </p:sp>
       <p:sp>
         <p:nvSpPr>
-          <p:cNvPr id="3" name="Content Placeholder 2"/>
-          <p:cNvSpPr>
-            <a:spLocks noGrp="1"/>
-          </p:cNvSpPr>
-          <p:nvPr>
-            <p:ph idx="1"/>
-          </p:nvPr>
-        </p:nvSpPr>
-        <p:spPr/>
-        <p:txBody>
-          <a:bodyPr/>
+          <p:cNvPr id="4" name="TextBox 3"/>
+          <p:cNvSpPr txBox="1"/>
+          <p:nvPr/>
+        </p:nvSpPr>
+        <p:spPr>
+          <a:xfrm>
+            <a:off x="1600200" y="4414157"/>
+            <a:ext cx="3448050" cy="1754326"/>
+          </a:xfrm>
+          <a:prstGeom prst="rect">
+            <a:avLst/>
+          </a:prstGeom>
+          <a:noFill/>
+        </p:spPr>
+        <p:txBody>
+          <a:bodyPr wrap="square" rtlCol="0">
+            <a:spAutoFit/>
+          </a:bodyPr>
           <a:lstStyle/>
           <a:p>
             <a:r>
+              <a:rPr lang="en-US" u="sng" dirty="0" err="1" smtClean="0"/>
+              <a:t>vSTB</a:t>
+            </a:r>
+            <a:r>
+              <a:rPr lang="en-US" u="sng" dirty="0" smtClean="0"/>
+              <a:t> Tester</a:t>
+            </a:r>
+          </a:p>
+          <a:p>
+            <a:pPr marL="285750" indent="-285750">
+              <a:buFont typeface="Arial" pitchFamily="34" charset="0"/>
+              <a:buChar char="•"/>
+            </a:pPr>
+            <a:r>
               <a:rPr lang="en-US" dirty="0" smtClean="0"/>
-              <a:t>Stabilize communication layer</a:t>
-            </a:r>
-          </a:p>
-          <a:p>
+              <a:t>Provides </a:t>
+            </a:r>
+            <a:r>
+              <a:rPr lang="en-US" dirty="0" err="1" smtClean="0"/>
+              <a:t>vAPMAX</a:t>
+            </a:r>
             <a:r>
               <a:rPr lang="en-US" dirty="0" smtClean="0"/>
-              <a:t>Redesign game architecture to exist </a:t>
-            </a:r>
-            <a:r>
-              <a:rPr lang="en-US" smtClean="0"/>
-              <a:t>with new live </a:t>
-            </a:r>
+              <a:t> intuitive interface to test environment</a:t>
+            </a:r>
+          </a:p>
+          <a:p>
+            <a:pPr marL="285750" indent="-285750">
+              <a:buFont typeface="Arial" pitchFamily="34" charset="0"/>
+              <a:buChar char="•"/>
+            </a:pPr>
             <a:r>
               <a:rPr lang="en-US" dirty="0" smtClean="0"/>
-              <a:t>multiplayer environment</a:t>
-            </a:r>
-          </a:p>
-          <a:p>
+              <a:t>Provides Game Server a flexible tool to view deployed objects</a:t>
+            </a:r>
+          </a:p>
+          <a:p>
+            <a:pPr marL="285750" indent="-285750">
+              <a:buFont typeface="Arial" pitchFamily="34" charset="0"/>
+              <a:buChar char="•"/>
+            </a:pPr>
+            <a:endParaRPr lang="en-US" dirty="0"/>
+          </a:p>
+        </p:txBody>
+      </p:sp>
+      <p:sp>
+        <p:nvSpPr>
+          <p:cNvPr id="5" name="TextBox 4"/>
+          <p:cNvSpPr txBox="1"/>
+          <p:nvPr/>
+        </p:nvSpPr>
+        <p:spPr>
+          <a:xfrm>
+            <a:off x="4953000" y="4414157"/>
+            <a:ext cx="4114800" cy="1754326"/>
+          </a:xfrm>
+          <a:prstGeom prst="rect">
+            <a:avLst/>
+          </a:prstGeom>
+          <a:noFill/>
+        </p:spPr>
+        <p:txBody>
+          <a:bodyPr wrap="square" rtlCol="0">
+            <a:spAutoFit/>
+          </a:bodyPr>
+          <a:lstStyle/>
+          <a:p>
+            <a:r>
+              <a:rPr lang="en-US" u="sng" dirty="0" err="1" smtClean="0"/>
+              <a:t>vSTB</a:t>
+            </a:r>
+            <a:r>
+              <a:rPr lang="en-US" u="sng" dirty="0" smtClean="0"/>
+              <a:t> Multiplayer Environment</a:t>
+            </a:r>
+          </a:p>
+          <a:p>
+            <a:pPr marL="285750" indent="-285750">
+              <a:buFont typeface="Arial" pitchFamily="34" charset="0"/>
+              <a:buChar char="•"/>
+            </a:pPr>
             <a:r>
               <a:rPr lang="en-US" dirty="0" smtClean="0"/>
-              <a:t>Increased development time of live environment</a:t>
-            </a:r>
+              <a:t>Reduces current load on STB</a:t>
+            </a:r>
+          </a:p>
+          <a:p>
+            <a:pPr marL="285750" indent="-285750">
+              <a:buFont typeface="Arial" pitchFamily="34" charset="0"/>
+              <a:buChar char="•"/>
+            </a:pPr>
+            <a:r>
+              <a:rPr lang="en-US" dirty="0" smtClean="0"/>
+              <a:t>Framework provides foundation to add future features to meet demand of end user and technology</a:t>
+            </a:r>
+          </a:p>
+          <a:p>
+            <a:pPr marL="285750" indent="-285750">
+              <a:buFont typeface="Arial" pitchFamily="34" charset="0"/>
+              <a:buChar char="•"/>
+            </a:pPr>
             <a:endParaRPr lang="en-US" dirty="0"/>
           </a:p>
         </p:txBody>
       </p:sp>
+      <p:pic>
+        <p:nvPicPr>
+          <p:cNvPr id="2052" name="Picture 4"/>
+          <p:cNvPicPr>
+            <a:picLocks noChangeAspect="1" noChangeArrowheads="1"/>
+          </p:cNvPicPr>
+          <p:nvPr/>
+        </p:nvPicPr>
+        <p:blipFill>
+          <a:blip r:embed="rId3">
+            <a:extLst>
+              <a:ext uri="{28A0092B-C50C-407E-A947-70E740481C1C}">
+                <a14:useLocalDpi xmlns:a14="http://schemas.microsoft.com/office/drawing/2010/main" val="0"/>
+              </a:ext>
+            </a:extLst>
+          </a:blip>
+          <a:srcRect/>
+          <a:stretch>
+            <a:fillRect/>
+          </a:stretch>
+        </p:blipFill>
+        <p:spPr bwMode="auto">
+          <a:xfrm>
+            <a:off x="671513" y="1190625"/>
+            <a:ext cx="7800975" cy="3228975"/>
+          </a:xfrm>
+          <a:prstGeom prst="rect">
+            <a:avLst/>
+          </a:prstGeom>
+          <a:noFill/>
+          <a:ln>
+            <a:noFill/>
+          </a:ln>
+          <a:effectLst/>
+          <a:extLst>
+            <a:ext uri="{909E8E84-426E-40DD-AFC4-6F175D3DCCD1}">
+              <a14:hiddenFill xmlns:a14="http://schemas.microsoft.com/office/drawing/2010/main">
+                <a:solidFill>
+                  <a:schemeClr val="accent1"/>
+                </a:solidFill>
+              </a14:hiddenFill>
+            </a:ext>
+            <a:ext uri="{91240B29-F687-4F45-9708-019B960494DF}">
+              <a14:hiddenLine xmlns:a14="http://schemas.microsoft.com/office/drawing/2010/main" w="9525">
+                <a:solidFill>
+                  <a:schemeClr val="tx1"/>
+                </a:solidFill>
+                <a:miter lim="800000"/>
+                <a:headEnd/>
+                <a:tailEnd/>
+              </a14:hiddenLine>
+            </a:ext>
+            <a:ext uri="{AF507438-7753-43E0-B8FC-AC1667EBCBE1}">
+              <a14:hiddenEffects xmlns:a14="http://schemas.microsoft.com/office/drawing/2010/main">
+                <a:effectLst>
+                  <a:outerShdw dist="35921" dir="2700000" algn="ctr" rotWithShape="0">
+                    <a:schemeClr val="bg2"/>
+                  </a:outerShdw>
+                </a:effectLst>
+              </a14:hiddenEffects>
+            </a:ext>
+          </a:extLst>
+        </p:spPr>
+      </p:pic>
     </p:spTree>
     <p:extLst>
       <p:ext uri="{BB962C8B-B14F-4D97-AF65-F5344CB8AC3E}">
-        <p14:creationId xmlns:p14="http://schemas.microsoft.com/office/powerpoint/2010/main" val="1732998213"/>
+        <p14:creationId xmlns:p14="http://schemas.microsoft.com/office/powerpoint/2010/main" val="1660071136"/>
       </p:ext>
     </p:extLst>
   </p:cSld>
@@ -4548,6 +6397,35 @@
           <a:chExt cx="0" cy="0"/>
         </a:xfrm>
       </p:grpSpPr>
+      <p:pic>
+        <p:nvPicPr>
+          <p:cNvPr id="4" name="Content Placeholder 3"/>
+          <p:cNvPicPr>
+            <a:picLocks noGrp="1" noChangeAspect="1"/>
+          </p:cNvPicPr>
+          <p:nvPr>
+            <p:ph idx="1"/>
+          </p:nvPr>
+        </p:nvPicPr>
+        <p:blipFill>
+          <a:blip r:embed="rId2">
+            <a:extLst>
+              <a:ext uri="{28A0092B-C50C-407E-A947-70E740481C1C}">
+                <a14:useLocalDpi xmlns:a14="http://schemas.microsoft.com/office/drawing/2010/main" val="0"/>
+              </a:ext>
+            </a:extLst>
+          </a:blip>
+          <a:stretch>
+            <a:fillRect/>
+          </a:stretch>
+        </p:blipFill>
+        <p:spPr>
+          <a:xfrm>
+            <a:off x="483909" y="1481138"/>
+            <a:ext cx="8176181" cy="4525962"/>
+          </a:xfrm>
+        </p:spPr>
+      </p:pic>
       <p:sp>
         <p:nvSpPr>
           <p:cNvPr id="2" name="Title 1"/>
@@ -4564,81 +6442,21 @@
           <a:lstStyle/>
           <a:p>
             <a:r>
+              <a:rPr lang="en-US" dirty="0" err="1" smtClean="0"/>
+              <a:t>vSTB</a:t>
+            </a:r>
+            <a:r>
               <a:rPr lang="en-US" dirty="0" smtClean="0"/>
-              <a:t>vAPMax</a:t>
+              <a:t> Tester</a:t>
             </a:r>
             <a:endParaRPr lang="en-US" dirty="0"/>
-          </a:p>
-        </p:txBody>
-      </p:sp>
-      <p:sp>
-        <p:nvSpPr>
-          <p:cNvPr id="3" name="Content Placeholder 2"/>
-          <p:cNvSpPr>
-            <a:spLocks noGrp="1"/>
-          </p:cNvSpPr>
-          <p:nvPr>
-            <p:ph idx="1"/>
-          </p:nvPr>
-        </p:nvSpPr>
-        <p:spPr/>
-        <p:txBody>
-          <a:bodyPr/>
-          <a:lstStyle/>
-          <a:p>
-            <a:r>
-              <a:rPr lang="en-US" dirty="0"/>
-              <a:t>Pass through system messaging </a:t>
-            </a:r>
-            <a:r>
-              <a:rPr lang="en-US" dirty="0" smtClean="0"/>
-              <a:t>system</a:t>
-            </a:r>
-            <a:endParaRPr lang="en-US" dirty="0" smtClean="0"/>
-          </a:p>
-          <a:p>
-            <a:pPr lvl="1"/>
-            <a:r>
-              <a:rPr lang="en-US" dirty="0" smtClean="0"/>
-              <a:t>STB</a:t>
-            </a:r>
-          </a:p>
-          <a:p>
-            <a:pPr lvl="1"/>
-            <a:r>
-              <a:rPr lang="en-US" dirty="0" smtClean="0"/>
-              <a:t>Game Server</a:t>
-            </a:r>
-          </a:p>
-          <a:p>
-            <a:r>
-              <a:rPr lang="en-US" dirty="0" smtClean="0"/>
-              <a:t>Performs quick formatting</a:t>
-            </a:r>
-            <a:endParaRPr lang="en-US" dirty="0" smtClean="0"/>
-          </a:p>
-          <a:p>
-            <a:r>
-              <a:rPr lang="en-US" dirty="0" smtClean="0"/>
-              <a:t>Important part of sandbox environment</a:t>
-            </a:r>
-          </a:p>
-          <a:p>
-            <a:r>
-              <a:rPr lang="en-US" dirty="0" smtClean="0"/>
-              <a:t>Allows q</a:t>
-            </a:r>
-            <a:r>
-              <a:rPr lang="en-US" dirty="0" smtClean="0"/>
-              <a:t>uicker development</a:t>
-            </a:r>
           </a:p>
         </p:txBody>
       </p:sp>
     </p:spTree>
     <p:extLst>
       <p:ext uri="{BB962C8B-B14F-4D97-AF65-F5344CB8AC3E}">
-        <p14:creationId xmlns:p14="http://schemas.microsoft.com/office/powerpoint/2010/main" val="3063388487"/>
+        <p14:creationId xmlns:p14="http://schemas.microsoft.com/office/powerpoint/2010/main" val="2427461855"/>
       </p:ext>
     </p:extLst>
   </p:cSld>
@@ -4682,14 +6500,19 @@
             <p:ph type="title"/>
           </p:nvPr>
         </p:nvSpPr>
-        <p:spPr/>
+        <p:spPr>
+          <a:xfrm>
+            <a:off x="457200" y="0"/>
+            <a:ext cx="8229600" cy="1143000"/>
+          </a:xfrm>
+        </p:spPr>
         <p:txBody>
           <a:bodyPr/>
           <a:lstStyle/>
           <a:p>
             <a:r>
               <a:rPr lang="en-US" dirty="0" smtClean="0"/>
-              <a:t>vAPMax Dataflow</a:t>
+              <a:t>Current STB Game Architecture</a:t>
             </a:r>
             <a:endParaRPr lang="en-US" dirty="0"/>
           </a:p>
@@ -4697,37 +6520,319 @@
       </p:sp>
       <p:pic>
         <p:nvPicPr>
-          <p:cNvPr id="10" name="Content Placeholder 9"/>
+          <p:cNvPr id="1029" name="Picture 5"/>
           <p:cNvPicPr>
-            <a:picLocks noGrp="1" noChangeAspect="1"/>
+            <a:picLocks noChangeAspect="1" noChangeArrowheads="1"/>
           </p:cNvPicPr>
-          <p:nvPr>
-            <p:ph idx="1"/>
-          </p:nvPr>
+          <p:nvPr/>
         </p:nvPicPr>
         <p:blipFill>
-          <a:blip r:embed="rId3">
+          <a:blip r:embed="rId2">
             <a:extLst>
               <a:ext uri="{28A0092B-C50C-407E-A947-70E740481C1C}">
                 <a14:useLocalDpi xmlns:a14="http://schemas.microsoft.com/office/drawing/2010/main" val="0"/>
               </a:ext>
             </a:extLst>
           </a:blip>
+          <a:srcRect/>
           <a:stretch>
             <a:fillRect/>
           </a:stretch>
         </p:blipFill>
+        <p:spPr bwMode="auto">
+          <a:xfrm>
+            <a:off x="1676400" y="990600"/>
+            <a:ext cx="5165725" cy="5675313"/>
+          </a:xfrm>
+          <a:prstGeom prst="rect">
+            <a:avLst/>
+          </a:prstGeom>
+          <a:noFill/>
+          <a:ln>
+            <a:noFill/>
+          </a:ln>
+          <a:effectLst/>
+          <a:extLst>
+            <a:ext uri="{909E8E84-426E-40DD-AFC4-6F175D3DCCD1}">
+              <a14:hiddenFill xmlns:a14="http://schemas.microsoft.com/office/drawing/2010/main">
+                <a:solidFill>
+                  <a:schemeClr val="accent1"/>
+                </a:solidFill>
+              </a14:hiddenFill>
+            </a:ext>
+            <a:ext uri="{91240B29-F687-4F45-9708-019B960494DF}">
+              <a14:hiddenLine xmlns:a14="http://schemas.microsoft.com/office/drawing/2010/main" w="9525">
+                <a:solidFill>
+                  <a:schemeClr val="tx1"/>
+                </a:solidFill>
+                <a:miter lim="800000"/>
+                <a:headEnd/>
+                <a:tailEnd/>
+              </a14:hiddenLine>
+            </a:ext>
+            <a:ext uri="{AF507438-7753-43E0-B8FC-AC1667EBCBE1}">
+              <a14:hiddenEffects xmlns:a14="http://schemas.microsoft.com/office/drawing/2010/main">
+                <a:effectLst>
+                  <a:outerShdw dist="35921" dir="2700000" algn="ctr" rotWithShape="0">
+                    <a:schemeClr val="bg2"/>
+                  </a:outerShdw>
+                </a:effectLst>
+              </a14:hiddenEffects>
+            </a:ext>
+          </a:extLst>
+        </p:spPr>
+      </p:pic>
+      <p:sp>
+        <p:nvSpPr>
+          <p:cNvPr id="6" name="Rectangle 5"/>
+          <p:cNvSpPr/>
+          <p:nvPr/>
+        </p:nvSpPr>
         <p:spPr>
           <a:xfrm>
-            <a:off x="2514600" y="1363426"/>
-            <a:ext cx="4267200" cy="5184680"/>
+            <a:off x="2057400" y="5791200"/>
+            <a:ext cx="5029200" cy="990600"/>
           </a:xfrm>
+          <a:prstGeom prst="rect">
+            <a:avLst/>
+          </a:prstGeom>
+          <a:noFill/>
+          <a:ln>
+            <a:solidFill>
+              <a:srgbClr val="FF0000"/>
+            </a:solidFill>
+          </a:ln>
         </p:spPr>
-      </p:pic>
+        <p:style>
+          <a:lnRef idx="2">
+            <a:schemeClr val="accent1">
+              <a:shade val="50000"/>
+            </a:schemeClr>
+          </a:lnRef>
+          <a:fillRef idx="1">
+            <a:schemeClr val="accent1"/>
+          </a:fillRef>
+          <a:effectRef idx="0">
+            <a:schemeClr val="accent1"/>
+          </a:effectRef>
+          <a:fontRef idx="minor">
+            <a:schemeClr val="lt1"/>
+          </a:fontRef>
+        </p:style>
+        <p:txBody>
+          <a:bodyPr rtlCol="0" anchor="ctr"/>
+          <a:lstStyle/>
+          <a:p>
+            <a:pPr algn="ctr"/>
+            <a:endParaRPr lang="en-US">
+              <a:solidFill>
+                <a:srgbClr val="FF0000"/>
+              </a:solidFill>
+            </a:endParaRPr>
+          </a:p>
+        </p:txBody>
+      </p:sp>
+      <p:sp>
+        <p:nvSpPr>
+          <p:cNvPr id="7" name="TextBox 6"/>
+          <p:cNvSpPr txBox="1"/>
+          <p:nvPr/>
+        </p:nvSpPr>
+        <p:spPr>
+          <a:xfrm>
+            <a:off x="7086600" y="3429000"/>
+            <a:ext cx="1905000" cy="1200329"/>
+          </a:xfrm>
+          <a:prstGeom prst="rect">
+            <a:avLst/>
+          </a:prstGeom>
+          <a:noFill/>
+          <a:ln>
+            <a:solidFill>
+              <a:srgbClr val="FF0000"/>
+            </a:solidFill>
+          </a:ln>
+        </p:spPr>
+        <p:txBody>
+          <a:bodyPr wrap="square" rtlCol="0">
+            <a:spAutoFit/>
+          </a:bodyPr>
+          <a:lstStyle/>
+          <a:p>
+            <a:pPr algn="ctr"/>
+            <a:r>
+              <a:rPr lang="en-US" dirty="0" err="1" smtClean="0"/>
+              <a:t>vSTB</a:t>
+            </a:r>
+            <a:r>
+              <a:rPr lang="en-US" dirty="0" smtClean="0"/>
+              <a:t> removes current load to be stored on Game Server</a:t>
+            </a:r>
+            <a:endParaRPr lang="en-US" dirty="0"/>
+          </a:p>
+        </p:txBody>
+      </p:sp>
+      <p:cxnSp>
+        <p:nvCxnSpPr>
+          <p:cNvPr id="9" name="Straight Arrow Connector 8"/>
+          <p:cNvCxnSpPr>
+            <a:stCxn id="7" idx="2"/>
+          </p:cNvCxnSpPr>
+          <p:nvPr/>
+        </p:nvCxnSpPr>
+        <p:spPr>
+          <a:xfrm flipH="1">
+            <a:off x="7162800" y="4629329"/>
+            <a:ext cx="876300" cy="1161871"/>
+          </a:xfrm>
+          <a:prstGeom prst="straightConnector1">
+            <a:avLst/>
+          </a:prstGeom>
+          <a:ln>
+            <a:solidFill>
+              <a:srgbClr val="FF0000"/>
+            </a:solidFill>
+            <a:tailEnd type="arrow"/>
+          </a:ln>
+        </p:spPr>
+        <p:style>
+          <a:lnRef idx="1">
+            <a:schemeClr val="accent1"/>
+          </a:lnRef>
+          <a:fillRef idx="0">
+            <a:schemeClr val="accent1"/>
+          </a:fillRef>
+          <a:effectRef idx="0">
+            <a:schemeClr val="accent1"/>
+          </a:effectRef>
+          <a:fontRef idx="minor">
+            <a:schemeClr val="tx1"/>
+          </a:fontRef>
+        </p:style>
+      </p:cxnSp>
+      <p:sp>
+        <p:nvSpPr>
+          <p:cNvPr id="3" name="Rectangle 2"/>
+          <p:cNvSpPr/>
+          <p:nvPr/>
+        </p:nvSpPr>
+        <p:spPr>
+          <a:xfrm>
+            <a:off x="990600" y="990600"/>
+            <a:ext cx="6019800" cy="4724400"/>
+          </a:xfrm>
+          <a:prstGeom prst="rect">
+            <a:avLst/>
+          </a:prstGeom>
+          <a:noFill/>
+          <a:ln>
+            <a:solidFill>
+              <a:srgbClr val="00B050"/>
+            </a:solidFill>
+          </a:ln>
+        </p:spPr>
+        <p:style>
+          <a:lnRef idx="2">
+            <a:schemeClr val="accent1">
+              <a:shade val="50000"/>
+            </a:schemeClr>
+          </a:lnRef>
+          <a:fillRef idx="1">
+            <a:schemeClr val="accent1"/>
+          </a:fillRef>
+          <a:effectRef idx="0">
+            <a:schemeClr val="accent1"/>
+          </a:effectRef>
+          <a:fontRef idx="minor">
+            <a:schemeClr val="lt1"/>
+          </a:fontRef>
+        </p:style>
+        <p:txBody>
+          <a:bodyPr rtlCol="0" anchor="ctr"/>
+          <a:lstStyle/>
+          <a:p>
+            <a:pPr algn="ctr"/>
+            <a:endParaRPr lang="en-US"/>
+          </a:p>
+        </p:txBody>
+      </p:sp>
+      <p:sp>
+        <p:nvSpPr>
+          <p:cNvPr id="4" name="TextBox 3"/>
+          <p:cNvSpPr txBox="1"/>
+          <p:nvPr/>
+        </p:nvSpPr>
+        <p:spPr>
+          <a:xfrm>
+            <a:off x="7162800" y="1066800"/>
+            <a:ext cx="1676400" cy="646331"/>
+          </a:xfrm>
+          <a:prstGeom prst="rect">
+            <a:avLst/>
+          </a:prstGeom>
+          <a:noFill/>
+          <a:ln>
+            <a:solidFill>
+              <a:srgbClr val="00B050"/>
+            </a:solidFill>
+          </a:ln>
+        </p:spPr>
+        <p:txBody>
+          <a:bodyPr wrap="square" rtlCol="0">
+            <a:spAutoFit/>
+          </a:bodyPr>
+          <a:lstStyle/>
+          <a:p>
+            <a:r>
+              <a:rPr lang="en-US" dirty="0" smtClean="0"/>
+              <a:t>Single Player Environment</a:t>
+            </a:r>
+            <a:endParaRPr lang="en-US" dirty="0"/>
+          </a:p>
+        </p:txBody>
+      </p:sp>
+      <p:cxnSp>
+        <p:nvCxnSpPr>
+          <p:cNvPr id="8" name="Straight Arrow Connector 7"/>
+          <p:cNvCxnSpPr>
+            <a:stCxn id="4" idx="2"/>
+          </p:cNvCxnSpPr>
+          <p:nvPr/>
+        </p:nvCxnSpPr>
+        <p:spPr>
+          <a:xfrm flipH="1">
+            <a:off x="7086600" y="1713131"/>
+            <a:ext cx="914400" cy="1030069"/>
+          </a:xfrm>
+          <a:prstGeom prst="straightConnector1">
+            <a:avLst/>
+          </a:prstGeom>
+          <a:ln>
+            <a:solidFill>
+              <a:srgbClr val="00B050"/>
+            </a:solidFill>
+            <a:tailEnd type="arrow"/>
+          </a:ln>
+        </p:spPr>
+        <p:style>
+          <a:lnRef idx="1">
+            <a:schemeClr val="accent1"/>
+          </a:lnRef>
+          <a:fillRef idx="0">
+            <a:schemeClr val="accent1"/>
+          </a:fillRef>
+          <a:effectRef idx="0">
+            <a:schemeClr val="accent1"/>
+          </a:effectRef>
+          <a:fontRef idx="minor">
+            <a:schemeClr val="tx1"/>
+          </a:fontRef>
+        </p:style>
+      </p:cxnSp>
     </p:spTree>
     <p:extLst>
       <p:ext uri="{BB962C8B-B14F-4D97-AF65-F5344CB8AC3E}">
-        <p14:creationId xmlns:p14="http://schemas.microsoft.com/office/powerpoint/2010/main" val="4056671421"/>
+        <p14:creationId xmlns:p14="http://schemas.microsoft.com/office/powerpoint/2010/main" val="2969513938"/>
       </p:ext>
     </p:extLst>
   </p:cSld>
@@ -4763,12 +6868,12 @@
       </p:grpSpPr>
       <p:sp>
         <p:nvSpPr>
-          <p:cNvPr id="2" name="Title 1"/>
-          <p:cNvSpPr>
-            <a:spLocks noGrp="1"/>
-          </p:cNvSpPr>
-          <p:nvPr>
-            <p:ph type="title"/>
+          <p:cNvPr id="3" name="Content Placeholder 2"/>
+          <p:cNvSpPr>
+            <a:spLocks noGrp="1"/>
+          </p:cNvSpPr>
+          <p:nvPr>
+            <p:ph idx="1"/>
           </p:nvPr>
         </p:nvSpPr>
         <p:spPr/>
@@ -4778,20 +6883,33 @@
           <a:p>
             <a:r>
               <a:rPr lang="en-US" dirty="0" smtClean="0"/>
-              <a:t>Game Server</a:t>
-            </a:r>
-            <a:endParaRPr lang="en-US" dirty="0"/>
-          </a:p>
-        </p:txBody>
-      </p:sp>
-      <p:sp>
-        <p:nvSpPr>
-          <p:cNvPr id="3" name="Content Placeholder 2"/>
-          <p:cNvSpPr>
-            <a:spLocks noGrp="1"/>
-          </p:cNvSpPr>
-          <p:nvPr>
-            <p:ph idx="1"/>
+              <a:t>Stabilize communication layer</a:t>
+            </a:r>
+          </a:p>
+          <a:p>
+            <a:r>
+              <a:rPr lang="en-US" dirty="0" smtClean="0"/>
+              <a:t>Redesign </a:t>
+            </a:r>
+            <a:r>
+              <a:rPr lang="en-US" dirty="0" smtClean="0"/>
+              <a:t>single </a:t>
+            </a:r>
+            <a:r>
+              <a:rPr lang="en-US" dirty="0" smtClean="0"/>
+              <a:t>player game architecture to exist with new live multiplayer environment</a:t>
+            </a:r>
+          </a:p>
+        </p:txBody>
+      </p:sp>
+      <p:sp>
+        <p:nvSpPr>
+          <p:cNvPr id="2" name="Title 1"/>
+          <p:cNvSpPr>
+            <a:spLocks noGrp="1"/>
+          </p:cNvSpPr>
+          <p:nvPr>
+            <p:ph type="title"/>
           </p:nvPr>
         </p:nvSpPr>
         <p:spPr/>
@@ -4800,6 +6918,379 @@
           <a:lstStyle/>
           <a:p>
             <a:r>
+              <a:rPr lang="en-US" dirty="0" err="1" smtClean="0"/>
+              <a:t>vSTB</a:t>
+            </a:r>
+            <a:r>
+              <a:rPr lang="en-US" dirty="0" smtClean="0"/>
+              <a:t> Direction</a:t>
+            </a:r>
+            <a:endParaRPr lang="en-US" dirty="0"/>
+          </a:p>
+        </p:txBody>
+      </p:sp>
+    </p:spTree>
+    <p:extLst>
+      <p:ext uri="{BB962C8B-B14F-4D97-AF65-F5344CB8AC3E}">
+        <p14:creationId xmlns:p14="http://schemas.microsoft.com/office/powerpoint/2010/main" val="3669574275"/>
+      </p:ext>
+    </p:extLst>
+  </p:cSld>
+  <p:clrMapOvr>
+    <a:masterClrMapping/>
+  </p:clrMapOvr>
+  <p:timing>
+    <p:tnLst>
+      <p:par>
+        <p:cTn id="1" dur="indefinite" restart="never" nodeType="tmRoot"/>
+      </p:par>
+    </p:tnLst>
+  </p:timing>
+</p:sld>
+</file>
+
+<file path=ppt/slides/slide14.xml><?xml version="1.0" encoding="utf-8"?>
+<p:sld xmlns:a="http://schemas.openxmlformats.org/drawingml/2006/main" xmlns:r="http://schemas.openxmlformats.org/officeDocument/2006/relationships" xmlns:p="http://schemas.openxmlformats.org/presentationml/2006/main">
+  <p:cSld>
+    <p:spTree>
+      <p:nvGrpSpPr>
+        <p:cNvPr id="1" name=""/>
+        <p:cNvGrpSpPr/>
+        <p:nvPr/>
+      </p:nvGrpSpPr>
+      <p:grpSpPr>
+        <a:xfrm>
+          <a:off x="0" y="0"/>
+          <a:ext cx="0" cy="0"/>
+          <a:chOff x="0" y="0"/>
+          <a:chExt cx="0" cy="0"/>
+        </a:xfrm>
+      </p:grpSpPr>
+      <p:sp>
+        <p:nvSpPr>
+          <p:cNvPr id="3" name="Content Placeholder 2"/>
+          <p:cNvSpPr>
+            <a:spLocks noGrp="1"/>
+          </p:cNvSpPr>
+          <p:nvPr>
+            <p:ph idx="1"/>
+          </p:nvPr>
+        </p:nvSpPr>
+        <p:spPr/>
+        <p:txBody>
+          <a:bodyPr/>
+          <a:lstStyle/>
+          <a:p>
+            <a:r>
+              <a:rPr lang="en-US" dirty="0"/>
+              <a:t>Pass through </a:t>
+            </a:r>
+            <a:r>
+              <a:rPr lang="en-US" dirty="0" smtClean="0"/>
+              <a:t>messaging </a:t>
+            </a:r>
+            <a:r>
+              <a:rPr lang="en-US" dirty="0" smtClean="0"/>
+              <a:t>system</a:t>
+            </a:r>
+          </a:p>
+          <a:p>
+            <a:pPr lvl="1"/>
+            <a:r>
+              <a:rPr lang="en-US" dirty="0" smtClean="0"/>
+              <a:t>STB</a:t>
+            </a:r>
+          </a:p>
+          <a:p>
+            <a:pPr lvl="1"/>
+            <a:r>
+              <a:rPr lang="en-US" dirty="0" smtClean="0"/>
+              <a:t>Game Server</a:t>
+            </a:r>
+          </a:p>
+          <a:p>
+            <a:r>
+              <a:rPr lang="en-US" dirty="0" smtClean="0"/>
+              <a:t>Performs quick formatting</a:t>
+            </a:r>
+          </a:p>
+          <a:p>
+            <a:r>
+              <a:rPr lang="en-US" dirty="0" smtClean="0"/>
+              <a:t>Allows </a:t>
+            </a:r>
+            <a:r>
+              <a:rPr lang="en-US" dirty="0" smtClean="0"/>
+              <a:t>quicker </a:t>
+            </a:r>
+            <a:r>
+              <a:rPr lang="en-US" dirty="0" smtClean="0"/>
+              <a:t>development</a:t>
+            </a:r>
+          </a:p>
+          <a:p>
+            <a:r>
+              <a:rPr lang="en-US" dirty="0" smtClean="0"/>
+              <a:t>Can test new communication protocols</a:t>
+            </a:r>
+            <a:endParaRPr lang="en-US" dirty="0" smtClean="0"/>
+          </a:p>
+        </p:txBody>
+      </p:sp>
+      <p:sp>
+        <p:nvSpPr>
+          <p:cNvPr id="2" name="Title 1"/>
+          <p:cNvSpPr>
+            <a:spLocks noGrp="1"/>
+          </p:cNvSpPr>
+          <p:nvPr>
+            <p:ph type="title"/>
+          </p:nvPr>
+        </p:nvSpPr>
+        <p:spPr/>
+        <p:txBody>
+          <a:bodyPr/>
+          <a:lstStyle/>
+          <a:p>
+            <a:r>
+              <a:rPr lang="en-US" dirty="0" smtClean="0"/>
+              <a:t>vAPMax</a:t>
+            </a:r>
+            <a:endParaRPr lang="en-US" dirty="0"/>
+          </a:p>
+        </p:txBody>
+      </p:sp>
+    </p:spTree>
+    <p:extLst>
+      <p:ext uri="{BB962C8B-B14F-4D97-AF65-F5344CB8AC3E}">
+        <p14:creationId xmlns:p14="http://schemas.microsoft.com/office/powerpoint/2010/main" val="3063388487"/>
+      </p:ext>
+    </p:extLst>
+  </p:cSld>
+  <p:clrMapOvr>
+    <a:masterClrMapping/>
+  </p:clrMapOvr>
+  <p:timing>
+    <p:tnLst>
+      <p:par>
+        <p:cTn id="1" dur="indefinite" restart="never" nodeType="tmRoot"/>
+      </p:par>
+    </p:tnLst>
+  </p:timing>
+</p:sld>
+</file>
+
+<file path=ppt/slides/slide15.xml><?xml version="1.0" encoding="utf-8"?>
+<p:sld xmlns:a="http://schemas.openxmlformats.org/drawingml/2006/main" xmlns:r="http://schemas.openxmlformats.org/officeDocument/2006/relationships" xmlns:p="http://schemas.openxmlformats.org/presentationml/2006/main">
+  <p:cSld>
+    <p:spTree>
+      <p:nvGrpSpPr>
+        <p:cNvPr id="1" name=""/>
+        <p:cNvGrpSpPr/>
+        <p:nvPr/>
+      </p:nvGrpSpPr>
+      <p:grpSpPr>
+        <a:xfrm>
+          <a:off x="0" y="0"/>
+          <a:ext cx="0" cy="0"/>
+          <a:chOff x="0" y="0"/>
+          <a:chExt cx="0" cy="0"/>
+        </a:xfrm>
+      </p:grpSpPr>
+      <p:pic>
+        <p:nvPicPr>
+          <p:cNvPr id="10" name="Content Placeholder 9"/>
+          <p:cNvPicPr>
+            <a:picLocks noGrp="1" noChangeAspect="1"/>
+          </p:cNvPicPr>
+          <p:nvPr>
+            <p:ph idx="1"/>
+          </p:nvPr>
+        </p:nvPicPr>
+        <p:blipFill>
+          <a:blip r:embed="rId3">
+            <a:extLst>
+              <a:ext uri="{28A0092B-C50C-407E-A947-70E740481C1C}">
+                <a14:useLocalDpi xmlns:a14="http://schemas.microsoft.com/office/drawing/2010/main" val="0"/>
+              </a:ext>
+            </a:extLst>
+          </a:blip>
+          <a:stretch>
+            <a:fillRect/>
+          </a:stretch>
+        </p:blipFill>
+        <p:spPr>
+          <a:xfrm>
+            <a:off x="2709475" y="1481138"/>
+            <a:ext cx="3725049" cy="4525962"/>
+          </a:xfrm>
+        </p:spPr>
+      </p:pic>
+      <p:sp>
+        <p:nvSpPr>
+          <p:cNvPr id="2" name="Title 1"/>
+          <p:cNvSpPr>
+            <a:spLocks noGrp="1"/>
+          </p:cNvSpPr>
+          <p:nvPr>
+            <p:ph type="title"/>
+          </p:nvPr>
+        </p:nvSpPr>
+        <p:spPr/>
+        <p:txBody>
+          <a:bodyPr/>
+          <a:lstStyle/>
+          <a:p>
+            <a:r>
+              <a:rPr lang="en-US" dirty="0" smtClean="0"/>
+              <a:t>vAPMax Dataflow</a:t>
+            </a:r>
+            <a:endParaRPr lang="en-US" dirty="0"/>
+          </a:p>
+        </p:txBody>
+      </p:sp>
+    </p:spTree>
+    <p:extLst>
+      <p:ext uri="{BB962C8B-B14F-4D97-AF65-F5344CB8AC3E}">
+        <p14:creationId xmlns:p14="http://schemas.microsoft.com/office/powerpoint/2010/main" val="4056671421"/>
+      </p:ext>
+    </p:extLst>
+  </p:cSld>
+  <p:clrMapOvr>
+    <a:masterClrMapping/>
+  </p:clrMapOvr>
+  <p:timing>
+    <p:tnLst>
+      <p:par>
+        <p:cTn id="1" dur="indefinite" restart="never" nodeType="tmRoot"/>
+      </p:par>
+    </p:tnLst>
+  </p:timing>
+</p:sld>
+</file>
+
+<file path=ppt/slides/slide16.xml><?xml version="1.0" encoding="utf-8"?>
+<p:sld xmlns:a="http://schemas.openxmlformats.org/drawingml/2006/main" xmlns:r="http://schemas.openxmlformats.org/officeDocument/2006/relationships" xmlns:p="http://schemas.openxmlformats.org/presentationml/2006/main">
+  <p:cSld>
+    <p:spTree>
+      <p:nvGrpSpPr>
+        <p:cNvPr id="1" name=""/>
+        <p:cNvGrpSpPr/>
+        <p:nvPr/>
+      </p:nvGrpSpPr>
+      <p:grpSpPr>
+        <a:xfrm>
+          <a:off x="0" y="0"/>
+          <a:ext cx="0" cy="0"/>
+          <a:chOff x="0" y="0"/>
+          <a:chExt cx="0" cy="0"/>
+        </a:xfrm>
+      </p:grpSpPr>
+      <p:pic>
+        <p:nvPicPr>
+          <p:cNvPr id="4" name="Content Placeholder 3"/>
+          <p:cNvPicPr>
+            <a:picLocks noGrp="1" noChangeAspect="1"/>
+          </p:cNvPicPr>
+          <p:nvPr>
+            <p:ph idx="1"/>
+          </p:nvPr>
+        </p:nvPicPr>
+        <p:blipFill>
+          <a:blip r:embed="rId2">
+            <a:extLst>
+              <a:ext uri="{28A0092B-C50C-407E-A947-70E740481C1C}">
+                <a14:useLocalDpi xmlns:a14="http://schemas.microsoft.com/office/drawing/2010/main" val="0"/>
+              </a:ext>
+            </a:extLst>
+          </a:blip>
+          <a:stretch>
+            <a:fillRect/>
+          </a:stretch>
+        </p:blipFill>
+        <p:spPr>
+          <a:xfrm>
+            <a:off x="1676400" y="1254239"/>
+            <a:ext cx="5410200" cy="5404703"/>
+          </a:xfrm>
+        </p:spPr>
+      </p:pic>
+      <p:sp>
+        <p:nvSpPr>
+          <p:cNvPr id="2" name="Title 1"/>
+          <p:cNvSpPr>
+            <a:spLocks noGrp="1"/>
+          </p:cNvSpPr>
+          <p:nvPr>
+            <p:ph type="title"/>
+          </p:nvPr>
+        </p:nvSpPr>
+        <p:spPr/>
+        <p:txBody>
+          <a:bodyPr/>
+          <a:lstStyle/>
+          <a:p>
+            <a:r>
+              <a:rPr lang="en-US" dirty="0" smtClean="0"/>
+              <a:t>vAPMax Prototype</a:t>
+            </a:r>
+            <a:endParaRPr lang="en-US" dirty="0"/>
+          </a:p>
+        </p:txBody>
+      </p:sp>
+    </p:spTree>
+    <p:extLst>
+      <p:ext uri="{BB962C8B-B14F-4D97-AF65-F5344CB8AC3E}">
+        <p14:creationId xmlns:p14="http://schemas.microsoft.com/office/powerpoint/2010/main" val="1662817599"/>
+      </p:ext>
+    </p:extLst>
+  </p:cSld>
+  <p:clrMapOvr>
+    <a:masterClrMapping/>
+  </p:clrMapOvr>
+  <p:timing>
+    <p:tnLst>
+      <p:par>
+        <p:cTn id="1" dur="indefinite" restart="never" nodeType="tmRoot"/>
+      </p:par>
+    </p:tnLst>
+  </p:timing>
+</p:sld>
+</file>
+
+<file path=ppt/slides/slide17.xml><?xml version="1.0" encoding="utf-8"?>
+<p:sld xmlns:a="http://schemas.openxmlformats.org/drawingml/2006/main" xmlns:r="http://schemas.openxmlformats.org/officeDocument/2006/relationships" xmlns:p="http://schemas.openxmlformats.org/presentationml/2006/main">
+  <p:cSld>
+    <p:spTree>
+      <p:nvGrpSpPr>
+        <p:cNvPr id="1" name=""/>
+        <p:cNvGrpSpPr/>
+        <p:nvPr/>
+      </p:nvGrpSpPr>
+      <p:grpSpPr>
+        <a:xfrm>
+          <a:off x="0" y="0"/>
+          <a:ext cx="0" cy="0"/>
+          <a:chOff x="0" y="0"/>
+          <a:chExt cx="0" cy="0"/>
+        </a:xfrm>
+      </p:grpSpPr>
+      <p:sp>
+        <p:nvSpPr>
+          <p:cNvPr id="3" name="Content Placeholder 2"/>
+          <p:cNvSpPr>
+            <a:spLocks noGrp="1"/>
+          </p:cNvSpPr>
+          <p:nvPr>
+            <p:ph idx="1"/>
+          </p:nvPr>
+        </p:nvSpPr>
+        <p:spPr/>
+        <p:txBody>
+          <a:bodyPr/>
+          <a:lstStyle/>
+          <a:p>
+            <a:r>
               <a:rPr lang="en-US" dirty="0" smtClean="0"/>
               <a:t>Will manage game resources/instances/stats</a:t>
             </a:r>
@@ -4808,6 +7299,29 @@
             <a:r>
               <a:rPr lang="en-US" dirty="0" smtClean="0"/>
               <a:t>Right now: Manages communication</a:t>
+            </a:r>
+            <a:endParaRPr lang="en-US" dirty="0"/>
+          </a:p>
+        </p:txBody>
+      </p:sp>
+      <p:sp>
+        <p:nvSpPr>
+          <p:cNvPr id="2" name="Title 1"/>
+          <p:cNvSpPr>
+            <a:spLocks noGrp="1"/>
+          </p:cNvSpPr>
+          <p:nvPr>
+            <p:ph type="title"/>
+          </p:nvPr>
+        </p:nvSpPr>
+        <p:spPr/>
+        <p:txBody>
+          <a:bodyPr/>
+          <a:lstStyle/>
+          <a:p>
+            <a:r>
+              <a:rPr lang="en-US" dirty="0" smtClean="0"/>
+              <a:t>Game Server</a:t>
             </a:r>
             <a:endParaRPr lang="en-US" dirty="0"/>
           </a:p>
@@ -4881,8 +7395,8 @@
           </p:nvSpPr>
           <p:spPr>
             <a:xfrm>
-              <a:off x="1981200" y="2689464"/>
-              <a:ext cx="1981200" cy="1905000"/>
+              <a:off x="1866900" y="2689464"/>
+              <a:ext cx="2476500" cy="1905000"/>
             </a:xfrm>
             <a:prstGeom prst="rect">
               <a:avLst/>
@@ -5024,7 +7538,7 @@
           <p:spPr>
             <a:xfrm>
               <a:off x="2133600" y="2667000"/>
-              <a:ext cx="1752600" cy="1785104"/>
+              <a:ext cx="2057400" cy="1785104"/>
             </a:xfrm>
             <a:prstGeom prst="rect">
               <a:avLst/>
@@ -5172,7 +7686,7 @@
           <p:spPr>
             <a:xfrm>
               <a:off x="2133600" y="4800600"/>
-              <a:ext cx="1600200" cy="1015663"/>
+              <a:ext cx="1600200" cy="923330"/>
             </a:xfrm>
             <a:prstGeom prst="rect">
               <a:avLst/>
@@ -5197,10 +7711,10 @@
                 <a:buChar char="•"/>
               </a:pPr>
               <a:r>
-                <a:rPr lang="en-US" sz="1400" dirty="0" smtClean="0"/>
+                <a:rPr lang="en-US" sz="1200" dirty="0" smtClean="0"/>
                 <a:t>Send custom, hardcoded messages</a:t>
               </a:r>
-              <a:endParaRPr lang="en-US" dirty="0"/>
+              <a:endParaRPr lang="en-US" sz="1600" dirty="0"/>
             </a:p>
           </p:txBody>
         </p:sp>
@@ -5237,13 +7751,15 @@
         <p:cxnSp>
           <p:nvCxnSpPr>
             <p:cNvPr id="14" name="Straight Arrow Connector 13"/>
-            <p:cNvCxnSpPr/>
+            <p:cNvCxnSpPr>
+              <a:stCxn id="9" idx="3"/>
+            </p:cNvCxnSpPr>
             <p:nvPr/>
           </p:nvCxnSpPr>
           <p:spPr>
             <a:xfrm flipV="1">
-              <a:off x="3810000" y="3429000"/>
-              <a:ext cx="921834" cy="207228"/>
+              <a:off x="4191000" y="3429000"/>
+              <a:ext cx="540834" cy="130552"/>
             </a:xfrm>
             <a:prstGeom prst="straightConnector1">
               <a:avLst/>
@@ -5278,8 +7794,8 @@
           </p:nvCxnSpPr>
           <p:spPr>
             <a:xfrm flipH="1">
-              <a:off x="3733800" y="4267200"/>
-              <a:ext cx="1143000" cy="0"/>
+              <a:off x="4038600" y="4267200"/>
+              <a:ext cx="838200" cy="0"/>
             </a:xfrm>
             <a:prstGeom prst="straightConnector1">
               <a:avLst/>
@@ -5441,14 +7957,14 @@
             <a:p>
               <a:pPr algn="ctr"/>
               <a:r>
-                <a:rPr lang="en-US" dirty="0" smtClean="0">
+                <a:rPr lang="en-US" sz="1600" dirty="0" smtClean="0">
                   <a:solidFill>
                     <a:schemeClr val="tx1"/>
                   </a:solidFill>
                 </a:rPr>
                 <a:t>TCP Out</a:t>
               </a:r>
-              <a:endParaRPr lang="en-US" dirty="0">
+              <a:endParaRPr lang="en-US" sz="1600" dirty="0">
                 <a:solidFill>
                   <a:schemeClr val="tx1"/>
                 </a:solidFill>
@@ -5621,7 +8137,7 @@
 </p:sld>
 </file>
 
-<file path=ppt/slides/slide14.xml><?xml version="1.0" encoding="utf-8"?>
+<file path=ppt/slides/slide18.xml><?xml version="1.0" encoding="utf-8"?>
 <p:sld xmlns:a="http://schemas.openxmlformats.org/drawingml/2006/main" xmlns:r="http://schemas.openxmlformats.org/officeDocument/2006/relationships" xmlns:p="http://schemas.openxmlformats.org/presentationml/2006/main">
   <p:cSld>
     <p:spTree>
@@ -5638,6 +8154,35 @@
           <a:chExt cx="0" cy="0"/>
         </a:xfrm>
       </p:grpSpPr>
+      <p:pic>
+        <p:nvPicPr>
+          <p:cNvPr id="6" name="Content Placeholder 5"/>
+          <p:cNvPicPr>
+            <a:picLocks noGrp="1" noChangeAspect="1"/>
+          </p:cNvPicPr>
+          <p:nvPr>
+            <p:ph idx="1"/>
+          </p:nvPr>
+        </p:nvPicPr>
+        <p:blipFill>
+          <a:blip r:embed="rId2">
+            <a:extLst>
+              <a:ext uri="{28A0092B-C50C-407E-A947-70E740481C1C}">
+                <a14:useLocalDpi xmlns:a14="http://schemas.microsoft.com/office/drawing/2010/main" val="0"/>
+              </a:ext>
+            </a:extLst>
+          </a:blip>
+          <a:stretch>
+            <a:fillRect/>
+          </a:stretch>
+        </p:blipFill>
+        <p:spPr>
+          <a:xfrm>
+            <a:off x="2008739" y="1995574"/>
+            <a:ext cx="5126522" cy="3497089"/>
+          </a:xfrm>
+        </p:spPr>
+      </p:pic>
       <p:sp>
         <p:nvSpPr>
           <p:cNvPr id="2" name="Title 1"/>
@@ -5655,30 +8200,7 @@
           <a:p>
             <a:r>
               <a:rPr lang="en-US" dirty="0" smtClean="0"/>
-              <a:t>Demo</a:t>
-            </a:r>
-            <a:endParaRPr lang="en-US" dirty="0"/>
-          </a:p>
-        </p:txBody>
-      </p:sp>
-      <p:sp>
-        <p:nvSpPr>
-          <p:cNvPr id="3" name="Content Placeholder 2"/>
-          <p:cNvSpPr>
-            <a:spLocks noGrp="1"/>
-          </p:cNvSpPr>
-          <p:nvPr>
-            <p:ph idx="1"/>
-          </p:nvPr>
-        </p:nvSpPr>
-        <p:spPr/>
-        <p:txBody>
-          <a:bodyPr/>
-          <a:lstStyle/>
-          <a:p>
-            <a:r>
-              <a:rPr lang="en-US" dirty="0" smtClean="0"/>
-              <a:t>HERE WE GGOOOOOOO</a:t>
+              <a:t>Game Server Prototype</a:t>
             </a:r>
             <a:endParaRPr lang="en-US" dirty="0"/>
           </a:p>
@@ -5687,7 +8209,7 @@
     </p:spTree>
     <p:extLst>
       <p:ext uri="{BB962C8B-B14F-4D97-AF65-F5344CB8AC3E}">
-        <p14:creationId xmlns:p14="http://schemas.microsoft.com/office/powerpoint/2010/main" val="625723072"/>
+        <p14:creationId xmlns:p14="http://schemas.microsoft.com/office/powerpoint/2010/main" val="3460429019"/>
       </p:ext>
     </p:extLst>
   </p:cSld>
@@ -5704,7 +8226,7 @@
 </p:sld>
 </file>
 
-<file path=ppt/slides/slide15.xml><?xml version="1.0" encoding="utf-8"?>
+<file path=ppt/slides/slide19.xml><?xml version="1.0" encoding="utf-8"?>
 <p:sld xmlns:a="http://schemas.openxmlformats.org/drawingml/2006/main" xmlns:r="http://schemas.openxmlformats.org/officeDocument/2006/relationships" xmlns:p="http://schemas.openxmlformats.org/presentationml/2006/main">
   <p:cSld>
     <p:spTree>
@@ -5723,29 +8245,6 @@
       </p:grpSpPr>
       <p:sp>
         <p:nvSpPr>
-          <p:cNvPr id="2" name="Title 1"/>
-          <p:cNvSpPr>
-            <a:spLocks noGrp="1"/>
-          </p:cNvSpPr>
-          <p:nvPr>
-            <p:ph type="title"/>
-          </p:nvPr>
-        </p:nvSpPr>
-        <p:spPr/>
-        <p:txBody>
-          <a:bodyPr/>
-          <a:lstStyle/>
-          <a:p>
-            <a:r>
-              <a:rPr lang="en-US" dirty="0" smtClean="0"/>
-              <a:t>Product Backlog</a:t>
-            </a:r>
-            <a:endParaRPr lang="en-US" dirty="0"/>
-          </a:p>
-        </p:txBody>
-      </p:sp>
-      <p:sp>
-        <p:nvSpPr>
           <p:cNvPr id="3" name="Content Placeholder 2"/>
           <p:cNvSpPr>
             <a:spLocks noGrp="1"/>
@@ -6110,89 +8609,33 @@
           </a:p>
         </p:txBody>
       </p:sp>
+      <p:sp>
+        <p:nvSpPr>
+          <p:cNvPr id="2" name="Title 1"/>
+          <p:cNvSpPr>
+            <a:spLocks noGrp="1"/>
+          </p:cNvSpPr>
+          <p:nvPr>
+            <p:ph type="title"/>
+          </p:nvPr>
+        </p:nvSpPr>
+        <p:spPr/>
+        <p:txBody>
+          <a:bodyPr/>
+          <a:lstStyle/>
+          <a:p>
+            <a:r>
+              <a:rPr lang="en-US" dirty="0" smtClean="0"/>
+              <a:t>Product Backlog</a:t>
+            </a:r>
+            <a:endParaRPr lang="en-US" dirty="0"/>
+          </a:p>
+        </p:txBody>
+      </p:sp>
     </p:spTree>
     <p:extLst>
       <p:ext uri="{BB962C8B-B14F-4D97-AF65-F5344CB8AC3E}">
         <p14:creationId xmlns:p14="http://schemas.microsoft.com/office/powerpoint/2010/main" val="3805795148"/>
-      </p:ext>
-    </p:extLst>
-  </p:cSld>
-  <p:clrMapOvr>
-    <a:masterClrMapping/>
-  </p:clrMapOvr>
-  <p:timing>
-    <p:tnLst>
-      <p:par>
-        <p:cTn id="1" dur="indefinite" restart="never" nodeType="tmRoot"/>
-      </p:par>
-    </p:tnLst>
-  </p:timing>
-</p:sld>
-</file>
-
-<file path=ppt/slides/slide16.xml><?xml version="1.0" encoding="utf-8"?>
-<p:sld xmlns:a="http://schemas.openxmlformats.org/drawingml/2006/main" xmlns:r="http://schemas.openxmlformats.org/officeDocument/2006/relationships" xmlns:p="http://schemas.openxmlformats.org/presentationml/2006/main">
-  <p:cSld>
-    <p:spTree>
-      <p:nvGrpSpPr>
-        <p:cNvPr id="1" name=""/>
-        <p:cNvGrpSpPr/>
-        <p:nvPr/>
-      </p:nvGrpSpPr>
-      <p:grpSpPr>
-        <a:xfrm>
-          <a:off x="0" y="0"/>
-          <a:ext cx="0" cy="0"/>
-          <a:chOff x="0" y="0"/>
-          <a:chExt cx="0" cy="0"/>
-        </a:xfrm>
-      </p:grpSpPr>
-      <p:sp>
-        <p:nvSpPr>
-          <p:cNvPr id="2" name="Title 1"/>
-          <p:cNvSpPr>
-            <a:spLocks noGrp="1"/>
-          </p:cNvSpPr>
-          <p:nvPr>
-            <p:ph type="title"/>
-          </p:nvPr>
-        </p:nvSpPr>
-        <p:spPr/>
-        <p:txBody>
-          <a:bodyPr/>
-          <a:lstStyle/>
-          <a:p>
-            <a:r>
-              <a:rPr lang="en-US" dirty="0" smtClean="0"/>
-              <a:t>Questions</a:t>
-            </a:r>
-            <a:endParaRPr lang="en-US" dirty="0"/>
-          </a:p>
-        </p:txBody>
-      </p:sp>
-      <p:sp>
-        <p:nvSpPr>
-          <p:cNvPr id="3" name="Content Placeholder 2"/>
-          <p:cNvSpPr>
-            <a:spLocks noGrp="1"/>
-          </p:cNvSpPr>
-          <p:nvPr>
-            <p:ph idx="1"/>
-          </p:nvPr>
-        </p:nvSpPr>
-        <p:spPr/>
-        <p:txBody>
-          <a:bodyPr/>
-          <a:lstStyle/>
-          <a:p>
-            <a:endParaRPr lang="en-US" dirty="0"/>
-          </a:p>
-        </p:txBody>
-      </p:sp>
-    </p:spTree>
-    <p:extLst>
-      <p:ext uri="{BB962C8B-B14F-4D97-AF65-F5344CB8AC3E}">
-        <p14:creationId xmlns:p14="http://schemas.microsoft.com/office/powerpoint/2010/main" val="2940516112"/>
       </p:ext>
     </p:extLst>
   </p:cSld>
@@ -6228,6 +8671,93 @@
       </p:grpSpPr>
       <p:sp>
         <p:nvSpPr>
+          <p:cNvPr id="3" name="Content Placeholder 2"/>
+          <p:cNvSpPr>
+            <a:spLocks noGrp="1"/>
+          </p:cNvSpPr>
+          <p:nvPr>
+            <p:ph idx="1"/>
+          </p:nvPr>
+        </p:nvSpPr>
+        <p:spPr/>
+        <p:txBody>
+          <a:bodyPr>
+            <a:normAutofit/>
+          </a:bodyPr>
+          <a:lstStyle/>
+          <a:p>
+            <a:r>
+              <a:rPr lang="en-US" sz="2800" dirty="0" smtClean="0"/>
+              <a:t>Innovative Systems</a:t>
+            </a:r>
+          </a:p>
+          <a:p>
+            <a:pPr lvl="1"/>
+            <a:r>
+              <a:rPr lang="en-US" sz="2400" dirty="0"/>
+              <a:t>P</a:t>
+            </a:r>
+            <a:r>
+              <a:rPr lang="en-US" sz="2400" dirty="0" smtClean="0"/>
+              <a:t>rovides integrated solutions for the independent telecommunications industry.</a:t>
+            </a:r>
+          </a:p>
+          <a:p>
+            <a:r>
+              <a:rPr lang="en-US" sz="2800" dirty="0" smtClean="0"/>
+              <a:t>APMax</a:t>
+            </a:r>
+          </a:p>
+          <a:p>
+            <a:pPr lvl="1"/>
+            <a:r>
+              <a:rPr lang="en-US" sz="2400" dirty="0"/>
+              <a:t>Application </a:t>
+            </a:r>
+            <a:r>
+              <a:rPr lang="en-US" sz="2400" dirty="0" smtClean="0"/>
+              <a:t>Server providing services such as:</a:t>
+            </a:r>
+          </a:p>
+          <a:p>
+            <a:pPr lvl="2"/>
+            <a:r>
+              <a:rPr lang="en-US" sz="2000" dirty="0" smtClean="0"/>
+              <a:t>IPTV Video Solutions</a:t>
+            </a:r>
+          </a:p>
+          <a:p>
+            <a:pPr lvl="2"/>
+            <a:r>
+              <a:rPr lang="en-US" sz="2000" dirty="0" smtClean="0"/>
+              <a:t>Unified Messaging</a:t>
+            </a:r>
+          </a:p>
+          <a:p>
+            <a:pPr lvl="2"/>
+            <a:r>
+              <a:rPr lang="en-US" sz="2000" dirty="0" smtClean="0"/>
+              <a:t>Single Number Service</a:t>
+            </a:r>
+          </a:p>
+          <a:p>
+            <a:r>
+              <a:rPr lang="en-US" sz="2600" dirty="0" smtClean="0"/>
+              <a:t>STB</a:t>
+            </a:r>
+          </a:p>
+          <a:p>
+            <a:pPr lvl="1"/>
+            <a:r>
+              <a:rPr lang="en-US" sz="2400" dirty="0" smtClean="0"/>
+              <a:t>Set-top-box providing television and integrated telephony applications</a:t>
+            </a:r>
+            <a:endParaRPr lang="en-US" sz="2400" dirty="0"/>
+          </a:p>
+        </p:txBody>
+      </p:sp>
+      <p:sp>
+        <p:nvSpPr>
           <p:cNvPr id="2" name="Title 1"/>
           <p:cNvSpPr>
             <a:spLocks noGrp="1"/>
@@ -6244,94 +8774,6 @@
             <a:r>
               <a:rPr lang="en-US" dirty="0" smtClean="0"/>
               <a:t>Client</a:t>
-            </a:r>
-            <a:endParaRPr lang="en-US" dirty="0"/>
-          </a:p>
-        </p:txBody>
-      </p:sp>
-      <p:sp>
-        <p:nvSpPr>
-          <p:cNvPr id="3" name="Content Placeholder 2"/>
-          <p:cNvSpPr>
-            <a:spLocks noGrp="1"/>
-          </p:cNvSpPr>
-          <p:nvPr>
-            <p:ph idx="1"/>
-          </p:nvPr>
-        </p:nvSpPr>
-        <p:spPr/>
-        <p:txBody>
-          <a:bodyPr>
-            <a:normAutofit fontScale="92500" lnSpcReduction="10000"/>
-          </a:bodyPr>
-          <a:lstStyle/>
-          <a:p>
-            <a:r>
-              <a:rPr lang="en-US" sz="2800" dirty="0" smtClean="0"/>
-              <a:t>Innovative Systems</a:t>
-            </a:r>
-          </a:p>
-          <a:p>
-            <a:pPr lvl="1"/>
-            <a:r>
-              <a:rPr lang="en-US" sz="2400" dirty="0"/>
-              <a:t>P</a:t>
-            </a:r>
-            <a:r>
-              <a:rPr lang="en-US" sz="2400" dirty="0" smtClean="0"/>
-              <a:t>rovides integrated solutions for the independent telecommunications industry.</a:t>
-            </a:r>
-          </a:p>
-          <a:p>
-            <a:r>
-              <a:rPr lang="en-US" sz="2800" dirty="0" smtClean="0"/>
-              <a:t>APMax</a:t>
-            </a:r>
-            <a:endParaRPr lang="en-US" sz="2800" dirty="0" smtClean="0"/>
-          </a:p>
-          <a:p>
-            <a:pPr lvl="1"/>
-            <a:r>
-              <a:rPr lang="en-US" sz="2400" dirty="0"/>
-              <a:t>Application </a:t>
-            </a:r>
-            <a:r>
-              <a:rPr lang="en-US" sz="2400" dirty="0" smtClean="0"/>
-              <a:t>Server providing services such as:</a:t>
-            </a:r>
-          </a:p>
-          <a:p>
-            <a:pPr lvl="2"/>
-            <a:r>
-              <a:rPr lang="en-US" sz="2000" dirty="0" smtClean="0"/>
-              <a:t>IPTV Video Solutions</a:t>
-            </a:r>
-          </a:p>
-          <a:p>
-            <a:pPr lvl="2"/>
-            <a:r>
-              <a:rPr lang="en-US" sz="2000" dirty="0" smtClean="0"/>
-              <a:t>Unified Messaging</a:t>
-            </a:r>
-          </a:p>
-          <a:p>
-            <a:pPr lvl="2"/>
-            <a:r>
-              <a:rPr lang="en-US" sz="2000" dirty="0" smtClean="0"/>
-              <a:t>Single Number Service</a:t>
-            </a:r>
-          </a:p>
-          <a:p>
-            <a:r>
-              <a:rPr lang="en-US" dirty="0" smtClean="0"/>
-              <a:t>STB</a:t>
-            </a:r>
-          </a:p>
-          <a:p>
-            <a:pPr lvl="1"/>
-            <a:r>
-              <a:rPr lang="en-US" dirty="0" smtClean="0"/>
-              <a:t>Set-top-box providing television and integrated telephony applications</a:t>
             </a:r>
             <a:endParaRPr lang="en-US" dirty="0"/>
           </a:p>
@@ -6341,6 +8783,85 @@
     <p:extLst>
       <p:ext uri="{BB962C8B-B14F-4D97-AF65-F5344CB8AC3E}">
         <p14:creationId xmlns:p14="http://schemas.microsoft.com/office/powerpoint/2010/main" val="2493944366"/>
+      </p:ext>
+    </p:extLst>
+  </p:cSld>
+  <p:clrMapOvr>
+    <a:masterClrMapping/>
+  </p:clrMapOvr>
+  <p:timing>
+    <p:tnLst>
+      <p:par>
+        <p:cTn id="1" dur="indefinite" restart="never" nodeType="tmRoot"/>
+      </p:par>
+    </p:tnLst>
+  </p:timing>
+</p:sld>
+</file>
+
+<file path=ppt/slides/slide20.xml><?xml version="1.0" encoding="utf-8"?>
+<p:sld xmlns:a="http://schemas.openxmlformats.org/drawingml/2006/main" xmlns:r="http://schemas.openxmlformats.org/officeDocument/2006/relationships" xmlns:p="http://schemas.openxmlformats.org/presentationml/2006/main">
+  <p:cSld>
+    <p:spTree>
+      <p:nvGrpSpPr>
+        <p:cNvPr id="1" name=""/>
+        <p:cNvGrpSpPr/>
+        <p:nvPr/>
+      </p:nvGrpSpPr>
+      <p:grpSpPr>
+        <a:xfrm>
+          <a:off x="0" y="0"/>
+          <a:ext cx="0" cy="0"/>
+          <a:chOff x="0" y="0"/>
+          <a:chExt cx="0" cy="0"/>
+        </a:xfrm>
+      </p:grpSpPr>
+      <p:sp>
+        <p:nvSpPr>
+          <p:cNvPr id="3" name="Content Placeholder 2"/>
+          <p:cNvSpPr>
+            <a:spLocks noGrp="1"/>
+          </p:cNvSpPr>
+          <p:nvPr>
+            <p:ph idx="1"/>
+          </p:nvPr>
+        </p:nvSpPr>
+        <p:spPr/>
+        <p:txBody>
+          <a:bodyPr/>
+          <a:lstStyle/>
+          <a:p>
+            <a:endParaRPr lang="en-US" dirty="0"/>
+          </a:p>
+        </p:txBody>
+      </p:sp>
+      <p:sp>
+        <p:nvSpPr>
+          <p:cNvPr id="2" name="Title 1"/>
+          <p:cNvSpPr>
+            <a:spLocks noGrp="1"/>
+          </p:cNvSpPr>
+          <p:nvPr>
+            <p:ph type="title"/>
+          </p:nvPr>
+        </p:nvSpPr>
+        <p:spPr/>
+        <p:txBody>
+          <a:bodyPr/>
+          <a:lstStyle/>
+          <a:p>
+            <a:r>
+              <a:rPr lang="en-US" dirty="0" smtClean="0"/>
+              <a:t>Questions</a:t>
+            </a:r>
+            <a:endParaRPr lang="en-US" dirty="0"/>
+          </a:p>
+        </p:txBody>
+      </p:sp>
+    </p:spTree>
+    <p:extLst>
+      <p:ext uri="{BB962C8B-B14F-4D97-AF65-F5344CB8AC3E}">
+        <p14:creationId xmlns:p14="http://schemas.microsoft.com/office/powerpoint/2010/main" val="2940516112"/>
       </p:ext>
     </p:extLst>
   </p:cSld>
@@ -6376,12 +8897,12 @@
       </p:grpSpPr>
       <p:sp>
         <p:nvSpPr>
-          <p:cNvPr id="2" name="Title 1"/>
-          <p:cNvSpPr>
-            <a:spLocks noGrp="1"/>
-          </p:cNvSpPr>
-          <p:nvPr>
-            <p:ph type="title"/>
+          <p:cNvPr id="3" name="Content Placeholder 2"/>
+          <p:cNvSpPr>
+            <a:spLocks noGrp="1"/>
+          </p:cNvSpPr>
+          <p:nvPr>
+            <p:ph idx="1"/>
           </p:nvPr>
         </p:nvSpPr>
         <p:spPr/>
@@ -6391,64 +8912,20 @@
           <a:p>
             <a:r>
               <a:rPr lang="en-US" dirty="0" smtClean="0"/>
-              <a:t>Project</a:t>
-            </a:r>
-            <a:endParaRPr lang="en-US" dirty="0"/>
-          </a:p>
-        </p:txBody>
-      </p:sp>
-      <p:sp>
-        <p:nvSpPr>
-          <p:cNvPr id="3" name="Content Placeholder 2"/>
-          <p:cNvSpPr>
-            <a:spLocks noGrp="1"/>
-          </p:cNvSpPr>
-          <p:nvPr>
-            <p:ph idx="1"/>
-          </p:nvPr>
-        </p:nvSpPr>
-        <p:spPr/>
-        <p:txBody>
-          <a:bodyPr/>
-          <a:lstStyle/>
+              <a:t>Create a server to host STB multiplayer game plugins</a:t>
+            </a:r>
+          </a:p>
           <a:p>
             <a:r>
               <a:rPr lang="en-US" dirty="0" smtClean="0"/>
-              <a:t>Create a server to host STB multiplayer game plugins</a:t>
+              <a:t>Design a template game UI for STBs in an APMax environment</a:t>
             </a:r>
           </a:p>
           <a:p>
             <a:r>
               <a:rPr lang="en-US" dirty="0" smtClean="0"/>
-              <a:t>Design a template game UI for STBs in an </a:t>
-            </a:r>
-            <a:r>
-              <a:rPr lang="en-US" dirty="0" smtClean="0"/>
-              <a:t>APMax </a:t>
-            </a:r>
-            <a:r>
-              <a:rPr lang="en-US" dirty="0" smtClean="0"/>
-              <a:t>environment</a:t>
-            </a:r>
-          </a:p>
-          <a:p>
-            <a:r>
-              <a:rPr lang="en-US" dirty="0" smtClean="0"/>
-              <a:t>Build a virtual </a:t>
-            </a:r>
-            <a:r>
-              <a:rPr lang="en-US" dirty="0" smtClean="0"/>
-              <a:t>APMax </a:t>
-            </a:r>
-            <a:r>
-              <a:rPr lang="en-US" dirty="0" smtClean="0"/>
-              <a:t>to simulate future communication </a:t>
-            </a:r>
-            <a:r>
-              <a:rPr lang="en-US" dirty="0" smtClean="0"/>
-              <a:t>protocols</a:t>
-            </a:r>
-            <a:endParaRPr lang="en-US" dirty="0" smtClean="0"/>
+              <a:t>Build a virtual APMax to simulate future communication protocols</a:t>
+            </a:r>
           </a:p>
           <a:p>
             <a:r>
@@ -6460,6 +8937,29 @@
             <a:pPr marL="0" indent="0">
               <a:buNone/>
             </a:pPr>
+            <a:endParaRPr lang="en-US" dirty="0"/>
+          </a:p>
+        </p:txBody>
+      </p:sp>
+      <p:sp>
+        <p:nvSpPr>
+          <p:cNvPr id="2" name="Title 1"/>
+          <p:cNvSpPr>
+            <a:spLocks noGrp="1"/>
+          </p:cNvSpPr>
+          <p:nvPr>
+            <p:ph type="title"/>
+          </p:nvPr>
+        </p:nvSpPr>
+        <p:spPr/>
+        <p:txBody>
+          <a:bodyPr/>
+          <a:lstStyle/>
+          <a:p>
+            <a:r>
+              <a:rPr lang="en-US" dirty="0" smtClean="0"/>
+              <a:t>Project</a:t>
+            </a:r>
             <a:endParaRPr lang="en-US" dirty="0"/>
           </a:p>
         </p:txBody>
@@ -6503,6 +9003,110 @@
       </p:grpSpPr>
       <p:sp>
         <p:nvSpPr>
+          <p:cNvPr id="3" name="Content Placeholder 2"/>
+          <p:cNvSpPr>
+            <a:spLocks noGrp="1"/>
+          </p:cNvSpPr>
+          <p:nvPr>
+            <p:ph idx="1"/>
+          </p:nvPr>
+        </p:nvSpPr>
+        <p:spPr/>
+        <p:txBody>
+          <a:bodyPr>
+            <a:normAutofit fontScale="92500" lnSpcReduction="10000"/>
+          </a:bodyPr>
+          <a:lstStyle/>
+          <a:p>
+            <a:r>
+              <a:rPr lang="en-US" dirty="0" smtClean="0"/>
+              <a:t>Sprint #1</a:t>
+            </a:r>
+          </a:p>
+          <a:p>
+            <a:pPr lvl="1"/>
+            <a:r>
+              <a:rPr lang="en-US" sz="2400" dirty="0" smtClean="0"/>
+              <a:t>Initial design of STBMF system</a:t>
+            </a:r>
+          </a:p>
+          <a:p>
+            <a:pPr lvl="1"/>
+            <a:r>
+              <a:rPr lang="en-US" sz="2400" dirty="0" smtClean="0"/>
+              <a:t>Researched </a:t>
+            </a:r>
+            <a:r>
+              <a:rPr lang="en-US" sz="2400" dirty="0" smtClean="0"/>
+              <a:t>current Innovative System network communications</a:t>
+            </a:r>
+          </a:p>
+          <a:p>
+            <a:r>
+              <a:rPr lang="en-US" dirty="0" smtClean="0"/>
+              <a:t>Sprint #2</a:t>
+            </a:r>
+          </a:p>
+          <a:p>
+            <a:pPr lvl="1"/>
+            <a:r>
+              <a:rPr lang="en-US" sz="2400" dirty="0" smtClean="0"/>
+              <a:t>Designed </a:t>
+            </a:r>
+            <a:r>
+              <a:rPr lang="en-US" sz="2400" dirty="0" smtClean="0"/>
+              <a:t>prototypes of STBMF System (vSTB, </a:t>
+            </a:r>
+            <a:r>
+              <a:rPr lang="en-US" sz="2400" dirty="0" err="1" smtClean="0"/>
+              <a:t>vAPMAX</a:t>
+            </a:r>
+            <a:r>
+              <a:rPr lang="en-US" sz="2400" dirty="0" smtClean="0"/>
+              <a:t>, Game Server) </a:t>
+            </a:r>
+          </a:p>
+          <a:p>
+            <a:pPr lvl="1"/>
+            <a:r>
+              <a:rPr lang="en-US" sz="2400" dirty="0" smtClean="0"/>
+              <a:t>Designed communication definitions for STBMF</a:t>
+            </a:r>
+            <a:endParaRPr lang="en-US" sz="2400" dirty="0"/>
+          </a:p>
+          <a:p>
+            <a:r>
+              <a:rPr lang="en-US" dirty="0" smtClean="0"/>
+              <a:t>Sprint #3</a:t>
+            </a:r>
+          </a:p>
+          <a:p>
+            <a:pPr lvl="1"/>
+            <a:r>
+              <a:rPr lang="en-US" sz="2400" dirty="0" smtClean="0"/>
+              <a:t>Implemented prototypes to test designed communication </a:t>
+            </a:r>
+            <a:r>
+              <a:rPr lang="en-US" sz="2400" dirty="0" smtClean="0"/>
+              <a:t>definitions</a:t>
+            </a:r>
+          </a:p>
+          <a:p>
+            <a:pPr lvl="1"/>
+            <a:r>
+              <a:rPr lang="en-US" sz="2400" dirty="0" smtClean="0"/>
+              <a:t>Created sand box environment for development</a:t>
+            </a:r>
+            <a:endParaRPr lang="en-US" sz="2400" dirty="0" smtClean="0"/>
+          </a:p>
+          <a:p>
+            <a:pPr lvl="1"/>
+            <a:endParaRPr lang="en-US" dirty="0" smtClean="0"/>
+          </a:p>
+        </p:txBody>
+      </p:sp>
+      <p:sp>
+        <p:nvSpPr>
           <p:cNvPr id="2" name="Title 1"/>
           <p:cNvSpPr>
             <a:spLocks noGrp="1"/>
@@ -6521,98 +9125,6 @@
               <a:t>Sprint Review</a:t>
             </a:r>
             <a:endParaRPr lang="en-US" dirty="0"/>
-          </a:p>
-        </p:txBody>
-      </p:sp>
-      <p:sp>
-        <p:nvSpPr>
-          <p:cNvPr id="3" name="Content Placeholder 2"/>
-          <p:cNvSpPr>
-            <a:spLocks noGrp="1"/>
-          </p:cNvSpPr>
-          <p:nvPr>
-            <p:ph idx="1"/>
-          </p:nvPr>
-        </p:nvSpPr>
-        <p:spPr/>
-        <p:txBody>
-          <a:bodyPr>
-            <a:normAutofit lnSpcReduction="10000"/>
-          </a:bodyPr>
-          <a:lstStyle/>
-          <a:p>
-            <a:r>
-              <a:rPr lang="en-US" dirty="0" smtClean="0"/>
-              <a:t>Sprint #1</a:t>
-            </a:r>
-          </a:p>
-          <a:p>
-            <a:pPr lvl="1"/>
-            <a:r>
-              <a:rPr lang="en-US" sz="2400" dirty="0" smtClean="0"/>
-              <a:t>Initial design of STBMF system</a:t>
-            </a:r>
-          </a:p>
-          <a:p>
-            <a:pPr lvl="1"/>
-            <a:r>
-              <a:rPr lang="en-US" sz="2400" dirty="0" smtClean="0"/>
-              <a:t>Learn current Innovative System network communications</a:t>
-            </a:r>
-          </a:p>
-          <a:p>
-            <a:r>
-              <a:rPr lang="en-US" dirty="0" smtClean="0"/>
-              <a:t>Sprint #2</a:t>
-            </a:r>
-          </a:p>
-          <a:p>
-            <a:pPr lvl="1"/>
-            <a:r>
-              <a:rPr lang="en-US" sz="2400" dirty="0" smtClean="0"/>
-              <a:t>Refined prototypes of STBMF System (</a:t>
-            </a:r>
-            <a:r>
-              <a:rPr lang="en-US" sz="2400" dirty="0" err="1" smtClean="0"/>
-              <a:t>vSTB</a:t>
-            </a:r>
-            <a:r>
-              <a:rPr lang="en-US" sz="2400" dirty="0" smtClean="0"/>
-              <a:t>, </a:t>
-            </a:r>
-            <a:r>
-              <a:rPr lang="en-US" sz="2400" dirty="0" err="1" smtClean="0"/>
-              <a:t>vAPMAX</a:t>
-            </a:r>
-            <a:r>
-              <a:rPr lang="en-US" sz="2400" dirty="0" smtClean="0"/>
-              <a:t>, Game Server) </a:t>
-            </a:r>
-          </a:p>
-          <a:p>
-            <a:pPr lvl="1"/>
-            <a:r>
-              <a:rPr lang="en-US" sz="2400" dirty="0" smtClean="0"/>
-              <a:t>Designed communication definitions for STBMF</a:t>
-            </a:r>
-            <a:endParaRPr lang="en-US" sz="2400" dirty="0"/>
-          </a:p>
-          <a:p>
-            <a:r>
-              <a:rPr lang="en-US" dirty="0" smtClean="0"/>
-              <a:t>Sprint #3</a:t>
-            </a:r>
-          </a:p>
-          <a:p>
-            <a:pPr lvl="1"/>
-            <a:r>
-              <a:rPr lang="en-US" sz="2400" dirty="0" smtClean="0"/>
-              <a:t>Implemented prototypes to test designed communication definitions</a:t>
-            </a:r>
-          </a:p>
-          <a:p>
-            <a:pPr lvl="1"/>
-            <a:endParaRPr lang="en-US" dirty="0" smtClean="0"/>
           </a:p>
         </p:txBody>
       </p:sp>
@@ -6655,12 +9167,12 @@
       </p:grpSpPr>
       <p:sp>
         <p:nvSpPr>
-          <p:cNvPr id="2" name="Title 1"/>
-          <p:cNvSpPr>
-            <a:spLocks noGrp="1"/>
-          </p:cNvSpPr>
-          <p:nvPr>
-            <p:ph type="title"/>
+          <p:cNvPr id="3" name="Content Placeholder 2"/>
+          <p:cNvSpPr>
+            <a:spLocks noGrp="1"/>
+          </p:cNvSpPr>
+          <p:nvPr>
+            <p:ph idx="1"/>
           </p:nvPr>
         </p:nvSpPr>
         <p:spPr/>
@@ -6670,20 +9182,71 @@
           <a:p>
             <a:r>
               <a:rPr lang="en-US" dirty="0" smtClean="0"/>
-              <a:t>System Design</a:t>
-            </a:r>
-            <a:endParaRPr lang="en-US" dirty="0"/>
-          </a:p>
-        </p:txBody>
-      </p:sp>
-      <p:sp>
-        <p:nvSpPr>
-          <p:cNvPr id="3" name="Content Placeholder 2"/>
-          <p:cNvSpPr>
-            <a:spLocks noGrp="1"/>
-          </p:cNvSpPr>
-          <p:nvPr>
-            <p:ph idx="1"/>
+              <a:t>3 Major Components:</a:t>
+            </a:r>
+          </a:p>
+          <a:p>
+            <a:pPr lvl="1"/>
+            <a:r>
+              <a:rPr lang="en-US" dirty="0" err="1" smtClean="0"/>
+              <a:t>vSTB</a:t>
+            </a:r>
+            <a:endParaRPr lang="en-US" dirty="0" smtClean="0"/>
+          </a:p>
+          <a:p>
+            <a:pPr lvl="1"/>
+            <a:r>
+              <a:rPr lang="en-US" dirty="0" err="1" smtClean="0"/>
+              <a:t>vAPMAX</a:t>
+            </a:r>
+            <a:endParaRPr lang="en-US" dirty="0" smtClean="0"/>
+          </a:p>
+          <a:p>
+            <a:pPr lvl="1"/>
+            <a:r>
+              <a:rPr lang="en-US" dirty="0" smtClean="0"/>
+              <a:t>Game Server</a:t>
+            </a:r>
+          </a:p>
+          <a:p>
+            <a:r>
+              <a:rPr lang="en-US" dirty="0" smtClean="0"/>
+              <a:t>Communication:</a:t>
+            </a:r>
+          </a:p>
+          <a:p>
+            <a:pPr lvl="1"/>
+            <a:r>
+              <a:rPr lang="en-US" dirty="0" smtClean="0"/>
+              <a:t>UDP</a:t>
+            </a:r>
+            <a:r>
+              <a:rPr lang="en-US" dirty="0"/>
+              <a:t> </a:t>
+            </a:r>
+            <a:r>
+              <a:rPr lang="en-US" dirty="0" smtClean="0"/>
+              <a:t>and TCP</a:t>
+            </a:r>
+          </a:p>
+          <a:p>
+            <a:pPr lvl="1"/>
+            <a:r>
+              <a:rPr lang="en-US" dirty="0" smtClean="0"/>
+              <a:t>CommandLink protocol</a:t>
+            </a:r>
+            <a:endParaRPr lang="en-US" dirty="0" smtClean="0"/>
+          </a:p>
+        </p:txBody>
+      </p:sp>
+      <p:sp>
+        <p:nvSpPr>
+          <p:cNvPr id="2" name="Title 1"/>
+          <p:cNvSpPr>
+            <a:spLocks noGrp="1"/>
+          </p:cNvSpPr>
+          <p:nvPr>
+            <p:ph type="title"/>
           </p:nvPr>
         </p:nvSpPr>
         <p:spPr/>
@@ -6693,51 +9256,9 @@
           <a:p>
             <a:r>
               <a:rPr lang="en-US" dirty="0" smtClean="0"/>
-              <a:t>3 Major Components:</a:t>
-            </a:r>
-          </a:p>
-          <a:p>
-            <a:pPr lvl="1"/>
-            <a:r>
-              <a:rPr lang="en-US" dirty="0" err="1" smtClean="0"/>
-              <a:t>vSTB</a:t>
-            </a:r>
-            <a:endParaRPr lang="en-US" dirty="0" smtClean="0"/>
-          </a:p>
-          <a:p>
-            <a:pPr lvl="1"/>
-            <a:r>
-              <a:rPr lang="en-US" dirty="0" err="1" smtClean="0"/>
-              <a:t>vAPMAX</a:t>
-            </a:r>
-            <a:endParaRPr lang="en-US" dirty="0" smtClean="0"/>
-          </a:p>
-          <a:p>
-            <a:pPr lvl="1"/>
-            <a:r>
-              <a:rPr lang="en-US" dirty="0" smtClean="0"/>
-              <a:t>Game Server</a:t>
-            </a:r>
-          </a:p>
-          <a:p>
-            <a:r>
-              <a:rPr lang="en-US" dirty="0" smtClean="0"/>
-              <a:t>Communication:</a:t>
-            </a:r>
-          </a:p>
-          <a:p>
-            <a:pPr lvl="1"/>
-            <a:r>
-              <a:rPr lang="en-US" dirty="0" smtClean="0"/>
-              <a:t>UDP</a:t>
-            </a:r>
-          </a:p>
-          <a:p>
-            <a:pPr lvl="1"/>
-            <a:r>
-              <a:rPr lang="en-US" dirty="0" smtClean="0"/>
-              <a:t>TCP</a:t>
-            </a:r>
+              <a:t>System Design</a:t>
+            </a:r>
+            <a:endParaRPr lang="en-US" dirty="0"/>
           </a:p>
         </p:txBody>
       </p:sp>
@@ -6780,12 +9301,12 @@
       </p:grpSpPr>
       <p:sp>
         <p:nvSpPr>
-          <p:cNvPr id="2" name="Title 1"/>
-          <p:cNvSpPr>
-            <a:spLocks noGrp="1"/>
-          </p:cNvSpPr>
-          <p:nvPr>
-            <p:ph type="title"/>
+          <p:cNvPr id="3" name="Content Placeholder 2"/>
+          <p:cNvSpPr>
+            <a:spLocks noGrp="1"/>
+          </p:cNvSpPr>
+          <p:nvPr>
+            <p:ph idx="1"/>
           </p:nvPr>
         </p:nvSpPr>
         <p:spPr/>
@@ -6793,86 +9314,81 @@
           <a:bodyPr/>
           <a:lstStyle/>
           <a:p>
+            <a:pPr lvl="1"/>
+            <a:r>
+              <a:rPr lang="en-US" dirty="0" err="1" smtClean="0"/>
+              <a:t>vSTB</a:t>
+            </a:r>
+            <a:endParaRPr lang="en-US" dirty="0" smtClean="0"/>
+          </a:p>
+          <a:p>
+            <a:pPr lvl="2"/>
+            <a:r>
+              <a:rPr lang="en-US" dirty="0" smtClean="0"/>
+              <a:t>Scalable module to handle game environment request/response from user</a:t>
+            </a:r>
+          </a:p>
+          <a:p>
+            <a:pPr lvl="1"/>
+            <a:r>
+              <a:rPr lang="en-US" dirty="0" err="1" smtClean="0"/>
+              <a:t>vAPMAX</a:t>
+            </a:r>
+            <a:endParaRPr lang="en-US" dirty="0" smtClean="0"/>
+          </a:p>
+          <a:p>
+            <a:pPr lvl="2"/>
+            <a:r>
+              <a:rPr lang="en-US" dirty="0" smtClean="0"/>
+              <a:t>Message handler between </a:t>
+            </a:r>
+            <a:r>
+              <a:rPr lang="en-US" dirty="0" err="1" smtClean="0"/>
+              <a:t>vSTB</a:t>
+            </a:r>
+            <a:r>
+              <a:rPr lang="en-US" dirty="0" smtClean="0"/>
+              <a:t> and Game Server</a:t>
+            </a:r>
+          </a:p>
+          <a:p>
+            <a:pPr lvl="1"/>
+            <a:r>
+              <a:rPr lang="en-US" dirty="0" smtClean="0"/>
+              <a:t>Game Server</a:t>
+            </a:r>
+          </a:p>
+          <a:p>
+            <a:pPr lvl="2"/>
+            <a:r>
+              <a:rPr lang="en-US" dirty="0" smtClean="0"/>
+              <a:t>Process requests from/responses to users on vSTB</a:t>
+            </a:r>
+          </a:p>
+          <a:p>
+            <a:endParaRPr lang="en-US" dirty="0"/>
+          </a:p>
+        </p:txBody>
+      </p:sp>
+      <p:sp>
+        <p:nvSpPr>
+          <p:cNvPr id="2" name="Title 1"/>
+          <p:cNvSpPr>
+            <a:spLocks noGrp="1"/>
+          </p:cNvSpPr>
+          <p:nvPr>
+            <p:ph type="title"/>
+          </p:nvPr>
+        </p:nvSpPr>
+        <p:spPr/>
+        <p:txBody>
+          <a:bodyPr/>
+          <a:lstStyle/>
+          <a:p>
             <a:r>
               <a:rPr lang="en-US" dirty="0" smtClean="0"/>
               <a:t>Prototypes</a:t>
             </a:r>
-            <a:endParaRPr lang="en-US" dirty="0"/>
-          </a:p>
-        </p:txBody>
-      </p:sp>
-      <p:sp>
-        <p:nvSpPr>
-          <p:cNvPr id="3" name="Content Placeholder 2"/>
-          <p:cNvSpPr>
-            <a:spLocks noGrp="1"/>
-          </p:cNvSpPr>
-          <p:nvPr>
-            <p:ph idx="1"/>
-          </p:nvPr>
-        </p:nvSpPr>
-        <p:spPr>
-          <a:xfrm>
-            <a:off x="457200" y="1600200"/>
-            <a:ext cx="8229600" cy="4525963"/>
-          </a:xfrm>
-        </p:spPr>
-        <p:txBody>
-          <a:bodyPr/>
-          <a:lstStyle/>
-          <a:p>
-            <a:pPr lvl="1"/>
-            <a:r>
-              <a:rPr lang="en-US" dirty="0" err="1" smtClean="0"/>
-              <a:t>vSTB</a:t>
-            </a:r>
-            <a:endParaRPr lang="en-US" dirty="0" smtClean="0"/>
-          </a:p>
-          <a:p>
-            <a:pPr lvl="2"/>
-            <a:r>
-              <a:rPr lang="en-US" dirty="0" smtClean="0"/>
-              <a:t>Scalable module to handle game environment request/response from user</a:t>
-            </a:r>
-          </a:p>
-          <a:p>
-            <a:pPr lvl="1"/>
-            <a:r>
-              <a:rPr lang="en-US" dirty="0" err="1" smtClean="0"/>
-              <a:t>vAPMAX</a:t>
-            </a:r>
-            <a:endParaRPr lang="en-US" dirty="0" smtClean="0"/>
-          </a:p>
-          <a:p>
-            <a:pPr lvl="2"/>
-            <a:r>
-              <a:rPr lang="en-US" dirty="0" smtClean="0"/>
-              <a:t>Message handler between </a:t>
-            </a:r>
-            <a:r>
-              <a:rPr lang="en-US" dirty="0" err="1" smtClean="0"/>
-              <a:t>vSTB</a:t>
-            </a:r>
-            <a:r>
-              <a:rPr lang="en-US" dirty="0" smtClean="0"/>
-              <a:t> and Game Server</a:t>
-            </a:r>
-          </a:p>
-          <a:p>
-            <a:pPr lvl="1"/>
-            <a:r>
-              <a:rPr lang="en-US" dirty="0" smtClean="0"/>
-              <a:t>Game Server</a:t>
-            </a:r>
-          </a:p>
-          <a:p>
-            <a:pPr lvl="2"/>
-            <a:r>
-              <a:rPr lang="en-US" dirty="0" smtClean="0"/>
-              <a:t>Process requests from/responses to users on vSTB</a:t>
-            </a:r>
-          </a:p>
-          <a:p>
             <a:endParaRPr lang="en-US" dirty="0"/>
           </a:p>
         </p:txBody>
@@ -6916,12 +9432,12 @@
       </p:grpSpPr>
       <p:sp>
         <p:nvSpPr>
-          <p:cNvPr id="2" name="Title 1"/>
-          <p:cNvSpPr>
-            <a:spLocks noGrp="1"/>
-          </p:cNvSpPr>
-          <p:nvPr>
-            <p:ph type="title"/>
+          <p:cNvPr id="3" name="Content Placeholder 2"/>
+          <p:cNvSpPr>
+            <a:spLocks noGrp="1"/>
+          </p:cNvSpPr>
+          <p:nvPr>
+            <p:ph idx="1"/>
           </p:nvPr>
         </p:nvSpPr>
         <p:spPr/>
@@ -6930,21 +9446,63 @@
           <a:lstStyle/>
           <a:p>
             <a:r>
+              <a:rPr lang="en-US" dirty="0" smtClean="0"/>
+              <a:t>New request response definitions</a:t>
+            </a:r>
+          </a:p>
+          <a:p>
+            <a:r>
+              <a:rPr lang="en-US" dirty="0" smtClean="0"/>
+              <a:t>Scalable</a:t>
+            </a:r>
+          </a:p>
+          <a:p>
+            <a:r>
+              <a:rPr lang="en-US" dirty="0" smtClean="0"/>
+              <a:t>Modular (</a:t>
+            </a:r>
+            <a:r>
               <a:rPr lang="en-US" dirty="0" err="1" smtClean="0"/>
               <a:t>vSTB</a:t>
             </a:r>
+            <a:r>
+              <a:rPr lang="en-US" dirty="0" smtClean="0"/>
+              <a:t> Tester, </a:t>
+            </a:r>
+            <a:r>
+              <a:rPr lang="en-US" dirty="0" err="1" smtClean="0"/>
+              <a:t>vSTB</a:t>
+            </a:r>
+            <a:r>
+              <a:rPr lang="en-US" dirty="0" smtClean="0"/>
+              <a:t> Multiplayer)</a:t>
+            </a:r>
+          </a:p>
+          <a:p>
+            <a:r>
+              <a:rPr lang="en-US" dirty="0" smtClean="0"/>
+              <a:t>Platform independent</a:t>
+            </a:r>
+          </a:p>
+          <a:p>
+            <a:r>
+              <a:rPr lang="en-US" dirty="0" smtClean="0"/>
+              <a:t>Increased availability to Users</a:t>
+            </a:r>
+          </a:p>
+          <a:p>
             <a:endParaRPr lang="en-US" dirty="0"/>
           </a:p>
         </p:txBody>
       </p:sp>
       <p:sp>
         <p:nvSpPr>
-          <p:cNvPr id="3" name="Content Placeholder 2"/>
-          <p:cNvSpPr>
-            <a:spLocks noGrp="1"/>
-          </p:cNvSpPr>
-          <p:nvPr>
-            <p:ph idx="1"/>
+          <p:cNvPr id="2" name="Title 1"/>
+          <p:cNvSpPr>
+            <a:spLocks noGrp="1"/>
+          </p:cNvSpPr>
+          <p:nvPr>
+            <p:ph type="title"/>
           </p:nvPr>
         </p:nvSpPr>
         <p:spPr/>
@@ -6953,51 +9511,9 @@
           <a:lstStyle/>
           <a:p>
             <a:r>
-              <a:rPr lang="en-US" dirty="0" smtClean="0"/>
-              <a:t>New request response definitions</a:t>
-            </a:r>
-          </a:p>
-          <a:p>
-            <a:r>
-              <a:rPr lang="en-US" dirty="0" smtClean="0"/>
-              <a:t>Scalable</a:t>
-            </a:r>
-          </a:p>
-          <a:p>
-            <a:r>
-              <a:rPr lang="en-US" dirty="0" smtClean="0"/>
-              <a:t>Modular (</a:t>
-            </a:r>
-            <a:r>
               <a:rPr lang="en-US" dirty="0" err="1" smtClean="0"/>
               <a:t>vSTB</a:t>
             </a:r>
-            <a:r>
-              <a:rPr lang="en-US" dirty="0" smtClean="0"/>
-              <a:t> Tester, </a:t>
-            </a:r>
-            <a:r>
-              <a:rPr lang="en-US" dirty="0" err="1" smtClean="0"/>
-              <a:t>vSTB</a:t>
-            </a:r>
-            <a:r>
-              <a:rPr lang="en-US" dirty="0" smtClean="0"/>
-              <a:t> Multiplayer)</a:t>
-            </a:r>
-          </a:p>
-          <a:p>
-            <a:r>
-              <a:rPr lang="en-US" dirty="0" smtClean="0"/>
-              <a:t>Platform independent</a:t>
-            </a:r>
-          </a:p>
-          <a:p>
-            <a:r>
-              <a:rPr lang="en-US" dirty="0" smtClean="0"/>
-              <a:t>Increased availability to Users</a:t>
-            </a:r>
-          </a:p>
-          <a:p>
             <a:endParaRPr lang="en-US" dirty="0"/>
           </a:p>
         </p:txBody>
@@ -7041,15 +9557,20 @@
       </p:grpSpPr>
       <p:sp>
         <p:nvSpPr>
-          <p:cNvPr id="2" name="Title 1"/>
-          <p:cNvSpPr>
-            <a:spLocks noGrp="1"/>
-          </p:cNvSpPr>
-          <p:nvPr>
-            <p:ph type="title"/>
-          </p:nvPr>
-        </p:nvSpPr>
-        <p:spPr/>
+          <p:cNvPr id="3" name="Content Placeholder 2"/>
+          <p:cNvSpPr>
+            <a:spLocks noGrp="1"/>
+          </p:cNvSpPr>
+          <p:nvPr>
+            <p:ph idx="1"/>
+          </p:nvPr>
+        </p:nvSpPr>
+        <p:spPr>
+          <a:xfrm>
+            <a:off x="457200" y="1295400"/>
+            <a:ext cx="8229600" cy="4525963"/>
+          </a:xfrm>
+        </p:spPr>
         <p:txBody>
           <a:bodyPr/>
           <a:lstStyle/>
@@ -7059,213 +9580,1094 @@
               <a:t>vSTB</a:t>
             </a:r>
             <a:r>
+              <a:rPr lang="en-US" dirty="0" smtClean="0"/>
+              <a:t> must </a:t>
+            </a:r>
+            <a:r>
               <a:rPr lang="en-US" dirty="0"/>
-              <a:t> </a:t>
+              <a:t>work on actual </a:t>
             </a:r>
             <a:r>
               <a:rPr lang="en-US" dirty="0" smtClean="0"/>
-              <a:t>Design</a:t>
-            </a:r>
+              <a:t>STB</a:t>
+            </a:r>
+          </a:p>
+          <a:p>
             <a:endParaRPr lang="en-US" dirty="0"/>
           </a:p>
         </p:txBody>
       </p:sp>
       <p:sp>
         <p:nvSpPr>
-          <p:cNvPr id="4" name="TextBox 3"/>
-          <p:cNvSpPr txBox="1"/>
+          <p:cNvPr id="2" name="Title 1"/>
+          <p:cNvSpPr>
+            <a:spLocks noGrp="1"/>
+          </p:cNvSpPr>
+          <p:nvPr>
+            <p:ph type="title"/>
+          </p:nvPr>
+        </p:nvSpPr>
+        <p:spPr/>
+        <p:txBody>
+          <a:bodyPr/>
+          <a:lstStyle/>
+          <a:p>
+            <a:r>
+              <a:rPr lang="en-US" dirty="0" smtClean="0"/>
+              <a:t>User Story</a:t>
+            </a:r>
+            <a:endParaRPr lang="en-US" dirty="0"/>
+          </a:p>
+        </p:txBody>
+      </p:sp>
+      <p:graphicFrame>
+        <p:nvGraphicFramePr>
+          <p:cNvPr id="4" name="Table 3"/>
+          <p:cNvGraphicFramePr>
+            <a:graphicFrameLocks noGrp="1"/>
+          </p:cNvGraphicFramePr>
+          <p:nvPr>
+            <p:extLst>
+              <p:ext uri="{D42A27DB-BD31-4B8C-83A1-F6EECF244321}">
+                <p14:modId xmlns:p14="http://schemas.microsoft.com/office/powerpoint/2010/main" val="3867263034"/>
+              </p:ext>
+            </p:extLst>
+          </p:nvPr>
+        </p:nvGraphicFramePr>
+        <p:xfrm>
+          <a:off x="381000" y="1828800"/>
+          <a:ext cx="8229600" cy="5212080"/>
+        </p:xfrm>
+        <a:graphic>
+          <a:graphicData uri="http://schemas.openxmlformats.org/drawingml/2006/table">
+            <a:tbl>
+              <a:tblPr firstRow="1" bandRow="1">
+                <a:tableStyleId>{5C22544A-7EE6-4342-B048-85BDC9FD1C3A}</a:tableStyleId>
+              </a:tblPr>
+              <a:tblGrid>
+                <a:gridCol w="4114800"/>
+                <a:gridCol w="4114800"/>
+              </a:tblGrid>
+              <a:tr h="4876800">
+                <a:tc>
+                  <a:txBody>
+                    <a:bodyPr/>
+                    <a:lstStyle/>
+                    <a:p>
+                      <a:r>
+                        <a:rPr lang="en-US" sz="1200" dirty="0" smtClean="0"/>
+                        <a:t>Amino Live</a:t>
+                      </a:r>
+                    </a:p>
+                    <a:p>
+                      <a:endParaRPr lang="en-US" sz="1200" b="0" i="0" kern="1200" dirty="0" smtClean="0">
+                        <a:solidFill>
+                          <a:schemeClr val="lt1"/>
+                        </a:solidFill>
+                        <a:effectLst/>
+                        <a:latin typeface="+mn-lt"/>
+                        <a:ea typeface="+mn-ea"/>
+                        <a:cs typeface="+mn-cs"/>
+                      </a:endParaRPr>
+                    </a:p>
+                    <a:p>
+                      <a:r>
+                        <a:rPr lang="en-US" sz="1200" b="1" i="0" kern="1200" dirty="0" smtClean="0">
+                          <a:solidFill>
+                            <a:schemeClr val="lt1"/>
+                          </a:solidFill>
+                          <a:effectLst/>
+                          <a:latin typeface="+mn-lt"/>
+                          <a:ea typeface="+mn-ea"/>
+                          <a:cs typeface="+mn-cs"/>
+                        </a:rPr>
+                        <a:t>Connectivity:</a:t>
+                      </a:r>
+                      <a:r>
+                        <a:rPr lang="en-US" sz="1200" dirty="0" smtClean="0"/>
+                        <a:t/>
+                      </a:r>
+                      <a:br>
+                        <a:rPr lang="en-US" sz="1200" dirty="0" smtClean="0"/>
+                      </a:br>
+                      <a:r>
+                        <a:rPr lang="en-US" sz="1200" b="0" i="0" kern="1200" dirty="0" smtClean="0">
+                          <a:solidFill>
+                            <a:schemeClr val="lt1"/>
+                          </a:solidFill>
+                          <a:effectLst/>
+                          <a:latin typeface="+mn-lt"/>
+                          <a:ea typeface="+mn-ea"/>
+                          <a:cs typeface="+mn-cs"/>
+                        </a:rPr>
+                        <a:t>Dual gigabit Ethernet via RJ-45 shielded connector, 802.11n wireless, Bluetooth, </a:t>
+                      </a:r>
+                      <a:r>
+                        <a:rPr lang="en-US" sz="1200" b="0" i="0" kern="1200" dirty="0" err="1" smtClean="0">
+                          <a:solidFill>
+                            <a:schemeClr val="lt1"/>
+                          </a:solidFill>
+                          <a:effectLst/>
+                          <a:latin typeface="+mn-lt"/>
+                          <a:ea typeface="+mn-ea"/>
+                          <a:cs typeface="+mn-cs"/>
+                        </a:rPr>
+                        <a:t>sim</a:t>
+                      </a:r>
+                      <a:r>
+                        <a:rPr lang="en-US" sz="1200" b="0" i="0" kern="1200" dirty="0" smtClean="0">
+                          <a:solidFill>
+                            <a:schemeClr val="lt1"/>
+                          </a:solidFill>
+                          <a:effectLst/>
+                          <a:latin typeface="+mn-lt"/>
+                          <a:ea typeface="+mn-ea"/>
+                          <a:cs typeface="+mn-cs"/>
+                        </a:rPr>
+                        <a:t> or smart card</a:t>
+                      </a:r>
+                      <a:r>
+                        <a:rPr lang="en-US" sz="1200" dirty="0" smtClean="0"/>
+                        <a:t/>
+                      </a:r>
+                      <a:br>
+                        <a:rPr lang="en-US" sz="1200" dirty="0" smtClean="0"/>
+                      </a:br>
+                      <a:r>
+                        <a:rPr lang="en-US" sz="1200" dirty="0" smtClean="0"/>
+                        <a:t/>
+                      </a:r>
+                      <a:br>
+                        <a:rPr lang="en-US" sz="1200" dirty="0" smtClean="0"/>
+                      </a:br>
+                      <a:r>
+                        <a:rPr lang="en-US" sz="1200" b="1" i="0" kern="1200" dirty="0" smtClean="0">
+                          <a:solidFill>
+                            <a:schemeClr val="lt1"/>
+                          </a:solidFill>
+                          <a:effectLst/>
+                          <a:latin typeface="+mn-lt"/>
+                          <a:ea typeface="+mn-ea"/>
+                          <a:cs typeface="+mn-cs"/>
+                        </a:rPr>
+                        <a:t>Outputs:</a:t>
+                      </a:r>
+                      <a:r>
+                        <a:rPr lang="en-US" sz="1200" dirty="0" smtClean="0"/>
+                        <a:t/>
+                      </a:r>
+                      <a:br>
+                        <a:rPr lang="en-US" sz="1200" dirty="0" smtClean="0"/>
+                      </a:br>
+                      <a:r>
+                        <a:rPr lang="en-US" sz="1200" b="0" i="0" kern="1200" dirty="0" smtClean="0">
+                          <a:solidFill>
+                            <a:schemeClr val="lt1"/>
+                          </a:solidFill>
+                          <a:effectLst/>
+                          <a:latin typeface="+mn-lt"/>
+                          <a:ea typeface="+mn-ea"/>
+                          <a:cs typeface="+mn-cs"/>
+                        </a:rPr>
+                        <a:t>HDMI 1.4 with HDCP. USB 2.0 8 3.0</a:t>
+                      </a:r>
+                    </a:p>
+                    <a:p>
+                      <a:r>
+                        <a:rPr lang="en-US" sz="1200" dirty="0" smtClean="0"/>
+                        <a:t/>
+                      </a:r>
+                      <a:br>
+                        <a:rPr lang="en-US" sz="1200" dirty="0" smtClean="0"/>
+                      </a:br>
+                      <a:r>
+                        <a:rPr lang="en-US" sz="1200" b="1" i="0" kern="1200" dirty="0" smtClean="0">
+                          <a:solidFill>
+                            <a:schemeClr val="lt1"/>
+                          </a:solidFill>
+                          <a:effectLst/>
+                          <a:latin typeface="+mn-lt"/>
+                          <a:ea typeface="+mn-ea"/>
+                          <a:cs typeface="+mn-cs"/>
+                        </a:rPr>
+                        <a:t>Memory:</a:t>
+                      </a:r>
+                      <a:r>
+                        <a:rPr lang="en-US" sz="1200" dirty="0" smtClean="0"/>
+                        <a:t/>
+                      </a:r>
+                      <a:br>
+                        <a:rPr lang="en-US" sz="1200" dirty="0" smtClean="0"/>
+                      </a:br>
+                      <a:r>
+                        <a:rPr lang="en-US" sz="1200" b="0" i="0" kern="1200" dirty="0" smtClean="0">
+                          <a:solidFill>
+                            <a:schemeClr val="lt1"/>
+                          </a:solidFill>
+                          <a:effectLst/>
+                          <a:latin typeface="+mn-lt"/>
+                          <a:ea typeface="+mn-ea"/>
+                          <a:cs typeface="+mn-cs"/>
+                        </a:rPr>
+                        <a:t>2 GB DDR 3 RAM</a:t>
+                      </a:r>
+                      <a:r>
+                        <a:rPr lang="en-US" sz="1200" dirty="0" smtClean="0"/>
+                        <a:t/>
+                      </a:r>
+                      <a:br>
+                        <a:rPr lang="en-US" sz="1200" dirty="0" smtClean="0"/>
+                      </a:br>
+                      <a:r>
+                        <a:rPr lang="en-US" sz="1200" dirty="0" smtClean="0"/>
+                        <a:t/>
+                      </a:r>
+                      <a:br>
+                        <a:rPr lang="en-US" sz="1200" dirty="0" smtClean="0"/>
+                      </a:br>
+                      <a:r>
+                        <a:rPr lang="en-US" sz="1200" b="1" i="0" kern="1200" dirty="0" smtClean="0">
+                          <a:solidFill>
+                            <a:schemeClr val="lt1"/>
+                          </a:solidFill>
+                          <a:effectLst/>
+                          <a:latin typeface="+mn-lt"/>
+                          <a:ea typeface="+mn-ea"/>
+                          <a:cs typeface="+mn-cs"/>
+                        </a:rPr>
+                        <a:t>HDD:</a:t>
+                      </a:r>
+                      <a:r>
+                        <a:rPr lang="en-US" sz="1200" dirty="0" smtClean="0"/>
+                        <a:t/>
+                      </a:r>
+                      <a:br>
+                        <a:rPr lang="en-US" sz="1200" dirty="0" smtClean="0"/>
+                      </a:br>
+                      <a:r>
+                        <a:rPr lang="en-US" sz="1200" b="0" i="0" kern="1200" dirty="0" smtClean="0">
+                          <a:solidFill>
+                            <a:schemeClr val="lt1"/>
+                          </a:solidFill>
+                          <a:effectLst/>
+                          <a:latin typeface="+mn-lt"/>
+                          <a:ea typeface="+mn-ea"/>
+                          <a:cs typeface="+mn-cs"/>
+                        </a:rPr>
+                        <a:t>250GB standard. Other sizes on request.</a:t>
+                      </a:r>
+                      <a:r>
+                        <a:rPr lang="en-US" sz="1200" dirty="0" smtClean="0"/>
+                        <a:t/>
+                      </a:r>
+                      <a:br>
+                        <a:rPr lang="en-US" sz="1200" dirty="0" smtClean="0"/>
+                      </a:br>
+                      <a:r>
+                        <a:rPr lang="en-US" sz="1200" dirty="0" smtClean="0"/>
+                        <a:t/>
+                      </a:r>
+                      <a:br>
+                        <a:rPr lang="en-US" sz="1200" dirty="0" smtClean="0"/>
+                      </a:br>
+                      <a:r>
+                        <a:rPr lang="en-US" sz="1200" b="1" i="0" kern="1200" dirty="0" smtClean="0">
+                          <a:solidFill>
+                            <a:schemeClr val="lt1"/>
+                          </a:solidFill>
+                          <a:effectLst/>
+                          <a:latin typeface="+mn-lt"/>
+                          <a:ea typeface="+mn-ea"/>
+                          <a:cs typeface="+mn-cs"/>
+                        </a:rPr>
+                        <a:t>Codecs:</a:t>
+                      </a:r>
+                      <a:r>
+                        <a:rPr lang="en-US" sz="1200" dirty="0" smtClean="0"/>
+                        <a:t/>
+                      </a:r>
+                      <a:br>
+                        <a:rPr lang="en-US" sz="1200" dirty="0" smtClean="0"/>
+                      </a:br>
+                      <a:r>
+                        <a:rPr lang="en-US" sz="1200" b="0" i="0" kern="1200" dirty="0" smtClean="0">
+                          <a:solidFill>
+                            <a:schemeClr val="lt1"/>
+                          </a:solidFill>
+                          <a:effectLst/>
+                          <a:latin typeface="+mn-lt"/>
+                          <a:ea typeface="+mn-ea"/>
+                          <a:cs typeface="+mn-cs"/>
+                        </a:rPr>
+                        <a:t>MPEG-2 MP@HL</a:t>
+                      </a:r>
+                      <a:r>
+                        <a:rPr lang="en-US" sz="1200" b="1" i="0" kern="1200" dirty="0" smtClean="0">
+                          <a:solidFill>
+                            <a:schemeClr val="lt1"/>
+                          </a:solidFill>
+                          <a:effectLst/>
+                          <a:latin typeface="+mn-lt"/>
+                          <a:ea typeface="+mn-ea"/>
+                          <a:cs typeface="+mn-cs"/>
+                        </a:rPr>
+                        <a:t>,</a:t>
+                      </a:r>
+                      <a:r>
+                        <a:rPr lang="en-US" sz="1200" b="1" i="0" kern="1200" baseline="0" dirty="0" smtClean="0">
+                          <a:solidFill>
+                            <a:schemeClr val="lt1"/>
+                          </a:solidFill>
+                          <a:effectLst/>
+                          <a:latin typeface="+mn-lt"/>
+                          <a:ea typeface="+mn-ea"/>
+                          <a:cs typeface="+mn-cs"/>
+                        </a:rPr>
+                        <a:t> </a:t>
+                      </a:r>
+                      <a:r>
+                        <a:rPr lang="en-US" sz="1200" b="0" i="0" kern="1200" dirty="0" smtClean="0">
+                          <a:solidFill>
+                            <a:schemeClr val="lt1"/>
+                          </a:solidFill>
+                          <a:effectLst/>
+                          <a:latin typeface="+mn-lt"/>
+                          <a:ea typeface="+mn-ea"/>
+                          <a:cs typeface="+mn-cs"/>
+                        </a:rPr>
+                        <a:t>MPEG-4 pt10 AVC/H.264 HP@L4</a:t>
+                      </a:r>
+                      <a:r>
+                        <a:rPr lang="en-US" sz="1200" dirty="0" smtClean="0"/>
+                        <a:t/>
+                      </a:r>
+                      <a:br>
+                        <a:rPr lang="en-US" sz="1200" dirty="0" smtClean="0"/>
+                      </a:br>
+                      <a:r>
+                        <a:rPr lang="en-US" sz="1200" b="0" i="0" kern="1200" dirty="0" smtClean="0">
+                          <a:solidFill>
+                            <a:schemeClr val="lt1"/>
+                          </a:solidFill>
+                          <a:effectLst/>
+                          <a:latin typeface="+mn-lt"/>
+                          <a:ea typeface="+mn-ea"/>
+                          <a:cs typeface="+mn-cs"/>
+                        </a:rPr>
+                        <a:t>Multi-plane dual HD (1080p) decode and display of video (MPEG 2, VCI</a:t>
+                      </a:r>
+                      <a:r>
+                        <a:rPr lang="en-US" sz="1200" b="1" i="0" kern="1200" baseline="0" dirty="0" smtClean="0">
+                          <a:solidFill>
+                            <a:schemeClr val="lt1"/>
+                          </a:solidFill>
+                          <a:effectLst/>
+                          <a:latin typeface="+mn-lt"/>
+                          <a:ea typeface="+mn-ea"/>
+                          <a:cs typeface="+mn-cs"/>
+                        </a:rPr>
+                        <a:t> </a:t>
+                      </a:r>
+                      <a:r>
+                        <a:rPr lang="en-US" sz="1200" b="0" i="0" kern="1200" dirty="0" smtClean="0">
+                          <a:solidFill>
+                            <a:schemeClr val="lt1"/>
+                          </a:solidFill>
+                          <a:effectLst/>
+                          <a:latin typeface="+mn-lt"/>
+                          <a:ea typeface="+mn-ea"/>
+                          <a:cs typeface="+mn-cs"/>
+                        </a:rPr>
+                        <a:t>and H264) and other low bit rate codec support</a:t>
+                      </a:r>
+                      <a:r>
+                        <a:rPr lang="en-US" sz="1200" dirty="0" smtClean="0"/>
+                        <a:t/>
+                      </a:r>
+                      <a:br>
+                        <a:rPr lang="en-US" sz="1200" dirty="0" smtClean="0"/>
+                      </a:br>
+                      <a:r>
+                        <a:rPr lang="en-US" sz="1200" dirty="0" smtClean="0"/>
+                        <a:t/>
+                      </a:r>
+                      <a:br>
+                        <a:rPr lang="en-US" sz="1200" dirty="0" smtClean="0"/>
+                      </a:br>
+                      <a:r>
+                        <a:rPr lang="en-US" sz="1200" b="1" i="0" kern="1200" dirty="0" smtClean="0">
+                          <a:solidFill>
+                            <a:schemeClr val="lt1"/>
+                          </a:solidFill>
+                          <a:effectLst/>
+                          <a:latin typeface="+mn-lt"/>
+                          <a:ea typeface="+mn-ea"/>
+                          <a:cs typeface="+mn-cs"/>
+                        </a:rPr>
+                        <a:t>CPU:</a:t>
+                      </a:r>
+                      <a:r>
+                        <a:rPr lang="en-US" sz="1200" b="1" dirty="0" smtClean="0"/>
+                        <a:t/>
+                      </a:r>
+                      <a:br>
+                        <a:rPr lang="en-US" sz="1200" b="1" dirty="0" smtClean="0"/>
+                      </a:br>
+                      <a:r>
+                        <a:rPr lang="en-US" sz="1200" b="0" i="0" kern="1200" dirty="0" smtClean="0">
+                          <a:solidFill>
+                            <a:schemeClr val="lt1"/>
+                          </a:solidFill>
+                          <a:effectLst/>
+                          <a:latin typeface="+mn-lt"/>
+                          <a:ea typeface="+mn-ea"/>
+                          <a:cs typeface="+mn-cs"/>
+                        </a:rPr>
+                        <a:t>Intel® Dual Core Atom™ based with hyper threading</a:t>
+                      </a:r>
+                      <a:r>
+                        <a:rPr lang="en-US" sz="1200" dirty="0" smtClean="0"/>
+                        <a:t/>
+                      </a:r>
+                      <a:br>
+                        <a:rPr lang="en-US" sz="1200" dirty="0" smtClean="0"/>
+                      </a:br>
+                      <a:r>
+                        <a:rPr lang="en-US" sz="1200" dirty="0" smtClean="0"/>
+                        <a:t/>
+                      </a:r>
+                      <a:br>
+                        <a:rPr lang="en-US" sz="1200" dirty="0" smtClean="0"/>
+                      </a:br>
+                      <a:r>
+                        <a:rPr lang="en-US" sz="1200" b="1" i="0" kern="1200" dirty="0" smtClean="0">
+                          <a:solidFill>
+                            <a:schemeClr val="lt1"/>
+                          </a:solidFill>
+                          <a:effectLst/>
+                          <a:latin typeface="+mn-lt"/>
+                          <a:ea typeface="+mn-ea"/>
+                          <a:cs typeface="+mn-cs"/>
+                        </a:rPr>
+                        <a:t>Graphics:</a:t>
+                      </a:r>
+                      <a:r>
+                        <a:rPr lang="en-US" sz="1200" b="1" dirty="0" smtClean="0"/>
+                        <a:t/>
+                      </a:r>
+                      <a:br>
+                        <a:rPr lang="en-US" sz="1200" b="1" dirty="0" smtClean="0"/>
+                      </a:br>
+                      <a:r>
+                        <a:rPr lang="en-US" sz="1200" b="0" i="0" kern="1200" dirty="0" smtClean="0">
+                          <a:solidFill>
+                            <a:schemeClr val="lt1"/>
+                          </a:solidFill>
+                          <a:effectLst/>
+                          <a:latin typeface="+mn-lt"/>
+                          <a:ea typeface="+mn-ea"/>
+                          <a:cs typeface="+mn-cs"/>
+                        </a:rPr>
+                        <a:t>Advanced graphics core with OpenGL2.0 and 3D </a:t>
+                      </a:r>
+                      <a:r>
+                        <a:rPr lang="en-US" sz="1200" b="0" i="0" kern="1200" dirty="0" err="1" smtClean="0">
+                          <a:solidFill>
+                            <a:schemeClr val="lt1"/>
+                          </a:solidFill>
+                          <a:effectLst/>
+                          <a:latin typeface="+mn-lt"/>
+                          <a:ea typeface="+mn-ea"/>
+                          <a:cs typeface="+mn-cs"/>
+                        </a:rPr>
+                        <a:t>shader</a:t>
+                      </a:r>
+                      <a:r>
+                        <a:rPr lang="en-US" sz="1200" b="0" i="0" kern="1200" dirty="0" smtClean="0">
+                          <a:solidFill>
+                            <a:schemeClr val="lt1"/>
+                          </a:solidFill>
+                          <a:effectLst/>
+                          <a:latin typeface="+mn-lt"/>
+                          <a:ea typeface="+mn-ea"/>
+                          <a:cs typeface="+mn-cs"/>
+                        </a:rPr>
+                        <a:t> support</a:t>
+                      </a:r>
+                      <a:r>
+                        <a:rPr lang="en-US" sz="1200" dirty="0" smtClean="0"/>
+                        <a:t/>
+                      </a:r>
+                      <a:br>
+                        <a:rPr lang="en-US" sz="1200" dirty="0" smtClean="0"/>
+                      </a:br>
+                      <a:endParaRPr lang="en-US" sz="1200" dirty="0"/>
+                    </a:p>
+                  </a:txBody>
+                  <a:tcPr/>
+                </a:tc>
+                <a:tc>
+                  <a:txBody>
+                    <a:bodyPr/>
+                    <a:lstStyle/>
+                    <a:p>
+                      <a:r>
+                        <a:rPr lang="en-US" sz="1200" b="1" i="0" kern="1200" dirty="0" smtClean="0">
+                          <a:solidFill>
+                            <a:schemeClr val="lt1"/>
+                          </a:solidFill>
+                          <a:effectLst/>
+                          <a:latin typeface="+mn-lt"/>
+                          <a:ea typeface="+mn-ea"/>
+                          <a:cs typeface="+mn-cs"/>
+                        </a:rPr>
+                        <a:t>Amino A140</a:t>
+                      </a:r>
+                      <a:r>
+                        <a:rPr lang="en-US" sz="1200" dirty="0" smtClean="0"/>
+                        <a:t/>
+                      </a:r>
+                      <a:br>
+                        <a:rPr lang="en-US" sz="1200" dirty="0" smtClean="0"/>
+                      </a:br>
+                      <a:endParaRPr lang="en-US" sz="1200" dirty="0" smtClean="0"/>
+                    </a:p>
+                    <a:p>
+                      <a:r>
+                        <a:rPr lang="en-US" sz="1200" dirty="0" smtClean="0"/>
+                        <a:t>Connectivity:</a:t>
+                      </a:r>
+                    </a:p>
+                    <a:p>
+                      <a:r>
+                        <a:rPr lang="en-US" sz="1200" b="0" i="0" kern="1200" dirty="0" smtClean="0">
+                          <a:solidFill>
+                            <a:schemeClr val="lt1"/>
+                          </a:solidFill>
+                          <a:effectLst/>
+                          <a:latin typeface="+mn-lt"/>
+                          <a:ea typeface="+mn-ea"/>
+                          <a:cs typeface="+mn-cs"/>
+                        </a:rPr>
+                        <a:t>Ethernet 10/100 </a:t>
+                      </a:r>
+                      <a:r>
+                        <a:rPr lang="en-US" sz="1200" b="0" i="0" kern="1200" dirty="0" err="1" smtClean="0">
+                          <a:solidFill>
+                            <a:schemeClr val="lt1"/>
+                          </a:solidFill>
+                          <a:effectLst/>
+                          <a:latin typeface="+mn-lt"/>
+                          <a:ea typeface="+mn-ea"/>
+                          <a:cs typeface="+mn-cs"/>
+                        </a:rPr>
+                        <a:t>BaseT</a:t>
+                      </a:r>
+                      <a:r>
+                        <a:rPr lang="en-US" sz="1200" b="0" i="0" kern="1200" dirty="0" smtClean="0">
+                          <a:solidFill>
+                            <a:schemeClr val="lt1"/>
+                          </a:solidFill>
+                          <a:effectLst/>
+                          <a:latin typeface="+mn-lt"/>
+                          <a:ea typeface="+mn-ea"/>
+                          <a:cs typeface="+mn-cs"/>
+                        </a:rPr>
+                        <a:t> via RJ-45 shielded connector</a:t>
+                      </a:r>
+                      <a:r>
+                        <a:rPr lang="en-US" sz="1200" dirty="0" smtClean="0"/>
+                        <a:t/>
+                      </a:r>
+                      <a:br>
+                        <a:rPr lang="en-US" sz="1200" dirty="0" smtClean="0"/>
+                      </a:br>
+                      <a:endParaRPr lang="en-US" sz="1200" dirty="0" smtClean="0"/>
+                    </a:p>
+                    <a:p>
+                      <a:r>
+                        <a:rPr lang="en-US" sz="1200" b="1" i="0" kern="1200" dirty="0" smtClean="0">
+                          <a:solidFill>
+                            <a:schemeClr val="lt1"/>
+                          </a:solidFill>
+                          <a:effectLst/>
+                          <a:latin typeface="+mn-lt"/>
+                          <a:ea typeface="+mn-ea"/>
+                          <a:cs typeface="+mn-cs"/>
+                        </a:rPr>
+                        <a:t>Outputs:</a:t>
+                      </a:r>
+                      <a:r>
+                        <a:rPr lang="en-US" sz="1200" dirty="0" smtClean="0"/>
+                        <a:t/>
+                      </a:r>
+                      <a:br>
+                        <a:rPr lang="en-US" sz="1200" dirty="0" smtClean="0"/>
+                      </a:br>
+                      <a:r>
+                        <a:rPr lang="en-US" sz="1200" b="0" i="0" kern="1200" dirty="0" smtClean="0">
+                          <a:solidFill>
+                            <a:schemeClr val="lt1"/>
+                          </a:solidFill>
+                          <a:effectLst/>
+                          <a:latin typeface="+mn-lt"/>
+                          <a:ea typeface="+mn-ea"/>
+                          <a:cs typeface="+mn-cs"/>
+                        </a:rPr>
+                        <a:t>HDMI 1.3a. (excl. Deep </a:t>
+                      </a:r>
+                      <a:r>
+                        <a:rPr lang="en-US" sz="1200" b="0" i="0" kern="1200" dirty="0" err="1" smtClean="0">
+                          <a:solidFill>
+                            <a:schemeClr val="lt1"/>
+                          </a:solidFill>
+                          <a:effectLst/>
+                          <a:latin typeface="+mn-lt"/>
+                          <a:ea typeface="+mn-ea"/>
+                          <a:cs typeface="+mn-cs"/>
+                        </a:rPr>
+                        <a:t>colour</a:t>
+                      </a:r>
+                      <a:r>
+                        <a:rPr lang="en-US" sz="1200" b="0" i="0" kern="1200" dirty="0" smtClean="0">
+                          <a:solidFill>
+                            <a:schemeClr val="lt1"/>
+                          </a:solidFill>
+                          <a:effectLst/>
+                          <a:latin typeface="+mn-lt"/>
+                          <a:ea typeface="+mn-ea"/>
+                          <a:cs typeface="+mn-cs"/>
+                        </a:rPr>
+                        <a:t> and DTS audio) with </a:t>
+                      </a:r>
+                      <a:r>
+                        <a:rPr lang="en-US" sz="1200" b="0" i="0" kern="1200" dirty="0" smtClean="0">
+                          <a:solidFill>
+                            <a:schemeClr val="lt1"/>
+                          </a:solidFill>
+                          <a:effectLst/>
+                          <a:latin typeface="+mn-lt"/>
+                          <a:ea typeface="+mn-ea"/>
+                          <a:cs typeface="+mn-cs"/>
+                        </a:rPr>
+                        <a:t>HDCP.S/PDIF </a:t>
+                      </a:r>
+                      <a:r>
+                        <a:rPr lang="en-US" sz="1200" b="0" i="0" kern="1200" dirty="0" smtClean="0">
+                          <a:solidFill>
+                            <a:schemeClr val="lt1"/>
+                          </a:solidFill>
+                          <a:effectLst/>
+                          <a:latin typeface="+mn-lt"/>
+                          <a:ea typeface="+mn-ea"/>
+                          <a:cs typeface="+mn-cs"/>
+                        </a:rPr>
+                        <a:t>(optical). USB2.0. 10-way Mini-DIN for </a:t>
+                      </a:r>
+                      <a:r>
+                        <a:rPr lang="en-US" sz="1200" b="0" i="0" kern="1200" dirty="0" smtClean="0">
+                          <a:solidFill>
+                            <a:schemeClr val="lt1"/>
+                          </a:solidFill>
+                          <a:effectLst/>
+                          <a:latin typeface="+mn-lt"/>
+                          <a:ea typeface="+mn-ea"/>
+                          <a:cs typeface="+mn-cs"/>
+                        </a:rPr>
+                        <a:t>Composite</a:t>
+                      </a:r>
+                      <a:r>
+                        <a:rPr lang="en-US" sz="1200" b="1" i="0" kern="1200" baseline="0" dirty="0" smtClean="0">
+                          <a:solidFill>
+                            <a:schemeClr val="lt1"/>
+                          </a:solidFill>
+                          <a:effectLst/>
+                          <a:latin typeface="+mn-lt"/>
+                          <a:ea typeface="+mn-ea"/>
+                          <a:cs typeface="+mn-cs"/>
+                        </a:rPr>
+                        <a:t> </a:t>
+                      </a:r>
+                      <a:r>
+                        <a:rPr lang="en-US" sz="1200" b="0" i="0" kern="1200" dirty="0" smtClean="0">
+                          <a:solidFill>
+                            <a:schemeClr val="lt1"/>
+                          </a:solidFill>
+                          <a:effectLst/>
+                          <a:latin typeface="+mn-lt"/>
+                          <a:ea typeface="+mn-ea"/>
+                          <a:cs typeface="+mn-cs"/>
+                        </a:rPr>
+                        <a:t>video</a:t>
+                      </a:r>
+                      <a:r>
+                        <a:rPr lang="en-US" sz="1200" b="0" i="0" kern="1200" dirty="0" smtClean="0">
+                          <a:solidFill>
+                            <a:schemeClr val="lt1"/>
+                          </a:solidFill>
+                          <a:effectLst/>
+                          <a:latin typeface="+mn-lt"/>
+                          <a:ea typeface="+mn-ea"/>
+                          <a:cs typeface="+mn-cs"/>
+                        </a:rPr>
+                        <a:t>, Component (</a:t>
+                      </a:r>
+                      <a:r>
+                        <a:rPr lang="en-US" sz="1200" b="0" i="0" kern="1200" dirty="0" err="1" smtClean="0">
+                          <a:solidFill>
+                            <a:schemeClr val="lt1"/>
+                          </a:solidFill>
+                          <a:effectLst/>
+                          <a:latin typeface="+mn-lt"/>
+                          <a:ea typeface="+mn-ea"/>
+                          <a:cs typeface="+mn-cs"/>
+                        </a:rPr>
+                        <a:t>YPrPb</a:t>
+                      </a:r>
+                      <a:r>
+                        <a:rPr lang="en-US" sz="1200" b="0" i="0" kern="1200" dirty="0" smtClean="0">
+                          <a:solidFill>
+                            <a:schemeClr val="lt1"/>
+                          </a:solidFill>
+                          <a:effectLst/>
+                          <a:latin typeface="+mn-lt"/>
+                          <a:ea typeface="+mn-ea"/>
+                          <a:cs typeface="+mn-cs"/>
+                        </a:rPr>
+                        <a:t>),RGB, S-Video and</a:t>
+                      </a:r>
+                      <a:r>
+                        <a:rPr lang="en-US" sz="1200" b="1" i="0" kern="1200" baseline="0" dirty="0" smtClean="0">
+                          <a:solidFill>
+                            <a:schemeClr val="lt1"/>
+                          </a:solidFill>
+                          <a:effectLst/>
+                          <a:latin typeface="+mn-lt"/>
+                          <a:ea typeface="+mn-ea"/>
+                          <a:cs typeface="+mn-cs"/>
+                        </a:rPr>
+                        <a:t> </a:t>
+                      </a:r>
+                      <a:r>
+                        <a:rPr lang="en-US" sz="1200" b="0" i="0" kern="1200" dirty="0" smtClean="0">
+                          <a:solidFill>
+                            <a:schemeClr val="lt1"/>
+                          </a:solidFill>
+                          <a:effectLst/>
+                          <a:latin typeface="+mn-lt"/>
+                          <a:ea typeface="+mn-ea"/>
+                          <a:cs typeface="+mn-cs"/>
+                        </a:rPr>
+                        <a:t>analogue audio. RF Mod and loop through.</a:t>
+                      </a:r>
+                      <a:r>
+                        <a:rPr lang="en-US" sz="1200" dirty="0" smtClean="0"/>
+                        <a:t/>
+                      </a:r>
+                      <a:br>
+                        <a:rPr lang="en-US" sz="1200" dirty="0" smtClean="0"/>
+                      </a:br>
+                      <a:endParaRPr lang="en-US" sz="1200" dirty="0" smtClean="0"/>
+                    </a:p>
+                    <a:p>
+                      <a:r>
+                        <a:rPr lang="en-US" sz="1200" b="1" i="0" kern="1200" dirty="0" smtClean="0">
+                          <a:solidFill>
+                            <a:schemeClr val="lt1"/>
+                          </a:solidFill>
+                          <a:effectLst/>
+                          <a:latin typeface="+mn-lt"/>
+                          <a:ea typeface="+mn-ea"/>
+                          <a:cs typeface="+mn-cs"/>
+                        </a:rPr>
+                        <a:t>Codecs:</a:t>
+                      </a:r>
+                      <a:r>
+                        <a:rPr lang="en-US" sz="1200" dirty="0" smtClean="0"/>
+                        <a:t/>
+                      </a:r>
+                      <a:br>
+                        <a:rPr lang="en-US" sz="1200" dirty="0" smtClean="0"/>
+                      </a:br>
+                      <a:r>
+                        <a:rPr lang="en-US" sz="1200" b="0" i="0" kern="1200" dirty="0" smtClean="0">
+                          <a:solidFill>
+                            <a:schemeClr val="lt1"/>
+                          </a:solidFill>
+                          <a:effectLst/>
+                          <a:latin typeface="+mn-lt"/>
+                          <a:ea typeface="+mn-ea"/>
+                          <a:cs typeface="+mn-cs"/>
+                        </a:rPr>
+                        <a:t>MPEG-2 MP@HL. MPEG-4 pt10 AVC/H.264 HP@L4</a:t>
+                      </a:r>
+                      <a:r>
+                        <a:rPr lang="en-US" sz="1200" dirty="0" smtClean="0"/>
+                        <a:t/>
+                      </a:r>
+                      <a:br>
+                        <a:rPr lang="en-US" sz="1200" dirty="0" smtClean="0"/>
+                      </a:br>
+                      <a:endParaRPr lang="en-US" sz="1200" dirty="0" smtClean="0"/>
+                    </a:p>
+                    <a:p>
+                      <a:r>
+                        <a:rPr lang="en-US" sz="1200" b="1" i="0" kern="1200" dirty="0" smtClean="0">
+                          <a:solidFill>
+                            <a:schemeClr val="lt1"/>
+                          </a:solidFill>
+                          <a:effectLst/>
+                          <a:latin typeface="+mn-lt"/>
+                          <a:ea typeface="+mn-ea"/>
+                          <a:cs typeface="+mn-cs"/>
+                        </a:rPr>
+                        <a:t>GRAPHICS RESOLUTIONS</a:t>
+                      </a:r>
+                      <a:r>
+                        <a:rPr lang="en-US" sz="1200" dirty="0" smtClean="0"/>
+                        <a:t/>
+                      </a:r>
+                      <a:br>
+                        <a:rPr lang="en-US" sz="1200" dirty="0" smtClean="0"/>
+                      </a:br>
+                      <a:r>
+                        <a:rPr lang="en-US" sz="1200" b="0" i="0" kern="1200" dirty="0" smtClean="0">
+                          <a:solidFill>
+                            <a:schemeClr val="lt1"/>
+                          </a:solidFill>
+                          <a:effectLst/>
+                          <a:latin typeface="+mn-lt"/>
+                          <a:ea typeface="+mn-ea"/>
+                          <a:cs typeface="+mn-cs"/>
+                        </a:rPr>
+                        <a:t>HD graphics up to 1280x720</a:t>
+                      </a:r>
+                      <a:r>
+                        <a:rPr lang="en-US" sz="1200" dirty="0" smtClean="0"/>
+                        <a:t/>
+                      </a:r>
+                      <a:br>
+                        <a:rPr lang="en-US" sz="1200" dirty="0" smtClean="0"/>
+                      </a:br>
+                      <a:r>
+                        <a:rPr lang="en-US" sz="1200" dirty="0" smtClean="0"/>
+                        <a:t/>
+                      </a:r>
+                      <a:br>
+                        <a:rPr lang="en-US" sz="1200" dirty="0" smtClean="0"/>
+                      </a:br>
+                      <a:r>
+                        <a:rPr lang="en-US" sz="1200" b="1" i="0" kern="1200" dirty="0" smtClean="0">
+                          <a:solidFill>
+                            <a:schemeClr val="lt1"/>
+                          </a:solidFill>
+                          <a:effectLst/>
+                          <a:latin typeface="+mn-lt"/>
+                          <a:ea typeface="+mn-ea"/>
+                          <a:cs typeface="+mn-cs"/>
+                        </a:rPr>
+                        <a:t>Memory:</a:t>
+                      </a:r>
+                      <a:r>
+                        <a:rPr lang="en-US" sz="1200" dirty="0" smtClean="0"/>
+                        <a:t/>
+                      </a:r>
+                      <a:br>
+                        <a:rPr lang="en-US" sz="1200" dirty="0" smtClean="0"/>
+                      </a:br>
+                      <a:r>
+                        <a:rPr lang="en-US" sz="1200" b="0" i="0" kern="1200" dirty="0" smtClean="0">
+                          <a:solidFill>
+                            <a:schemeClr val="lt1"/>
+                          </a:solidFill>
+                          <a:effectLst/>
+                          <a:latin typeface="+mn-lt"/>
+                          <a:ea typeface="+mn-ea"/>
+                          <a:cs typeface="+mn-cs"/>
+                        </a:rPr>
+                        <a:t>128MB Flash, 256MB RAM</a:t>
+                      </a:r>
+                    </a:p>
+                    <a:p>
+                      <a:endParaRPr lang="en-US" sz="1200" b="0" i="0" kern="1200" dirty="0" smtClean="0">
+                        <a:solidFill>
+                          <a:schemeClr val="lt1"/>
+                        </a:solidFill>
+                        <a:effectLst/>
+                        <a:latin typeface="+mn-lt"/>
+                        <a:ea typeface="+mn-ea"/>
+                        <a:cs typeface="+mn-cs"/>
+                      </a:endParaRPr>
+                    </a:p>
+                    <a:p>
+                      <a:r>
+                        <a:rPr lang="en-US" sz="1200" b="1" i="0" kern="1200" dirty="0" smtClean="0">
+                          <a:solidFill>
+                            <a:schemeClr val="lt1"/>
+                          </a:solidFill>
+                          <a:effectLst/>
+                          <a:latin typeface="+mn-lt"/>
+                          <a:ea typeface="+mn-ea"/>
+                          <a:cs typeface="+mn-cs"/>
+                        </a:rPr>
+                        <a:t>CPU:</a:t>
+                      </a:r>
+                    </a:p>
+                    <a:p>
+                      <a:r>
+                        <a:rPr lang="en-US" sz="1200" b="0" i="0" kern="1200" dirty="0" smtClean="0">
+                          <a:solidFill>
+                            <a:schemeClr val="lt1"/>
+                          </a:solidFill>
+                          <a:effectLst/>
+                          <a:latin typeface="+mn-lt"/>
+                          <a:ea typeface="+mn-ea"/>
+                          <a:cs typeface="+mn-cs"/>
+                        </a:rPr>
+                        <a:t>800</a:t>
+                      </a:r>
+                      <a:r>
+                        <a:rPr lang="en-US" sz="1200" b="0" i="0" kern="1200" baseline="0" dirty="0" smtClean="0">
+                          <a:solidFill>
+                            <a:schemeClr val="lt1"/>
+                          </a:solidFill>
+                          <a:effectLst/>
+                          <a:latin typeface="+mn-lt"/>
+                          <a:ea typeface="+mn-ea"/>
+                          <a:cs typeface="+mn-cs"/>
+                        </a:rPr>
+                        <a:t> </a:t>
+                      </a:r>
+                      <a:r>
+                        <a:rPr lang="en-US" sz="1200" b="0" i="0" kern="1200" baseline="0" dirty="0" err="1" smtClean="0">
+                          <a:solidFill>
+                            <a:schemeClr val="lt1"/>
+                          </a:solidFill>
+                          <a:effectLst/>
+                          <a:latin typeface="+mn-lt"/>
+                          <a:ea typeface="+mn-ea"/>
+                          <a:cs typeface="+mn-cs"/>
+                        </a:rPr>
+                        <a:t>Mhz</a:t>
+                      </a:r>
+                      <a:r>
+                        <a:rPr lang="en-US" sz="1200" b="0" i="0" kern="1200" baseline="0" dirty="0" smtClean="0">
+                          <a:solidFill>
+                            <a:schemeClr val="lt1"/>
+                          </a:solidFill>
+                          <a:effectLst/>
+                          <a:latin typeface="+mn-lt"/>
+                          <a:ea typeface="+mn-ea"/>
+                          <a:cs typeface="+mn-cs"/>
+                        </a:rPr>
+                        <a:t> Processor</a:t>
+                      </a:r>
+                      <a:endParaRPr lang="en-US" sz="1200" dirty="0"/>
+                    </a:p>
+                  </a:txBody>
+                  <a:tcPr/>
+                </a:tc>
+              </a:tr>
+            </a:tbl>
+          </a:graphicData>
+        </a:graphic>
+      </p:graphicFrame>
+      <p:sp>
+        <p:nvSpPr>
+          <p:cNvPr id="5" name="Rectangle 4"/>
+          <p:cNvSpPr/>
           <p:nvPr/>
         </p:nvSpPr>
         <p:spPr>
           <a:xfrm>
-            <a:off x="819150" y="4572000"/>
-            <a:ext cx="3448050" cy="1754326"/>
-          </a:xfrm>
-          <a:prstGeom prst="rect">
-            <a:avLst/>
-          </a:prstGeom>
-          <a:noFill/>
-        </p:spPr>
-        <p:txBody>
-          <a:bodyPr wrap="square" rtlCol="0">
-            <a:spAutoFit/>
-          </a:bodyPr>
-          <a:lstStyle/>
-          <a:p>
-            <a:r>
-              <a:rPr lang="en-US" u="sng" dirty="0" err="1" smtClean="0"/>
-              <a:t>vSTB</a:t>
-            </a:r>
-            <a:r>
-              <a:rPr lang="en-US" u="sng" dirty="0" smtClean="0"/>
-              <a:t> Tester</a:t>
-            </a:r>
-          </a:p>
-          <a:p>
-            <a:pPr marL="285750" indent="-285750">
-              <a:buFont typeface="Arial" pitchFamily="34" charset="0"/>
-              <a:buChar char="•"/>
-            </a:pPr>
-            <a:r>
-              <a:rPr lang="en-US" dirty="0" smtClean="0"/>
-              <a:t>Provides </a:t>
-            </a:r>
-            <a:r>
-              <a:rPr lang="en-US" dirty="0" err="1" smtClean="0"/>
-              <a:t>vAPMAX</a:t>
-            </a:r>
-            <a:r>
-              <a:rPr lang="en-US" dirty="0" smtClean="0"/>
-              <a:t> intuitive interface to test environment</a:t>
-            </a:r>
-          </a:p>
-          <a:p>
-            <a:pPr marL="285750" indent="-285750">
-              <a:buFont typeface="Arial" pitchFamily="34" charset="0"/>
-              <a:buChar char="•"/>
-            </a:pPr>
-            <a:r>
-              <a:rPr lang="en-US" dirty="0" smtClean="0"/>
-              <a:t>Provides Game Server a flexible tool to view deployed objects</a:t>
-            </a:r>
-          </a:p>
-          <a:p>
-            <a:pPr marL="285750" indent="-285750">
-              <a:buFont typeface="Arial" pitchFamily="34" charset="0"/>
-              <a:buChar char="•"/>
-            </a:pPr>
-            <a:endParaRPr lang="en-US" dirty="0"/>
-          </a:p>
-        </p:txBody>
-      </p:sp>
-      <p:sp>
-        <p:nvSpPr>
-          <p:cNvPr id="5" name="TextBox 4"/>
-          <p:cNvSpPr txBox="1"/>
-          <p:nvPr/>
-        </p:nvSpPr>
-        <p:spPr>
-          <a:xfrm>
-            <a:off x="4876800" y="4572000"/>
-            <a:ext cx="4114800" cy="1754326"/>
-          </a:xfrm>
-          <a:prstGeom prst="rect">
-            <a:avLst/>
-          </a:prstGeom>
-          <a:noFill/>
-        </p:spPr>
-        <p:txBody>
-          <a:bodyPr wrap="square" rtlCol="0">
-            <a:spAutoFit/>
-          </a:bodyPr>
-          <a:lstStyle/>
-          <a:p>
-            <a:r>
-              <a:rPr lang="en-US" u="sng" dirty="0" err="1" smtClean="0"/>
-              <a:t>vSTB</a:t>
-            </a:r>
-            <a:r>
-              <a:rPr lang="en-US" u="sng" dirty="0" smtClean="0"/>
-              <a:t> Multiplayer Environment</a:t>
-            </a:r>
-          </a:p>
-          <a:p>
-            <a:pPr marL="285750" indent="-285750">
-              <a:buFont typeface="Arial" pitchFamily="34" charset="0"/>
-              <a:buChar char="•"/>
-            </a:pPr>
-            <a:r>
-              <a:rPr lang="en-US" dirty="0" smtClean="0"/>
-              <a:t>Reduces current load on STB</a:t>
-            </a:r>
-          </a:p>
-          <a:p>
-            <a:pPr marL="285750" indent="-285750">
-              <a:buFont typeface="Arial" pitchFamily="34" charset="0"/>
-              <a:buChar char="•"/>
-            </a:pPr>
-            <a:r>
-              <a:rPr lang="en-US" dirty="0" smtClean="0"/>
-              <a:t>Framework provides foundation to add future features to meet demand of end user and technology</a:t>
-            </a:r>
-          </a:p>
-          <a:p>
-            <a:pPr marL="285750" indent="-285750">
-              <a:buFont typeface="Arial" pitchFamily="34" charset="0"/>
-              <a:buChar char="•"/>
-            </a:pPr>
-            <a:endParaRPr lang="en-US" dirty="0"/>
-          </a:p>
-        </p:txBody>
-      </p:sp>
-      <p:pic>
-        <p:nvPicPr>
-          <p:cNvPr id="2052" name="Picture 4"/>
-          <p:cNvPicPr>
-            <a:picLocks noChangeAspect="1" noChangeArrowheads="1"/>
-          </p:cNvPicPr>
-          <p:nvPr/>
-        </p:nvPicPr>
-        <p:blipFill>
-          <a:blip r:embed="rId2">
-            <a:extLst>
-              <a:ext uri="{28A0092B-C50C-407E-A947-70E740481C1C}">
-                <a14:useLocalDpi xmlns:a14="http://schemas.microsoft.com/office/drawing/2010/main" val="0"/>
-              </a:ext>
-            </a:extLst>
-          </a:blip>
-          <a:srcRect/>
-          <a:stretch>
-            <a:fillRect/>
-          </a:stretch>
-        </p:blipFill>
-        <p:spPr bwMode="auto">
-          <a:xfrm>
-            <a:off x="671513" y="1190625"/>
-            <a:ext cx="7800975" cy="3228975"/>
+            <a:off x="438150" y="3429000"/>
+            <a:ext cx="3962400" cy="3429000"/>
           </a:xfrm>
           <a:prstGeom prst="rect">
             <a:avLst/>
           </a:prstGeom>
           <a:noFill/>
           <a:ln>
-            <a:noFill/>
+            <a:solidFill>
+              <a:srgbClr val="FF0000"/>
+            </a:solidFill>
           </a:ln>
-          <a:effectLst/>
-          <a:extLst>
-            <a:ext uri="{909E8E84-426E-40DD-AFC4-6F175D3DCCD1}">
-              <a14:hiddenFill xmlns:a14="http://schemas.microsoft.com/office/drawing/2010/main">
-                <a:solidFill>
-                  <a:schemeClr val="accent1"/>
-                </a:solidFill>
-              </a14:hiddenFill>
-            </a:ext>
-            <a:ext uri="{91240B29-F687-4F45-9708-019B960494DF}">
-              <a14:hiddenLine xmlns:a14="http://schemas.microsoft.com/office/drawing/2010/main" w="9525">
-                <a:solidFill>
-                  <a:schemeClr val="tx1"/>
-                </a:solidFill>
-                <a:miter lim="800000"/>
-                <a:headEnd/>
-                <a:tailEnd/>
-              </a14:hiddenLine>
-            </a:ext>
-            <a:ext uri="{AF507438-7753-43E0-B8FC-AC1667EBCBE1}">
-              <a14:hiddenEffects xmlns:a14="http://schemas.microsoft.com/office/drawing/2010/main">
-                <a:effectLst>
-                  <a:outerShdw dist="35921" dir="2700000" algn="ctr" rotWithShape="0">
-                    <a:schemeClr val="bg2"/>
-                  </a:outerShdw>
-                </a:effectLst>
-              </a14:hiddenEffects>
-            </a:ext>
-          </a:extLst>
         </p:spPr>
-      </p:pic>
+        <p:style>
+          <a:lnRef idx="2">
+            <a:schemeClr val="accent1">
+              <a:shade val="50000"/>
+            </a:schemeClr>
+          </a:lnRef>
+          <a:fillRef idx="1">
+            <a:schemeClr val="accent1"/>
+          </a:fillRef>
+          <a:effectRef idx="0">
+            <a:schemeClr val="accent1"/>
+          </a:effectRef>
+          <a:fontRef idx="minor">
+            <a:schemeClr val="lt1"/>
+          </a:fontRef>
+        </p:style>
+        <p:txBody>
+          <a:bodyPr rtlCol="0" anchor="ctr"/>
+          <a:lstStyle/>
+          <a:p>
+            <a:pPr algn="ctr"/>
+            <a:endParaRPr lang="en-US"/>
+          </a:p>
+        </p:txBody>
+      </p:sp>
+      <p:sp>
+        <p:nvSpPr>
+          <p:cNvPr id="6" name="Rectangle 5"/>
+          <p:cNvSpPr/>
+          <p:nvPr/>
+        </p:nvSpPr>
+        <p:spPr>
+          <a:xfrm>
+            <a:off x="4572000" y="3810000"/>
+            <a:ext cx="3810000" cy="2362200"/>
+          </a:xfrm>
+          <a:prstGeom prst="rect">
+            <a:avLst/>
+          </a:prstGeom>
+          <a:noFill/>
+          <a:ln>
+            <a:solidFill>
+              <a:srgbClr val="FF0000"/>
+            </a:solidFill>
+          </a:ln>
+        </p:spPr>
+        <p:style>
+          <a:lnRef idx="2">
+            <a:schemeClr val="accent1">
+              <a:shade val="50000"/>
+            </a:schemeClr>
+          </a:lnRef>
+          <a:fillRef idx="1">
+            <a:schemeClr val="accent1"/>
+          </a:fillRef>
+          <a:effectRef idx="0">
+            <a:schemeClr val="accent1"/>
+          </a:effectRef>
+          <a:fontRef idx="minor">
+            <a:schemeClr val="lt1"/>
+          </a:fontRef>
+        </p:style>
+        <p:txBody>
+          <a:bodyPr rtlCol="0" anchor="ctr"/>
+          <a:lstStyle/>
+          <a:p>
+            <a:pPr algn="ctr"/>
+            <a:endParaRPr lang="en-US"/>
+          </a:p>
+        </p:txBody>
+      </p:sp>
     </p:spTree>
     <p:extLst>
       <p:ext uri="{BB962C8B-B14F-4D97-AF65-F5344CB8AC3E}">
-        <p14:creationId xmlns:p14="http://schemas.microsoft.com/office/powerpoint/2010/main" val="1660071136"/>
+        <p14:creationId xmlns:p14="http://schemas.microsoft.com/office/powerpoint/2010/main" val="3144095686"/>
       </p:ext>
     </p:extLst>
   </p:cSld>
@@ -7301,6 +10703,211 @@
       </p:grpSpPr>
       <p:sp>
         <p:nvSpPr>
+          <p:cNvPr id="3" name="Content Placeholder 2"/>
+          <p:cNvSpPr>
+            <a:spLocks noGrp="1"/>
+          </p:cNvSpPr>
+          <p:nvPr>
+            <p:ph idx="1"/>
+          </p:nvPr>
+        </p:nvSpPr>
+        <p:spPr/>
+        <p:txBody>
+          <a:bodyPr>
+            <a:normAutofit fontScale="92500" lnSpcReduction="20000"/>
+          </a:bodyPr>
+          <a:lstStyle/>
+          <a:p>
+            <a:r>
+              <a:rPr lang="en-US" dirty="0" err="1" smtClean="0"/>
+              <a:t>vSTB</a:t>
+            </a:r>
+            <a:r>
+              <a:rPr lang="en-US" dirty="0" smtClean="0"/>
+              <a:t> must be fully Unit Tested</a:t>
+            </a:r>
+          </a:p>
+          <a:p>
+            <a:r>
+              <a:rPr lang="en-US" dirty="0"/>
+              <a:t>Unit Testing: </a:t>
+            </a:r>
+            <a:r>
+              <a:rPr lang="en-US" dirty="0" err="1" smtClean="0"/>
+              <a:t>QtTestLib</a:t>
+            </a:r>
+            <a:endParaRPr lang="en-US" dirty="0" smtClean="0"/>
+          </a:p>
+          <a:p>
+            <a:pPr lvl="1"/>
+            <a:r>
+              <a:rPr lang="en-US" dirty="0" smtClean="0"/>
+              <a:t>Lightweight </a:t>
+            </a:r>
+            <a:r>
+              <a:rPr lang="en-US" dirty="0"/>
+              <a:t>library, around 6000 lines of code and 60 exported </a:t>
+            </a:r>
+            <a:r>
+              <a:rPr lang="en-US" dirty="0" smtClean="0"/>
+              <a:t>symbols.</a:t>
+            </a:r>
+          </a:p>
+          <a:p>
+            <a:pPr lvl="1"/>
+            <a:r>
+              <a:rPr lang="en-US" dirty="0" smtClean="0"/>
+              <a:t>Data-driven </a:t>
+            </a:r>
+            <a:r>
+              <a:rPr lang="en-US" dirty="0"/>
+              <a:t>unit testing and GUI </a:t>
+            </a:r>
+            <a:r>
+              <a:rPr lang="en-US" dirty="0" smtClean="0"/>
+              <a:t>testing.</a:t>
+            </a:r>
+          </a:p>
+          <a:p>
+            <a:pPr lvl="1"/>
+            <a:r>
+              <a:rPr lang="en-US" dirty="0" smtClean="0"/>
+              <a:t>IDE </a:t>
+            </a:r>
+            <a:r>
+              <a:rPr lang="en-US" dirty="0"/>
+              <a:t>Integration for Visual Studio and </a:t>
+            </a:r>
+            <a:r>
+              <a:rPr lang="en-US" dirty="0" err="1" smtClean="0"/>
+              <a:t>KDevelop</a:t>
+            </a:r>
+            <a:r>
+              <a:rPr lang="en-US" dirty="0" smtClean="0"/>
+              <a:t>.</a:t>
+            </a:r>
+          </a:p>
+          <a:p>
+            <a:pPr lvl="1"/>
+            <a:r>
+              <a:rPr lang="en-US" dirty="0" smtClean="0"/>
+              <a:t>Thread-safe </a:t>
+            </a:r>
+            <a:r>
+              <a:rPr lang="en-US" dirty="0"/>
+              <a:t>error </a:t>
+            </a:r>
+            <a:r>
+              <a:rPr lang="en-US" dirty="0" smtClean="0"/>
+              <a:t>reporting.</a:t>
+            </a:r>
+          </a:p>
+          <a:p>
+            <a:pPr lvl="1"/>
+            <a:r>
+              <a:rPr lang="en-US" dirty="0" smtClean="0"/>
+              <a:t>Self-contained</a:t>
+            </a:r>
+            <a:r>
+              <a:rPr lang="en-US" dirty="0"/>
+              <a:t>, requires only </a:t>
+            </a:r>
+            <a:r>
+              <a:rPr lang="en-US" dirty="0" err="1"/>
+              <a:t>Qt</a:t>
+            </a:r>
+            <a:r>
+              <a:rPr lang="en-US" dirty="0"/>
+              <a:t> Core for non-</a:t>
+            </a:r>
+            <a:r>
+              <a:rPr lang="en-US" dirty="0" err="1"/>
+              <a:t>gui</a:t>
+            </a:r>
+            <a:r>
+              <a:rPr lang="en-US" dirty="0"/>
+              <a:t> </a:t>
+            </a:r>
+            <a:r>
+              <a:rPr lang="en-US" dirty="0" smtClean="0"/>
+              <a:t>testing.</a:t>
+            </a:r>
+          </a:p>
+          <a:p>
+            <a:pPr lvl="1"/>
+            <a:r>
+              <a:rPr lang="en-US" dirty="0" smtClean="0"/>
+              <a:t>Rapid </a:t>
+            </a:r>
+            <a:r>
+              <a:rPr lang="en-US" dirty="0"/>
+              <a:t>testing, no special runners </a:t>
+            </a:r>
+            <a:r>
+              <a:rPr lang="en-US" dirty="0" smtClean="0"/>
+              <a:t>required.</a:t>
+            </a:r>
+          </a:p>
+          <a:p>
+            <a:pPr lvl="1"/>
+            <a:r>
+              <a:rPr lang="en-US" dirty="0" smtClean="0"/>
+              <a:t>Rapid </a:t>
+            </a:r>
+            <a:r>
+              <a:rPr lang="en-US" dirty="0"/>
+              <a:t>test creation, no special utilities or </a:t>
+            </a:r>
+            <a:r>
+              <a:rPr lang="en-US" dirty="0" err="1"/>
+              <a:t>testcase</a:t>
+            </a:r>
+            <a:r>
+              <a:rPr lang="en-US" dirty="0"/>
+              <a:t>-registration </a:t>
+            </a:r>
+            <a:r>
+              <a:rPr lang="en-US" dirty="0" smtClean="0"/>
+              <a:t>required.</a:t>
+            </a:r>
+          </a:p>
+          <a:p>
+            <a:pPr lvl="1"/>
+            <a:r>
+              <a:rPr lang="en-US" dirty="0" smtClean="0"/>
+              <a:t>Easily </a:t>
+            </a:r>
+            <a:r>
+              <a:rPr lang="en-US" dirty="0"/>
+              <a:t>extendable test logging, outputs plain text or </a:t>
+            </a:r>
+            <a:r>
+              <a:rPr lang="en-US" dirty="0" smtClean="0"/>
+              <a:t>xml.</a:t>
+            </a:r>
+          </a:p>
+          <a:p>
+            <a:r>
+              <a:rPr lang="en-US" dirty="0" err="1" smtClean="0"/>
+              <a:t>QElapsedTimer</a:t>
+            </a:r>
+            <a:endParaRPr lang="en-US" dirty="0" smtClean="0"/>
+          </a:p>
+          <a:p>
+            <a:pPr lvl="1"/>
+            <a:r>
+              <a:rPr lang="en-US" dirty="0" smtClean="0"/>
+              <a:t>milliseconds, nanoseconds(best </a:t>
+            </a:r>
+            <a:r>
+              <a:rPr lang="en-US" dirty="0"/>
+              <a:t>estimated by system)</a:t>
+            </a:r>
+          </a:p>
+        </p:txBody>
+      </p:sp>
+      <p:sp>
+        <p:nvSpPr>
           <p:cNvPr id="2" name="Title 1"/>
           <p:cNvSpPr>
             <a:spLocks noGrp="1"/>
@@ -7309,220 +10916,23 @@
             <p:ph type="title"/>
           </p:nvPr>
         </p:nvSpPr>
-        <p:spPr>
-          <a:xfrm>
-            <a:off x="457200" y="0"/>
-            <a:ext cx="8229600" cy="1143000"/>
-          </a:xfrm>
-        </p:spPr>
+        <p:spPr/>
         <p:txBody>
           <a:bodyPr/>
           <a:lstStyle/>
           <a:p>
             <a:r>
               <a:rPr lang="en-US" dirty="0" smtClean="0"/>
-              <a:t>Current STB Game Architecture</a:t>
+              <a:t>User Story</a:t>
             </a:r>
             <a:endParaRPr lang="en-US" dirty="0"/>
           </a:p>
         </p:txBody>
       </p:sp>
-      <p:pic>
-        <p:nvPicPr>
-          <p:cNvPr id="1029" name="Picture 5"/>
-          <p:cNvPicPr>
-            <a:picLocks noChangeAspect="1" noChangeArrowheads="1"/>
-          </p:cNvPicPr>
-          <p:nvPr/>
-        </p:nvPicPr>
-        <p:blipFill>
-          <a:blip r:embed="rId2">
-            <a:extLst>
-              <a:ext uri="{28A0092B-C50C-407E-A947-70E740481C1C}">
-                <a14:useLocalDpi xmlns:a14="http://schemas.microsoft.com/office/drawing/2010/main" val="0"/>
-              </a:ext>
-            </a:extLst>
-          </a:blip>
-          <a:srcRect/>
-          <a:stretch>
-            <a:fillRect/>
-          </a:stretch>
-        </p:blipFill>
-        <p:spPr bwMode="auto">
-          <a:xfrm>
-            <a:off x="1676400" y="990600"/>
-            <a:ext cx="5165725" cy="5675313"/>
-          </a:xfrm>
-          <a:prstGeom prst="rect">
-            <a:avLst/>
-          </a:prstGeom>
-          <a:noFill/>
-          <a:ln>
-            <a:noFill/>
-          </a:ln>
-          <a:effectLst/>
-          <a:extLst>
-            <a:ext uri="{909E8E84-426E-40DD-AFC4-6F175D3DCCD1}">
-              <a14:hiddenFill xmlns:a14="http://schemas.microsoft.com/office/drawing/2010/main">
-                <a:solidFill>
-                  <a:schemeClr val="accent1"/>
-                </a:solidFill>
-              </a14:hiddenFill>
-            </a:ext>
-            <a:ext uri="{91240B29-F687-4F45-9708-019B960494DF}">
-              <a14:hiddenLine xmlns:a14="http://schemas.microsoft.com/office/drawing/2010/main" w="9525">
-                <a:solidFill>
-                  <a:schemeClr val="tx1"/>
-                </a:solidFill>
-                <a:miter lim="800000"/>
-                <a:headEnd/>
-                <a:tailEnd/>
-              </a14:hiddenLine>
-            </a:ext>
-            <a:ext uri="{AF507438-7753-43E0-B8FC-AC1667EBCBE1}">
-              <a14:hiddenEffects xmlns:a14="http://schemas.microsoft.com/office/drawing/2010/main">
-                <a:effectLst>
-                  <a:outerShdw dist="35921" dir="2700000" algn="ctr" rotWithShape="0">
-                    <a:schemeClr val="bg2"/>
-                  </a:outerShdw>
-                </a:effectLst>
-              </a14:hiddenEffects>
-            </a:ext>
-          </a:extLst>
-        </p:spPr>
-      </p:pic>
-      <p:sp>
-        <p:nvSpPr>
-          <p:cNvPr id="6" name="Rectangle 5"/>
-          <p:cNvSpPr/>
-          <p:nvPr/>
-        </p:nvSpPr>
-        <p:spPr>
-          <a:xfrm>
-            <a:off x="2057400" y="5791200"/>
-            <a:ext cx="5029200" cy="990600"/>
-          </a:xfrm>
-          <a:prstGeom prst="rect">
-            <a:avLst/>
-          </a:prstGeom>
-          <a:noFill/>
-          <a:ln>
-            <a:solidFill>
-              <a:srgbClr val="FF0000"/>
-            </a:solidFill>
-          </a:ln>
-        </p:spPr>
-        <p:style>
-          <a:lnRef idx="2">
-            <a:schemeClr val="accent1">
-              <a:shade val="50000"/>
-            </a:schemeClr>
-          </a:lnRef>
-          <a:fillRef idx="1">
-            <a:schemeClr val="accent1"/>
-          </a:fillRef>
-          <a:effectRef idx="0">
-            <a:schemeClr val="accent1"/>
-          </a:effectRef>
-          <a:fontRef idx="minor">
-            <a:schemeClr val="lt1"/>
-          </a:fontRef>
-        </p:style>
-        <p:txBody>
-          <a:bodyPr rtlCol="0" anchor="ctr"/>
-          <a:lstStyle/>
-          <a:p>
-            <a:pPr algn="ctr"/>
-            <a:endParaRPr lang="en-US">
-              <a:solidFill>
-                <a:srgbClr val="FF0000"/>
-              </a:solidFill>
-            </a:endParaRPr>
-          </a:p>
-        </p:txBody>
-      </p:sp>
-      <p:sp>
-        <p:nvSpPr>
-          <p:cNvPr id="7" name="TextBox 6"/>
-          <p:cNvSpPr txBox="1"/>
-          <p:nvPr/>
-        </p:nvSpPr>
-        <p:spPr>
-          <a:xfrm>
-            <a:off x="7086600" y="3429000"/>
-            <a:ext cx="1752600" cy="1200329"/>
-          </a:xfrm>
-          <a:prstGeom prst="rect">
-            <a:avLst/>
-          </a:prstGeom>
-          <a:noFill/>
-          <a:ln>
-            <a:solidFill>
-              <a:srgbClr val="FF0000"/>
-            </a:solidFill>
-          </a:ln>
-        </p:spPr>
-        <p:txBody>
-          <a:bodyPr wrap="square" rtlCol="0">
-            <a:spAutoFit/>
-          </a:bodyPr>
-          <a:lstStyle/>
-          <a:p>
-            <a:pPr algn="ctr"/>
-            <a:r>
-              <a:rPr lang="en-US" dirty="0" err="1" smtClean="0"/>
-              <a:t>vSTB</a:t>
-            </a:r>
-            <a:r>
-              <a:rPr lang="en-US" dirty="0" smtClean="0"/>
-              <a:t> removes current load to be stored on Game Server</a:t>
-            </a:r>
-            <a:endParaRPr lang="en-US" dirty="0"/>
-          </a:p>
-        </p:txBody>
-      </p:sp>
-      <p:cxnSp>
-        <p:nvCxnSpPr>
-          <p:cNvPr id="9" name="Straight Arrow Connector 8"/>
-          <p:cNvCxnSpPr>
-            <a:stCxn id="7" idx="2"/>
-          </p:cNvCxnSpPr>
-          <p:nvPr/>
-        </p:nvCxnSpPr>
-        <p:spPr>
-          <a:xfrm flipH="1">
-            <a:off x="7086600" y="4629329"/>
-            <a:ext cx="876300" cy="1161871"/>
-          </a:xfrm>
-          <a:prstGeom prst="straightConnector1">
-            <a:avLst/>
-          </a:prstGeom>
-          <a:ln>
-            <a:solidFill>
-              <a:srgbClr val="FF0000"/>
-            </a:solidFill>
-            <a:tailEnd type="arrow"/>
-          </a:ln>
-        </p:spPr>
-        <p:style>
-          <a:lnRef idx="1">
-            <a:schemeClr val="accent1"/>
-          </a:lnRef>
-          <a:fillRef idx="0">
-            <a:schemeClr val="accent1"/>
-          </a:fillRef>
-          <a:effectRef idx="0">
-            <a:schemeClr val="accent1"/>
-          </a:effectRef>
-          <a:fontRef idx="minor">
-            <a:schemeClr val="tx1"/>
-          </a:fontRef>
-        </p:style>
-      </p:cxnSp>
     </p:spTree>
     <p:extLst>
       <p:ext uri="{BB962C8B-B14F-4D97-AF65-F5344CB8AC3E}">
-        <p14:creationId xmlns:p14="http://schemas.microsoft.com/office/powerpoint/2010/main" val="2184670609"/>
+        <p14:creationId xmlns:p14="http://schemas.microsoft.com/office/powerpoint/2010/main" val="3276619284"/>
       </p:ext>
     </p:extLst>
   </p:cSld>
@@ -7540,9 +10950,9 @@
 </file>
 
 <file path=ppt/theme/theme1.xml><?xml version="1.0" encoding="utf-8"?>
-<a:theme xmlns:a="http://schemas.openxmlformats.org/drawingml/2006/main" name="Office Theme">
+<a:theme xmlns:a="http://schemas.openxmlformats.org/drawingml/2006/main" name="Concourse">
   <a:themeElements>
-    <a:clrScheme name="Office">
+    <a:clrScheme name="Concourse">
       <a:dk1>
         <a:sysClr val="windowText" lastClr="000000"/>
       </a:dk1>
@@ -7550,80 +10960,45 @@
         <a:sysClr val="window" lastClr="FFFFFF"/>
       </a:lt1>
       <a:dk2>
-        <a:srgbClr val="1F497D"/>
+        <a:srgbClr val="464646"/>
       </a:dk2>
       <a:lt2>
-        <a:srgbClr val="EEECE1"/>
+        <a:srgbClr val="DEF5FA"/>
       </a:lt2>
       <a:accent1>
-        <a:srgbClr val="4F81BD"/>
+        <a:srgbClr val="2DA2BF"/>
       </a:accent1>
       <a:accent2>
-        <a:srgbClr val="C0504D"/>
+        <a:srgbClr val="DA1F28"/>
       </a:accent2>
       <a:accent3>
-        <a:srgbClr val="9BBB59"/>
+        <a:srgbClr val="EB641B"/>
       </a:accent3>
       <a:accent4>
-        <a:srgbClr val="8064A2"/>
+        <a:srgbClr val="39639D"/>
       </a:accent4>
       <a:accent5>
-        <a:srgbClr val="4BACC6"/>
+        <a:srgbClr val="474B78"/>
       </a:accent5>
       <a:accent6>
-        <a:srgbClr val="F79646"/>
+        <a:srgbClr val="7D3C4A"/>
       </a:accent6>
       <a:hlink>
-        <a:srgbClr val="0000FF"/>
+        <a:srgbClr val="FF8119"/>
       </a:hlink>
       <a:folHlink>
-        <a:srgbClr val="800080"/>
+        <a:srgbClr val="44B9E8"/>
       </a:folHlink>
     </a:clrScheme>
-    <a:fontScheme name="Office">
+    <a:fontScheme name="Concourse">
       <a:majorFont>
-        <a:latin typeface="Calibri"/>
+        <a:latin typeface="Lucida Sans Unicode"/>
         <a:ea typeface=""/>
         <a:cs typeface=""/>
         <a:font script="Jpan" typeface="ＭＳ Ｐゴシック"/>
         <a:font script="Hang" typeface="맑은 고딕"/>
-        <a:font script="Hans" typeface="宋体"/>
-        <a:font script="Hant" typeface="新細明體"/>
-        <a:font script="Arab" typeface="Times New Roman"/>
-        <a:font script="Hebr" typeface="Times New Roman"/>
-        <a:font script="Thai" typeface="Angsana New"/>
-        <a:font script="Ethi" typeface="Nyala"/>
-        <a:font script="Beng" typeface="Vrinda"/>
-        <a:font script="Gujr" typeface="Shruti"/>
-        <a:font script="Khmr" typeface="MoolBoran"/>
-        <a:font script="Knda" typeface="Tunga"/>
-        <a:font script="Guru" typeface="Raavi"/>
-        <a:font script="Cans" typeface="Euphemia"/>
-        <a:font script="Cher" typeface="Plantagenet Cherokee"/>
-        <a:font script="Yiii" typeface="Microsoft Yi Baiti"/>
-        <a:font script="Tibt" typeface="Microsoft Himalaya"/>
-        <a:font script="Thaa" typeface="MV Boli"/>
-        <a:font script="Deva" typeface="Mangal"/>
-        <a:font script="Telu" typeface="Gautami"/>
-        <a:font script="Taml" typeface="Latha"/>
-        <a:font script="Syrc" typeface="Estrangelo Edessa"/>
-        <a:font script="Orya" typeface="Kalinga"/>
-        <a:font script="Mlym" typeface="Kartika"/>
-        <a:font script="Laoo" typeface="DokChampa"/>
-        <a:font script="Sinh" typeface="Iskoola Pota"/>
-        <a:font script="Mong" typeface="Mongolian Baiti"/>
-        <a:font script="Viet" typeface="Times New Roman"/>
-        <a:font script="Uigh" typeface="Microsoft Uighur"/>
-        <a:font script="Geor" typeface="Sylfaen"/>
-      </a:majorFont>
-      <a:minorFont>
-        <a:latin typeface="Calibri"/>
-        <a:ea typeface=""/>
-        <a:cs typeface=""/>
-        <a:font script="Jpan" typeface="ＭＳ Ｐゴシック"/>
-        <a:font script="Hang" typeface="맑은 고딕"/>
-        <a:font script="Hans" typeface="宋体"/>
-        <a:font script="Hant" typeface="新細明體"/>
+        <a:font script="Hans" typeface="黑体"/>
+        <a:font script="Hant" typeface="微軟正黑體"/>
         <a:font script="Arab" typeface="Arial"/>
         <a:font script="Hebr" typeface="Arial"/>
         <a:font script="Thai" typeface="Cordia New"/>
@@ -7647,12 +11022,45 @@
         <a:font script="Laoo" typeface="DokChampa"/>
         <a:font script="Sinh" typeface="Iskoola Pota"/>
         <a:font script="Mong" typeface="Mongolian Baiti"/>
-        <a:font script="Viet" typeface="Arial"/>
+        <a:font script="Uigh" typeface="Microsoft Uighur"/>
+        <a:font script="Geor" typeface="Sylfaen"/>
+      </a:majorFont>
+      <a:minorFont>
+        <a:latin typeface="Lucida Sans Unicode"/>
+        <a:ea typeface=""/>
+        <a:cs typeface=""/>
+        <a:font script="Jpan" typeface="ＭＳ Ｐゴシック"/>
+        <a:font script="Hang" typeface="맑은 고딕"/>
+        <a:font script="Hans" typeface="黑体"/>
+        <a:font script="Hant" typeface="微軟正黑體"/>
+        <a:font script="Arab" typeface="Arial"/>
+        <a:font script="Hebr" typeface="Arial"/>
+        <a:font script="Thai" typeface="Cordia New"/>
+        <a:font script="Ethi" typeface="Nyala"/>
+        <a:font script="Beng" typeface="Vrinda"/>
+        <a:font script="Gujr" typeface="Shruti"/>
+        <a:font script="Khmr" typeface="DaunPenh"/>
+        <a:font script="Knda" typeface="Tunga"/>
+        <a:font script="Guru" typeface="Raavi"/>
+        <a:font script="Cans" typeface="Euphemia"/>
+        <a:font script="Cher" typeface="Plantagenet Cherokee"/>
+        <a:font script="Yiii" typeface="Microsoft Yi Baiti"/>
+        <a:font script="Tibt" typeface="Microsoft Himalaya"/>
+        <a:font script="Thaa" typeface="MV Boli"/>
+        <a:font script="Deva" typeface="Mangal"/>
+        <a:font script="Telu" typeface="Gautami"/>
+        <a:font script="Taml" typeface="Latha"/>
+        <a:font script="Syrc" typeface="Estrangelo Edessa"/>
+        <a:font script="Orya" typeface="Kalinga"/>
+        <a:font script="Mlym" typeface="Kartika"/>
+        <a:font script="Laoo" typeface="DokChampa"/>
+        <a:font script="Sinh" typeface="Iskoola Pota"/>
+        <a:font script="Mong" typeface="Mongolian Baiti"/>
         <a:font script="Uigh" typeface="Microsoft Uighur"/>
         <a:font script="Geor" typeface="Sylfaen"/>
       </a:minorFont>
     </a:fontScheme>
-    <a:fmtScheme name="Office">
+    <a:fmtScheme name="Concourse">
       <a:fillStyleLst>
         <a:solidFill>
           <a:schemeClr val="phClr"/>
@@ -7661,43 +11069,51 @@
           <a:gsLst>
             <a:gs pos="0">
               <a:schemeClr val="phClr">
-                <a:tint val="50000"/>
-                <a:satMod val="300000"/>
+                <a:tint val="62000"/>
+                <a:satMod val="180000"/>
               </a:schemeClr>
             </a:gs>
-            <a:gs pos="35000">
+            <a:gs pos="65000">
               <a:schemeClr val="phClr">
-                <a:tint val="37000"/>
-                <a:satMod val="300000"/>
+                <a:tint val="32000"/>
+                <a:satMod val="250000"/>
               </a:schemeClr>
             </a:gs>
             <a:gs pos="100000">
               <a:schemeClr val="phClr">
-                <a:tint val="15000"/>
-                <a:satMod val="350000"/>
+                <a:tint val="23000"/>
+                <a:satMod val="300000"/>
               </a:schemeClr>
             </a:gs>
           </a:gsLst>
-          <a:lin ang="16200000" scaled="1"/>
+          <a:lin ang="16200000" scaled="0"/>
         </a:gradFill>
         <a:gradFill rotWithShape="1">
           <a:gsLst>
             <a:gs pos="0">
               <a:schemeClr val="phClr">
-                <a:shade val="51000"/>
-                <a:satMod val="130000"/>
+                <a:shade val="15000"/>
+                <a:satMod val="180000"/>
               </a:schemeClr>
             </a:gs>
-            <a:gs pos="80000">
+            <a:gs pos="50000">
               <a:schemeClr val="phClr">
-                <a:shade val="93000"/>
-                <a:satMod val="130000"/>
+                <a:shade val="45000"/>
+                <a:satMod val="170000"/>
+              </a:schemeClr>
+            </a:gs>
+            <a:gs pos="70000">
+              <a:schemeClr val="phClr">
+                <a:tint val="99000"/>
+                <a:shade val="65000"/>
+                <a:satMod val="155000"/>
               </a:schemeClr>
             </a:gs>
             <a:gs pos="100000">
               <a:schemeClr val="phClr">
-                <a:shade val="94000"/>
-                <a:satMod val="135000"/>
+                <a:tint val="95500"/>
+                <a:shade val="100000"/>
+                <a:satMod val="155000"/>
               </a:schemeClr>
             </a:gs>
           </a:gsLst>
@@ -7707,20 +11123,17 @@
       <a:lnStyleLst>
         <a:ln w="9525" cap="flat" cmpd="sng" algn="ctr">
           <a:solidFill>
-            <a:schemeClr val="phClr">
-              <a:shade val="95000"/>
-              <a:satMod val="105000"/>
-            </a:schemeClr>
+            <a:schemeClr val="phClr"/>
           </a:solidFill>
           <a:prstDash val="solid"/>
         </a:ln>
-        <a:ln w="25400" cap="flat" cmpd="sng" algn="ctr">
+        <a:ln w="55000" cap="flat" cmpd="thickThin" algn="ctr">
           <a:solidFill>
             <a:schemeClr val="phClr"/>
           </a:solidFill>
           <a:prstDash val="solid"/>
         </a:ln>
-        <a:ln w="38100" cap="flat" cmpd="sng" algn="ctr">
+        <a:ln w="63500" cap="flat" cmpd="thickThin" algn="ctr">
           <a:solidFill>
             <a:schemeClr val="phClr"/>
           </a:solidFill>
@@ -7730,16 +11143,7 @@
       <a:effectStyleLst>
         <a:effectStyle>
           <a:effectLst>
-            <a:outerShdw blurRad="40000" dist="20000" dir="5400000" rotWithShape="0">
-              <a:srgbClr val="000000">
-                <a:alpha val="38000"/>
-              </a:srgbClr>
-            </a:outerShdw>
-          </a:effectLst>
-        </a:effectStyle>
-        <a:effectStyle>
-          <a:effectLst>
-            <a:outerShdw blurRad="40000" dist="23000" dir="5400000" rotWithShape="0">
+            <a:outerShdw blurRad="50800" dist="38100" dir="5400000" rotWithShape="0">
               <a:srgbClr val="000000">
                 <a:alpha val="35000"/>
               </a:srgbClr>
@@ -7748,22 +11152,36 @@
         </a:effectStyle>
         <a:effectStyle>
           <a:effectLst>
-            <a:outerShdw blurRad="40000" dist="23000" dir="5400000" rotWithShape="0">
+            <a:outerShdw blurRad="50800" dist="38100" dir="5400000" rotWithShape="0">
               <a:srgbClr val="000000">
                 <a:alpha val="35000"/>
               </a:srgbClr>
             </a:outerShdw>
           </a:effectLst>
+        </a:effectStyle>
+        <a:effectStyle>
+          <a:effectLst>
+            <a:outerShdw blurRad="63500" dist="38100" dir="5400000" rotWithShape="0">
+              <a:srgbClr val="000000">
+                <a:alpha val="45000"/>
+              </a:srgbClr>
+            </a:outerShdw>
+          </a:effectLst>
           <a:scene3d>
-            <a:camera prst="orthographicFront">
+            <a:camera prst="orthographicFront" fov="0">
               <a:rot lat="0" lon="0" rev="0"/>
             </a:camera>
-            <a:lightRig rig="threePt" dir="t">
-              <a:rot lat="0" lon="0" rev="1200000"/>
+            <a:lightRig rig="glow" dir="t">
+              <a:rot lat="0" lon="0" rev="6360000"/>
             </a:lightRig>
           </a:scene3d>
-          <a:sp3d>
-            <a:bevelT w="63500" h="25400"/>
+          <a:sp3d contourW="1000" prstMaterial="flat">
+            <a:bevelT w="95250" h="101600"/>
+            <a:contourClr>
+              <a:schemeClr val="phClr">
+                <a:satMod val="300000"/>
+              </a:schemeClr>
+            </a:contourClr>
           </a:sp3d>
         </a:effectStyle>
       </a:effectStyleLst>
@@ -7775,47 +11193,41 @@
           <a:gsLst>
             <a:gs pos="0">
               <a:schemeClr val="phClr">
-                <a:tint val="40000"/>
-                <a:satMod val="350000"/>
+                <a:tint val="55000"/>
+                <a:satMod val="300000"/>
               </a:schemeClr>
             </a:gs>
             <a:gs pos="40000">
               <a:schemeClr val="phClr">
-                <a:tint val="45000"/>
-                <a:shade val="99000"/>
-                <a:satMod val="350000"/>
-              </a:schemeClr>
-            </a:gs>
-            <a:gs pos="100000">
-              <a:schemeClr val="phClr">
-                <a:shade val="20000"/>
-                <a:satMod val="255000"/>
-              </a:schemeClr>
-            </a:gs>
-          </a:gsLst>
-          <a:path path="circle">
-            <a:fillToRect l="50000" t="-80000" r="50000" b="180000"/>
-          </a:path>
-        </a:gradFill>
-        <a:gradFill rotWithShape="1">
-          <a:gsLst>
-            <a:gs pos="0">
-              <a:schemeClr val="phClr">
-                <a:tint val="80000"/>
+                <a:tint val="65000"/>
                 <a:satMod val="300000"/>
               </a:schemeClr>
             </a:gs>
             <a:gs pos="100000">
               <a:schemeClr val="phClr">
-                <a:shade val="30000"/>
-                <a:satMod val="200000"/>
+                <a:shade val="65000"/>
+                <a:satMod val="300000"/>
               </a:schemeClr>
             </a:gs>
           </a:gsLst>
           <a:path path="circle">
-            <a:fillToRect l="50000" t="50000" r="50000" b="50000"/>
+            <a:fillToRect l="65000" b="98000"/>
           </a:path>
         </a:gradFill>
+        <a:blipFill>
+          <a:blip xmlns:r="http://schemas.openxmlformats.org/officeDocument/2006/relationships" r:embed="rId1">
+            <a:duotone>
+              <a:schemeClr val="phClr">
+                <a:shade val="60000"/>
+                <a:satMod val="110000"/>
+              </a:schemeClr>
+              <a:schemeClr val="phClr">
+                <a:tint val="95000"/>
+              </a:schemeClr>
+            </a:duotone>
+          </a:blip>
+          <a:tile tx="0" ty="0" sx="50000" sy="50000" flip="none" algn="tl"/>
+        </a:blipFill>
       </a:bgFillStyleLst>
     </a:fmtScheme>
   </a:themeElements>
